--- a/ppt/Module2_Underlying_Mechanisms_of_Deep_Learning.pptx
+++ b/ppt/Module2_Underlying_Mechanisms_of_Deep_Learning.pptx
@@ -529,6 +529,10 @@
           </p:nvPr>
         </p:nvSpPr>
         <p:spPr/>
+        <p:txBody>
+          <a:bodyPr/>
+          <a:p/>
+        </p:txBody>
       </p:sp>
       <p:sp>
         <p:nvSpPr>
@@ -613,6 +617,10 @@
           </p:nvPr>
         </p:nvSpPr>
         <p:spPr/>
+        <p:txBody>
+          <a:bodyPr/>
+          <a:p/>
+        </p:txBody>
       </p:sp>
       <p:sp>
         <p:nvSpPr>
@@ -698,6 +706,10 @@
           </p:nvPr>
         </p:nvSpPr>
         <p:spPr/>
+        <p:txBody>
+          <a:bodyPr/>
+          <a:p/>
+        </p:txBody>
       </p:sp>
       <p:sp>
         <p:nvSpPr>
@@ -783,6 +795,10 @@
           </p:nvPr>
         </p:nvSpPr>
         <p:spPr/>
+        <p:txBody>
+          <a:bodyPr/>
+          <a:p/>
+        </p:txBody>
       </p:sp>
       <p:sp>
         <p:nvSpPr>
@@ -868,6 +884,10 @@
           </p:nvPr>
         </p:nvSpPr>
         <p:spPr/>
+        <p:txBody>
+          <a:bodyPr/>
+          <a:p/>
+        </p:txBody>
       </p:sp>
       <p:sp>
         <p:nvSpPr>
@@ -953,6 +973,10 @@
           </p:nvPr>
         </p:nvSpPr>
         <p:spPr/>
+        <p:txBody>
+          <a:bodyPr/>
+          <a:p/>
+        </p:txBody>
       </p:sp>
       <p:sp>
         <p:nvSpPr>
@@ -1038,6 +1062,10 @@
           </p:nvPr>
         </p:nvSpPr>
         <p:spPr/>
+        <p:txBody>
+          <a:bodyPr/>
+          <a:p/>
+        </p:txBody>
       </p:sp>
       <p:sp>
         <p:nvSpPr>
@@ -1123,6 +1151,10 @@
           </p:nvPr>
         </p:nvSpPr>
         <p:spPr/>
+        <p:txBody>
+          <a:bodyPr/>
+          <a:p/>
+        </p:txBody>
       </p:sp>
       <p:sp>
         <p:nvSpPr>
@@ -1208,6 +1240,10 @@
           </p:nvPr>
         </p:nvSpPr>
         <p:spPr/>
+        <p:txBody>
+          <a:bodyPr/>
+          <a:p/>
+        </p:txBody>
       </p:sp>
       <p:sp>
         <p:nvSpPr>
@@ -1293,6 +1329,10 @@
           </p:nvPr>
         </p:nvSpPr>
         <p:spPr/>
+        <p:txBody>
+          <a:bodyPr/>
+          <a:p/>
+        </p:txBody>
       </p:sp>
       <p:sp>
         <p:nvSpPr>
@@ -1378,6 +1418,10 @@
           </p:nvPr>
         </p:nvSpPr>
         <p:spPr/>
+        <p:txBody>
+          <a:bodyPr/>
+          <a:p/>
+        </p:txBody>
       </p:sp>
       <p:sp>
         <p:nvSpPr>
@@ -1463,6 +1507,10 @@
           </p:nvPr>
         </p:nvSpPr>
         <p:spPr/>
+        <p:txBody>
+          <a:bodyPr/>
+          <a:p/>
+        </p:txBody>
       </p:sp>
       <p:sp>
         <p:nvSpPr>
@@ -1548,6 +1596,10 @@
           </p:nvPr>
         </p:nvSpPr>
         <p:spPr/>
+        <p:txBody>
+          <a:bodyPr/>
+          <a:p/>
+        </p:txBody>
       </p:sp>
       <p:sp>
         <p:nvSpPr>
@@ -1633,6 +1685,10 @@
           </p:nvPr>
         </p:nvSpPr>
         <p:spPr/>
+        <p:txBody>
+          <a:bodyPr/>
+          <a:p/>
+        </p:txBody>
       </p:sp>
       <p:sp>
         <p:nvSpPr>
@@ -1718,6 +1774,10 @@
           </p:nvPr>
         </p:nvSpPr>
         <p:spPr/>
+        <p:txBody>
+          <a:bodyPr/>
+          <a:p/>
+        </p:txBody>
       </p:sp>
       <p:sp>
         <p:nvSpPr>
@@ -1803,6 +1863,10 @@
           </p:nvPr>
         </p:nvSpPr>
         <p:spPr/>
+        <p:txBody>
+          <a:bodyPr/>
+          <a:p/>
+        </p:txBody>
       </p:sp>
       <p:sp>
         <p:nvSpPr>
@@ -1888,6 +1952,10 @@
           </p:nvPr>
         </p:nvSpPr>
         <p:spPr/>
+        <p:txBody>
+          <a:bodyPr/>
+          <a:p/>
+        </p:txBody>
       </p:sp>
       <p:sp>
         <p:nvSpPr>
@@ -1973,6 +2041,10 @@
           </p:nvPr>
         </p:nvSpPr>
         <p:spPr/>
+        <p:txBody>
+          <a:bodyPr/>
+          <a:p/>
+        </p:txBody>
       </p:sp>
       <p:sp>
         <p:nvSpPr>
@@ -2058,6 +2130,10 @@
           </p:nvPr>
         </p:nvSpPr>
         <p:spPr/>
+        <p:txBody>
+          <a:bodyPr/>
+          <a:p/>
+        </p:txBody>
       </p:sp>
       <p:sp>
         <p:nvSpPr>
@@ -2143,6 +2219,10 @@
           </p:nvPr>
         </p:nvSpPr>
         <p:spPr/>
+        <p:txBody>
+          <a:bodyPr/>
+          <a:p/>
+        </p:txBody>
       </p:sp>
       <p:sp>
         <p:nvSpPr>
@@ -2228,6 +2308,10 @@
           </p:nvPr>
         </p:nvSpPr>
         <p:spPr/>
+        <p:txBody>
+          <a:bodyPr/>
+          <a:p/>
+        </p:txBody>
       </p:sp>
       <p:sp>
         <p:nvSpPr>
@@ -2313,6 +2397,10 @@
           </p:nvPr>
         </p:nvSpPr>
         <p:spPr/>
+        <p:txBody>
+          <a:bodyPr/>
+          <a:p/>
+        </p:txBody>
       </p:sp>
       <p:sp>
         <p:nvSpPr>
@@ -2398,6 +2486,10 @@
           </p:nvPr>
         </p:nvSpPr>
         <p:spPr/>
+        <p:txBody>
+          <a:bodyPr/>
+          <a:p/>
+        </p:txBody>
       </p:sp>
       <p:sp>
         <p:nvSpPr>
@@ -2483,6 +2575,10 @@
           </p:nvPr>
         </p:nvSpPr>
         <p:spPr/>
+        <p:txBody>
+          <a:bodyPr/>
+          <a:p/>
+        </p:txBody>
       </p:sp>
       <p:sp>
         <p:nvSpPr>
@@ -2578,8 +2674,8 @@
           <a:lstStyle>
             <a:lvl1pPr algn="ctr">
               <a:defRPr sz="6000">
-                <a:latin typeface="Times New Roman" panose="02020603050405020304" pitchFamily="18" charset="0"/>
-                <a:cs typeface="Times New Roman" panose="02020603050405020304" pitchFamily="18" charset="0"/>
+                <a:latin typeface="Liberation Serif" panose="02020603050405020304" pitchFamily="18" charset="0"/>
+                <a:cs typeface="Liberation Serif" panose="02020603050405020304" pitchFamily="18" charset="0"/>
               </a:defRPr>
             </a:lvl1pPr>
           </a:lstStyle>
@@ -2614,8 +2710,8 @@
             <a:lvl1pPr marL="0" indent="0" algn="ctr">
               <a:buNone/>
               <a:defRPr sz="2400">
-                <a:latin typeface="Times New Roman" panose="02020603050405020304" pitchFamily="18" charset="0"/>
-                <a:cs typeface="Times New Roman" panose="02020603050405020304" pitchFamily="18" charset="0"/>
+                <a:latin typeface="Liberation Serif" panose="02020603050405020304" pitchFamily="18" charset="0"/>
+                <a:cs typeface="Liberation Serif" panose="02020603050405020304" pitchFamily="18" charset="0"/>
               </a:defRPr>
             </a:lvl1pPr>
             <a:lvl2pPr marL="457200" indent="0" algn="ctr">
@@ -2676,8 +2772,8 @@
           <a:lstStyle>
             <a:lvl1pPr>
               <a:defRPr>
-                <a:latin typeface="Times New Roman" panose="02020603050405020304" pitchFamily="18" charset="0"/>
-                <a:cs typeface="Times New Roman" panose="02020603050405020304" pitchFamily="18" charset="0"/>
+                <a:latin typeface="Liberation Serif" panose="02020603050405020304" pitchFamily="18" charset="0"/>
+                <a:cs typeface="Liberation Serif" panose="02020603050405020304" pitchFamily="18" charset="0"/>
               </a:defRPr>
             </a:lvl1pPr>
           </a:lstStyle>
@@ -2710,8 +2806,8 @@
                 <a:solidFill>
                   <a:schemeClr val="tx1"/>
                 </a:solidFill>
-                <a:latin typeface="Times New Roman" panose="02020603050405020304" pitchFamily="18" charset="0"/>
-                <a:cs typeface="Times New Roman" panose="02020603050405020304" pitchFamily="18" charset="0"/>
+                <a:latin typeface="Liberation Serif" panose="02020603050405020304" pitchFamily="18" charset="0"/>
+                <a:cs typeface="Liberation Serif" panose="02020603050405020304" pitchFamily="18" charset="0"/>
               </a:defRPr>
             </a:lvl1pPr>
           </a:lstStyle>
@@ -2736,8 +2832,8 @@
           <a:lstStyle>
             <a:lvl1pPr>
               <a:defRPr>
-                <a:latin typeface="Times New Roman" panose="02020603050405020304" pitchFamily="18" charset="0"/>
-                <a:cs typeface="Times New Roman" panose="02020603050405020304" pitchFamily="18" charset="0"/>
+                <a:latin typeface="Liberation Serif" panose="02020603050405020304" pitchFamily="18" charset="0"/>
+                <a:cs typeface="Liberation Serif" panose="02020603050405020304" pitchFamily="18" charset="0"/>
               </a:defRPr>
             </a:lvl1pPr>
           </a:lstStyle>
@@ -2776,35 +2872,35 @@
             <a:pPr algn="ctr"/>
             <a:r>
               <a:rPr lang="da-DK" altLang="ko-KR" sz="1200" dirty="0" smtClean="0">
-                <a:latin typeface="Times New Roman" panose="02020603050405020304" pitchFamily="18" charset="0"/>
-                <a:cs typeface="Times New Roman" panose="02020603050405020304" pitchFamily="18" charset="0"/>
+                <a:latin typeface="Liberation Serif" panose="02020603050405020304" pitchFamily="18" charset="0"/>
+                <a:cs typeface="Liberation Serif" panose="02020603050405020304" pitchFamily="18" charset="0"/>
               </a:rPr>
               <a:t>Jongho</a:t>
             </a:r>
             <a:r>
               <a:rPr lang="da-DK" altLang="ko-KR" sz="1200" baseline="0" dirty="0" smtClean="0">
-                <a:latin typeface="Times New Roman" panose="02020603050405020304" pitchFamily="18" charset="0"/>
-                <a:cs typeface="Times New Roman" panose="02020603050405020304" pitchFamily="18" charset="0"/>
+                <a:latin typeface="Liberation Serif" panose="02020603050405020304" pitchFamily="18" charset="0"/>
+                <a:cs typeface="Liberation Serif" panose="02020603050405020304" pitchFamily="18" charset="0"/>
               </a:rPr>
               <a:t> Kim (</a:t>
             </a:r>
             <a:r>
               <a:rPr lang="da-DK" altLang="ko-KR" sz="1200" baseline="0" dirty="0" err="1" smtClean="0">
-                <a:latin typeface="Times New Roman" panose="02020603050405020304" pitchFamily="18" charset="0"/>
-                <a:cs typeface="Times New Roman" panose="02020603050405020304" pitchFamily="18" charset="0"/>
+                <a:latin typeface="Liberation Serif" panose="02020603050405020304" pitchFamily="18" charset="0"/>
+                <a:cs typeface="Liberation Serif" panose="02020603050405020304" pitchFamily="18" charset="0"/>
               </a:rPr>
               <a:t>quantic.jh@gmail.com</a:t>
             </a:r>
             <a:r>
               <a:rPr lang="da-DK" altLang="ko-KR" sz="1200" baseline="0" dirty="0" smtClean="0">
-                <a:latin typeface="Times New Roman" panose="02020603050405020304" pitchFamily="18" charset="0"/>
-                <a:cs typeface="Times New Roman" panose="02020603050405020304" pitchFamily="18" charset="0"/>
+                <a:latin typeface="Liberation Serif" panose="02020603050405020304" pitchFamily="18" charset="0"/>
+                <a:cs typeface="Liberation Serif" panose="02020603050405020304" pitchFamily="18" charset="0"/>
               </a:rPr>
               <a:t>)</a:t>
             </a:r>
             <a:endParaRPr lang="ko-KR" altLang="en-US" sz="1200" dirty="0">
-              <a:latin typeface="Times New Roman" panose="02020603050405020304" pitchFamily="18" charset="0"/>
-              <a:cs typeface="Times New Roman" panose="02020603050405020304" pitchFamily="18" charset="0"/>
+              <a:latin typeface="Liberation Serif" panose="02020603050405020304" pitchFamily="18" charset="0"/>
+              <a:cs typeface="Liberation Serif" panose="02020603050405020304" pitchFamily="18" charset="0"/>
             </a:endParaRPr>
           </a:p>
         </p:txBody>
@@ -3267,8 +3363,8 @@
           <a:lstStyle>
             <a:lvl1pPr>
               <a:defRPr>
-                <a:latin typeface="Times New Roman" panose="02020603050405020304" pitchFamily="18" charset="0"/>
-                <a:cs typeface="Times New Roman" panose="02020603050405020304" pitchFamily="18" charset="0"/>
+                <a:latin typeface="Liberation Serif" panose="02020603050405020304" pitchFamily="18" charset="0"/>
+                <a:cs typeface="Liberation Serif" panose="02020603050405020304" pitchFamily="18" charset="0"/>
               </a:defRPr>
             </a:lvl1pPr>
           </a:lstStyle>
@@ -3297,32 +3393,32 @@
           <a:lstStyle>
             <a:lvl1pPr>
               <a:defRPr>
-                <a:latin typeface="Times New Roman" panose="02020603050405020304" pitchFamily="18" charset="0"/>
-                <a:cs typeface="Times New Roman" panose="02020603050405020304" pitchFamily="18" charset="0"/>
+                <a:latin typeface="Liberation Serif" panose="02020603050405020304" pitchFamily="18" charset="0"/>
+                <a:cs typeface="Liberation Serif" panose="02020603050405020304" pitchFamily="18" charset="0"/>
               </a:defRPr>
             </a:lvl1pPr>
             <a:lvl2pPr>
               <a:defRPr>
-                <a:latin typeface="Times New Roman" panose="02020603050405020304" pitchFamily="18" charset="0"/>
-                <a:cs typeface="Times New Roman" panose="02020603050405020304" pitchFamily="18" charset="0"/>
+                <a:latin typeface="Liberation Serif" panose="02020603050405020304" pitchFamily="18" charset="0"/>
+                <a:cs typeface="Liberation Serif" panose="02020603050405020304" pitchFamily="18" charset="0"/>
               </a:defRPr>
             </a:lvl2pPr>
             <a:lvl3pPr>
               <a:defRPr>
-                <a:latin typeface="Times New Roman" panose="02020603050405020304" pitchFamily="18" charset="0"/>
-                <a:cs typeface="Times New Roman" panose="02020603050405020304" pitchFamily="18" charset="0"/>
+                <a:latin typeface="Liberation Serif" panose="02020603050405020304" pitchFamily="18" charset="0"/>
+                <a:cs typeface="Liberation Serif" panose="02020603050405020304" pitchFamily="18" charset="0"/>
               </a:defRPr>
             </a:lvl3pPr>
             <a:lvl4pPr>
               <a:defRPr>
-                <a:latin typeface="Times New Roman" panose="02020603050405020304" pitchFamily="18" charset="0"/>
-                <a:cs typeface="Times New Roman" panose="02020603050405020304" pitchFamily="18" charset="0"/>
+                <a:latin typeface="Liberation Serif" panose="02020603050405020304" pitchFamily="18" charset="0"/>
+                <a:cs typeface="Liberation Serif" panose="02020603050405020304" pitchFamily="18" charset="0"/>
               </a:defRPr>
             </a:lvl4pPr>
             <a:lvl5pPr>
               <a:defRPr>
-                <a:latin typeface="Times New Roman" panose="02020603050405020304" pitchFamily="18" charset="0"/>
-                <a:cs typeface="Times New Roman" panose="02020603050405020304" pitchFamily="18" charset="0"/>
+                <a:latin typeface="Liberation Serif" panose="02020603050405020304" pitchFamily="18" charset="0"/>
+                <a:cs typeface="Liberation Serif" panose="02020603050405020304" pitchFamily="18" charset="0"/>
               </a:defRPr>
             </a:lvl5pPr>
           </a:lstStyle>
@@ -3411,8 +3507,8 @@
           </a:lstStyle>
           <a:p>
             <a:endParaRPr lang="ko-KR" altLang="en-US" dirty="0" smtClean="0">
-              <a:latin typeface="Times New Roman" panose="02020603050405020304" pitchFamily="18" charset="0"/>
-              <a:cs typeface="Times New Roman" panose="02020603050405020304" pitchFamily="18" charset="0"/>
+              <a:latin typeface="Liberation Serif" panose="02020603050405020304" pitchFamily="18" charset="0"/>
+              <a:cs typeface="Liberation Serif" panose="02020603050405020304" pitchFamily="18" charset="0"/>
             </a:endParaRPr>
           </a:p>
         </p:txBody>
@@ -3558,8 +3654,8 @@
           </a:lstStyle>
           <a:p>
             <a:endParaRPr lang="ko-KR" altLang="en-US" dirty="0">
-              <a:latin typeface="Times New Roman" panose="02020603050405020304" pitchFamily="18" charset="0"/>
-              <a:cs typeface="Times New Roman" panose="02020603050405020304" pitchFamily="18" charset="0"/>
+              <a:latin typeface="Liberation Serif" panose="02020603050405020304" pitchFamily="18" charset="0"/>
+              <a:cs typeface="Liberation Serif" panose="02020603050405020304" pitchFamily="18" charset="0"/>
             </a:endParaRPr>
           </a:p>
         </p:txBody>
@@ -3589,35 +3685,35 @@
             <a:pPr algn="ctr"/>
             <a:r>
               <a:rPr lang="da-DK" altLang="ko-KR" sz="1200" dirty="0" smtClean="0">
-                <a:latin typeface="Times New Roman" panose="02020603050405020304" pitchFamily="18" charset="0"/>
-                <a:cs typeface="Times New Roman" panose="02020603050405020304" pitchFamily="18" charset="0"/>
+                <a:latin typeface="Liberation Serif" panose="02020603050405020304" pitchFamily="18" charset="0"/>
+                <a:cs typeface="Liberation Serif" panose="02020603050405020304" pitchFamily="18" charset="0"/>
               </a:rPr>
               <a:t>Jongho</a:t>
             </a:r>
             <a:r>
               <a:rPr lang="da-DK" altLang="ko-KR" sz="1200" baseline="0" dirty="0" smtClean="0">
-                <a:latin typeface="Times New Roman" panose="02020603050405020304" pitchFamily="18" charset="0"/>
-                <a:cs typeface="Times New Roman" panose="02020603050405020304" pitchFamily="18" charset="0"/>
+                <a:latin typeface="Liberation Serif" panose="02020603050405020304" pitchFamily="18" charset="0"/>
+                <a:cs typeface="Liberation Serif" panose="02020603050405020304" pitchFamily="18" charset="0"/>
               </a:rPr>
               <a:t> Kim (</a:t>
             </a:r>
             <a:r>
               <a:rPr lang="da-DK" altLang="ko-KR" sz="1200" baseline="0" dirty="0" err="1" smtClean="0">
-                <a:latin typeface="Times New Roman" panose="02020603050405020304" pitchFamily="18" charset="0"/>
-                <a:cs typeface="Times New Roman" panose="02020603050405020304" pitchFamily="18" charset="0"/>
+                <a:latin typeface="Liberation Serif" panose="02020603050405020304" pitchFamily="18" charset="0"/>
+                <a:cs typeface="Liberation Serif" panose="02020603050405020304" pitchFamily="18" charset="0"/>
               </a:rPr>
               <a:t>quantic.jh@gmail.com</a:t>
             </a:r>
             <a:r>
               <a:rPr lang="da-DK" altLang="ko-KR" sz="1200" baseline="0" dirty="0" smtClean="0">
-                <a:latin typeface="Times New Roman" panose="02020603050405020304" pitchFamily="18" charset="0"/>
-                <a:cs typeface="Times New Roman" panose="02020603050405020304" pitchFamily="18" charset="0"/>
+                <a:latin typeface="Liberation Serif" panose="02020603050405020304" pitchFamily="18" charset="0"/>
+                <a:cs typeface="Liberation Serif" panose="02020603050405020304" pitchFamily="18" charset="0"/>
               </a:rPr>
               <a:t>)</a:t>
             </a:r>
             <a:endParaRPr lang="ko-KR" altLang="en-US" sz="1200" dirty="0">
-              <a:latin typeface="Times New Roman" panose="02020603050405020304" pitchFamily="18" charset="0"/>
-              <a:cs typeface="Times New Roman" panose="02020603050405020304" pitchFamily="18" charset="0"/>
+              <a:latin typeface="Liberation Serif" panose="02020603050405020304" pitchFamily="18" charset="0"/>
+              <a:cs typeface="Liberation Serif" panose="02020603050405020304" pitchFamily="18" charset="0"/>
             </a:endParaRPr>
           </a:p>
         </p:txBody>
@@ -3721,8 +3817,8 @@
           <a:lstStyle>
             <a:lvl1pPr>
               <a:defRPr sz="6000">
-                <a:latin typeface="Times New Roman" panose="02020603050405020304" pitchFamily="18" charset="0"/>
-                <a:cs typeface="Times New Roman" panose="02020603050405020304" pitchFamily="18" charset="0"/>
+                <a:latin typeface="Liberation Serif" panose="02020603050405020304" pitchFamily="18" charset="0"/>
+                <a:cs typeface="Liberation Serif" panose="02020603050405020304" pitchFamily="18" charset="0"/>
               </a:defRPr>
             </a:lvl1pPr>
           </a:lstStyle>
@@ -3760,8 +3856,8 @@
                 <a:solidFill>
                   <a:schemeClr val="tx1"/>
                 </a:solidFill>
-                <a:latin typeface="Times New Roman" panose="02020603050405020304" pitchFamily="18" charset="0"/>
-                <a:cs typeface="Times New Roman" panose="02020603050405020304" pitchFamily="18" charset="0"/>
+                <a:latin typeface="Liberation Serif" panose="02020603050405020304" pitchFamily="18" charset="0"/>
+                <a:cs typeface="Liberation Serif" panose="02020603050405020304" pitchFamily="18" charset="0"/>
               </a:defRPr>
             </a:lvl1pPr>
             <a:lvl2pPr marL="457200" indent="0">
@@ -3870,8 +3966,8 @@
           <a:lstStyle>
             <a:lvl1pPr>
               <a:defRPr>
-                <a:latin typeface="Times New Roman" panose="02020603050405020304" pitchFamily="18" charset="0"/>
-                <a:cs typeface="Times New Roman" panose="02020603050405020304" pitchFamily="18" charset="0"/>
+                <a:latin typeface="Liberation Serif" panose="02020603050405020304" pitchFamily="18" charset="0"/>
+                <a:cs typeface="Liberation Serif" panose="02020603050405020304" pitchFamily="18" charset="0"/>
               </a:defRPr>
             </a:lvl1pPr>
           </a:lstStyle>
@@ -3901,8 +3997,8 @@
           <a:lstStyle>
             <a:lvl1pPr>
               <a:defRPr>
-                <a:latin typeface="Times New Roman" panose="02020603050405020304" pitchFamily="18" charset="0"/>
-                <a:cs typeface="Times New Roman" panose="02020603050405020304" pitchFamily="18" charset="0"/>
+                <a:latin typeface="Liberation Serif" panose="02020603050405020304" pitchFamily="18" charset="0"/>
+                <a:cs typeface="Liberation Serif" panose="02020603050405020304" pitchFamily="18" charset="0"/>
               </a:defRPr>
             </a:lvl1pPr>
           </a:lstStyle>
@@ -3927,8 +4023,8 @@
           <a:lstStyle>
             <a:lvl1pPr>
               <a:defRPr>
-                <a:latin typeface="Times New Roman" panose="02020603050405020304" pitchFamily="18" charset="0"/>
-                <a:cs typeface="Times New Roman" panose="02020603050405020304" pitchFamily="18" charset="0"/>
+                <a:latin typeface="Liberation Serif" panose="02020603050405020304" pitchFamily="18" charset="0"/>
+                <a:cs typeface="Liberation Serif" panose="02020603050405020304" pitchFamily="18" charset="0"/>
               </a:defRPr>
             </a:lvl1pPr>
           </a:lstStyle>
@@ -4733,8 +4829,8 @@
           <a:lstStyle>
             <a:lvl1pPr>
               <a:defRPr>
-                <a:latin typeface="Times New Roman" panose="02020603050405020304" pitchFamily="18" charset="0"/>
-                <a:cs typeface="Times New Roman" panose="02020603050405020304" pitchFamily="18" charset="0"/>
+                <a:latin typeface="Liberation Serif" panose="02020603050405020304" pitchFamily="18" charset="0"/>
+                <a:cs typeface="Liberation Serif" panose="02020603050405020304" pitchFamily="18" charset="0"/>
               </a:defRPr>
             </a:lvl1pPr>
           </a:lstStyle>
@@ -4764,8 +4860,8 @@
           <a:lstStyle>
             <a:lvl1pPr>
               <a:defRPr>
-                <a:latin typeface="Times New Roman" panose="02020603050405020304" pitchFamily="18" charset="0"/>
-                <a:cs typeface="Times New Roman" panose="02020603050405020304" pitchFamily="18" charset="0"/>
+                <a:latin typeface="Liberation Serif" panose="02020603050405020304" pitchFamily="18" charset="0"/>
+                <a:cs typeface="Liberation Serif" panose="02020603050405020304" pitchFamily="18" charset="0"/>
               </a:defRPr>
             </a:lvl1pPr>
           </a:lstStyle>
@@ -4790,8 +4886,8 @@
           <a:lstStyle>
             <a:lvl1pPr>
               <a:defRPr>
-                <a:latin typeface="Times New Roman" panose="02020603050405020304" pitchFamily="18" charset="0"/>
-                <a:cs typeface="Times New Roman" panose="02020603050405020304" pitchFamily="18" charset="0"/>
+                <a:latin typeface="Liberation Serif" panose="02020603050405020304" pitchFamily="18" charset="0"/>
+                <a:cs typeface="Liberation Serif" panose="02020603050405020304" pitchFamily="18" charset="0"/>
               </a:defRPr>
             </a:lvl1pPr>
           </a:lstStyle>
@@ -5666,7 +5762,7 @@
         <a:spcBef>
           <a:spcPts val="1000"/>
         </a:spcBef>
-        <a:buFont typeface="Arial" panose="020B0604020202020204" pitchFamily="34" charset="0"/>
+        <a:buFont typeface="Liberation Sans" panose="020B0604020202020204" pitchFamily="34" charset="0"/>
         <a:buChar char="•"/>
         <a:defRPr sz="2800" kern="1200">
           <a:solidFill>
@@ -5684,7 +5780,7 @@
         <a:spcBef>
           <a:spcPts val="500"/>
         </a:spcBef>
-        <a:buFont typeface="Arial" panose="020B0604020202020204" pitchFamily="34" charset="0"/>
+        <a:buFont typeface="Liberation Sans" panose="020B0604020202020204" pitchFamily="34" charset="0"/>
         <a:buChar char="•"/>
         <a:defRPr sz="2400" kern="1200">
           <a:solidFill>
@@ -5702,7 +5798,7 @@
         <a:spcBef>
           <a:spcPts val="500"/>
         </a:spcBef>
-        <a:buFont typeface="Arial" panose="020B0604020202020204" pitchFamily="34" charset="0"/>
+        <a:buFont typeface="Liberation Sans" panose="020B0604020202020204" pitchFamily="34" charset="0"/>
         <a:buChar char="•"/>
         <a:defRPr sz="2000" kern="1200">
           <a:solidFill>
@@ -5720,7 +5816,7 @@
         <a:spcBef>
           <a:spcPts val="500"/>
         </a:spcBef>
-        <a:buFont typeface="Arial" panose="020B0604020202020204" pitchFamily="34" charset="0"/>
+        <a:buFont typeface="Liberation Sans" panose="020B0604020202020204" pitchFamily="34" charset="0"/>
         <a:buChar char="•"/>
         <a:defRPr sz="1800" kern="1200">
           <a:solidFill>
@@ -5738,7 +5834,7 @@
         <a:spcBef>
           <a:spcPts val="500"/>
         </a:spcBef>
-        <a:buFont typeface="Arial" panose="020B0604020202020204" pitchFamily="34" charset="0"/>
+        <a:buFont typeface="Liberation Sans" panose="020B0604020202020204" pitchFamily="34" charset="0"/>
         <a:buChar char="•"/>
         <a:defRPr sz="1800" kern="1200">
           <a:solidFill>
@@ -5756,7 +5852,7 @@
         <a:spcBef>
           <a:spcPts val="500"/>
         </a:spcBef>
-        <a:buFont typeface="Arial" panose="020B0604020202020204" pitchFamily="34" charset="0"/>
+        <a:buFont typeface="Liberation Sans" panose="020B0604020202020204" pitchFamily="34" charset="0"/>
         <a:buChar char="•"/>
         <a:defRPr sz="1800" kern="1200">
           <a:solidFill>
@@ -5774,7 +5870,7 @@
         <a:spcBef>
           <a:spcPts val="500"/>
         </a:spcBef>
-        <a:buFont typeface="Arial" panose="020B0604020202020204" pitchFamily="34" charset="0"/>
+        <a:buFont typeface="Liberation Sans" panose="020B0604020202020204" pitchFamily="34" charset="0"/>
         <a:buChar char="•"/>
         <a:defRPr sz="1800" kern="1200">
           <a:solidFill>
@@ -5792,7 +5888,7 @@
         <a:spcBef>
           <a:spcPts val="500"/>
         </a:spcBef>
-        <a:buFont typeface="Arial" panose="020B0604020202020204" pitchFamily="34" charset="0"/>
+        <a:buFont typeface="Liberation Sans" panose="020B0604020202020204" pitchFamily="34" charset="0"/>
         <a:buChar char="•"/>
         <a:defRPr sz="1800" kern="1200">
           <a:solidFill>
@@ -5810,7 +5906,7 @@
         <a:spcBef>
           <a:spcPts val="500"/>
         </a:spcBef>
-        <a:buFont typeface="Arial" panose="020B0604020202020204" pitchFamily="34" charset="0"/>
+        <a:buFont typeface="Liberation Sans" panose="020B0604020202020204" pitchFamily="34" charset="0"/>
         <a:buChar char="•"/>
         <a:defRPr sz="1800" kern="1200">
           <a:solidFill>
@@ -6044,9 +6140,9 @@
               <a:solidFill>
                 <a:schemeClr val="bg1"/>
               </a:solidFill>
-              <a:latin typeface="Times New Roman" charset="0"/>
-              <a:ea typeface="Times New Roman" charset="0"/>
-              <a:cs typeface="Times New Roman" charset="0"/>
+              <a:latin typeface="Liberation Serif" charset="0"/>
+              <a:ea typeface="Liberation Serif" charset="0"/>
+              <a:cs typeface="Liberation Serif" charset="0"/>
             </a:endParaRPr>
           </a:p>
           <a:p>
@@ -6056,9 +6152,9 @@
                 <a:solidFill>
                   <a:schemeClr val="bg1"/>
                 </a:solidFill>
-                <a:latin typeface="Times New Roman" charset="0"/>
-                <a:ea typeface="Times New Roman" charset="0"/>
-                <a:cs typeface="Times New Roman" charset="0"/>
+                <a:latin typeface="Liberation Serif" charset="0"/>
+                <a:ea typeface="Liberation Serif" charset="0"/>
+                <a:cs typeface="Liberation Serif" charset="0"/>
               </a:rPr>
               <a:t>Jongho Kim</a:t>
             </a:r>
@@ -6066,9 +6162,9 @@
               <a:solidFill>
                 <a:schemeClr val="bg1"/>
               </a:solidFill>
-              <a:latin typeface="Times New Roman" charset="0"/>
-              <a:ea typeface="Times New Roman" charset="0"/>
-              <a:cs typeface="Times New Roman" charset="0"/>
+              <a:latin typeface="Liberation Serif" charset="0"/>
+              <a:ea typeface="Liberation Serif" charset="0"/>
+              <a:cs typeface="Liberation Serif" charset="0"/>
             </a:endParaRPr>
           </a:p>
           <a:p>
@@ -6078,9 +6174,9 @@
                 <a:solidFill>
                   <a:schemeClr val="bg1"/>
                 </a:solidFill>
-                <a:latin typeface="Times New Roman" charset="0"/>
-                <a:ea typeface="Times New Roman" charset="0"/>
-                <a:cs typeface="Times New Roman" charset="0"/>
+                <a:latin typeface="Liberation Serif" charset="0"/>
+                <a:ea typeface="Liberation Serif" charset="0"/>
+                <a:cs typeface="Liberation Serif" charset="0"/>
               </a:rPr>
               <a:t>December &amp; </a:t>
             </a:r>
@@ -6089,9 +6185,9 @@
                 <a:solidFill>
                   <a:schemeClr val="bg1"/>
                 </a:solidFill>
-                <a:latin typeface="Times New Roman" charset="0"/>
-                <a:ea typeface="Times New Roman" charset="0"/>
-                <a:cs typeface="Times New Roman" charset="0"/>
+                <a:latin typeface="Liberation Serif" charset="0"/>
+                <a:ea typeface="Liberation Serif" charset="0"/>
+                <a:cs typeface="Liberation Serif" charset="0"/>
               </a:rPr>
               <a:t>Company Inc.</a:t>
             </a:r>
@@ -6103,9 +6199,9 @@
                 <a:solidFill>
                   <a:schemeClr val="bg1"/>
                 </a:solidFill>
-                <a:latin typeface="Times New Roman" charset="0"/>
-                <a:ea typeface="Times New Roman" charset="0"/>
-                <a:cs typeface="Times New Roman" charset="0"/>
+                <a:latin typeface="Liberation Serif" charset="0"/>
+                <a:ea typeface="Liberation Serif" charset="0"/>
+                <a:cs typeface="Liberation Serif" charset="0"/>
               </a:rPr>
               <a:t>Spring, 2019</a:t>
             </a:r>
@@ -6147,9 +6243,9 @@
                 <a:solidFill>
                   <a:schemeClr val="bg1"/>
                 </a:solidFill>
-                <a:latin typeface="Times New Roman" charset="0"/>
-                <a:ea typeface="Times New Roman" charset="0"/>
-                <a:cs typeface="Times New Roman" charset="0"/>
+                <a:latin typeface="Liberation Serif" charset="0"/>
+                <a:ea typeface="Liberation Serif" charset="0"/>
+                <a:cs typeface="Liberation Serif" charset="0"/>
               </a:rPr>
               <a:t>Business </a:t>
             </a:r>
@@ -6158,9 +6254,9 @@
                 <a:solidFill>
                   <a:schemeClr val="bg1"/>
                 </a:solidFill>
-                <a:latin typeface="Times New Roman" charset="0"/>
-                <a:ea typeface="Times New Roman" charset="0"/>
-                <a:cs typeface="Times New Roman" charset="0"/>
+                <a:latin typeface="Liberation Serif" charset="0"/>
+                <a:ea typeface="Liberation Serif" charset="0"/>
+                <a:cs typeface="Liberation Serif" charset="0"/>
               </a:rPr>
               <a:t>Analytics</a:t>
             </a:r>
@@ -6169,9 +6265,9 @@
                 <a:solidFill>
                   <a:schemeClr val="bg1"/>
                 </a:solidFill>
-                <a:latin typeface="Times New Roman" charset="0"/>
-                <a:ea typeface="Times New Roman" charset="0"/>
-                <a:cs typeface="Times New Roman" charset="0"/>
+                <a:latin typeface="Liberation Serif" charset="0"/>
+                <a:ea typeface="Liberation Serif" charset="0"/>
+                <a:cs typeface="Liberation Serif" charset="0"/>
               </a:rPr>
               <a:t> </a:t>
             </a:r>
@@ -6180,9 +6276,9 @@
                 <a:solidFill>
                   <a:schemeClr val="bg1"/>
                 </a:solidFill>
-                <a:latin typeface="Times New Roman" charset="0"/>
-                <a:ea typeface="Times New Roman" charset="0"/>
-                <a:cs typeface="Times New Roman" charset="0"/>
+                <a:latin typeface="Liberation Serif" charset="0"/>
+                <a:ea typeface="Liberation Serif" charset="0"/>
+                <a:cs typeface="Liberation Serif" charset="0"/>
               </a:rPr>
               <a:t>(</a:t>
             </a:r>
@@ -6191,9 +6287,9 @@
                 <a:solidFill>
                   <a:schemeClr val="bg1"/>
                 </a:solidFill>
-                <a:latin typeface="Times New Roman" charset="0"/>
-                <a:ea typeface="Times New Roman" charset="0"/>
-                <a:cs typeface="Times New Roman" charset="0"/>
+                <a:latin typeface="Liberation Serif" charset="0"/>
+                <a:ea typeface="Liberation Serif" charset="0"/>
+                <a:cs typeface="Liberation Serif" charset="0"/>
               </a:rPr>
               <a:t>IM561)</a:t>
             </a:r>
@@ -6208,9 +6304,9 @@
               <a:solidFill>
                 <a:schemeClr val="bg1"/>
               </a:solidFill>
-              <a:latin typeface="Times New Roman" charset="0"/>
-              <a:ea typeface="Times New Roman" charset="0"/>
-              <a:cs typeface="Times New Roman" charset="0"/>
+              <a:latin typeface="Liberation Serif" charset="0"/>
+              <a:ea typeface="Liberation Serif" charset="0"/>
+              <a:cs typeface="Liberation Serif" charset="0"/>
             </a:endParaRPr>
           </a:p>
           <a:p>
@@ -6223,9 +6319,9 @@
               <a:solidFill>
                 <a:schemeClr val="bg1"/>
               </a:solidFill>
-              <a:latin typeface="Times New Roman" charset="0"/>
-              <a:ea typeface="Times New Roman" charset="0"/>
-              <a:cs typeface="Times New Roman" charset="0"/>
+              <a:latin typeface="Liberation Serif" charset="0"/>
+              <a:ea typeface="Liberation Serif" charset="0"/>
+              <a:cs typeface="Liberation Serif" charset="0"/>
             </a:endParaRPr>
           </a:p>
           <a:p>
@@ -6238,9 +6334,9 @@
               <a:solidFill>
                 <a:schemeClr val="bg1"/>
               </a:solidFill>
-              <a:latin typeface="Times New Roman" charset="0"/>
-              <a:ea typeface="Times New Roman" charset="0"/>
-              <a:cs typeface="Times New Roman" charset="0"/>
+              <a:latin typeface="Liberation Serif" charset="0"/>
+              <a:ea typeface="Liberation Serif" charset="0"/>
+              <a:cs typeface="Liberation Serif" charset="0"/>
             </a:endParaRPr>
           </a:p>
           <a:p>
@@ -6253,9 +6349,9 @@
               <a:solidFill>
                 <a:schemeClr val="bg1"/>
               </a:solidFill>
-              <a:latin typeface="Times New Roman" charset="0"/>
-              <a:ea typeface="Times New Roman" charset="0"/>
-              <a:cs typeface="Times New Roman" charset="0"/>
+              <a:latin typeface="Liberation Serif" charset="0"/>
+              <a:ea typeface="Liberation Serif" charset="0"/>
+              <a:cs typeface="Liberation Serif" charset="0"/>
             </a:endParaRPr>
           </a:p>
           <a:p>
@@ -6269,9 +6365,9 @@
                 <a:solidFill>
                   <a:schemeClr val="bg1"/>
                 </a:solidFill>
-                <a:latin typeface="Times New Roman" charset="0"/>
-                <a:ea typeface="Times New Roman" charset="0"/>
-                <a:cs typeface="Times New Roman" charset="0"/>
+                <a:latin typeface="Liberation Serif" charset="0"/>
+                <a:ea typeface="Liberation Serif" charset="0"/>
+                <a:cs typeface="Liberation Serif" charset="0"/>
               </a:rPr>
               <a:t>Module2. </a:t>
             </a:r>
@@ -6280,9 +6376,9 @@
                 <a:solidFill>
                   <a:schemeClr val="bg1"/>
                 </a:solidFill>
-                <a:latin typeface="Times New Roman" charset="0"/>
-                <a:ea typeface="Times New Roman" charset="0"/>
-                <a:cs typeface="Times New Roman" charset="0"/>
+                <a:latin typeface="Liberation Serif" charset="0"/>
+                <a:ea typeface="Liberation Serif" charset="0"/>
+                <a:cs typeface="Liberation Serif" charset="0"/>
               </a:rPr>
               <a:t>Underlying </a:t>
             </a:r>
@@ -6291,9 +6387,9 @@
                 <a:solidFill>
                   <a:schemeClr val="bg1"/>
                 </a:solidFill>
-                <a:latin typeface="Times New Roman" charset="0"/>
-                <a:ea typeface="Times New Roman" charset="0"/>
-                <a:cs typeface="Times New Roman" charset="0"/>
+                <a:latin typeface="Liberation Serif" charset="0"/>
+                <a:ea typeface="Liberation Serif" charset="0"/>
+                <a:cs typeface="Liberation Serif" charset="0"/>
               </a:rPr>
               <a:t>Mechanisms of Deep Learning</a:t>
             </a:r>
@@ -6308,9 +6404,9 @@
               <a:solidFill>
                 <a:schemeClr val="bg1"/>
               </a:solidFill>
-              <a:latin typeface="Times New Roman" charset="0"/>
-              <a:ea typeface="Times New Roman" charset="0"/>
-              <a:cs typeface="Times New Roman" charset="0"/>
+              <a:latin typeface="Liberation Serif" charset="0"/>
+              <a:ea typeface="Liberation Serif" charset="0"/>
+              <a:cs typeface="Liberation Serif" charset="0"/>
             </a:endParaRPr>
           </a:p>
           <a:p>
@@ -6320,9 +6416,9 @@
                 <a:solidFill>
                   <a:schemeClr val="bg1"/>
                 </a:solidFill>
-                <a:latin typeface="Times New Roman" charset="0"/>
-                <a:ea typeface="Times New Roman" charset="0"/>
-                <a:cs typeface="Times New Roman" charset="0"/>
+                <a:latin typeface="Liberation Serif" charset="0"/>
+                <a:ea typeface="Liberation Serif" charset="0"/>
+                <a:cs typeface="Liberation Serif" charset="0"/>
               </a:rPr>
               <a:t>Intelligent Video Analytics </a:t>
             </a:r>
@@ -6334,9 +6430,9 @@
                 <a:solidFill>
                   <a:schemeClr val="bg1"/>
                 </a:solidFill>
-                <a:latin typeface="Times New Roman" charset="0"/>
-                <a:ea typeface="Times New Roman" charset="0"/>
-                <a:cs typeface="Times New Roman" charset="0"/>
+                <a:latin typeface="Liberation Serif" charset="0"/>
+                <a:ea typeface="Liberation Serif" charset="0"/>
+                <a:cs typeface="Liberation Serif" charset="0"/>
               </a:rPr>
               <a:t>with Deep Learning</a:t>
             </a:r>
@@ -6367,32 +6463,32 @@
           <a:p>
             <a:r>
               <a:rPr kumimoji="1" lang="en-US" altLang="ko-KR" sz="1600" dirty="0" smtClean="0">
-                <a:latin typeface="Times New Roman" charset="0"/>
-                <a:ea typeface="Times New Roman" charset="0"/>
-                <a:cs typeface="Times New Roman" charset="0"/>
-              </a:rPr>
-              <a:t>Note. This content mainly refers the summer session of KAIST organized by </a:t>
+                <a:latin typeface="Liberation Serif" charset="0"/>
+                <a:ea typeface="Liberation Serif" charset="0"/>
+                <a:cs typeface="Liberation Serif" charset="0"/>
+              </a:rPr>
+              <a:t>Note. This content mainly refers to the summer session of KAIST organized by </a:t>
             </a:r>
             <a:r>
               <a:rPr kumimoji="1" lang="en-US" altLang="ko-KR" sz="1600" dirty="0" err="1" smtClean="0">
-                <a:latin typeface="Times New Roman" charset="0"/>
-                <a:ea typeface="Times New Roman" charset="0"/>
-                <a:cs typeface="Times New Roman" charset="0"/>
+                <a:latin typeface="Liberation Serif" charset="0"/>
+                <a:ea typeface="Liberation Serif" charset="0"/>
+                <a:cs typeface="Liberation Serif" charset="0"/>
               </a:rPr>
               <a:t>Jiyong</a:t>
             </a:r>
             <a:r>
               <a:rPr kumimoji="1" lang="en-US" altLang="ko-KR" sz="1600" dirty="0" smtClean="0">
-                <a:latin typeface="Times New Roman" charset="0"/>
-                <a:ea typeface="Times New Roman" charset="0"/>
-                <a:cs typeface="Times New Roman" charset="0"/>
+                <a:latin typeface="Liberation Serif" charset="0"/>
+                <a:ea typeface="Liberation Serif" charset="0"/>
+                <a:cs typeface="Liberation Serif" charset="0"/>
               </a:rPr>
               <a:t> Park(2018)</a:t>
             </a:r>
             <a:endParaRPr kumimoji="1" lang="ko-KR" altLang="en-US" sz="1600" dirty="0">
-              <a:latin typeface="Times New Roman" charset="0"/>
-              <a:ea typeface="Times New Roman" charset="0"/>
-              <a:cs typeface="Times New Roman" charset="0"/>
+              <a:latin typeface="Liberation Serif" charset="0"/>
+              <a:ea typeface="Liberation Serif" charset="0"/>
+              <a:cs typeface="Liberation Serif" charset="0"/>
             </a:endParaRPr>
           </a:p>
         </p:txBody>
@@ -6524,8 +6620,8 @@
                 <a:solidFill>
                   <a:prstClr val="black"/>
                 </a:solidFill>
-                <a:latin typeface="Times New Roman" panose="02020603050405020304" pitchFamily="18" charset="0"/>
-                <a:cs typeface="Times New Roman" panose="02020603050405020304" pitchFamily="18" charset="0"/>
+                <a:latin typeface="Liberation Serif" panose="02020603050405020304" pitchFamily="18" charset="0"/>
+                <a:cs typeface="Liberation Serif" panose="02020603050405020304" pitchFamily="18" charset="0"/>
               </a:rPr>
               <a:t>Why Should We Care about Learning Representation?</a:t>
             </a:r>
@@ -6533,8 +6629,8 @@
               <a:solidFill>
                 <a:prstClr val="black"/>
               </a:solidFill>
-              <a:latin typeface="Times New Roman" panose="02020603050405020304" pitchFamily="18" charset="0"/>
-              <a:cs typeface="Times New Roman" panose="02020603050405020304" pitchFamily="18" charset="0"/>
+              <a:latin typeface="Liberation Serif" panose="02020603050405020304" pitchFamily="18" charset="0"/>
+              <a:cs typeface="Liberation Serif" panose="02020603050405020304" pitchFamily="18" charset="0"/>
             </a:endParaRPr>
           </a:p>
         </p:txBody>
@@ -6565,13 +6661,13 @@
               <a:lnSpc>
                 <a:spcPct val="150000"/>
               </a:lnSpc>
-              <a:buFont typeface="Arial" panose="020B0604020202020204" pitchFamily="34" charset="0"/>
+              <a:buFont typeface="Liberation Sans" panose="020B0604020202020204" pitchFamily="34" charset="0"/>
               <a:buChar char="•"/>
             </a:pPr>
             <a:r>
               <a:rPr lang="en-US" altLang="ko-KR" sz="2000" dirty="0" smtClean="0">
-                <a:latin typeface="Times New Roman" panose="02020603050405020304" pitchFamily="18" charset="0"/>
-                <a:cs typeface="Times New Roman" panose="02020603050405020304" pitchFamily="18" charset="0"/>
+                <a:latin typeface="Liberation Serif" panose="02020603050405020304" pitchFamily="18" charset="0"/>
+                <a:cs typeface="Liberation Serif" panose="02020603050405020304" pitchFamily="18" charset="0"/>
               </a:rPr>
               <a:t>The performance of machine learning methods is heavily dependent on the choice of data representation</a:t>
             </a:r>
@@ -6581,13 +6677,13 @@
               <a:lnSpc>
                 <a:spcPct val="150000"/>
               </a:lnSpc>
-              <a:buFont typeface="Arial" panose="020B0604020202020204" pitchFamily="34" charset="0"/>
+              <a:buFont typeface="Liberation Sans" panose="020B0604020202020204" pitchFamily="34" charset="0"/>
               <a:buChar char="•"/>
             </a:pPr>
             <a:r>
               <a:rPr lang="en-US" altLang="ko-KR" sz="2000" dirty="0">
-                <a:latin typeface="Times New Roman" panose="02020603050405020304" pitchFamily="18" charset="0"/>
-                <a:cs typeface="Times New Roman" panose="02020603050405020304" pitchFamily="18" charset="0"/>
+                <a:latin typeface="Liberation Serif" panose="02020603050405020304" pitchFamily="18" charset="0"/>
+                <a:cs typeface="Liberation Serif" panose="02020603050405020304" pitchFamily="18" charset="0"/>
               </a:rPr>
               <a:t>Conventional machine-learning techniques were limited in their ability to process natural data in their raw form. </a:t>
             </a:r>
@@ -6721,8 +6817,8 @@
                 <a:solidFill>
                   <a:prstClr val="black"/>
                 </a:solidFill>
-                <a:latin typeface="Times New Roman" panose="02020603050405020304" pitchFamily="18" charset="0"/>
-                <a:cs typeface="Times New Roman" panose="02020603050405020304" pitchFamily="18" charset="0"/>
+                <a:latin typeface="Liberation Serif" panose="02020603050405020304" pitchFamily="18" charset="0"/>
+                <a:cs typeface="Liberation Serif" panose="02020603050405020304" pitchFamily="18" charset="0"/>
               </a:rPr>
               <a:t>Why Should We Care about Learning Representation?</a:t>
             </a:r>
@@ -6730,8 +6826,8 @@
               <a:solidFill>
                 <a:prstClr val="black"/>
               </a:solidFill>
-              <a:latin typeface="Times New Roman" panose="02020603050405020304" pitchFamily="18" charset="0"/>
-              <a:cs typeface="Times New Roman" panose="02020603050405020304" pitchFamily="18" charset="0"/>
+              <a:latin typeface="Liberation Serif" panose="02020603050405020304" pitchFamily="18" charset="0"/>
+              <a:cs typeface="Liberation Serif" panose="02020603050405020304" pitchFamily="18" charset="0"/>
             </a:endParaRPr>
           </a:p>
         </p:txBody>
@@ -6762,13 +6858,13 @@
               <a:lnSpc>
                 <a:spcPct val="150000"/>
               </a:lnSpc>
-              <a:buFont typeface="Arial" panose="020B0604020202020204" pitchFamily="34" charset="0"/>
+              <a:buFont typeface="Liberation Sans" panose="020B0604020202020204" pitchFamily="34" charset="0"/>
               <a:buChar char="•"/>
             </a:pPr>
             <a:r>
               <a:rPr lang="en-US" altLang="ko-KR" sz="2000" dirty="0" smtClean="0">
-                <a:latin typeface="Times New Roman" panose="02020603050405020304" pitchFamily="18" charset="0"/>
-                <a:cs typeface="Times New Roman" panose="02020603050405020304" pitchFamily="18" charset="0"/>
+                <a:latin typeface="Liberation Serif" panose="02020603050405020304" pitchFamily="18" charset="0"/>
+                <a:cs typeface="Liberation Serif" panose="02020603050405020304" pitchFamily="18" charset="0"/>
               </a:rPr>
               <a:t>Deep-learning methods are representation-learning methods with multiple levels of representation from a concrete level to slightly more abstract level. </a:t>
             </a:r>
@@ -6778,12 +6874,12 @@
               <a:lnSpc>
                 <a:spcPct val="150000"/>
               </a:lnSpc>
-              <a:buFont typeface="Arial" panose="020B0604020202020204" pitchFamily="34" charset="0"/>
+              <a:buFont typeface="Liberation Sans" panose="020B0604020202020204" pitchFamily="34" charset="0"/>
               <a:buChar char="•"/>
             </a:pPr>
             <a:endParaRPr lang="en-US" altLang="ko-KR" sz="2000" dirty="0">
-              <a:latin typeface="Times New Roman" panose="02020603050405020304" pitchFamily="18" charset="0"/>
-              <a:cs typeface="Times New Roman" panose="02020603050405020304" pitchFamily="18" charset="0"/>
+              <a:latin typeface="Liberation Serif" panose="02020603050405020304" pitchFamily="18" charset="0"/>
+              <a:cs typeface="Liberation Serif" panose="02020603050405020304" pitchFamily="18" charset="0"/>
             </a:endParaRPr>
           </a:p>
           <a:p>
@@ -6791,12 +6887,12 @@
               <a:lnSpc>
                 <a:spcPct val="150000"/>
               </a:lnSpc>
-              <a:buFont typeface="Arial" panose="020B0604020202020204" pitchFamily="34" charset="0"/>
+              <a:buFont typeface="Liberation Sans" panose="020B0604020202020204" pitchFamily="34" charset="0"/>
               <a:buChar char="•"/>
             </a:pPr>
             <a:endParaRPr lang="en-US" altLang="ko-KR" sz="2000" dirty="0" smtClean="0">
-              <a:latin typeface="Times New Roman" panose="02020603050405020304" pitchFamily="18" charset="0"/>
-              <a:cs typeface="Times New Roman" panose="02020603050405020304" pitchFamily="18" charset="0"/>
+              <a:latin typeface="Liberation Serif" panose="02020603050405020304" pitchFamily="18" charset="0"/>
+              <a:cs typeface="Liberation Serif" panose="02020603050405020304" pitchFamily="18" charset="0"/>
             </a:endParaRPr>
           </a:p>
           <a:p>
@@ -6804,12 +6900,12 @@
               <a:lnSpc>
                 <a:spcPct val="150000"/>
               </a:lnSpc>
-              <a:buFont typeface="Arial" panose="020B0604020202020204" pitchFamily="34" charset="0"/>
+              <a:buFont typeface="Liberation Sans" panose="020B0604020202020204" pitchFamily="34" charset="0"/>
               <a:buChar char="•"/>
             </a:pPr>
             <a:endParaRPr lang="en-US" altLang="ko-KR" sz="2000" dirty="0">
-              <a:latin typeface="Times New Roman" panose="02020603050405020304" pitchFamily="18" charset="0"/>
-              <a:cs typeface="Times New Roman" panose="02020603050405020304" pitchFamily="18" charset="0"/>
+              <a:latin typeface="Liberation Serif" panose="02020603050405020304" pitchFamily="18" charset="0"/>
+              <a:cs typeface="Liberation Serif" panose="02020603050405020304" pitchFamily="18" charset="0"/>
             </a:endParaRPr>
           </a:p>
           <a:p>
@@ -6817,12 +6913,12 @@
               <a:lnSpc>
                 <a:spcPct val="150000"/>
               </a:lnSpc>
-              <a:buFont typeface="Arial" panose="020B0604020202020204" pitchFamily="34" charset="0"/>
+              <a:buFont typeface="Liberation Sans" panose="020B0604020202020204" pitchFamily="34" charset="0"/>
               <a:buChar char="•"/>
             </a:pPr>
             <a:endParaRPr lang="en-US" altLang="ko-KR" sz="2000" dirty="0" smtClean="0">
-              <a:latin typeface="Times New Roman" panose="02020603050405020304" pitchFamily="18" charset="0"/>
-              <a:cs typeface="Times New Roman" panose="02020603050405020304" pitchFamily="18" charset="0"/>
+              <a:latin typeface="Liberation Serif" panose="02020603050405020304" pitchFamily="18" charset="0"/>
+              <a:cs typeface="Liberation Serif" panose="02020603050405020304" pitchFamily="18" charset="0"/>
             </a:endParaRPr>
           </a:p>
           <a:p>
@@ -6830,12 +6926,12 @@
               <a:lnSpc>
                 <a:spcPct val="150000"/>
               </a:lnSpc>
-              <a:buFont typeface="Arial" panose="020B0604020202020204" pitchFamily="34" charset="0"/>
+              <a:buFont typeface="Liberation Sans" panose="020B0604020202020204" pitchFamily="34" charset="0"/>
               <a:buChar char="•"/>
             </a:pPr>
             <a:endParaRPr lang="en-US" altLang="ko-KR" sz="2000" dirty="0" smtClean="0">
-              <a:latin typeface="Times New Roman" panose="02020603050405020304" pitchFamily="18" charset="0"/>
-              <a:cs typeface="Times New Roman" panose="02020603050405020304" pitchFamily="18" charset="0"/>
+              <a:latin typeface="Liberation Serif" panose="02020603050405020304" pitchFamily="18" charset="0"/>
+              <a:cs typeface="Liberation Serif" panose="02020603050405020304" pitchFamily="18" charset="0"/>
             </a:endParaRPr>
           </a:p>
           <a:p>
@@ -6843,12 +6939,12 @@
               <a:lnSpc>
                 <a:spcPct val="150000"/>
               </a:lnSpc>
-              <a:buFont typeface="Arial" panose="020B0604020202020204" pitchFamily="34" charset="0"/>
+              <a:buFont typeface="Liberation Sans" panose="020B0604020202020204" pitchFamily="34" charset="0"/>
               <a:buChar char="•"/>
             </a:pPr>
             <a:endParaRPr lang="en-US" altLang="ko-KR" sz="2000" dirty="0">
-              <a:latin typeface="Times New Roman" panose="02020603050405020304" pitchFamily="18" charset="0"/>
-              <a:cs typeface="Times New Roman" panose="02020603050405020304" pitchFamily="18" charset="0"/>
+              <a:latin typeface="Liberation Serif" panose="02020603050405020304" pitchFamily="18" charset="0"/>
+              <a:cs typeface="Liberation Serif" panose="02020603050405020304" pitchFamily="18" charset="0"/>
             </a:endParaRPr>
           </a:p>
           <a:p>
@@ -6856,12 +6952,12 @@
               <a:lnSpc>
                 <a:spcPct val="150000"/>
               </a:lnSpc>
-              <a:buFont typeface="Arial" panose="020B0604020202020204" pitchFamily="34" charset="0"/>
+              <a:buFont typeface="Liberation Sans" panose="020B0604020202020204" pitchFamily="34" charset="0"/>
               <a:buChar char="•"/>
             </a:pPr>
             <a:endParaRPr lang="en-US" altLang="ko-KR" sz="2000" dirty="0" smtClean="0">
-              <a:latin typeface="Times New Roman" panose="02020603050405020304" pitchFamily="18" charset="0"/>
-              <a:cs typeface="Times New Roman" panose="02020603050405020304" pitchFamily="18" charset="0"/>
+              <a:latin typeface="Liberation Serif" panose="02020603050405020304" pitchFamily="18" charset="0"/>
+              <a:cs typeface="Liberation Serif" panose="02020603050405020304" pitchFamily="18" charset="0"/>
             </a:endParaRPr>
           </a:p>
           <a:p>
@@ -6869,13 +6965,13 @@
               <a:lnSpc>
                 <a:spcPct val="150000"/>
               </a:lnSpc>
-              <a:buFont typeface="Arial" panose="020B0604020202020204" pitchFamily="34" charset="0"/>
+              <a:buFont typeface="Liberation Sans" panose="020B0604020202020204" pitchFamily="34" charset="0"/>
               <a:buChar char="•"/>
             </a:pPr>
             <a:r>
               <a:rPr lang="en-US" altLang="ko-KR" sz="2000" dirty="0" smtClean="0">
-                <a:latin typeface="Times New Roman" panose="02020603050405020304" pitchFamily="18" charset="0"/>
-                <a:cs typeface="Times New Roman" panose="02020603050405020304" pitchFamily="18" charset="0"/>
+                <a:latin typeface="Liberation Serif" panose="02020603050405020304" pitchFamily="18" charset="0"/>
+                <a:cs typeface="Liberation Serif" panose="02020603050405020304" pitchFamily="18" charset="0"/>
               </a:rPr>
               <a:t>Very complex functions can be learned by learning representation using Deep-learning</a:t>
             </a:r>
@@ -6885,12 +6981,12 @@
               <a:lnSpc>
                 <a:spcPct val="150000"/>
               </a:lnSpc>
-              <a:buFont typeface="Arial" panose="020B0604020202020204" pitchFamily="34" charset="0"/>
+              <a:buFont typeface="Liberation Sans" panose="020B0604020202020204" pitchFamily="34" charset="0"/>
               <a:buChar char="•"/>
             </a:pPr>
             <a:endParaRPr lang="en-US" altLang="ko-KR" sz="2000" dirty="0" smtClean="0">
-              <a:latin typeface="Times New Roman" panose="02020603050405020304" pitchFamily="18" charset="0"/>
-              <a:cs typeface="Times New Roman" panose="02020603050405020304" pitchFamily="18" charset="0"/>
+              <a:latin typeface="Liberation Serif" panose="02020603050405020304" pitchFamily="18" charset="0"/>
+              <a:cs typeface="Liberation Serif" panose="02020603050405020304" pitchFamily="18" charset="0"/>
             </a:endParaRPr>
           </a:p>
         </p:txBody>
@@ -7104,8 +7200,8 @@
                 <a:solidFill>
                   <a:prstClr val="black"/>
                 </a:solidFill>
-                <a:latin typeface="Times New Roman" panose="02020603050405020304" pitchFamily="18" charset="0"/>
-                <a:cs typeface="Times New Roman" panose="02020603050405020304" pitchFamily="18" charset="0"/>
+                <a:latin typeface="Liberation Serif" panose="02020603050405020304" pitchFamily="18" charset="0"/>
+                <a:cs typeface="Liberation Serif" panose="02020603050405020304" pitchFamily="18" charset="0"/>
               </a:rPr>
               <a:t>Ch2. </a:t>
             </a:r>
@@ -7114,8 +7210,8 @@
                 <a:solidFill>
                   <a:prstClr val="black"/>
                 </a:solidFill>
-                <a:latin typeface="Times New Roman" panose="02020603050405020304" pitchFamily="18" charset="0"/>
-                <a:cs typeface="Times New Roman" panose="02020603050405020304" pitchFamily="18" charset="0"/>
+                <a:latin typeface="Liberation Serif" panose="02020603050405020304" pitchFamily="18" charset="0"/>
+                <a:cs typeface="Liberation Serif" panose="02020603050405020304" pitchFamily="18" charset="0"/>
               </a:rPr>
               <a:t>Artificial Neural </a:t>
             </a:r>
@@ -7124,8 +7220,8 @@
                 <a:solidFill>
                   <a:prstClr val="black"/>
                 </a:solidFill>
-                <a:latin typeface="Times New Roman" panose="02020603050405020304" pitchFamily="18" charset="0"/>
-                <a:cs typeface="Times New Roman" panose="02020603050405020304" pitchFamily="18" charset="0"/>
+                <a:latin typeface="Liberation Serif" panose="02020603050405020304" pitchFamily="18" charset="0"/>
+                <a:cs typeface="Liberation Serif" panose="02020603050405020304" pitchFamily="18" charset="0"/>
               </a:rPr>
               <a:t>Networks</a:t>
             </a:r>
@@ -7133,8 +7229,8 @@
               <a:solidFill>
                 <a:prstClr val="black"/>
               </a:solidFill>
-              <a:latin typeface="Times New Roman" panose="02020603050405020304" pitchFamily="18" charset="0"/>
-              <a:cs typeface="Times New Roman" panose="02020603050405020304" pitchFamily="18" charset="0"/>
+              <a:latin typeface="Liberation Serif" panose="02020603050405020304" pitchFamily="18" charset="0"/>
+              <a:cs typeface="Liberation Serif" panose="02020603050405020304" pitchFamily="18" charset="0"/>
             </a:endParaRPr>
           </a:p>
         </p:txBody>
@@ -7266,8 +7362,8 @@
                 <a:solidFill>
                   <a:prstClr val="black"/>
                 </a:solidFill>
-                <a:latin typeface="Times New Roman" panose="02020603050405020304" pitchFamily="18" charset="0"/>
-                <a:cs typeface="Times New Roman" panose="02020603050405020304" pitchFamily="18" charset="0"/>
+                <a:latin typeface="Liberation Serif" panose="02020603050405020304" pitchFamily="18" charset="0"/>
+                <a:cs typeface="Liberation Serif" panose="02020603050405020304" pitchFamily="18" charset="0"/>
               </a:rPr>
               <a:t>Neural Networks</a:t>
             </a:r>
@@ -7275,8 +7371,8 @@
               <a:solidFill>
                 <a:prstClr val="black"/>
               </a:solidFill>
-              <a:latin typeface="Times New Roman" panose="02020603050405020304" pitchFamily="18" charset="0"/>
-              <a:cs typeface="Times New Roman" panose="02020603050405020304" pitchFamily="18" charset="0"/>
+              <a:latin typeface="Liberation Serif" panose="02020603050405020304" pitchFamily="18" charset="0"/>
+              <a:cs typeface="Liberation Serif" panose="02020603050405020304" pitchFamily="18" charset="0"/>
             </a:endParaRPr>
           </a:p>
         </p:txBody>
@@ -7307,19 +7403,19 @@
               <a:lnSpc>
                 <a:spcPct val="150000"/>
               </a:lnSpc>
-              <a:buFont typeface="Arial" panose="020B0604020202020204" pitchFamily="34" charset="0"/>
+              <a:buFont typeface="Liberation Sans" panose="020B0604020202020204" pitchFamily="34" charset="0"/>
               <a:buChar char="•"/>
             </a:pPr>
             <a:r>
               <a:rPr lang="en-US" altLang="ko-KR" sz="2000" dirty="0" smtClean="0">
-                <a:latin typeface="Times New Roman" panose="02020603050405020304" pitchFamily="18" charset="0"/>
-                <a:cs typeface="Times New Roman" panose="02020603050405020304" pitchFamily="18" charset="0"/>
+                <a:latin typeface="Liberation Serif" panose="02020603050405020304" pitchFamily="18" charset="0"/>
+                <a:cs typeface="Liberation Serif" panose="02020603050405020304" pitchFamily="18" charset="0"/>
               </a:rPr>
               <a:t>Artificial neural network mimics the human brain</a:t>
             </a:r>
             <a:endParaRPr lang="en-US" altLang="ko-KR" sz="2000" dirty="0">
-              <a:latin typeface="Times New Roman" panose="02020603050405020304" pitchFamily="18" charset="0"/>
-              <a:cs typeface="Times New Roman" panose="02020603050405020304" pitchFamily="18" charset="0"/>
+              <a:latin typeface="Liberation Serif" panose="02020603050405020304" pitchFamily="18" charset="0"/>
+              <a:cs typeface="Liberation Serif" panose="02020603050405020304" pitchFamily="18" charset="0"/>
             </a:endParaRPr>
           </a:p>
           <a:p>
@@ -7332,8 +7428,8 @@
             </a:pPr>
             <a:r>
               <a:rPr lang="en-US" altLang="ko-KR" dirty="0" smtClean="0">
-                <a:latin typeface="Times New Roman" panose="02020603050405020304" pitchFamily="18" charset="0"/>
-                <a:cs typeface="Times New Roman" panose="02020603050405020304" pitchFamily="18" charset="0"/>
+                <a:latin typeface="Liberation Serif" panose="02020603050405020304" pitchFamily="18" charset="0"/>
+                <a:cs typeface="Liberation Serif" panose="02020603050405020304" pitchFamily="18" charset="0"/>
               </a:rPr>
               <a:t>While neural network-based algorithms for classification or regression may be useful for the purpose of artificial intelligence (AI), neural network itself has nothing to do with.</a:t>
             </a:r>
@@ -7348,8 +7444,8 @@
             </a:pPr>
             <a:r>
               <a:rPr lang="en-US" altLang="ko-KR" dirty="0" smtClean="0">
-                <a:latin typeface="Times New Roman" panose="02020603050405020304" pitchFamily="18" charset="0"/>
-                <a:cs typeface="Times New Roman" panose="02020603050405020304" pitchFamily="18" charset="0"/>
+                <a:latin typeface="Liberation Serif" panose="02020603050405020304" pitchFamily="18" charset="0"/>
+                <a:cs typeface="Liberation Serif" panose="02020603050405020304" pitchFamily="18" charset="0"/>
               </a:rPr>
               <a:t>Single neuron is activated (=1) or not (=0).</a:t>
             </a:r>
@@ -7524,8 +7620,8 @@
                 <a:solidFill>
                   <a:prstClr val="black"/>
                 </a:solidFill>
-                <a:latin typeface="Times New Roman" panose="02020603050405020304" pitchFamily="18" charset="0"/>
-                <a:cs typeface="Times New Roman" panose="02020603050405020304" pitchFamily="18" charset="0"/>
+                <a:latin typeface="Liberation Serif" panose="02020603050405020304" pitchFamily="18" charset="0"/>
+                <a:cs typeface="Liberation Serif" panose="02020603050405020304" pitchFamily="18" charset="0"/>
               </a:rPr>
               <a:t>Capacity of Neural Networks</a:t>
             </a:r>
@@ -7533,8 +7629,8 @@
               <a:solidFill>
                 <a:prstClr val="black"/>
               </a:solidFill>
-              <a:latin typeface="Times New Roman" panose="02020603050405020304" pitchFamily="18" charset="0"/>
-              <a:cs typeface="Times New Roman" panose="02020603050405020304" pitchFamily="18" charset="0"/>
+              <a:latin typeface="Liberation Serif" panose="02020603050405020304" pitchFamily="18" charset="0"/>
+              <a:cs typeface="Liberation Serif" panose="02020603050405020304" pitchFamily="18" charset="0"/>
             </a:endParaRPr>
           </a:p>
         </p:txBody>
@@ -7565,13 +7661,13 @@
               <a:lnSpc>
                 <a:spcPct val="150000"/>
               </a:lnSpc>
-              <a:buFont typeface="Arial" panose="020B0604020202020204" pitchFamily="34" charset="0"/>
+              <a:buFont typeface="Liberation Sans" panose="020B0604020202020204" pitchFamily="34" charset="0"/>
               <a:buChar char="•"/>
             </a:pPr>
             <a:r>
               <a:rPr lang="en-US" altLang="ko-KR" sz="2000" dirty="0" smtClean="0">
-                <a:latin typeface="Times New Roman" panose="02020603050405020304" pitchFamily="18" charset="0"/>
-                <a:cs typeface="Times New Roman" panose="02020603050405020304" pitchFamily="18" charset="0"/>
+                <a:latin typeface="Liberation Serif" panose="02020603050405020304" pitchFamily="18" charset="0"/>
+                <a:cs typeface="Liberation Serif" panose="02020603050405020304" pitchFamily="18" charset="0"/>
               </a:rPr>
               <a:t>Linearly separable problems</a:t>
             </a:r>
@@ -7581,12 +7677,12 @@
               <a:lnSpc>
                 <a:spcPct val="150000"/>
               </a:lnSpc>
-              <a:buFont typeface="Arial" panose="020B0604020202020204" pitchFamily="34" charset="0"/>
+              <a:buFont typeface="Liberation Sans" panose="020B0604020202020204" pitchFamily="34" charset="0"/>
               <a:buChar char="•"/>
             </a:pPr>
             <a:endParaRPr lang="en-US" altLang="ko-KR" sz="2000" dirty="0">
-              <a:latin typeface="Times New Roman" panose="02020603050405020304" pitchFamily="18" charset="0"/>
-              <a:cs typeface="Times New Roman" panose="02020603050405020304" pitchFamily="18" charset="0"/>
+              <a:latin typeface="Liberation Serif" panose="02020603050405020304" pitchFamily="18" charset="0"/>
+              <a:cs typeface="Liberation Serif" panose="02020603050405020304" pitchFamily="18" charset="0"/>
             </a:endParaRPr>
           </a:p>
           <a:p>
@@ -7594,12 +7690,12 @@
               <a:lnSpc>
                 <a:spcPct val="150000"/>
               </a:lnSpc>
-              <a:buFont typeface="Arial" panose="020B0604020202020204" pitchFamily="34" charset="0"/>
+              <a:buFont typeface="Liberation Sans" panose="020B0604020202020204" pitchFamily="34" charset="0"/>
               <a:buChar char="•"/>
             </a:pPr>
             <a:endParaRPr lang="en-US" altLang="ko-KR" sz="2000" dirty="0" smtClean="0">
-              <a:latin typeface="Times New Roman" panose="02020603050405020304" pitchFamily="18" charset="0"/>
-              <a:cs typeface="Times New Roman" panose="02020603050405020304" pitchFamily="18" charset="0"/>
+              <a:latin typeface="Liberation Serif" panose="02020603050405020304" pitchFamily="18" charset="0"/>
+              <a:cs typeface="Liberation Serif" panose="02020603050405020304" pitchFamily="18" charset="0"/>
             </a:endParaRPr>
           </a:p>
           <a:p>
@@ -7607,12 +7703,12 @@
               <a:lnSpc>
                 <a:spcPct val="150000"/>
               </a:lnSpc>
-              <a:buFont typeface="Arial" panose="020B0604020202020204" pitchFamily="34" charset="0"/>
+              <a:buFont typeface="Liberation Sans" panose="020B0604020202020204" pitchFamily="34" charset="0"/>
               <a:buChar char="•"/>
             </a:pPr>
             <a:endParaRPr lang="en-US" altLang="ko-KR" sz="2000" dirty="0" smtClean="0">
-              <a:latin typeface="Times New Roman" panose="02020603050405020304" pitchFamily="18" charset="0"/>
-              <a:cs typeface="Times New Roman" panose="02020603050405020304" pitchFamily="18" charset="0"/>
+              <a:latin typeface="Liberation Serif" panose="02020603050405020304" pitchFamily="18" charset="0"/>
+              <a:cs typeface="Liberation Serif" panose="02020603050405020304" pitchFamily="18" charset="0"/>
             </a:endParaRPr>
           </a:p>
           <a:p>
@@ -7620,12 +7716,12 @@
               <a:lnSpc>
                 <a:spcPct val="150000"/>
               </a:lnSpc>
-              <a:buFont typeface="Arial" panose="020B0604020202020204" pitchFamily="34" charset="0"/>
+              <a:buFont typeface="Liberation Sans" panose="020B0604020202020204" pitchFamily="34" charset="0"/>
               <a:buChar char="•"/>
             </a:pPr>
             <a:endParaRPr lang="en-US" altLang="ko-KR" sz="2000" dirty="0">
-              <a:latin typeface="Times New Roman" panose="02020603050405020304" pitchFamily="18" charset="0"/>
-              <a:cs typeface="Times New Roman" panose="02020603050405020304" pitchFamily="18" charset="0"/>
+              <a:latin typeface="Liberation Serif" panose="02020603050405020304" pitchFamily="18" charset="0"/>
+              <a:cs typeface="Liberation Serif" panose="02020603050405020304" pitchFamily="18" charset="0"/>
             </a:endParaRPr>
           </a:p>
           <a:p>
@@ -7633,19 +7729,19 @@
               <a:lnSpc>
                 <a:spcPct val="150000"/>
               </a:lnSpc>
-              <a:buFont typeface="Arial" panose="020B0604020202020204" pitchFamily="34" charset="0"/>
+              <a:buFont typeface="Liberation Sans" panose="020B0604020202020204" pitchFamily="34" charset="0"/>
               <a:buChar char="•"/>
             </a:pPr>
             <a:r>
               <a:rPr lang="en-US" altLang="ko-KR" sz="2000" dirty="0" smtClean="0">
-                <a:latin typeface="Times New Roman" panose="02020603050405020304" pitchFamily="18" charset="0"/>
-                <a:cs typeface="Times New Roman" panose="02020603050405020304" pitchFamily="18" charset="0"/>
+                <a:latin typeface="Liberation Serif" panose="02020603050405020304" pitchFamily="18" charset="0"/>
+                <a:cs typeface="Liberation Serif" panose="02020603050405020304" pitchFamily="18" charset="0"/>
               </a:rPr>
               <a:t>Non-linearly separable problems</a:t>
             </a:r>
             <a:endParaRPr lang="en-US" altLang="ko-KR" dirty="0" smtClean="0">
-              <a:latin typeface="Times New Roman" panose="02020603050405020304" pitchFamily="18" charset="0"/>
-              <a:cs typeface="Times New Roman" panose="02020603050405020304" pitchFamily="18" charset="0"/>
+              <a:latin typeface="Liberation Serif" panose="02020603050405020304" pitchFamily="18" charset="0"/>
+              <a:cs typeface="Liberation Serif" panose="02020603050405020304" pitchFamily="18" charset="0"/>
             </a:endParaRPr>
           </a:p>
         </p:txBody>
@@ -7869,8 +7965,8 @@
                 <a:solidFill>
                   <a:prstClr val="black"/>
                 </a:solidFill>
-                <a:latin typeface="Times New Roman" panose="02020603050405020304" pitchFamily="18" charset="0"/>
-                <a:cs typeface="Times New Roman" panose="02020603050405020304" pitchFamily="18" charset="0"/>
+                <a:latin typeface="Liberation Serif" panose="02020603050405020304" pitchFamily="18" charset="0"/>
+                <a:cs typeface="Liberation Serif" panose="02020603050405020304" pitchFamily="18" charset="0"/>
               </a:rPr>
               <a:t>Capacity of Neural Networks</a:t>
             </a:r>
@@ -7878,8 +7974,8 @@
               <a:solidFill>
                 <a:prstClr val="black"/>
               </a:solidFill>
-              <a:latin typeface="Times New Roman" panose="02020603050405020304" pitchFamily="18" charset="0"/>
-              <a:cs typeface="Times New Roman" panose="02020603050405020304" pitchFamily="18" charset="0"/>
+              <a:latin typeface="Liberation Serif" panose="02020603050405020304" pitchFamily="18" charset="0"/>
+              <a:cs typeface="Liberation Serif" panose="02020603050405020304" pitchFamily="18" charset="0"/>
             </a:endParaRPr>
           </a:p>
         </p:txBody>
@@ -7910,13 +8006,13 @@
               <a:lnSpc>
                 <a:spcPct val="150000"/>
               </a:lnSpc>
-              <a:buFont typeface="Arial" panose="020B0604020202020204" pitchFamily="34" charset="0"/>
+              <a:buFont typeface="Liberation Sans" panose="020B0604020202020204" pitchFamily="34" charset="0"/>
               <a:buChar char="•"/>
             </a:pPr>
             <a:r>
               <a:rPr lang="en-US" altLang="ko-KR" sz="2000" dirty="0" smtClean="0">
-                <a:latin typeface="Times New Roman" panose="02020603050405020304" pitchFamily="18" charset="0"/>
-                <a:cs typeface="Times New Roman" panose="02020603050405020304" pitchFamily="18" charset="0"/>
+                <a:latin typeface="Liberation Serif" panose="02020603050405020304" pitchFamily="18" charset="0"/>
+                <a:cs typeface="Liberation Serif" panose="02020603050405020304" pitchFamily="18" charset="0"/>
               </a:rPr>
               <a:t>Artificial neural networks can solve non-linearly separable problems.</a:t>
             </a:r>
@@ -7934,8 +8030,8 @@
                 <a:solidFill>
                   <a:prstClr val="black"/>
                 </a:solidFill>
-                <a:latin typeface="Times New Roman" panose="02020603050405020304" pitchFamily="18" charset="0"/>
-                <a:cs typeface="Times New Roman" panose="02020603050405020304" pitchFamily="18" charset="0"/>
+                <a:latin typeface="Liberation Serif" panose="02020603050405020304" pitchFamily="18" charset="0"/>
+                <a:cs typeface="Liberation Serif" panose="02020603050405020304" pitchFamily="18" charset="0"/>
               </a:rPr>
               <a:t>That is, neural networks can represent more complex features! </a:t>
             </a:r>
@@ -7943,8 +8039,8 @@
               <a:solidFill>
                 <a:prstClr val="black"/>
               </a:solidFill>
-              <a:latin typeface="Times New Roman" panose="02020603050405020304" pitchFamily="18" charset="0"/>
-              <a:cs typeface="Times New Roman" panose="02020603050405020304" pitchFamily="18" charset="0"/>
+              <a:latin typeface="Liberation Serif" panose="02020603050405020304" pitchFamily="18" charset="0"/>
+              <a:cs typeface="Liberation Serif" panose="02020603050405020304" pitchFamily="18" charset="0"/>
             </a:endParaRPr>
           </a:p>
           <a:p>
@@ -7952,13 +8048,13 @@
               <a:lnSpc>
                 <a:spcPct val="150000"/>
               </a:lnSpc>
-              <a:buFont typeface="Arial" panose="020B0604020202020204" pitchFamily="34" charset="0"/>
+              <a:buFont typeface="Liberation Sans" panose="020B0604020202020204" pitchFamily="34" charset="0"/>
               <a:buChar char="•"/>
             </a:pPr>
             <a:r>
               <a:rPr lang="en-US" altLang="ko-KR" sz="2000" dirty="0" smtClean="0">
-                <a:latin typeface="Times New Roman" panose="02020603050405020304" pitchFamily="18" charset="0"/>
-                <a:cs typeface="Times New Roman" panose="02020603050405020304" pitchFamily="18" charset="0"/>
+                <a:latin typeface="Liberation Serif" panose="02020603050405020304" pitchFamily="18" charset="0"/>
+                <a:cs typeface="Liberation Serif" panose="02020603050405020304" pitchFamily="18" charset="0"/>
               </a:rPr>
               <a:t>Linearly separable problems</a:t>
             </a:r>
@@ -7968,12 +8064,12 @@
               <a:lnSpc>
                 <a:spcPct val="150000"/>
               </a:lnSpc>
-              <a:buFont typeface="Arial" panose="020B0604020202020204" pitchFamily="34" charset="0"/>
+              <a:buFont typeface="Liberation Sans" panose="020B0604020202020204" pitchFamily="34" charset="0"/>
               <a:buChar char="•"/>
             </a:pPr>
             <a:endParaRPr lang="en-US" altLang="ko-KR" sz="2000" dirty="0">
-              <a:latin typeface="Times New Roman" panose="02020603050405020304" pitchFamily="18" charset="0"/>
-              <a:cs typeface="Times New Roman" panose="02020603050405020304" pitchFamily="18" charset="0"/>
+              <a:latin typeface="Liberation Serif" panose="02020603050405020304" pitchFamily="18" charset="0"/>
+              <a:cs typeface="Liberation Serif" panose="02020603050405020304" pitchFamily="18" charset="0"/>
             </a:endParaRPr>
           </a:p>
           <a:p>
@@ -7981,12 +8077,12 @@
               <a:lnSpc>
                 <a:spcPct val="150000"/>
               </a:lnSpc>
-              <a:buFont typeface="Arial" panose="020B0604020202020204" pitchFamily="34" charset="0"/>
+              <a:buFont typeface="Liberation Sans" panose="020B0604020202020204" pitchFamily="34" charset="0"/>
               <a:buChar char="•"/>
             </a:pPr>
             <a:endParaRPr lang="en-US" altLang="ko-KR" sz="2000" dirty="0" smtClean="0">
-              <a:latin typeface="Times New Roman" panose="02020603050405020304" pitchFamily="18" charset="0"/>
-              <a:cs typeface="Times New Roman" panose="02020603050405020304" pitchFamily="18" charset="0"/>
+              <a:latin typeface="Liberation Serif" panose="02020603050405020304" pitchFamily="18" charset="0"/>
+              <a:cs typeface="Liberation Serif" panose="02020603050405020304" pitchFamily="18" charset="0"/>
             </a:endParaRPr>
           </a:p>
           <a:p>
@@ -7994,12 +8090,12 @@
               <a:lnSpc>
                 <a:spcPct val="150000"/>
               </a:lnSpc>
-              <a:buFont typeface="Arial" panose="020B0604020202020204" pitchFamily="34" charset="0"/>
+              <a:buFont typeface="Liberation Sans" panose="020B0604020202020204" pitchFamily="34" charset="0"/>
               <a:buChar char="•"/>
             </a:pPr>
             <a:endParaRPr lang="en-US" altLang="ko-KR" sz="2000" dirty="0" smtClean="0">
-              <a:latin typeface="Times New Roman" panose="02020603050405020304" pitchFamily="18" charset="0"/>
-              <a:cs typeface="Times New Roman" panose="02020603050405020304" pitchFamily="18" charset="0"/>
+              <a:latin typeface="Liberation Serif" panose="02020603050405020304" pitchFamily="18" charset="0"/>
+              <a:cs typeface="Liberation Serif" panose="02020603050405020304" pitchFamily="18" charset="0"/>
             </a:endParaRPr>
           </a:p>
           <a:p>
@@ -8007,12 +8103,12 @@
               <a:lnSpc>
                 <a:spcPct val="150000"/>
               </a:lnSpc>
-              <a:buFont typeface="Arial" panose="020B0604020202020204" pitchFamily="34" charset="0"/>
+              <a:buFont typeface="Liberation Sans" panose="020B0604020202020204" pitchFamily="34" charset="0"/>
               <a:buChar char="•"/>
             </a:pPr>
             <a:endParaRPr lang="en-US" altLang="ko-KR" sz="2000" dirty="0">
-              <a:latin typeface="Times New Roman" panose="02020603050405020304" pitchFamily="18" charset="0"/>
-              <a:cs typeface="Times New Roman" panose="02020603050405020304" pitchFamily="18" charset="0"/>
+              <a:latin typeface="Liberation Serif" panose="02020603050405020304" pitchFamily="18" charset="0"/>
+              <a:cs typeface="Liberation Serif" panose="02020603050405020304" pitchFamily="18" charset="0"/>
             </a:endParaRPr>
           </a:p>
           <a:p>
@@ -8020,19 +8116,19 @@
               <a:lnSpc>
                 <a:spcPct val="150000"/>
               </a:lnSpc>
-              <a:buFont typeface="Arial" panose="020B0604020202020204" pitchFamily="34" charset="0"/>
+              <a:buFont typeface="Liberation Sans" panose="020B0604020202020204" pitchFamily="34" charset="0"/>
               <a:buChar char="•"/>
             </a:pPr>
             <a:r>
               <a:rPr lang="en-US" altLang="ko-KR" sz="2000" dirty="0" smtClean="0">
-                <a:latin typeface="Times New Roman" panose="02020603050405020304" pitchFamily="18" charset="0"/>
-                <a:cs typeface="Times New Roman" panose="02020603050405020304" pitchFamily="18" charset="0"/>
+                <a:latin typeface="Liberation Serif" panose="02020603050405020304" pitchFamily="18" charset="0"/>
+                <a:cs typeface="Liberation Serif" panose="02020603050405020304" pitchFamily="18" charset="0"/>
               </a:rPr>
               <a:t>Non-linearly separable problems</a:t>
             </a:r>
             <a:endParaRPr lang="en-US" altLang="ko-KR" dirty="0" smtClean="0">
-              <a:latin typeface="Times New Roman" panose="02020603050405020304" pitchFamily="18" charset="0"/>
-              <a:cs typeface="Times New Roman" panose="02020603050405020304" pitchFamily="18" charset="0"/>
+              <a:latin typeface="Liberation Serif" panose="02020603050405020304" pitchFamily="18" charset="0"/>
+              <a:cs typeface="Liberation Serif" panose="02020603050405020304" pitchFamily="18" charset="0"/>
             </a:endParaRPr>
           </a:p>
         </p:txBody>
@@ -8188,8 +8284,8 @@
                 <a:solidFill>
                   <a:prstClr val="black"/>
                 </a:solidFill>
-                <a:latin typeface="Times New Roman" panose="02020603050405020304" pitchFamily="18" charset="0"/>
-                <a:cs typeface="Times New Roman" panose="02020603050405020304" pitchFamily="18" charset="0"/>
+                <a:latin typeface="Liberation Serif" panose="02020603050405020304" pitchFamily="18" charset="0"/>
+                <a:cs typeface="Liberation Serif" panose="02020603050405020304" pitchFamily="18" charset="0"/>
               </a:rPr>
               <a:t>Multi-layer neural networks can solve it by transforming the input in a better representation.</a:t>
             </a:r>
@@ -8197,8 +8293,8 @@
               <a:solidFill>
                 <a:prstClr val="black"/>
               </a:solidFill>
-              <a:latin typeface="Times New Roman" panose="02020603050405020304" pitchFamily="18" charset="0"/>
-              <a:cs typeface="Times New Roman" panose="02020603050405020304" pitchFamily="18" charset="0"/>
+              <a:latin typeface="Liberation Serif" panose="02020603050405020304" pitchFamily="18" charset="0"/>
+              <a:cs typeface="Liberation Serif" panose="02020603050405020304" pitchFamily="18" charset="0"/>
             </a:endParaRPr>
           </a:p>
         </p:txBody>
@@ -8330,8 +8426,8 @@
                 <a:solidFill>
                   <a:prstClr val="black"/>
                 </a:solidFill>
-                <a:latin typeface="Times New Roman" panose="02020603050405020304" pitchFamily="18" charset="0"/>
-                <a:cs typeface="Times New Roman" panose="02020603050405020304" pitchFamily="18" charset="0"/>
+                <a:latin typeface="Liberation Serif" panose="02020603050405020304" pitchFamily="18" charset="0"/>
+                <a:cs typeface="Liberation Serif" panose="02020603050405020304" pitchFamily="18" charset="0"/>
               </a:rPr>
               <a:t>Learning Algorithm of Neural Networks</a:t>
             </a:r>
@@ -8339,8 +8435,8 @@
               <a:solidFill>
                 <a:prstClr val="black"/>
               </a:solidFill>
-              <a:latin typeface="Times New Roman" panose="02020603050405020304" pitchFamily="18" charset="0"/>
-              <a:cs typeface="Times New Roman" panose="02020603050405020304" pitchFamily="18" charset="0"/>
+              <a:latin typeface="Liberation Serif" panose="02020603050405020304" pitchFamily="18" charset="0"/>
+              <a:cs typeface="Liberation Serif" panose="02020603050405020304" pitchFamily="18" charset="0"/>
             </a:endParaRPr>
           </a:p>
         </p:txBody>
@@ -8371,13 +8467,13 @@
               <a:lnSpc>
                 <a:spcPct val="150000"/>
               </a:lnSpc>
-              <a:buFont typeface="Arial" panose="020B0604020202020204" pitchFamily="34" charset="0"/>
+              <a:buFont typeface="Liberation Sans" panose="020B0604020202020204" pitchFamily="34" charset="0"/>
               <a:buChar char="•"/>
             </a:pPr>
             <a:r>
               <a:rPr lang="en-US" altLang="ko-KR" sz="2000" dirty="0" smtClean="0">
-                <a:latin typeface="Times New Roman" panose="02020603050405020304" pitchFamily="18" charset="0"/>
-                <a:cs typeface="Times New Roman" panose="02020603050405020304" pitchFamily="18" charset="0"/>
+                <a:latin typeface="Liberation Serif" panose="02020603050405020304" pitchFamily="18" charset="0"/>
+                <a:cs typeface="Liberation Serif" panose="02020603050405020304" pitchFamily="18" charset="0"/>
               </a:rPr>
               <a:t>Back-propagation </a:t>
             </a:r>
@@ -8390,14 +8486,14 @@
             </a:pPr>
             <a:r>
               <a:rPr lang="en-US" altLang="ko-KR" dirty="0" smtClean="0">
-                <a:latin typeface="Times New Roman" panose="02020603050405020304" pitchFamily="18" charset="0"/>
-                <a:cs typeface="Times New Roman" panose="02020603050405020304" pitchFamily="18" charset="0"/>
+                <a:latin typeface="Liberation Serif" panose="02020603050405020304" pitchFamily="18" charset="0"/>
+                <a:cs typeface="Liberation Serif" panose="02020603050405020304" pitchFamily="18" charset="0"/>
               </a:rPr>
               <a:t>= Learning parameters to minimize the error from the true value in the reverse way</a:t>
             </a:r>
             <a:endParaRPr lang="en-US" altLang="ko-KR" dirty="0">
-              <a:latin typeface="Times New Roman" panose="02020603050405020304" pitchFamily="18" charset="0"/>
-              <a:cs typeface="Times New Roman" panose="02020603050405020304" pitchFamily="18" charset="0"/>
+              <a:latin typeface="Liberation Serif" panose="02020603050405020304" pitchFamily="18" charset="0"/>
+              <a:cs typeface="Liberation Serif" panose="02020603050405020304" pitchFamily="18" charset="0"/>
             </a:endParaRPr>
           </a:p>
         </p:txBody>
@@ -8530,14 +8626,14 @@
           <a:p>
             <a:r>
               <a:rPr lang="en-US" altLang="ko-KR" sz="1600" dirty="0" smtClean="0">
-                <a:latin typeface="Times New Roman" panose="02020603050405020304" pitchFamily="18" charset="0"/>
-                <a:cs typeface="Times New Roman" panose="02020603050405020304" pitchFamily="18" charset="0"/>
+                <a:latin typeface="Liberation Serif" panose="02020603050405020304" pitchFamily="18" charset="0"/>
+                <a:cs typeface="Liberation Serif" panose="02020603050405020304" pitchFamily="18" charset="0"/>
               </a:rPr>
               <a:t>1</a:t>
             </a:r>
             <a:endParaRPr lang="ko-KR" altLang="en-US" sz="1600" dirty="0">
-              <a:latin typeface="Times New Roman" panose="02020603050405020304" pitchFamily="18" charset="0"/>
-              <a:cs typeface="Times New Roman" panose="02020603050405020304" pitchFamily="18" charset="0"/>
+              <a:latin typeface="Liberation Serif" panose="02020603050405020304" pitchFamily="18" charset="0"/>
+              <a:cs typeface="Liberation Serif" panose="02020603050405020304" pitchFamily="18" charset="0"/>
             </a:endParaRPr>
           </a:p>
         </p:txBody>
@@ -8566,14 +8662,14 @@
           <a:p>
             <a:r>
               <a:rPr lang="en-US" altLang="ko-KR" sz="1600" dirty="0" smtClean="0">
-                <a:latin typeface="Times New Roman" panose="02020603050405020304" pitchFamily="18" charset="0"/>
-                <a:cs typeface="Times New Roman" panose="02020603050405020304" pitchFamily="18" charset="0"/>
+                <a:latin typeface="Liberation Serif" panose="02020603050405020304" pitchFamily="18" charset="0"/>
+                <a:cs typeface="Liberation Serif" panose="02020603050405020304" pitchFamily="18" charset="0"/>
               </a:rPr>
               <a:t>0</a:t>
             </a:r>
             <a:endParaRPr lang="ko-KR" altLang="en-US" sz="1600" dirty="0">
-              <a:latin typeface="Times New Roman" panose="02020603050405020304" pitchFamily="18" charset="0"/>
-              <a:cs typeface="Times New Roman" panose="02020603050405020304" pitchFamily="18" charset="0"/>
+              <a:latin typeface="Liberation Serif" panose="02020603050405020304" pitchFamily="18" charset="0"/>
+              <a:cs typeface="Liberation Serif" panose="02020603050405020304" pitchFamily="18" charset="0"/>
             </a:endParaRPr>
           </a:p>
         </p:txBody>
@@ -8638,8 +8734,8 @@
                 <a:pPr algn="ctr"/>
                 <a:r>
                   <a:rPr lang="en-US" altLang="ko-KR" sz="1600" dirty="0" smtClean="0">
-                    <a:latin typeface="Times New Roman" panose="02020603050405020304" pitchFamily="18" charset="0"/>
-                    <a:cs typeface="Times New Roman" panose="02020603050405020304" pitchFamily="18" charset="0"/>
+                    <a:latin typeface="Liberation Serif" panose="02020603050405020304" pitchFamily="18" charset="0"/>
+                    <a:cs typeface="Liberation Serif" panose="02020603050405020304" pitchFamily="18" charset="0"/>
                   </a:rPr>
                   <a:t>Activation function</a:t>
                 </a:r>
@@ -8654,29 +8750,29 @@
                     <m:oMath xmlns:m="http://schemas.openxmlformats.org/officeDocument/2006/math">
                       <m:r>
                         <a:rPr lang="en-US" altLang="ko-KR" sz="1600" b="0" i="1" smtClean="0">
-                          <a:latin typeface="Cambria Math" panose="02040503050406030204" pitchFamily="18" charset="0"/>
-                          <a:cs typeface="Times New Roman" panose="02020603050405020304" pitchFamily="18" charset="0"/>
+                          <a:latin typeface="Caladea" panose="02040503050406030204" pitchFamily="18" charset="0"/>
+                          <a:cs typeface="Liberation Serif" panose="02020603050405020304" pitchFamily="18" charset="0"/>
                         </a:rPr>
                         <m:t>𝑦</m:t>
                       </m:r>
                       <m:r>
                         <a:rPr lang="en-US" altLang="ko-KR" sz="1600" b="0" i="1" smtClean="0">
-                          <a:latin typeface="Cambria Math" panose="02040503050406030204" pitchFamily="18" charset="0"/>
-                          <a:cs typeface="Times New Roman" panose="02020603050405020304" pitchFamily="18" charset="0"/>
+                          <a:latin typeface="Caladea" panose="02040503050406030204" pitchFamily="18" charset="0"/>
+                          <a:cs typeface="Liberation Serif" panose="02020603050405020304" pitchFamily="18" charset="0"/>
                         </a:rPr>
                         <m:t>=</m:t>
                       </m:r>
                       <m:r>
                         <a:rPr lang="en-US" altLang="ko-KR" sz="1600" b="0" i="1" smtClean="0">
-                          <a:latin typeface="Cambria Math" panose="02040503050406030204" pitchFamily="18" charset="0"/>
-                          <a:cs typeface="Times New Roman" panose="02020603050405020304" pitchFamily="18" charset="0"/>
+                          <a:latin typeface="Caladea" panose="02040503050406030204" pitchFamily="18" charset="0"/>
+                          <a:cs typeface="Liberation Serif" panose="02020603050405020304" pitchFamily="18" charset="0"/>
                         </a:rPr>
                         <m:t>𝑓</m:t>
                       </m:r>
                       <m:r>
                         <a:rPr lang="en-US" altLang="ko-KR" sz="1600" b="0" i="1" smtClean="0">
-                          <a:latin typeface="Cambria Math" panose="02040503050406030204" pitchFamily="18" charset="0"/>
-                          <a:cs typeface="Times New Roman" panose="02020603050405020304" pitchFamily="18" charset="0"/>
+                          <a:latin typeface="Caladea" panose="02040503050406030204" pitchFamily="18" charset="0"/>
+                          <a:cs typeface="Liberation Serif" panose="02020603050405020304" pitchFamily="18" charset="0"/>
                         </a:rPr>
                         <m:t>(</m:t>
                       </m:r>
@@ -8684,16 +8780,16 @@
                         <m:sSubPr>
                           <m:ctrlPr>
                             <a:rPr lang="en-US" altLang="ko-KR" sz="1600" b="0" i="1" smtClean="0">
-                              <a:latin typeface="Cambria Math" charset="0"/>
-                              <a:cs typeface="Times New Roman" panose="02020603050405020304" pitchFamily="18" charset="0"/>
+                              <a:latin typeface="Caladea" charset="0"/>
+                              <a:cs typeface="Liberation Serif" panose="02020603050405020304" pitchFamily="18" charset="0"/>
                             </a:rPr>
                           </m:ctrlPr>
                         </m:sSubPr>
                         <m:e>
                           <m:r>
                             <a:rPr lang="en-US" altLang="ko-KR" sz="1600" b="0" i="1" smtClean="0">
-                              <a:latin typeface="Cambria Math" panose="02040503050406030204" pitchFamily="18" charset="0"/>
-                              <a:cs typeface="Times New Roman" panose="02020603050405020304" pitchFamily="18" charset="0"/>
+                              <a:latin typeface="Caladea" panose="02040503050406030204" pitchFamily="18" charset="0"/>
+                              <a:cs typeface="Liberation Serif" panose="02020603050405020304" pitchFamily="18" charset="0"/>
                             </a:rPr>
                             <m:t>𝑤</m:t>
                           </m:r>
@@ -8701,8 +8797,8 @@
                         <m:sub>
                           <m:r>
                             <a:rPr lang="en-US" altLang="ko-KR" sz="1600" b="0" i="1" smtClean="0">
-                              <a:latin typeface="Cambria Math" panose="02040503050406030204" pitchFamily="18" charset="0"/>
-                              <a:cs typeface="Times New Roman" panose="02020603050405020304" pitchFamily="18" charset="0"/>
+                              <a:latin typeface="Caladea" panose="02040503050406030204" pitchFamily="18" charset="0"/>
+                              <a:cs typeface="Liberation Serif" panose="02020603050405020304" pitchFamily="18" charset="0"/>
                             </a:rPr>
                             <m:t>1</m:t>
                           </m:r>
@@ -8710,8 +8806,8 @@
                       </m:sSub>
                       <m:r>
                         <a:rPr lang="en-US" altLang="ko-KR" sz="1600" b="0" i="1" smtClean="0">
-                          <a:latin typeface="Cambria Math" panose="02040503050406030204" pitchFamily="18" charset="0"/>
-                          <a:cs typeface="Times New Roman" panose="02020603050405020304" pitchFamily="18" charset="0"/>
+                          <a:latin typeface="Caladea" panose="02040503050406030204" pitchFamily="18" charset="0"/>
+                          <a:cs typeface="Liberation Serif" panose="02020603050405020304" pitchFamily="18" charset="0"/>
                         </a:rPr>
                         <m:t>∗1+</m:t>
                       </m:r>
@@ -8719,16 +8815,16 @@
                         <m:sSubPr>
                           <m:ctrlPr>
                             <a:rPr lang="en-US" altLang="ko-KR" sz="1600" b="0" i="1" smtClean="0">
-                              <a:latin typeface="Cambria Math" charset="0"/>
-                              <a:cs typeface="Times New Roman" panose="02020603050405020304" pitchFamily="18" charset="0"/>
+                              <a:latin typeface="Caladea" charset="0"/>
+                              <a:cs typeface="Liberation Serif" panose="02020603050405020304" pitchFamily="18" charset="0"/>
                             </a:rPr>
                           </m:ctrlPr>
                         </m:sSubPr>
                         <m:e>
                           <m:r>
                             <a:rPr lang="en-US" altLang="ko-KR" sz="1600" b="0" i="1" smtClean="0">
-                              <a:latin typeface="Cambria Math" panose="02040503050406030204" pitchFamily="18" charset="0"/>
-                              <a:cs typeface="Times New Roman" panose="02020603050405020304" pitchFamily="18" charset="0"/>
+                              <a:latin typeface="Caladea" panose="02040503050406030204" pitchFamily="18" charset="0"/>
+                              <a:cs typeface="Liberation Serif" panose="02020603050405020304" pitchFamily="18" charset="0"/>
                             </a:rPr>
                             <m:t>𝑤</m:t>
                           </m:r>
@@ -8736,8 +8832,8 @@
                         <m:sub>
                           <m:r>
                             <a:rPr lang="en-US" altLang="ko-KR" sz="1600" b="0" i="1" smtClean="0">
-                              <a:latin typeface="Cambria Math" panose="02040503050406030204" pitchFamily="18" charset="0"/>
-                              <a:cs typeface="Times New Roman" panose="02020603050405020304" pitchFamily="18" charset="0"/>
+                              <a:latin typeface="Caladea" panose="02040503050406030204" pitchFamily="18" charset="0"/>
+                              <a:cs typeface="Liberation Serif" panose="02020603050405020304" pitchFamily="18" charset="0"/>
                             </a:rPr>
                             <m:t>0</m:t>
                           </m:r>
@@ -8745,8 +8841,8 @@
                       </m:sSub>
                       <m:r>
                         <a:rPr lang="en-US" altLang="ko-KR" sz="1600" b="0" i="1" smtClean="0">
-                          <a:latin typeface="Cambria Math" panose="02040503050406030204" pitchFamily="18" charset="0"/>
-                          <a:cs typeface="Times New Roman" panose="02020603050405020304" pitchFamily="18" charset="0"/>
+                          <a:latin typeface="Caladea" panose="02040503050406030204" pitchFamily="18" charset="0"/>
+                          <a:cs typeface="Liberation Serif" panose="02020603050405020304" pitchFamily="18" charset="0"/>
                         </a:rPr>
                         <m:t>∗0)</m:t>
                       </m:r>
@@ -8754,8 +8850,8 @@
                   </m:oMathPara>
                 </a14:m>
                 <a:endParaRPr lang="en-US" altLang="ko-KR" sz="1600" dirty="0" smtClean="0">
-                  <a:latin typeface="Times New Roman" panose="02020603050405020304" pitchFamily="18" charset="0"/>
-                  <a:cs typeface="Times New Roman" panose="02020603050405020304" pitchFamily="18" charset="0"/>
+                  <a:latin typeface="Liberation Serif" panose="02020603050405020304" pitchFamily="18" charset="0"/>
+                  <a:cs typeface="Liberation Serif" panose="02020603050405020304" pitchFamily="18" charset="0"/>
                 </a:endParaRPr>
               </a:p>
             </p:txBody>
@@ -8989,14 +9085,14 @@
           <a:p>
             <a:r>
               <a:rPr lang="en-US" altLang="ko-KR" sz="1600" i="1" dirty="0" smtClean="0">
-                <a:latin typeface="Times New Roman" panose="02020603050405020304" pitchFamily="18" charset="0"/>
-                <a:cs typeface="Times New Roman" panose="02020603050405020304" pitchFamily="18" charset="0"/>
+                <a:latin typeface="Liberation Serif" panose="02020603050405020304" pitchFamily="18" charset="0"/>
+                <a:cs typeface="Liberation Serif" panose="02020603050405020304" pitchFamily="18" charset="0"/>
               </a:rPr>
               <a:t>h</a:t>
             </a:r>
             <a:endParaRPr lang="ko-KR" altLang="en-US" sz="1600" i="1" dirty="0">
-              <a:latin typeface="Times New Roman" panose="02020603050405020304" pitchFamily="18" charset="0"/>
-              <a:cs typeface="Times New Roman" panose="02020603050405020304" pitchFamily="18" charset="0"/>
+              <a:latin typeface="Liberation Serif" panose="02020603050405020304" pitchFamily="18" charset="0"/>
+              <a:cs typeface="Liberation Serif" panose="02020603050405020304" pitchFamily="18" charset="0"/>
             </a:endParaRPr>
           </a:p>
         </p:txBody>
@@ -9025,14 +9121,14 @@
           <a:p>
             <a:r>
               <a:rPr lang="en-US" altLang="ko-KR" sz="1600" dirty="0" smtClean="0">
-                <a:latin typeface="Times New Roman" panose="02020603050405020304" pitchFamily="18" charset="0"/>
-                <a:cs typeface="Times New Roman" panose="02020603050405020304" pitchFamily="18" charset="0"/>
+                <a:latin typeface="Liberation Serif" panose="02020603050405020304" pitchFamily="18" charset="0"/>
+                <a:cs typeface="Liberation Serif" panose="02020603050405020304" pitchFamily="18" charset="0"/>
               </a:rPr>
               <a:t>1</a:t>
             </a:r>
             <a:endParaRPr lang="ko-KR" altLang="en-US" sz="1600" dirty="0">
-              <a:latin typeface="Times New Roman" panose="02020603050405020304" pitchFamily="18" charset="0"/>
-              <a:cs typeface="Times New Roman" panose="02020603050405020304" pitchFamily="18" charset="0"/>
+              <a:latin typeface="Liberation Serif" panose="02020603050405020304" pitchFamily="18" charset="0"/>
+              <a:cs typeface="Liberation Serif" panose="02020603050405020304" pitchFamily="18" charset="0"/>
             </a:endParaRPr>
           </a:p>
         </p:txBody>
@@ -9069,8 +9165,8 @@
                     <m:oMath xmlns:m="http://schemas.openxmlformats.org/officeDocument/2006/math">
                       <m:r>
                         <a:rPr lang="en-US" altLang="ko-KR" i="1">
-                          <a:latin typeface="Cambria Math" panose="02040503050406030204" pitchFamily="18" charset="0"/>
-                          <a:cs typeface="Times New Roman" panose="02020603050405020304" pitchFamily="18" charset="0"/>
+                          <a:latin typeface="Caladea" panose="02040503050406030204" pitchFamily="18" charset="0"/>
+                          <a:cs typeface="Liberation Serif" panose="02020603050405020304" pitchFamily="18" charset="0"/>
                         </a:rPr>
                         <m:t>𝑦</m:t>
                       </m:r>
@@ -9150,8 +9246,8 @@
                 </a:pPr>
                 <a:r>
                   <a:rPr lang="en-US" altLang="ko-KR" dirty="0" smtClean="0">
-                    <a:latin typeface="Times New Roman" panose="02020603050405020304" pitchFamily="18" charset="0"/>
-                    <a:cs typeface="Times New Roman" panose="02020603050405020304" pitchFamily="18" charset="0"/>
+                    <a:latin typeface="Liberation Serif" panose="02020603050405020304" pitchFamily="18" charset="0"/>
+                    <a:cs typeface="Liberation Serif" panose="02020603050405020304" pitchFamily="18" charset="0"/>
                   </a:rPr>
                   <a:t>If the model outputs 1 and the true value is 0, how should you modify the parameters (</a:t>
                 </a:r>
@@ -9161,16 +9257,16 @@
                       <m:sSubPr>
                         <m:ctrlPr>
                           <a:rPr lang="en-US" altLang="ko-KR" i="1">
-                            <a:latin typeface="Cambria Math" charset="0"/>
-                            <a:cs typeface="Times New Roman" panose="02020603050405020304" pitchFamily="18" charset="0"/>
+                            <a:latin typeface="Caladea" charset="0"/>
+                            <a:cs typeface="Liberation Serif" panose="02020603050405020304" pitchFamily="18" charset="0"/>
                           </a:rPr>
                         </m:ctrlPr>
                       </m:sSubPr>
                       <m:e>
                         <m:r>
                           <a:rPr lang="en-US" altLang="ko-KR" i="1">
-                            <a:latin typeface="Cambria Math" panose="02040503050406030204" pitchFamily="18" charset="0"/>
-                            <a:cs typeface="Times New Roman" panose="02020603050405020304" pitchFamily="18" charset="0"/>
+                            <a:latin typeface="Caladea" panose="02040503050406030204" pitchFamily="18" charset="0"/>
+                            <a:cs typeface="Liberation Serif" panose="02020603050405020304" pitchFamily="18" charset="0"/>
                           </a:rPr>
                           <m:t>𝑤</m:t>
                         </m:r>
@@ -9178,8 +9274,8 @@
                       <m:sub>
                         <m:r>
                           <a:rPr lang="en-US" altLang="ko-KR" i="1">
-                            <a:latin typeface="Cambria Math" panose="02040503050406030204" pitchFamily="18" charset="0"/>
-                            <a:cs typeface="Times New Roman" panose="02020603050405020304" pitchFamily="18" charset="0"/>
+                            <a:latin typeface="Caladea" panose="02040503050406030204" pitchFamily="18" charset="0"/>
+                            <a:cs typeface="Liberation Serif" panose="02020603050405020304" pitchFamily="18" charset="0"/>
                           </a:rPr>
                           <m:t>1</m:t>
                         </m:r>
@@ -9187,8 +9283,8 @@
                     </m:sSub>
                     <m:r>
                       <a:rPr lang="en-US" altLang="ko-KR" b="0" i="1" smtClean="0">
-                        <a:latin typeface="Cambria Math" panose="02040503050406030204" pitchFamily="18" charset="0"/>
-                        <a:cs typeface="Times New Roman" panose="02020603050405020304" pitchFamily="18" charset="0"/>
+                        <a:latin typeface="Caladea" panose="02040503050406030204" pitchFamily="18" charset="0"/>
+                        <a:cs typeface="Liberation Serif" panose="02020603050405020304" pitchFamily="18" charset="0"/>
                       </a:rPr>
                       <m:t>, </m:t>
                     </m:r>
@@ -9196,16 +9292,16 @@
                       <m:sSubPr>
                         <m:ctrlPr>
                           <a:rPr lang="en-US" altLang="ko-KR" b="0" i="1" smtClean="0">
-                            <a:latin typeface="Cambria Math" charset="0"/>
-                            <a:cs typeface="Times New Roman" panose="02020603050405020304" pitchFamily="18" charset="0"/>
+                            <a:latin typeface="Caladea" charset="0"/>
+                            <a:cs typeface="Liberation Serif" panose="02020603050405020304" pitchFamily="18" charset="0"/>
                           </a:rPr>
                         </m:ctrlPr>
                       </m:sSubPr>
                       <m:e>
                         <m:r>
                           <a:rPr lang="en-US" altLang="ko-KR" b="0" i="1" smtClean="0">
-                            <a:latin typeface="Cambria Math" panose="02040503050406030204" pitchFamily="18" charset="0"/>
-                            <a:cs typeface="Times New Roman" panose="02020603050405020304" pitchFamily="18" charset="0"/>
+                            <a:latin typeface="Caladea" panose="02040503050406030204" pitchFamily="18" charset="0"/>
+                            <a:cs typeface="Liberation Serif" panose="02020603050405020304" pitchFamily="18" charset="0"/>
                           </a:rPr>
                           <m:t>𝑤</m:t>
                         </m:r>
@@ -9213,8 +9309,8 @@
                       <m:sub>
                         <m:r>
                           <a:rPr lang="en-US" altLang="ko-KR" b="0" i="1" smtClean="0">
-                            <a:latin typeface="Cambria Math" panose="02040503050406030204" pitchFamily="18" charset="0"/>
-                            <a:cs typeface="Times New Roman" panose="02020603050405020304" pitchFamily="18" charset="0"/>
+                            <a:latin typeface="Caladea" panose="02040503050406030204" pitchFamily="18" charset="0"/>
+                            <a:cs typeface="Liberation Serif" panose="02020603050405020304" pitchFamily="18" charset="0"/>
                           </a:rPr>
                           <m:t>0</m:t>
                         </m:r>
@@ -9222,22 +9318,22 @@
                     </m:sSub>
                     <m:r>
                       <a:rPr lang="en-US" altLang="ko-KR" b="0" i="1" smtClean="0">
-                        <a:latin typeface="Cambria Math" panose="02040503050406030204" pitchFamily="18" charset="0"/>
-                        <a:cs typeface="Times New Roman" panose="02020603050405020304" pitchFamily="18" charset="0"/>
+                        <a:latin typeface="Caladea" panose="02040503050406030204" pitchFamily="18" charset="0"/>
+                        <a:cs typeface="Liberation Serif" panose="02020603050405020304" pitchFamily="18" charset="0"/>
                       </a:rPr>
                       <m:t>, </m:t>
                     </m:r>
                     <m:r>
                       <a:rPr lang="en-US" altLang="ko-KR" b="0" i="1" smtClean="0">
-                        <a:latin typeface="Cambria Math" panose="02040503050406030204" pitchFamily="18" charset="0"/>
-                        <a:cs typeface="Times New Roman" panose="02020603050405020304" pitchFamily="18" charset="0"/>
+                        <a:latin typeface="Caladea" panose="02040503050406030204" pitchFamily="18" charset="0"/>
+                        <a:cs typeface="Liberation Serif" panose="02020603050405020304" pitchFamily="18" charset="0"/>
                       </a:rPr>
                       <m:t>h</m:t>
                     </m:r>
                     <m:r>
                       <a:rPr lang="en-US" altLang="ko-KR" b="0" i="1" smtClean="0">
-                        <a:latin typeface="Cambria Math" panose="02040503050406030204" pitchFamily="18" charset="0"/>
-                        <a:cs typeface="Times New Roman" panose="02020603050405020304" pitchFamily="18" charset="0"/>
+                        <a:latin typeface="Caladea" panose="02040503050406030204" pitchFamily="18" charset="0"/>
+                        <a:cs typeface="Liberation Serif" panose="02020603050405020304" pitchFamily="18" charset="0"/>
                       </a:rPr>
                       <m:t>)</m:t>
                     </m:r>
@@ -9245,8 +9341,8 @@
                 </a14:m>
                 <a:r>
                   <a:rPr lang="en-US" altLang="ko-KR" dirty="0" smtClean="0">
-                    <a:latin typeface="Times New Roman" panose="02020603050405020304" pitchFamily="18" charset="0"/>
-                    <a:cs typeface="Times New Roman" panose="02020603050405020304" pitchFamily="18" charset="0"/>
+                    <a:latin typeface="Liberation Serif" panose="02020603050405020304" pitchFamily="18" charset="0"/>
+                    <a:cs typeface="Liberation Serif" panose="02020603050405020304" pitchFamily="18" charset="0"/>
                   </a:rPr>
                   <a:t>?</a:t>
                 </a:r>
@@ -9256,8 +9352,8 @@
                   <a:buAutoNum type="arabicParenBoth"/>
                 </a:pPr>
                 <a:endParaRPr lang="en-US" altLang="ko-KR" dirty="0" smtClean="0">
-                  <a:latin typeface="Times New Roman" panose="02020603050405020304" pitchFamily="18" charset="0"/>
-                  <a:cs typeface="Times New Roman" panose="02020603050405020304" pitchFamily="18" charset="0"/>
+                  <a:latin typeface="Liberation Serif" panose="02020603050405020304" pitchFamily="18" charset="0"/>
+                  <a:cs typeface="Liberation Serif" panose="02020603050405020304" pitchFamily="18" charset="0"/>
                 </a:endParaRPr>
               </a:p>
               <a:p>
@@ -9267,43 +9363,43 @@
                 </a:pPr>
                 <a:r>
                   <a:rPr lang="en-US" altLang="ko-KR" dirty="0" smtClean="0">
-                    <a:latin typeface="Times New Roman" panose="02020603050405020304" pitchFamily="18" charset="0"/>
-                    <a:cs typeface="Times New Roman" panose="02020603050405020304" pitchFamily="18" charset="0"/>
+                    <a:latin typeface="Liberation Serif" panose="02020603050405020304" pitchFamily="18" charset="0"/>
+                    <a:cs typeface="Liberation Serif" panose="02020603050405020304" pitchFamily="18" charset="0"/>
                   </a:rPr>
                   <a:t>If </a:t>
                 </a:r>
                 <a:r>
                   <a:rPr lang="en-US" altLang="ko-KR" dirty="0">
-                    <a:latin typeface="Times New Roman" panose="02020603050405020304" pitchFamily="18" charset="0"/>
-                    <a:cs typeface="Times New Roman" panose="02020603050405020304" pitchFamily="18" charset="0"/>
+                    <a:latin typeface="Liberation Serif" panose="02020603050405020304" pitchFamily="18" charset="0"/>
+                    <a:cs typeface="Liberation Serif" panose="02020603050405020304" pitchFamily="18" charset="0"/>
                   </a:rPr>
                   <a:t>the model outputs </a:t>
                 </a:r>
                 <a:r>
                   <a:rPr lang="en-US" altLang="ko-KR" dirty="0" smtClean="0">
-                    <a:latin typeface="Times New Roman" panose="02020603050405020304" pitchFamily="18" charset="0"/>
-                    <a:cs typeface="Times New Roman" panose="02020603050405020304" pitchFamily="18" charset="0"/>
+                    <a:latin typeface="Liberation Serif" panose="02020603050405020304" pitchFamily="18" charset="0"/>
+                    <a:cs typeface="Liberation Serif" panose="02020603050405020304" pitchFamily="18" charset="0"/>
                   </a:rPr>
                   <a:t>0 </a:t>
                 </a:r>
                 <a:r>
                   <a:rPr lang="en-US" altLang="ko-KR" dirty="0">
-                    <a:latin typeface="Times New Roman" panose="02020603050405020304" pitchFamily="18" charset="0"/>
-                    <a:cs typeface="Times New Roman" panose="02020603050405020304" pitchFamily="18" charset="0"/>
+                    <a:latin typeface="Liberation Serif" panose="02020603050405020304" pitchFamily="18" charset="0"/>
+                    <a:cs typeface="Liberation Serif" panose="02020603050405020304" pitchFamily="18" charset="0"/>
                   </a:rPr>
                   <a:t>and the true value is </a:t>
                 </a:r>
                 <a:r>
                   <a:rPr lang="en-US" altLang="ko-KR" dirty="0" smtClean="0">
-                    <a:latin typeface="Times New Roman" panose="02020603050405020304" pitchFamily="18" charset="0"/>
-                    <a:cs typeface="Times New Roman" panose="02020603050405020304" pitchFamily="18" charset="0"/>
+                    <a:latin typeface="Liberation Serif" panose="02020603050405020304" pitchFamily="18" charset="0"/>
+                    <a:cs typeface="Liberation Serif" panose="02020603050405020304" pitchFamily="18" charset="0"/>
                   </a:rPr>
                   <a:t>1, </a:t>
                 </a:r>
                 <a:r>
                   <a:rPr lang="en-US" altLang="ko-KR" dirty="0">
-                    <a:latin typeface="Times New Roman" panose="02020603050405020304" pitchFamily="18" charset="0"/>
-                    <a:cs typeface="Times New Roman" panose="02020603050405020304" pitchFamily="18" charset="0"/>
+                    <a:latin typeface="Liberation Serif" panose="02020603050405020304" pitchFamily="18" charset="0"/>
+                    <a:cs typeface="Liberation Serif" panose="02020603050405020304" pitchFamily="18" charset="0"/>
                   </a:rPr>
                   <a:t>how should you modify the parameters (</a:t>
                 </a:r>
@@ -9313,16 +9409,16 @@
                       <m:sSubPr>
                         <m:ctrlPr>
                           <a:rPr lang="en-US" altLang="ko-KR" i="1">
-                            <a:latin typeface="Cambria Math" charset="0"/>
-                            <a:cs typeface="Times New Roman" panose="02020603050405020304" pitchFamily="18" charset="0"/>
+                            <a:latin typeface="Caladea" charset="0"/>
+                            <a:cs typeface="Liberation Serif" panose="02020603050405020304" pitchFamily="18" charset="0"/>
                           </a:rPr>
                         </m:ctrlPr>
                       </m:sSubPr>
                       <m:e>
                         <m:r>
                           <a:rPr lang="en-US" altLang="ko-KR" i="1">
-                            <a:latin typeface="Cambria Math" panose="02040503050406030204" pitchFamily="18" charset="0"/>
-                            <a:cs typeface="Times New Roman" panose="02020603050405020304" pitchFamily="18" charset="0"/>
+                            <a:latin typeface="Caladea" panose="02040503050406030204" pitchFamily="18" charset="0"/>
+                            <a:cs typeface="Liberation Serif" panose="02020603050405020304" pitchFamily="18" charset="0"/>
                           </a:rPr>
                           <m:t>𝑤</m:t>
                         </m:r>
@@ -9330,8 +9426,8 @@
                       <m:sub>
                         <m:r>
                           <a:rPr lang="en-US" altLang="ko-KR" i="1">
-                            <a:latin typeface="Cambria Math" panose="02040503050406030204" pitchFamily="18" charset="0"/>
-                            <a:cs typeface="Times New Roman" panose="02020603050405020304" pitchFamily="18" charset="0"/>
+                            <a:latin typeface="Caladea" panose="02040503050406030204" pitchFamily="18" charset="0"/>
+                            <a:cs typeface="Liberation Serif" panose="02020603050405020304" pitchFamily="18" charset="0"/>
                           </a:rPr>
                           <m:t>1</m:t>
                         </m:r>
@@ -9339,8 +9435,8 @@
                     </m:sSub>
                     <m:r>
                       <a:rPr lang="en-US" altLang="ko-KR" i="1">
-                        <a:latin typeface="Cambria Math" panose="02040503050406030204" pitchFamily="18" charset="0"/>
-                        <a:cs typeface="Times New Roman" panose="02020603050405020304" pitchFamily="18" charset="0"/>
+                        <a:latin typeface="Caladea" panose="02040503050406030204" pitchFamily="18" charset="0"/>
+                        <a:cs typeface="Liberation Serif" panose="02020603050405020304" pitchFamily="18" charset="0"/>
                       </a:rPr>
                       <m:t>, </m:t>
                     </m:r>
@@ -9348,16 +9444,16 @@
                       <m:sSubPr>
                         <m:ctrlPr>
                           <a:rPr lang="en-US" altLang="ko-KR" i="1">
-                            <a:latin typeface="Cambria Math" charset="0"/>
-                            <a:cs typeface="Times New Roman" panose="02020603050405020304" pitchFamily="18" charset="0"/>
+                            <a:latin typeface="Caladea" charset="0"/>
+                            <a:cs typeface="Liberation Serif" panose="02020603050405020304" pitchFamily="18" charset="0"/>
                           </a:rPr>
                         </m:ctrlPr>
                       </m:sSubPr>
                       <m:e>
                         <m:r>
                           <a:rPr lang="en-US" altLang="ko-KR" i="1">
-                            <a:latin typeface="Cambria Math" panose="02040503050406030204" pitchFamily="18" charset="0"/>
-                            <a:cs typeface="Times New Roman" panose="02020603050405020304" pitchFamily="18" charset="0"/>
+                            <a:latin typeface="Caladea" panose="02040503050406030204" pitchFamily="18" charset="0"/>
+                            <a:cs typeface="Liberation Serif" panose="02020603050405020304" pitchFamily="18" charset="0"/>
                           </a:rPr>
                           <m:t>𝑤</m:t>
                         </m:r>
@@ -9365,8 +9461,8 @@
                       <m:sub>
                         <m:r>
                           <a:rPr lang="en-US" altLang="ko-KR" i="1">
-                            <a:latin typeface="Cambria Math" panose="02040503050406030204" pitchFamily="18" charset="0"/>
-                            <a:cs typeface="Times New Roman" panose="02020603050405020304" pitchFamily="18" charset="0"/>
+                            <a:latin typeface="Caladea" panose="02040503050406030204" pitchFamily="18" charset="0"/>
+                            <a:cs typeface="Liberation Serif" panose="02020603050405020304" pitchFamily="18" charset="0"/>
                           </a:rPr>
                           <m:t>0</m:t>
                         </m:r>
@@ -9374,22 +9470,22 @@
                     </m:sSub>
                     <m:r>
                       <a:rPr lang="en-US" altLang="ko-KR" i="1">
-                        <a:latin typeface="Cambria Math" panose="02040503050406030204" pitchFamily="18" charset="0"/>
-                        <a:cs typeface="Times New Roman" panose="02020603050405020304" pitchFamily="18" charset="0"/>
+                        <a:latin typeface="Caladea" panose="02040503050406030204" pitchFamily="18" charset="0"/>
+                        <a:cs typeface="Liberation Serif" panose="02020603050405020304" pitchFamily="18" charset="0"/>
                       </a:rPr>
                       <m:t>, </m:t>
                     </m:r>
                     <m:r>
                       <a:rPr lang="en-US" altLang="ko-KR" i="1">
-                        <a:latin typeface="Cambria Math" panose="02040503050406030204" pitchFamily="18" charset="0"/>
-                        <a:cs typeface="Times New Roman" panose="02020603050405020304" pitchFamily="18" charset="0"/>
+                        <a:latin typeface="Caladea" panose="02040503050406030204" pitchFamily="18" charset="0"/>
+                        <a:cs typeface="Liberation Serif" panose="02020603050405020304" pitchFamily="18" charset="0"/>
                       </a:rPr>
                       <m:t>h</m:t>
                     </m:r>
                     <m:r>
                       <a:rPr lang="en-US" altLang="ko-KR" i="1">
-                        <a:latin typeface="Cambria Math" panose="02040503050406030204" pitchFamily="18" charset="0"/>
-                        <a:cs typeface="Times New Roman" panose="02020603050405020304" pitchFamily="18" charset="0"/>
+                        <a:latin typeface="Caladea" panose="02040503050406030204" pitchFamily="18" charset="0"/>
+                        <a:cs typeface="Liberation Serif" panose="02020603050405020304" pitchFamily="18" charset="0"/>
                       </a:rPr>
                       <m:t>)</m:t>
                     </m:r>
@@ -9397,14 +9493,14 @@
                 </a14:m>
                 <a:r>
                   <a:rPr lang="en-US" altLang="ko-KR" dirty="0">
-                    <a:latin typeface="Times New Roman" panose="02020603050405020304" pitchFamily="18" charset="0"/>
-                    <a:cs typeface="Times New Roman" panose="02020603050405020304" pitchFamily="18" charset="0"/>
+                    <a:latin typeface="Liberation Serif" panose="02020603050405020304" pitchFamily="18" charset="0"/>
+                    <a:cs typeface="Liberation Serif" panose="02020603050405020304" pitchFamily="18" charset="0"/>
                   </a:rPr>
                   <a:t>?</a:t>
                 </a:r>
                 <a:endParaRPr lang="en-US" altLang="ko-KR" dirty="0" smtClean="0">
-                  <a:latin typeface="Times New Roman" panose="02020603050405020304" pitchFamily="18" charset="0"/>
-                  <a:cs typeface="Times New Roman" panose="02020603050405020304" pitchFamily="18" charset="0"/>
+                  <a:latin typeface="Liberation Serif" panose="02020603050405020304" pitchFamily="18" charset="0"/>
+                  <a:cs typeface="Liberation Serif" panose="02020603050405020304" pitchFamily="18" charset="0"/>
                 </a:endParaRPr>
               </a:p>
               <a:p>
@@ -9413,8 +9509,8 @@
                   <a:buAutoNum type="arabicParenBoth"/>
                 </a:pPr>
                 <a:endParaRPr lang="en-US" altLang="ko-KR" dirty="0">
-                  <a:latin typeface="Times New Roman" panose="02020603050405020304" pitchFamily="18" charset="0"/>
-                  <a:cs typeface="Times New Roman" panose="02020603050405020304" pitchFamily="18" charset="0"/>
+                  <a:latin typeface="Liberation Serif" panose="02020603050405020304" pitchFamily="18" charset="0"/>
+                  <a:cs typeface="Liberation Serif" panose="02020603050405020304" pitchFamily="18" charset="0"/>
                 </a:endParaRPr>
               </a:p>
               <a:p>
@@ -9424,21 +9520,21 @@
                 </a:pPr>
                 <a:r>
                   <a:rPr lang="en-US" altLang="ko-KR" dirty="0" smtClean="0">
-                    <a:latin typeface="Times New Roman" panose="02020603050405020304" pitchFamily="18" charset="0"/>
-                    <a:cs typeface="Times New Roman" panose="02020603050405020304" pitchFamily="18" charset="0"/>
+                    <a:latin typeface="Liberation Serif" panose="02020603050405020304" pitchFamily="18" charset="0"/>
+                    <a:cs typeface="Liberation Serif" panose="02020603050405020304" pitchFamily="18" charset="0"/>
                   </a:rPr>
                   <a:t>Until when? Minimizing </a:t>
                 </a:r>
                 <a:r>
                   <a:rPr lang="en-US" altLang="ko-KR" i="1" dirty="0" smtClean="0">
-                    <a:latin typeface="Times New Roman" panose="02020603050405020304" pitchFamily="18" charset="0"/>
-                    <a:cs typeface="Times New Roman" panose="02020603050405020304" pitchFamily="18" charset="0"/>
+                    <a:latin typeface="Liberation Serif" panose="02020603050405020304" pitchFamily="18" charset="0"/>
+                    <a:cs typeface="Liberation Serif" panose="02020603050405020304" pitchFamily="18" charset="0"/>
                   </a:rPr>
                   <a:t>the error (loss) function</a:t>
                 </a:r>
                 <a:endParaRPr lang="en-US" altLang="ko-KR" i="1" dirty="0">
-                  <a:latin typeface="Times New Roman" panose="02020603050405020304" pitchFamily="18" charset="0"/>
-                  <a:cs typeface="Times New Roman" panose="02020603050405020304" pitchFamily="18" charset="0"/>
+                  <a:latin typeface="Liberation Serif" panose="02020603050405020304" pitchFamily="18" charset="0"/>
+                  <a:cs typeface="Liberation Serif" panose="02020603050405020304" pitchFamily="18" charset="0"/>
                 </a:endParaRPr>
               </a:p>
             </p:txBody>
@@ -9515,8 +9611,8 @@
                     <m:oMath xmlns:m="http://schemas.openxmlformats.org/officeDocument/2006/math">
                       <m:r>
                         <a:rPr lang="en-US" altLang="ko-KR" i="1">
-                          <a:latin typeface="Cambria Math" panose="02040503050406030204" pitchFamily="18" charset="0"/>
-                          <a:cs typeface="Times New Roman" panose="02020603050405020304" pitchFamily="18" charset="0"/>
+                          <a:latin typeface="Caladea" panose="02040503050406030204" pitchFamily="18" charset="0"/>
+                          <a:cs typeface="Liberation Serif" panose="02020603050405020304" pitchFamily="18" charset="0"/>
                         </a:rPr>
                         <m:t>𝑓</m:t>
                       </m:r>
@@ -9659,8 +9755,8 @@
             <a:pPr algn="ctr"/>
             <a:r>
               <a:rPr lang="en-US" altLang="ko-KR" sz="1400" dirty="0" smtClean="0">
-                <a:latin typeface="Times New Roman" panose="02020603050405020304" pitchFamily="18" charset="0"/>
-                <a:cs typeface="Times New Roman" panose="02020603050405020304" pitchFamily="18" charset="0"/>
+                <a:latin typeface="Liberation Serif" panose="02020603050405020304" pitchFamily="18" charset="0"/>
+                <a:cs typeface="Liberation Serif" panose="02020603050405020304" pitchFamily="18" charset="0"/>
               </a:rPr>
               <a:t>Direction of updates</a:t>
             </a:r>
@@ -9835,8 +9931,8 @@
                 <a:solidFill>
                   <a:prstClr val="black"/>
                 </a:solidFill>
-                <a:latin typeface="Times New Roman" panose="02020603050405020304" pitchFamily="18" charset="0"/>
-                <a:cs typeface="Times New Roman" panose="02020603050405020304" pitchFamily="18" charset="0"/>
+                <a:latin typeface="Liberation Serif" panose="02020603050405020304" pitchFamily="18" charset="0"/>
+                <a:cs typeface="Liberation Serif" panose="02020603050405020304" pitchFamily="18" charset="0"/>
               </a:rPr>
               <a:t>Ch3. </a:t>
             </a:r>
@@ -9845,8 +9941,8 @@
                 <a:solidFill>
                   <a:prstClr val="black"/>
                 </a:solidFill>
-                <a:latin typeface="Times New Roman" panose="02020603050405020304" pitchFamily="18" charset="0"/>
-                <a:cs typeface="Times New Roman" panose="02020603050405020304" pitchFamily="18" charset="0"/>
+                <a:latin typeface="Liberation Serif" panose="02020603050405020304" pitchFamily="18" charset="0"/>
+                <a:cs typeface="Liberation Serif" panose="02020603050405020304" pitchFamily="18" charset="0"/>
               </a:rPr>
               <a:t>Deep </a:t>
             </a:r>
@@ -9855,8 +9951,8 @@
                 <a:solidFill>
                   <a:prstClr val="black"/>
                 </a:solidFill>
-                <a:latin typeface="Times New Roman" panose="02020603050405020304" pitchFamily="18" charset="0"/>
-                <a:cs typeface="Times New Roman" panose="02020603050405020304" pitchFamily="18" charset="0"/>
+                <a:latin typeface="Liberation Serif" panose="02020603050405020304" pitchFamily="18" charset="0"/>
+                <a:cs typeface="Liberation Serif" panose="02020603050405020304" pitchFamily="18" charset="0"/>
               </a:rPr>
               <a:t>Learning Algorithms</a:t>
             </a:r>
@@ -9864,8 +9960,8 @@
               <a:solidFill>
                 <a:prstClr val="black"/>
               </a:solidFill>
-              <a:latin typeface="Times New Roman" panose="02020603050405020304" pitchFamily="18" charset="0"/>
-              <a:cs typeface="Times New Roman" panose="02020603050405020304" pitchFamily="18" charset="0"/>
+              <a:latin typeface="Liberation Serif" panose="02020603050405020304" pitchFamily="18" charset="0"/>
+              <a:cs typeface="Liberation Serif" panose="02020603050405020304" pitchFamily="18" charset="0"/>
             </a:endParaRPr>
           </a:p>
         </p:txBody>
@@ -9997,8 +10093,8 @@
                 <a:solidFill>
                   <a:prstClr val="black"/>
                 </a:solidFill>
-                <a:latin typeface="Times New Roman" panose="02020603050405020304" pitchFamily="18" charset="0"/>
-                <a:cs typeface="Times New Roman" panose="02020603050405020304" pitchFamily="18" charset="0"/>
+                <a:latin typeface="Liberation Serif" panose="02020603050405020304" pitchFamily="18" charset="0"/>
+                <a:cs typeface="Liberation Serif" panose="02020603050405020304" pitchFamily="18" charset="0"/>
               </a:rPr>
               <a:t>Representation Learning + Deep Architecture</a:t>
             </a:r>
@@ -10006,8 +10102,8 @@
               <a:solidFill>
                 <a:prstClr val="black"/>
               </a:solidFill>
-              <a:latin typeface="Times New Roman" panose="02020603050405020304" pitchFamily="18" charset="0"/>
-              <a:cs typeface="Times New Roman" panose="02020603050405020304" pitchFamily="18" charset="0"/>
+              <a:latin typeface="Liberation Serif" panose="02020603050405020304" pitchFamily="18" charset="0"/>
+              <a:cs typeface="Liberation Serif" panose="02020603050405020304" pitchFamily="18" charset="0"/>
             </a:endParaRPr>
           </a:p>
         </p:txBody>
@@ -10038,13 +10134,13 @@
               <a:lnSpc>
                 <a:spcPct val="150000"/>
               </a:lnSpc>
-              <a:buFont typeface="Arial" panose="020B0604020202020204" pitchFamily="34" charset="0"/>
+              <a:buFont typeface="Liberation Sans" panose="020B0604020202020204" pitchFamily="34" charset="0"/>
               <a:buChar char="•"/>
             </a:pPr>
             <a:r>
               <a:rPr lang="en-US" altLang="ko-KR" sz="2000" dirty="0" smtClean="0">
-                <a:latin typeface="Times New Roman" panose="02020603050405020304" pitchFamily="18" charset="0"/>
-                <a:cs typeface="Times New Roman" panose="02020603050405020304" pitchFamily="18" charset="0"/>
+                <a:latin typeface="Liberation Serif" panose="02020603050405020304" pitchFamily="18" charset="0"/>
+                <a:cs typeface="Liberation Serif" panose="02020603050405020304" pitchFamily="18" charset="0"/>
               </a:rPr>
               <a:t>“Deep Learning can be considered as special case of representation learning algorithms which learn representations of the data in a Deep Architecture with </a:t>
             </a:r>
@@ -10053,15 +10149,15 @@
                 <a:solidFill>
                   <a:srgbClr val="C00000"/>
                 </a:solidFill>
-                <a:latin typeface="Times New Roman" panose="02020603050405020304" pitchFamily="18" charset="0"/>
-                <a:cs typeface="Times New Roman" panose="02020603050405020304" pitchFamily="18" charset="0"/>
+                <a:latin typeface="Liberation Serif" panose="02020603050405020304" pitchFamily="18" charset="0"/>
+                <a:cs typeface="Liberation Serif" panose="02020603050405020304" pitchFamily="18" charset="0"/>
               </a:rPr>
               <a:t>multiple levels of representations</a:t>
             </a:r>
             <a:r>
               <a:rPr lang="en-US" altLang="ko-KR" sz="2000" dirty="0" smtClean="0">
-                <a:latin typeface="Times New Roman" panose="02020603050405020304" pitchFamily="18" charset="0"/>
-                <a:cs typeface="Times New Roman" panose="02020603050405020304" pitchFamily="18" charset="0"/>
+                <a:latin typeface="Liberation Serif" panose="02020603050405020304" pitchFamily="18" charset="0"/>
+                <a:cs typeface="Liberation Serif" panose="02020603050405020304" pitchFamily="18" charset="0"/>
               </a:rPr>
               <a:t>.”</a:t>
             </a:r>
@@ -10070,29 +10166,29 @@
                 <a:solidFill>
                   <a:srgbClr val="C00000"/>
                 </a:solidFill>
-                <a:latin typeface="Times New Roman" panose="02020603050405020304" pitchFamily="18" charset="0"/>
-                <a:cs typeface="Times New Roman" panose="02020603050405020304" pitchFamily="18" charset="0"/>
+                <a:latin typeface="Liberation Serif" panose="02020603050405020304" pitchFamily="18" charset="0"/>
+                <a:cs typeface="Liberation Serif" panose="02020603050405020304" pitchFamily="18" charset="0"/>
               </a:rPr>
               <a:t> </a:t>
             </a:r>
             <a:r>
               <a:rPr lang="en-US" altLang="ko-KR" sz="2000" dirty="0" smtClean="0">
-                <a:latin typeface="Times New Roman" panose="02020603050405020304" pitchFamily="18" charset="0"/>
-                <a:cs typeface="Times New Roman" panose="02020603050405020304" pitchFamily="18" charset="0"/>
+                <a:latin typeface="Liberation Serif" panose="02020603050405020304" pitchFamily="18" charset="0"/>
+                <a:cs typeface="Liberation Serif" panose="02020603050405020304" pitchFamily="18" charset="0"/>
               </a:rPr>
               <a:t>(</a:t>
             </a:r>
             <a:r>
               <a:rPr lang="en-US" altLang="ko-KR" sz="2000" dirty="0" err="1" smtClean="0">
-                <a:latin typeface="Times New Roman" panose="02020603050405020304" pitchFamily="18" charset="0"/>
-                <a:cs typeface="Times New Roman" panose="02020603050405020304" pitchFamily="18" charset="0"/>
+                <a:latin typeface="Liberation Serif" panose="02020603050405020304" pitchFamily="18" charset="0"/>
+                <a:cs typeface="Liberation Serif" panose="02020603050405020304" pitchFamily="18" charset="0"/>
               </a:rPr>
               <a:t>Najafabadi</a:t>
             </a:r>
             <a:r>
               <a:rPr lang="en-US" altLang="ko-KR" sz="2000" dirty="0" smtClean="0">
-                <a:latin typeface="Times New Roman" panose="02020603050405020304" pitchFamily="18" charset="0"/>
-                <a:cs typeface="Times New Roman" panose="02020603050405020304" pitchFamily="18" charset="0"/>
+                <a:latin typeface="Liberation Serif" panose="02020603050405020304" pitchFamily="18" charset="0"/>
+                <a:cs typeface="Liberation Serif" panose="02020603050405020304" pitchFamily="18" charset="0"/>
               </a:rPr>
               <a:t> et al. 2015, p. 5)</a:t>
             </a:r>
@@ -10102,12 +10198,12 @@
               <a:lnSpc>
                 <a:spcPct val="150000"/>
               </a:lnSpc>
-              <a:buFont typeface="Arial" panose="020B0604020202020204" pitchFamily="34" charset="0"/>
+              <a:buFont typeface="Liberation Sans" panose="020B0604020202020204" pitchFamily="34" charset="0"/>
               <a:buChar char="•"/>
             </a:pPr>
             <a:endParaRPr lang="en-US" altLang="ko-KR" sz="1400" dirty="0" smtClean="0">
-              <a:latin typeface="Times New Roman" panose="02020603050405020304" pitchFamily="18" charset="0"/>
-              <a:cs typeface="Times New Roman" panose="02020603050405020304" pitchFamily="18" charset="0"/>
+              <a:latin typeface="Liberation Serif" panose="02020603050405020304" pitchFamily="18" charset="0"/>
+              <a:cs typeface="Liberation Serif" panose="02020603050405020304" pitchFamily="18" charset="0"/>
             </a:endParaRPr>
           </a:p>
           <a:p>
@@ -10115,19 +10211,19 @@
               <a:lnSpc>
                 <a:spcPct val="150000"/>
               </a:lnSpc>
-              <a:buFont typeface="Arial" panose="020B0604020202020204" pitchFamily="34" charset="0"/>
+              <a:buFont typeface="Liberation Sans" panose="020B0604020202020204" pitchFamily="34" charset="0"/>
               <a:buChar char="•"/>
             </a:pPr>
             <a:r>
               <a:rPr lang="en-US" altLang="ko-KR" sz="2000" dirty="0" smtClean="0">
-                <a:latin typeface="Times New Roman" panose="02020603050405020304" pitchFamily="18" charset="0"/>
-                <a:cs typeface="Times New Roman" panose="02020603050405020304" pitchFamily="18" charset="0"/>
+                <a:latin typeface="Liberation Serif" panose="02020603050405020304" pitchFamily="18" charset="0"/>
+                <a:cs typeface="Liberation Serif" panose="02020603050405020304" pitchFamily="18" charset="0"/>
               </a:rPr>
               <a:t>Recent deep learning algorithms are mostly based on neural networks.</a:t>
             </a:r>
             <a:endParaRPr lang="en-US" altLang="ko-KR" sz="2000" dirty="0">
-              <a:latin typeface="Times New Roman" panose="02020603050405020304" pitchFamily="18" charset="0"/>
-              <a:cs typeface="Times New Roman" panose="02020603050405020304" pitchFamily="18" charset="0"/>
+              <a:latin typeface="Liberation Serif" panose="02020603050405020304" pitchFamily="18" charset="0"/>
+              <a:cs typeface="Liberation Serif" panose="02020603050405020304" pitchFamily="18" charset="0"/>
             </a:endParaRPr>
           </a:p>
           <a:p>
@@ -10140,8 +10236,8 @@
             </a:pPr>
             <a:r>
               <a:rPr lang="en-US" altLang="ko-KR" dirty="0" smtClean="0">
-                <a:latin typeface="Times New Roman" panose="02020603050405020304" pitchFamily="18" charset="0"/>
-                <a:cs typeface="Times New Roman" panose="02020603050405020304" pitchFamily="18" charset="0"/>
+                <a:latin typeface="Liberation Serif" panose="02020603050405020304" pitchFamily="18" charset="0"/>
+                <a:cs typeface="Liberation Serif" panose="02020603050405020304" pitchFamily="18" charset="0"/>
               </a:rPr>
               <a:t>Neural network + Deep architecture</a:t>
             </a:r>
@@ -10154,29 +10250,29 @@
             </a:pPr>
             <a:r>
               <a:rPr lang="en-US" altLang="ko-KR" dirty="0">
-                <a:latin typeface="Times New Roman" panose="02020603050405020304" pitchFamily="18" charset="0"/>
-                <a:cs typeface="Times New Roman" panose="02020603050405020304" pitchFamily="18" charset="0"/>
+                <a:latin typeface="Liberation Serif" panose="02020603050405020304" pitchFamily="18" charset="0"/>
+                <a:cs typeface="Liberation Serif" panose="02020603050405020304" pitchFamily="18" charset="0"/>
               </a:rPr>
               <a:t>	</a:t>
             </a:r>
             <a:r>
               <a:rPr lang="en-US" altLang="ko-KR" dirty="0" smtClean="0">
-                <a:latin typeface="Times New Roman" panose="02020603050405020304" pitchFamily="18" charset="0"/>
-                <a:cs typeface="Times New Roman" panose="02020603050405020304" pitchFamily="18" charset="0"/>
+                <a:latin typeface="Liberation Serif" panose="02020603050405020304" pitchFamily="18" charset="0"/>
+                <a:cs typeface="Liberation Serif" panose="02020603050405020304" pitchFamily="18" charset="0"/>
               </a:rPr>
               <a:t>= Feed-forward networks </a:t>
             </a:r>
             <a:r>
               <a:rPr lang="en-US" altLang="ko-KR" dirty="0">
-                <a:latin typeface="Times New Roman" panose="02020603050405020304" pitchFamily="18" charset="0"/>
-                <a:cs typeface="Times New Roman" panose="02020603050405020304" pitchFamily="18" charset="0"/>
+                <a:latin typeface="Liberation Serif" panose="02020603050405020304" pitchFamily="18" charset="0"/>
+                <a:cs typeface="Liberation Serif" panose="02020603050405020304" pitchFamily="18" charset="0"/>
               </a:rPr>
               <a:t>with many hidden </a:t>
             </a:r>
             <a:r>
               <a:rPr lang="en-US" altLang="ko-KR" dirty="0" smtClean="0">
-                <a:latin typeface="Times New Roman" panose="02020603050405020304" pitchFamily="18" charset="0"/>
-                <a:cs typeface="Times New Roman" panose="02020603050405020304" pitchFamily="18" charset="0"/>
+                <a:latin typeface="Liberation Serif" panose="02020603050405020304" pitchFamily="18" charset="0"/>
+                <a:cs typeface="Liberation Serif" panose="02020603050405020304" pitchFamily="18" charset="0"/>
               </a:rPr>
               <a:t>layers</a:t>
             </a:r>
@@ -10189,15 +10285,15 @@
             </a:pPr>
             <a:r>
               <a:rPr lang="en-US" altLang="ko-KR" dirty="0">
-                <a:latin typeface="Times New Roman" panose="02020603050405020304" pitchFamily="18" charset="0"/>
-                <a:cs typeface="Times New Roman" panose="02020603050405020304" pitchFamily="18" charset="0"/>
+                <a:latin typeface="Liberation Serif" panose="02020603050405020304" pitchFamily="18" charset="0"/>
+                <a:cs typeface="Liberation Serif" panose="02020603050405020304" pitchFamily="18" charset="0"/>
               </a:rPr>
               <a:t>	</a:t>
             </a:r>
             <a:r>
               <a:rPr lang="en-US" altLang="ko-KR" dirty="0" smtClean="0">
-                <a:latin typeface="Times New Roman" panose="02020603050405020304" pitchFamily="18" charset="0"/>
-                <a:cs typeface="Times New Roman" panose="02020603050405020304" pitchFamily="18" charset="0"/>
+                <a:latin typeface="Liberation Serif" panose="02020603050405020304" pitchFamily="18" charset="0"/>
+                <a:cs typeface="Liberation Serif" panose="02020603050405020304" pitchFamily="18" charset="0"/>
               </a:rPr>
               <a:t>= Multi-layer perceptron (MLP)</a:t>
             </a:r>
@@ -10210,29 +10306,29 @@
             </a:pPr>
             <a:r>
               <a:rPr lang="en-US" altLang="ko-KR" dirty="0">
-                <a:latin typeface="Times New Roman" panose="02020603050405020304" pitchFamily="18" charset="0"/>
-                <a:cs typeface="Times New Roman" panose="02020603050405020304" pitchFamily="18" charset="0"/>
+                <a:latin typeface="Liberation Serif" panose="02020603050405020304" pitchFamily="18" charset="0"/>
+                <a:cs typeface="Liberation Serif" panose="02020603050405020304" pitchFamily="18" charset="0"/>
               </a:rPr>
               <a:t>	</a:t>
             </a:r>
             <a:r>
               <a:rPr lang="en-US" altLang="ko-KR" dirty="0" smtClean="0">
-                <a:latin typeface="Times New Roman" panose="02020603050405020304" pitchFamily="18" charset="0"/>
-                <a:cs typeface="Times New Roman" panose="02020603050405020304" pitchFamily="18" charset="0"/>
+                <a:latin typeface="Liberation Serif" panose="02020603050405020304" pitchFamily="18" charset="0"/>
+                <a:cs typeface="Liberation Serif" panose="02020603050405020304" pitchFamily="18" charset="0"/>
               </a:rPr>
               <a:t>= Deep </a:t>
             </a:r>
             <a:r>
               <a:rPr lang="en-US" altLang="ko-KR" dirty="0">
-                <a:latin typeface="Times New Roman" panose="02020603050405020304" pitchFamily="18" charset="0"/>
-                <a:cs typeface="Times New Roman" panose="02020603050405020304" pitchFamily="18" charset="0"/>
+                <a:latin typeface="Liberation Serif" panose="02020603050405020304" pitchFamily="18" charset="0"/>
+                <a:cs typeface="Liberation Serif" panose="02020603050405020304" pitchFamily="18" charset="0"/>
               </a:rPr>
               <a:t>neural </a:t>
             </a:r>
             <a:r>
               <a:rPr lang="en-US" altLang="ko-KR" dirty="0" smtClean="0">
-                <a:latin typeface="Times New Roman" panose="02020603050405020304" pitchFamily="18" charset="0"/>
-                <a:cs typeface="Times New Roman" panose="02020603050405020304" pitchFamily="18" charset="0"/>
+                <a:latin typeface="Liberation Serif" panose="02020603050405020304" pitchFamily="18" charset="0"/>
+                <a:cs typeface="Liberation Serif" panose="02020603050405020304" pitchFamily="18" charset="0"/>
               </a:rPr>
               <a:t>network (DNN)</a:t>
             </a:r>
@@ -10244,8 +10340,8 @@
               </a:lnSpc>
             </a:pPr>
             <a:endParaRPr lang="en-US" altLang="ko-KR" sz="1000" dirty="0" smtClean="0">
-              <a:latin typeface="Times New Roman" panose="02020603050405020304" pitchFamily="18" charset="0"/>
-              <a:cs typeface="Times New Roman" panose="02020603050405020304" pitchFamily="18" charset="0"/>
+              <a:latin typeface="Liberation Serif" panose="02020603050405020304" pitchFamily="18" charset="0"/>
+              <a:cs typeface="Liberation Serif" panose="02020603050405020304" pitchFamily="18" charset="0"/>
             </a:endParaRPr>
           </a:p>
           <a:p>
@@ -10261,8 +10357,8 @@
                 <a:solidFill>
                   <a:prstClr val="black"/>
                 </a:solidFill>
-                <a:latin typeface="Times New Roman" panose="02020603050405020304" pitchFamily="18" charset="0"/>
-                <a:cs typeface="Times New Roman" panose="02020603050405020304" pitchFamily="18" charset="0"/>
+                <a:latin typeface="Liberation Serif" panose="02020603050405020304" pitchFamily="18" charset="0"/>
+                <a:cs typeface="Liberation Serif" panose="02020603050405020304" pitchFamily="18" charset="0"/>
               </a:rPr>
               <a:t>More specialized algorithms: CNN, RNN, LSTM, etc.</a:t>
             </a:r>
@@ -10270,8 +10366,8 @@
               <a:solidFill>
                 <a:prstClr val="black"/>
               </a:solidFill>
-              <a:latin typeface="Times New Roman" panose="02020603050405020304" pitchFamily="18" charset="0"/>
-              <a:cs typeface="Times New Roman" panose="02020603050405020304" pitchFamily="18" charset="0"/>
+              <a:latin typeface="Liberation Serif" panose="02020603050405020304" pitchFamily="18" charset="0"/>
+              <a:cs typeface="Liberation Serif" panose="02020603050405020304" pitchFamily="18" charset="0"/>
             </a:endParaRPr>
           </a:p>
         </p:txBody>
@@ -10302,7 +10398,7 @@
                 <a:solidFill>
                   <a:srgbClr val="222222"/>
                 </a:solidFill>
-                <a:latin typeface="Arial" panose="020B0604020202020204" pitchFamily="34" charset="0"/>
+                <a:latin typeface="Liberation Sans" panose="020B0604020202020204" pitchFamily="34" charset="0"/>
               </a:rPr>
               <a:t>Najafabadi</a:t>
             </a:r>
@@ -10311,7 +10407,7 @@
                 <a:solidFill>
                   <a:srgbClr val="222222"/>
                 </a:solidFill>
-                <a:latin typeface="Arial" panose="020B0604020202020204" pitchFamily="34" charset="0"/>
+                <a:latin typeface="Liberation Sans" panose="020B0604020202020204" pitchFamily="34" charset="0"/>
               </a:rPr>
               <a:t>, M. M., </a:t>
             </a:r>
@@ -10320,7 +10416,7 @@
                 <a:solidFill>
                   <a:srgbClr val="222222"/>
                 </a:solidFill>
-                <a:latin typeface="Arial" panose="020B0604020202020204" pitchFamily="34" charset="0"/>
+                <a:latin typeface="Liberation Sans" panose="020B0604020202020204" pitchFamily="34" charset="0"/>
               </a:rPr>
               <a:t>Villanustre</a:t>
             </a:r>
@@ -10329,7 +10425,7 @@
                 <a:solidFill>
                   <a:srgbClr val="222222"/>
                 </a:solidFill>
-                <a:latin typeface="Arial" panose="020B0604020202020204" pitchFamily="34" charset="0"/>
+                <a:latin typeface="Liberation Sans" panose="020B0604020202020204" pitchFamily="34" charset="0"/>
               </a:rPr>
               <a:t>, F., </a:t>
             </a:r>
@@ -10338,7 +10434,7 @@
                 <a:solidFill>
                   <a:srgbClr val="222222"/>
                 </a:solidFill>
-                <a:latin typeface="Arial" panose="020B0604020202020204" pitchFamily="34" charset="0"/>
+                <a:latin typeface="Liberation Sans" panose="020B0604020202020204" pitchFamily="34" charset="0"/>
               </a:rPr>
               <a:t>Khoshgoftaar</a:t>
             </a:r>
@@ -10347,7 +10443,7 @@
                 <a:solidFill>
                   <a:srgbClr val="222222"/>
                 </a:solidFill>
-                <a:latin typeface="Arial" panose="020B0604020202020204" pitchFamily="34" charset="0"/>
+                <a:latin typeface="Liberation Sans" panose="020B0604020202020204" pitchFamily="34" charset="0"/>
               </a:rPr>
               <a:t>, T. M., </a:t>
             </a:r>
@@ -10356,7 +10452,7 @@
                 <a:solidFill>
                   <a:srgbClr val="222222"/>
                 </a:solidFill>
-                <a:latin typeface="Arial" panose="020B0604020202020204" pitchFamily="34" charset="0"/>
+                <a:latin typeface="Liberation Sans" panose="020B0604020202020204" pitchFamily="34" charset="0"/>
               </a:rPr>
               <a:t>Seliya</a:t>
             </a:r>
@@ -10365,7 +10461,7 @@
                 <a:solidFill>
                   <a:srgbClr val="222222"/>
                 </a:solidFill>
-                <a:latin typeface="Arial" panose="020B0604020202020204" pitchFamily="34" charset="0"/>
+                <a:latin typeface="Liberation Sans" panose="020B0604020202020204" pitchFamily="34" charset="0"/>
               </a:rPr>
               <a:t>, N., Wald, R., &amp; </a:t>
             </a:r>
@@ -10374,7 +10470,7 @@
                 <a:solidFill>
                   <a:srgbClr val="222222"/>
                 </a:solidFill>
-                <a:latin typeface="Arial" panose="020B0604020202020204" pitchFamily="34" charset="0"/>
+                <a:latin typeface="Liberation Sans" panose="020B0604020202020204" pitchFamily="34" charset="0"/>
               </a:rPr>
               <a:t>Muharemagic</a:t>
             </a:r>
@@ -10383,7 +10479,7 @@
                 <a:solidFill>
                   <a:srgbClr val="222222"/>
                 </a:solidFill>
-                <a:latin typeface="Arial" panose="020B0604020202020204" pitchFamily="34" charset="0"/>
+                <a:latin typeface="Liberation Sans" panose="020B0604020202020204" pitchFamily="34" charset="0"/>
               </a:rPr>
               <a:t>, E. (2015). Deep </a:t>
             </a:r>
@@ -10392,7 +10488,7 @@
                 <a:solidFill>
                   <a:srgbClr val="222222"/>
                 </a:solidFill>
-                <a:latin typeface="Arial" panose="020B0604020202020204" pitchFamily="34" charset="0"/>
+                <a:latin typeface="Liberation Sans" panose="020B0604020202020204" pitchFamily="34" charset="0"/>
               </a:rPr>
               <a:t>Learning Applications </a:t>
             </a:r>
@@ -10401,7 +10497,7 @@
                 <a:solidFill>
                   <a:srgbClr val="222222"/>
                 </a:solidFill>
-                <a:latin typeface="Arial" panose="020B0604020202020204" pitchFamily="34" charset="0"/>
+                <a:latin typeface="Liberation Sans" panose="020B0604020202020204" pitchFamily="34" charset="0"/>
               </a:rPr>
               <a:t>and </a:t>
             </a:r>
@@ -10410,7 +10506,7 @@
                 <a:solidFill>
                   <a:srgbClr val="222222"/>
                 </a:solidFill>
-                <a:latin typeface="Arial" panose="020B0604020202020204" pitchFamily="34" charset="0"/>
+                <a:latin typeface="Liberation Sans" panose="020B0604020202020204" pitchFamily="34" charset="0"/>
               </a:rPr>
               <a:t>Challenges </a:t>
             </a:r>
@@ -10419,7 +10515,7 @@
                 <a:solidFill>
                   <a:srgbClr val="222222"/>
                 </a:solidFill>
-                <a:latin typeface="Arial" panose="020B0604020202020204" pitchFamily="34" charset="0"/>
+                <a:latin typeface="Liberation Sans" panose="020B0604020202020204" pitchFamily="34" charset="0"/>
               </a:rPr>
               <a:t>in </a:t>
             </a:r>
@@ -10428,7 +10524,7 @@
                 <a:solidFill>
                   <a:srgbClr val="222222"/>
                 </a:solidFill>
-                <a:latin typeface="Arial" panose="020B0604020202020204" pitchFamily="34" charset="0"/>
+                <a:latin typeface="Liberation Sans" panose="020B0604020202020204" pitchFamily="34" charset="0"/>
               </a:rPr>
               <a:t>Big Data Analytics</a:t>
             </a:r>
@@ -10437,7 +10533,7 @@
                 <a:solidFill>
                   <a:srgbClr val="222222"/>
                 </a:solidFill>
-                <a:latin typeface="Arial" panose="020B0604020202020204" pitchFamily="34" charset="0"/>
+                <a:latin typeface="Liberation Sans" panose="020B0604020202020204" pitchFamily="34" charset="0"/>
               </a:rPr>
               <a:t>. </a:t>
             </a:r>
@@ -10446,7 +10542,7 @@
                 <a:solidFill>
                   <a:srgbClr val="222222"/>
                 </a:solidFill>
-                <a:latin typeface="Arial" panose="020B0604020202020204" pitchFamily="34" charset="0"/>
+                <a:latin typeface="Liberation Sans" panose="020B0604020202020204" pitchFamily="34" charset="0"/>
               </a:rPr>
               <a:t>Journal of Big Data</a:t>
             </a:r>
@@ -10455,7 +10551,7 @@
                 <a:solidFill>
                   <a:srgbClr val="222222"/>
                 </a:solidFill>
-                <a:latin typeface="Arial" panose="020B0604020202020204" pitchFamily="34" charset="0"/>
+                <a:latin typeface="Liberation Sans" panose="020B0604020202020204" pitchFamily="34" charset="0"/>
               </a:rPr>
               <a:t>, </a:t>
             </a:r>
@@ -10464,7 +10560,7 @@
                 <a:solidFill>
                   <a:srgbClr val="222222"/>
                 </a:solidFill>
-                <a:latin typeface="Arial" panose="020B0604020202020204" pitchFamily="34" charset="0"/>
+                <a:latin typeface="Liberation Sans" panose="020B0604020202020204" pitchFamily="34" charset="0"/>
               </a:rPr>
               <a:t>2</a:t>
             </a:r>
@@ -10473,7 +10569,7 @@
                 <a:solidFill>
                   <a:srgbClr val="222222"/>
                 </a:solidFill>
-                <a:latin typeface="Arial" panose="020B0604020202020204" pitchFamily="34" charset="0"/>
+                <a:latin typeface="Liberation Sans" panose="020B0604020202020204" pitchFamily="34" charset="0"/>
               </a:rPr>
               <a:t>(1), 1.</a:t>
             </a:r>
@@ -10608,8 +10704,8 @@
                 <a:solidFill>
                   <a:prstClr val="black"/>
                 </a:solidFill>
-                <a:latin typeface="Times New Roman" panose="02020603050405020304" pitchFamily="18" charset="0"/>
-                <a:cs typeface="Times New Roman" panose="02020603050405020304" pitchFamily="18" charset="0"/>
+                <a:latin typeface="Liberation Serif" panose="02020603050405020304" pitchFamily="18" charset="0"/>
+                <a:cs typeface="Liberation Serif" panose="02020603050405020304" pitchFamily="18" charset="0"/>
               </a:rPr>
               <a:t>Representation Learning + Deep </a:t>
             </a:r>
@@ -10618,8 +10714,8 @@
                 <a:solidFill>
                   <a:prstClr val="black"/>
                 </a:solidFill>
-                <a:latin typeface="Times New Roman" panose="02020603050405020304" pitchFamily="18" charset="0"/>
-                <a:cs typeface="Times New Roman" panose="02020603050405020304" pitchFamily="18" charset="0"/>
+                <a:latin typeface="Liberation Serif" panose="02020603050405020304" pitchFamily="18" charset="0"/>
+                <a:cs typeface="Liberation Serif" panose="02020603050405020304" pitchFamily="18" charset="0"/>
               </a:rPr>
               <a:t>Architecture</a:t>
             </a:r>
@@ -10627,8 +10723,8 @@
               <a:solidFill>
                 <a:prstClr val="black"/>
               </a:solidFill>
-              <a:latin typeface="Times New Roman" panose="02020603050405020304" pitchFamily="18" charset="0"/>
-              <a:cs typeface="Times New Roman" panose="02020603050405020304" pitchFamily="18" charset="0"/>
+              <a:latin typeface="Liberation Serif" panose="02020603050405020304" pitchFamily="18" charset="0"/>
+              <a:cs typeface="Liberation Serif" panose="02020603050405020304" pitchFamily="18" charset="0"/>
             </a:endParaRPr>
           </a:p>
         </p:txBody>
@@ -10659,13 +10755,13 @@
               <a:lnSpc>
                 <a:spcPct val="150000"/>
               </a:lnSpc>
-              <a:buFont typeface="Arial" panose="020B0604020202020204" pitchFamily="34" charset="0"/>
+              <a:buFont typeface="Liberation Sans" panose="020B0604020202020204" pitchFamily="34" charset="0"/>
               <a:buChar char="•"/>
             </a:pPr>
             <a:r>
               <a:rPr lang="en-US" altLang="ko-KR" sz="2000" dirty="0">
-                <a:latin typeface="Times New Roman" panose="02020603050405020304" pitchFamily="18" charset="0"/>
-                <a:cs typeface="Times New Roman" panose="02020603050405020304" pitchFamily="18" charset="0"/>
+                <a:latin typeface="Liberation Serif" panose="02020603050405020304" pitchFamily="18" charset="0"/>
+                <a:cs typeface="Liberation Serif" panose="02020603050405020304" pitchFamily="18" charset="0"/>
               </a:rPr>
               <a:t>Then, how deep?</a:t>
             </a:r>
@@ -10881,8 +10977,8 @@
                 <a:solidFill>
                   <a:prstClr val="black"/>
                 </a:solidFill>
-                <a:latin typeface="Times New Roman" panose="02020603050405020304" pitchFamily="18" charset="0"/>
-                <a:cs typeface="Times New Roman" panose="02020603050405020304" pitchFamily="18" charset="0"/>
+                <a:latin typeface="Liberation Serif" panose="02020603050405020304" pitchFamily="18" charset="0"/>
+                <a:cs typeface="Liberation Serif" panose="02020603050405020304" pitchFamily="18" charset="0"/>
               </a:rPr>
               <a:t>Module2. </a:t>
             </a:r>
@@ -10891,8 +10987,8 @@
                 <a:solidFill>
                   <a:prstClr val="black"/>
                 </a:solidFill>
-                <a:latin typeface="Times New Roman" panose="02020603050405020304" pitchFamily="18" charset="0"/>
-                <a:cs typeface="Times New Roman" panose="02020603050405020304" pitchFamily="18" charset="0"/>
+                <a:latin typeface="Liberation Serif" panose="02020603050405020304" pitchFamily="18" charset="0"/>
+                <a:cs typeface="Liberation Serif" panose="02020603050405020304" pitchFamily="18" charset="0"/>
               </a:rPr>
               <a:t>Underlying Mechanisms of Deep Learning</a:t>
             </a:r>
@@ -11067,8 +11163,8 @@
                 <a:solidFill>
                   <a:prstClr val="black"/>
                 </a:solidFill>
-                <a:latin typeface="Times New Roman" panose="02020603050405020304" pitchFamily="18" charset="0"/>
-                <a:cs typeface="Times New Roman" panose="02020603050405020304" pitchFamily="18" charset="0"/>
+                <a:latin typeface="Liberation Serif" panose="02020603050405020304" pitchFamily="18" charset="0"/>
+                <a:cs typeface="Liberation Serif" panose="02020603050405020304" pitchFamily="18" charset="0"/>
               </a:rPr>
               <a:t>Convolutional Neural Network</a:t>
             </a:r>
@@ -11076,8 +11172,8 @@
               <a:solidFill>
                 <a:prstClr val="black"/>
               </a:solidFill>
-              <a:latin typeface="Times New Roman" panose="02020603050405020304" pitchFamily="18" charset="0"/>
-              <a:cs typeface="Times New Roman" panose="02020603050405020304" pitchFamily="18" charset="0"/>
+              <a:latin typeface="Liberation Serif" panose="02020603050405020304" pitchFamily="18" charset="0"/>
+              <a:cs typeface="Liberation Serif" panose="02020603050405020304" pitchFamily="18" charset="0"/>
             </a:endParaRPr>
           </a:p>
         </p:txBody>
@@ -11174,8 +11270,8 @@
                 <a:solidFill>
                   <a:prstClr val="black"/>
                 </a:solidFill>
-                <a:latin typeface="Times New Roman" panose="02020603050405020304" pitchFamily="18" charset="0"/>
-                <a:cs typeface="Times New Roman" panose="02020603050405020304" pitchFamily="18" charset="0"/>
+                <a:latin typeface="Liberation Serif" panose="02020603050405020304" pitchFamily="18" charset="0"/>
+                <a:cs typeface="Liberation Serif" panose="02020603050405020304" pitchFamily="18" charset="0"/>
               </a:rPr>
               <a:t>What </a:t>
             </a:r>
@@ -11184,8 +11280,8 @@
                 <a:solidFill>
                   <a:prstClr val="black"/>
                 </a:solidFill>
-                <a:latin typeface="Times New Roman" panose="02020603050405020304" pitchFamily="18" charset="0"/>
-                <a:cs typeface="Times New Roman" panose="02020603050405020304" pitchFamily="18" charset="0"/>
+                <a:latin typeface="Liberation Serif" panose="02020603050405020304" pitchFamily="18" charset="0"/>
+                <a:cs typeface="Liberation Serif" panose="02020603050405020304" pitchFamily="18" charset="0"/>
               </a:rPr>
               <a:t>is Convolutional Neural Network (CNN</a:t>
             </a:r>
@@ -11194,8 +11290,8 @@
                 <a:solidFill>
                   <a:prstClr val="black"/>
                 </a:solidFill>
-                <a:latin typeface="Times New Roman" panose="02020603050405020304" pitchFamily="18" charset="0"/>
-                <a:cs typeface="Times New Roman" panose="02020603050405020304" pitchFamily="18" charset="0"/>
+                <a:latin typeface="Liberation Serif" panose="02020603050405020304" pitchFamily="18" charset="0"/>
+                <a:cs typeface="Liberation Serif" panose="02020603050405020304" pitchFamily="18" charset="0"/>
               </a:rPr>
               <a:t>)?</a:t>
             </a:r>
@@ -11203,8 +11299,8 @@
               <a:solidFill>
                 <a:prstClr val="black"/>
               </a:solidFill>
-              <a:latin typeface="Times New Roman" panose="02020603050405020304" pitchFamily="18" charset="0"/>
-              <a:cs typeface="Times New Roman" panose="02020603050405020304" pitchFamily="18" charset="0"/>
+              <a:latin typeface="Liberation Serif" panose="02020603050405020304" pitchFamily="18" charset="0"/>
+              <a:cs typeface="Liberation Serif" panose="02020603050405020304" pitchFamily="18" charset="0"/>
             </a:endParaRPr>
           </a:p>
         </p:txBody>
@@ -11270,13 +11366,13 @@
               <a:lnSpc>
                 <a:spcPct val="150000"/>
               </a:lnSpc>
-              <a:buFont typeface="Arial" panose="020B0604020202020204" pitchFamily="34" charset="0"/>
+              <a:buFont typeface="Liberation Sans" panose="020B0604020202020204" pitchFamily="34" charset="0"/>
               <a:buChar char="•"/>
             </a:pPr>
             <a:r>
               <a:rPr lang="en-US" altLang="ko-KR" sz="2000" dirty="0" smtClean="0">
-                <a:latin typeface="Times New Roman" panose="02020603050405020304" pitchFamily="18" charset="0"/>
-                <a:cs typeface="Times New Roman" panose="02020603050405020304" pitchFamily="18" charset="0"/>
+                <a:latin typeface="Liberation Serif" panose="02020603050405020304" pitchFamily="18" charset="0"/>
+                <a:cs typeface="Liberation Serif" panose="02020603050405020304" pitchFamily="18" charset="0"/>
               </a:rPr>
               <a:t>A typical example of CNN</a:t>
             </a:r>
@@ -11286,12 +11382,12 @@
               <a:lnSpc>
                 <a:spcPct val="150000"/>
               </a:lnSpc>
-              <a:buFont typeface="Arial" panose="020B0604020202020204" pitchFamily="34" charset="0"/>
+              <a:buFont typeface="Liberation Sans" panose="020B0604020202020204" pitchFamily="34" charset="0"/>
               <a:buChar char="•"/>
             </a:pPr>
             <a:endParaRPr lang="en-US" altLang="ko-KR" sz="1600" dirty="0" smtClean="0">
-              <a:latin typeface="Times New Roman" panose="02020603050405020304" pitchFamily="18" charset="0"/>
-              <a:cs typeface="Times New Roman" panose="02020603050405020304" pitchFamily="18" charset="0"/>
+              <a:latin typeface="Liberation Serif" panose="02020603050405020304" pitchFamily="18" charset="0"/>
+              <a:cs typeface="Liberation Serif" panose="02020603050405020304" pitchFamily="18" charset="0"/>
             </a:endParaRPr>
           </a:p>
           <a:p>
@@ -11299,12 +11395,12 @@
               <a:lnSpc>
                 <a:spcPct val="150000"/>
               </a:lnSpc>
-              <a:buFont typeface="Arial" panose="020B0604020202020204" pitchFamily="34" charset="0"/>
+              <a:buFont typeface="Liberation Sans" panose="020B0604020202020204" pitchFamily="34" charset="0"/>
               <a:buChar char="•"/>
             </a:pPr>
             <a:endParaRPr lang="en-US" altLang="ko-KR" sz="1600" dirty="0">
-              <a:latin typeface="Times New Roman" panose="02020603050405020304" pitchFamily="18" charset="0"/>
-              <a:cs typeface="Times New Roman" panose="02020603050405020304" pitchFamily="18" charset="0"/>
+              <a:latin typeface="Liberation Serif" panose="02020603050405020304" pitchFamily="18" charset="0"/>
+              <a:cs typeface="Liberation Serif" panose="02020603050405020304" pitchFamily="18" charset="0"/>
             </a:endParaRPr>
           </a:p>
           <a:p>
@@ -11312,12 +11408,12 @@
               <a:lnSpc>
                 <a:spcPct val="150000"/>
               </a:lnSpc>
-              <a:buFont typeface="Arial" panose="020B0604020202020204" pitchFamily="34" charset="0"/>
+              <a:buFont typeface="Liberation Sans" panose="020B0604020202020204" pitchFamily="34" charset="0"/>
               <a:buChar char="•"/>
             </a:pPr>
             <a:endParaRPr lang="en-US" altLang="ko-KR" sz="1600" dirty="0" smtClean="0">
-              <a:latin typeface="Times New Roman" panose="02020603050405020304" pitchFamily="18" charset="0"/>
-              <a:cs typeface="Times New Roman" panose="02020603050405020304" pitchFamily="18" charset="0"/>
+              <a:latin typeface="Liberation Serif" panose="02020603050405020304" pitchFamily="18" charset="0"/>
+              <a:cs typeface="Liberation Serif" panose="02020603050405020304" pitchFamily="18" charset="0"/>
             </a:endParaRPr>
           </a:p>
           <a:p>
@@ -11325,12 +11421,12 @@
               <a:lnSpc>
                 <a:spcPct val="150000"/>
               </a:lnSpc>
-              <a:buFont typeface="Arial" panose="020B0604020202020204" pitchFamily="34" charset="0"/>
+              <a:buFont typeface="Liberation Sans" panose="020B0604020202020204" pitchFamily="34" charset="0"/>
               <a:buChar char="•"/>
             </a:pPr>
             <a:endParaRPr lang="en-US" altLang="ko-KR" sz="1600" dirty="0">
-              <a:latin typeface="Times New Roman" panose="02020603050405020304" pitchFamily="18" charset="0"/>
-              <a:cs typeface="Times New Roman" panose="02020603050405020304" pitchFamily="18" charset="0"/>
+              <a:latin typeface="Liberation Serif" panose="02020603050405020304" pitchFamily="18" charset="0"/>
+              <a:cs typeface="Liberation Serif" panose="02020603050405020304" pitchFamily="18" charset="0"/>
             </a:endParaRPr>
           </a:p>
           <a:p>
@@ -11342,8 +11438,8 @@
               <a:buChar char="Ø"/>
             </a:pPr>
             <a:endParaRPr lang="en-US" altLang="ko-KR" sz="1600" dirty="0" smtClean="0">
-              <a:latin typeface="Times New Roman" panose="02020603050405020304" pitchFamily="18" charset="0"/>
-              <a:cs typeface="Times New Roman" panose="02020603050405020304" pitchFamily="18" charset="0"/>
+              <a:latin typeface="Liberation Serif" panose="02020603050405020304" pitchFamily="18" charset="0"/>
+              <a:cs typeface="Liberation Serif" panose="02020603050405020304" pitchFamily="18" charset="0"/>
             </a:endParaRPr>
           </a:p>
           <a:p>
@@ -11355,8 +11451,8 @@
               <a:buChar char="Ø"/>
             </a:pPr>
             <a:endParaRPr lang="en-US" altLang="ko-KR" sz="1600" dirty="0">
-              <a:latin typeface="Times New Roman" panose="02020603050405020304" pitchFamily="18" charset="0"/>
-              <a:cs typeface="Times New Roman" panose="02020603050405020304" pitchFamily="18" charset="0"/>
+              <a:latin typeface="Liberation Serif" panose="02020603050405020304" pitchFamily="18" charset="0"/>
+              <a:cs typeface="Liberation Serif" panose="02020603050405020304" pitchFamily="18" charset="0"/>
             </a:endParaRPr>
           </a:p>
           <a:p>
@@ -11368,8 +11464,8 @@
               <a:buChar char="Ø"/>
             </a:pPr>
             <a:endParaRPr lang="en-US" altLang="ko-KR" sz="1600" dirty="0" smtClean="0">
-              <a:latin typeface="Times New Roman" panose="02020603050405020304" pitchFamily="18" charset="0"/>
-              <a:cs typeface="Times New Roman" panose="02020603050405020304" pitchFamily="18" charset="0"/>
+              <a:latin typeface="Liberation Serif" panose="02020603050405020304" pitchFamily="18" charset="0"/>
+              <a:cs typeface="Liberation Serif" panose="02020603050405020304" pitchFamily="18" charset="0"/>
             </a:endParaRPr>
           </a:p>
           <a:p>
@@ -11381,8 +11477,8 @@
               <a:buChar char="Ø"/>
             </a:pPr>
             <a:endParaRPr lang="en-US" altLang="ko-KR" sz="1600" dirty="0" smtClean="0">
-              <a:latin typeface="Times New Roman" panose="02020603050405020304" pitchFamily="18" charset="0"/>
-              <a:cs typeface="Times New Roman" panose="02020603050405020304" pitchFamily="18" charset="0"/>
+              <a:latin typeface="Liberation Serif" panose="02020603050405020304" pitchFamily="18" charset="0"/>
+              <a:cs typeface="Liberation Serif" panose="02020603050405020304" pitchFamily="18" charset="0"/>
             </a:endParaRPr>
           </a:p>
           <a:p>
@@ -11395,113 +11491,113 @@
             </a:pPr>
             <a:r>
               <a:rPr lang="en-US" altLang="ko-KR" dirty="0" smtClean="0">
-                <a:latin typeface="Times New Roman" panose="02020603050405020304" pitchFamily="18" charset="0"/>
-                <a:cs typeface="Times New Roman" panose="02020603050405020304" pitchFamily="18" charset="0"/>
+                <a:latin typeface="Liberation Serif" panose="02020603050405020304" pitchFamily="18" charset="0"/>
+                <a:cs typeface="Liberation Serif" panose="02020603050405020304" pitchFamily="18" charset="0"/>
               </a:rPr>
               <a:t>Inputs (2-dimension</a:t>
             </a:r>
             <a:r>
               <a:rPr lang="en-US" altLang="ko-KR" dirty="0" smtClean="0">
-                <a:latin typeface="Cambria Math" panose="02040503050406030204" pitchFamily="18" charset="0"/>
-                <a:ea typeface="Cambria Math" panose="02040503050406030204" pitchFamily="18" charset="0"/>
-                <a:cs typeface="Times New Roman" panose="02020603050405020304" pitchFamily="18" charset="0"/>
+                <a:latin typeface="Caladea" panose="02040503050406030204" pitchFamily="18" charset="0"/>
+                <a:ea typeface="Caladea" panose="02040503050406030204" pitchFamily="18" charset="0"/>
+                <a:cs typeface="Liberation Serif" panose="02020603050405020304" pitchFamily="18" charset="0"/>
               </a:rPr>
               <a:t> ⨯ channels)</a:t>
             </a:r>
             <a:r>
               <a:rPr lang="en-US" altLang="ko-KR" dirty="0" smtClean="0">
-                <a:latin typeface="Times New Roman" panose="02020603050405020304" pitchFamily="18" charset="0"/>
-                <a:cs typeface="Times New Roman" panose="02020603050405020304" pitchFamily="18" charset="0"/>
+                <a:latin typeface="Liberation Serif" panose="02020603050405020304" pitchFamily="18" charset="0"/>
+                <a:cs typeface="Liberation Serif" panose="02020603050405020304" pitchFamily="18" charset="0"/>
               </a:rPr>
               <a:t> → [Convolution </a:t>
             </a:r>
             <a:r>
               <a:rPr lang="en-US" altLang="ko-KR" dirty="0">
-                <a:latin typeface="Times New Roman" panose="02020603050405020304" pitchFamily="18" charset="0"/>
-                <a:cs typeface="Times New Roman" panose="02020603050405020304" pitchFamily="18" charset="0"/>
+                <a:latin typeface="Liberation Serif" panose="02020603050405020304" pitchFamily="18" charset="0"/>
+                <a:cs typeface="Liberation Serif" panose="02020603050405020304" pitchFamily="18" charset="0"/>
               </a:rPr>
               <a:t>-&gt; </a:t>
             </a:r>
             <a:r>
               <a:rPr lang="en-US" altLang="ko-KR" dirty="0" err="1">
-                <a:latin typeface="Times New Roman" panose="02020603050405020304" pitchFamily="18" charset="0"/>
-                <a:cs typeface="Times New Roman" panose="02020603050405020304" pitchFamily="18" charset="0"/>
+                <a:latin typeface="Liberation Serif" panose="02020603050405020304" pitchFamily="18" charset="0"/>
+                <a:cs typeface="Liberation Serif" panose="02020603050405020304" pitchFamily="18" charset="0"/>
               </a:rPr>
               <a:t>ReLu</a:t>
             </a:r>
             <a:r>
               <a:rPr lang="en-US" altLang="ko-KR" dirty="0">
-                <a:latin typeface="Times New Roman" panose="02020603050405020304" pitchFamily="18" charset="0"/>
-                <a:cs typeface="Times New Roman" panose="02020603050405020304" pitchFamily="18" charset="0"/>
+                <a:latin typeface="Liberation Serif" panose="02020603050405020304" pitchFamily="18" charset="0"/>
+                <a:cs typeface="Liberation Serif" panose="02020603050405020304" pitchFamily="18" charset="0"/>
               </a:rPr>
               <a:t> -&gt; </a:t>
             </a:r>
             <a:r>
               <a:rPr lang="en-US" altLang="ko-KR" dirty="0" smtClean="0">
-                <a:latin typeface="Times New Roman" panose="02020603050405020304" pitchFamily="18" charset="0"/>
-                <a:cs typeface="Times New Roman" panose="02020603050405020304" pitchFamily="18" charset="0"/>
+                <a:latin typeface="Liberation Serif" panose="02020603050405020304" pitchFamily="18" charset="0"/>
+                <a:cs typeface="Liberation Serif" panose="02020603050405020304" pitchFamily="18" charset="0"/>
               </a:rPr>
               <a:t>Pooling] </a:t>
             </a:r>
             <a:r>
               <a:rPr lang="en-US" altLang="ko-KR" dirty="0">
-                <a:latin typeface="Times New Roman" panose="02020603050405020304" pitchFamily="18" charset="0"/>
-                <a:cs typeface="Times New Roman" panose="02020603050405020304" pitchFamily="18" charset="0"/>
+                <a:latin typeface="Liberation Serif" panose="02020603050405020304" pitchFamily="18" charset="0"/>
+                <a:cs typeface="Liberation Serif" panose="02020603050405020304" pitchFamily="18" charset="0"/>
               </a:rPr>
               <a:t>→ </a:t>
             </a:r>
             <a:r>
               <a:rPr lang="en-US" altLang="ko-KR" dirty="0" smtClean="0">
-                <a:latin typeface="Times New Roman" panose="02020603050405020304" pitchFamily="18" charset="0"/>
-                <a:cs typeface="Times New Roman" panose="02020603050405020304" pitchFamily="18" charset="0"/>
+                <a:latin typeface="Liberation Serif" panose="02020603050405020304" pitchFamily="18" charset="0"/>
+                <a:cs typeface="Liberation Serif" panose="02020603050405020304" pitchFamily="18" charset="0"/>
               </a:rPr>
               <a:t>… </a:t>
             </a:r>
             <a:r>
               <a:rPr lang="en-US" altLang="ko-KR" dirty="0">
-                <a:latin typeface="Times New Roman" panose="02020603050405020304" pitchFamily="18" charset="0"/>
-                <a:cs typeface="Times New Roman" panose="02020603050405020304" pitchFamily="18" charset="0"/>
+                <a:latin typeface="Liberation Serif" panose="02020603050405020304" pitchFamily="18" charset="0"/>
+                <a:cs typeface="Liberation Serif" panose="02020603050405020304" pitchFamily="18" charset="0"/>
               </a:rPr>
               <a:t>→ </a:t>
             </a:r>
             <a:r>
               <a:rPr lang="en-US" altLang="ko-KR" dirty="0" smtClean="0">
-                <a:latin typeface="Times New Roman" panose="02020603050405020304" pitchFamily="18" charset="0"/>
-                <a:cs typeface="Times New Roman" panose="02020603050405020304" pitchFamily="18" charset="0"/>
+                <a:latin typeface="Liberation Serif" panose="02020603050405020304" pitchFamily="18" charset="0"/>
+                <a:cs typeface="Liberation Serif" panose="02020603050405020304" pitchFamily="18" charset="0"/>
               </a:rPr>
               <a:t>[</a:t>
             </a:r>
             <a:r>
               <a:rPr lang="en-US" altLang="ko-KR" dirty="0">
-                <a:latin typeface="Times New Roman" panose="02020603050405020304" pitchFamily="18" charset="0"/>
-                <a:cs typeface="Times New Roman" panose="02020603050405020304" pitchFamily="18" charset="0"/>
+                <a:latin typeface="Liberation Serif" panose="02020603050405020304" pitchFamily="18" charset="0"/>
+                <a:cs typeface="Liberation Serif" panose="02020603050405020304" pitchFamily="18" charset="0"/>
               </a:rPr>
               <a:t>Convolution -&gt; </a:t>
             </a:r>
             <a:r>
               <a:rPr lang="en-US" altLang="ko-KR" dirty="0" err="1">
-                <a:latin typeface="Times New Roman" panose="02020603050405020304" pitchFamily="18" charset="0"/>
-                <a:cs typeface="Times New Roman" panose="02020603050405020304" pitchFamily="18" charset="0"/>
+                <a:latin typeface="Liberation Serif" panose="02020603050405020304" pitchFamily="18" charset="0"/>
+                <a:cs typeface="Liberation Serif" panose="02020603050405020304" pitchFamily="18" charset="0"/>
               </a:rPr>
               <a:t>ReLu</a:t>
             </a:r>
             <a:r>
               <a:rPr lang="en-US" altLang="ko-KR" dirty="0">
-                <a:latin typeface="Times New Roman" panose="02020603050405020304" pitchFamily="18" charset="0"/>
-                <a:cs typeface="Times New Roman" panose="02020603050405020304" pitchFamily="18" charset="0"/>
+                <a:latin typeface="Liberation Serif" panose="02020603050405020304" pitchFamily="18" charset="0"/>
+                <a:cs typeface="Liberation Serif" panose="02020603050405020304" pitchFamily="18" charset="0"/>
               </a:rPr>
               <a:t> -&gt; Pooling</a:t>
             </a:r>
             <a:r>
               <a:rPr lang="en-US" altLang="ko-KR" dirty="0" smtClean="0">
-                <a:latin typeface="Times New Roman" panose="02020603050405020304" pitchFamily="18" charset="0"/>
-                <a:cs typeface="Times New Roman" panose="02020603050405020304" pitchFamily="18" charset="0"/>
+                <a:latin typeface="Liberation Serif" panose="02020603050405020304" pitchFamily="18" charset="0"/>
+                <a:cs typeface="Liberation Serif" panose="02020603050405020304" pitchFamily="18" charset="0"/>
               </a:rPr>
               <a:t>] → Fully connected layer                     → Output prediction (Multi-class classification)</a:t>
             </a:r>
             <a:endParaRPr lang="en-US" altLang="ko-KR" dirty="0">
-              <a:latin typeface="Times New Roman" panose="02020603050405020304" pitchFamily="18" charset="0"/>
-              <a:cs typeface="Times New Roman" panose="02020603050405020304" pitchFamily="18" charset="0"/>
+              <a:latin typeface="Liberation Serif" panose="02020603050405020304" pitchFamily="18" charset="0"/>
+              <a:cs typeface="Liberation Serif" panose="02020603050405020304" pitchFamily="18" charset="0"/>
             </a:endParaRPr>
           </a:p>
         </p:txBody>
@@ -11638,8 +11734,8 @@
                 <a:solidFill>
                   <a:prstClr val="black"/>
                 </a:solidFill>
-                <a:latin typeface="Times New Roman" panose="02020603050405020304" pitchFamily="18" charset="0"/>
-                <a:cs typeface="Times New Roman" panose="02020603050405020304" pitchFamily="18" charset="0"/>
+                <a:latin typeface="Liberation Serif" panose="02020603050405020304" pitchFamily="18" charset="0"/>
+                <a:cs typeface="Liberation Serif" panose="02020603050405020304" pitchFamily="18" charset="0"/>
               </a:rPr>
               <a:t>Example: 1D Convolution</a:t>
             </a:r>
@@ -11647,8 +11743,8 @@
               <a:solidFill>
                 <a:prstClr val="black"/>
               </a:solidFill>
-              <a:latin typeface="Times New Roman" panose="02020603050405020304" pitchFamily="18" charset="0"/>
-              <a:cs typeface="Times New Roman" panose="02020603050405020304" pitchFamily="18" charset="0"/>
+              <a:latin typeface="Liberation Serif" panose="02020603050405020304" pitchFamily="18" charset="0"/>
+              <a:cs typeface="Liberation Serif" panose="02020603050405020304" pitchFamily="18" charset="0"/>
             </a:endParaRPr>
           </a:p>
         </p:txBody>
@@ -11714,13 +11810,13 @@
               <a:lnSpc>
                 <a:spcPct val="150000"/>
               </a:lnSpc>
-              <a:buFont typeface="Arial" panose="020B0604020202020204" pitchFamily="34" charset="0"/>
+              <a:buFont typeface="Liberation Sans" panose="020B0604020202020204" pitchFamily="34" charset="0"/>
               <a:buChar char="•"/>
             </a:pPr>
             <a:r>
               <a:rPr lang="en-US" altLang="ko-KR" sz="2000" dirty="0" smtClean="0">
-                <a:latin typeface="Times New Roman" panose="02020603050405020304" pitchFamily="18" charset="0"/>
-                <a:cs typeface="Times New Roman" panose="02020603050405020304" pitchFamily="18" charset="0"/>
+                <a:latin typeface="Liberation Serif" panose="02020603050405020304" pitchFamily="18" charset="0"/>
+                <a:cs typeface="Liberation Serif" panose="02020603050405020304" pitchFamily="18" charset="0"/>
               </a:rPr>
               <a:t>How can we apply convolution on 1D time series data?</a:t>
             </a:r>
@@ -11730,12 +11826,12 @@
               <a:lnSpc>
                 <a:spcPct val="150000"/>
               </a:lnSpc>
-              <a:buFont typeface="Arial" panose="020B0604020202020204" pitchFamily="34" charset="0"/>
+              <a:buFont typeface="Liberation Sans" panose="020B0604020202020204" pitchFamily="34" charset="0"/>
               <a:buChar char="•"/>
             </a:pPr>
             <a:endParaRPr lang="en-US" altLang="ko-KR" sz="2000" dirty="0">
-              <a:latin typeface="Times New Roman" panose="02020603050405020304" pitchFamily="18" charset="0"/>
-              <a:cs typeface="Times New Roman" panose="02020603050405020304" pitchFamily="18" charset="0"/>
+              <a:latin typeface="Liberation Serif" panose="02020603050405020304" pitchFamily="18" charset="0"/>
+              <a:cs typeface="Liberation Serif" panose="02020603050405020304" pitchFamily="18" charset="0"/>
             </a:endParaRPr>
           </a:p>
           <a:p>
@@ -11743,13 +11839,13 @@
               <a:lnSpc>
                 <a:spcPct val="150000"/>
               </a:lnSpc>
-              <a:buFont typeface="Arial" panose="020B0604020202020204" pitchFamily="34" charset="0"/>
+              <a:buFont typeface="Liberation Sans" panose="020B0604020202020204" pitchFamily="34" charset="0"/>
               <a:buChar char="•"/>
             </a:pPr>
             <a:r>
               <a:rPr lang="en-US" altLang="ko-KR" sz="2000" dirty="0" smtClean="0">
-                <a:latin typeface="Times New Roman" panose="02020603050405020304" pitchFamily="18" charset="0"/>
-                <a:cs typeface="Times New Roman" panose="02020603050405020304" pitchFamily="18" charset="0"/>
+                <a:latin typeface="Liberation Serif" panose="02020603050405020304" pitchFamily="18" charset="0"/>
+                <a:cs typeface="Liberation Serif" panose="02020603050405020304" pitchFamily="18" charset="0"/>
               </a:rPr>
               <a:t>1D Convolution of discrete time signals</a:t>
             </a:r>
@@ -11759,12 +11855,12 @@
               <a:lnSpc>
                 <a:spcPct val="150000"/>
               </a:lnSpc>
-              <a:buFont typeface="Arial" panose="020B0604020202020204" pitchFamily="34" charset="0"/>
+              <a:buFont typeface="Liberation Sans" panose="020B0604020202020204" pitchFamily="34" charset="0"/>
               <a:buChar char="•"/>
             </a:pPr>
             <a:endParaRPr lang="en-US" altLang="ko-KR" sz="2000" dirty="0" smtClean="0">
-              <a:latin typeface="Times New Roman" panose="02020603050405020304" pitchFamily="18" charset="0"/>
-              <a:cs typeface="Times New Roman" panose="02020603050405020304" pitchFamily="18" charset="0"/>
+              <a:latin typeface="Liberation Serif" panose="02020603050405020304" pitchFamily="18" charset="0"/>
+              <a:cs typeface="Liberation Serif" panose="02020603050405020304" pitchFamily="18" charset="0"/>
             </a:endParaRPr>
           </a:p>
           <a:p>
@@ -11772,13 +11868,13 @@
               <a:lnSpc>
                 <a:spcPct val="150000"/>
               </a:lnSpc>
-              <a:buFont typeface="Arial" panose="020B0604020202020204" pitchFamily="34" charset="0"/>
+              <a:buFont typeface="Liberation Sans" panose="020B0604020202020204" pitchFamily="34" charset="0"/>
               <a:buChar char="•"/>
             </a:pPr>
             <a:r>
               <a:rPr lang="en-US" altLang="ko-KR" sz="2000" dirty="0" smtClean="0">
-                <a:latin typeface="Times New Roman" panose="02020603050405020304" pitchFamily="18" charset="0"/>
-                <a:cs typeface="Times New Roman" panose="02020603050405020304" pitchFamily="18" charset="0"/>
+                <a:latin typeface="Liberation Serif" panose="02020603050405020304" pitchFamily="18" charset="0"/>
+                <a:cs typeface="Liberation Serif" panose="02020603050405020304" pitchFamily="18" charset="0"/>
               </a:rPr>
               <a:t>Example</a:t>
             </a:r>
@@ -11788,13 +11884,13 @@
               <a:lnSpc>
                 <a:spcPct val="150000"/>
               </a:lnSpc>
-              <a:buFont typeface="Arial" panose="020B0604020202020204" pitchFamily="34" charset="0"/>
+              <a:buFont typeface="Liberation Sans" panose="020B0604020202020204" pitchFamily="34" charset="0"/>
               <a:buChar char="•"/>
             </a:pPr>
             <a:r>
               <a:rPr lang="en-US" altLang="ko-KR" sz="2000" dirty="0" smtClean="0">
-                <a:latin typeface="Times New Roman" panose="02020603050405020304" pitchFamily="18" charset="0"/>
-                <a:cs typeface="Times New Roman" panose="02020603050405020304" pitchFamily="18" charset="0"/>
+                <a:latin typeface="Liberation Serif" panose="02020603050405020304" pitchFamily="18" charset="0"/>
+                <a:cs typeface="Liberation Serif" panose="02020603050405020304" pitchFamily="18" charset="0"/>
               </a:rPr>
               <a:t>Kernel: </a:t>
             </a:r>
@@ -11804,19 +11900,19 @@
               <a:lnSpc>
                 <a:spcPct val="150000"/>
               </a:lnSpc>
-              <a:buFont typeface="Arial" panose="020B0604020202020204" pitchFamily="34" charset="0"/>
+              <a:buFont typeface="Liberation Sans" panose="020B0604020202020204" pitchFamily="34" charset="0"/>
               <a:buChar char="•"/>
             </a:pPr>
             <a:r>
               <a:rPr lang="en-US" altLang="ko-KR" sz="2000" dirty="0" smtClean="0">
-                <a:latin typeface="Times New Roman" panose="02020603050405020304" pitchFamily="18" charset="0"/>
-                <a:cs typeface="Times New Roman" panose="02020603050405020304" pitchFamily="18" charset="0"/>
+                <a:latin typeface="Liberation Serif" panose="02020603050405020304" pitchFamily="18" charset="0"/>
+                <a:cs typeface="Liberation Serif" panose="02020603050405020304" pitchFamily="18" charset="0"/>
               </a:rPr>
               <a:t>Time series data: </a:t>
             </a:r>
             <a:endParaRPr lang="en-US" altLang="ko-KR" sz="2000" dirty="0">
-              <a:latin typeface="Times New Roman" panose="02020603050405020304" pitchFamily="18" charset="0"/>
-              <a:cs typeface="Times New Roman" panose="02020603050405020304" pitchFamily="18" charset="0"/>
+              <a:latin typeface="Liberation Serif" panose="02020603050405020304" pitchFamily="18" charset="0"/>
+              <a:cs typeface="Liberation Serif" panose="02020603050405020304" pitchFamily="18" charset="0"/>
             </a:endParaRPr>
           </a:p>
         </p:txBody>
@@ -12117,8 +12213,8 @@
                 <a:solidFill>
                   <a:prstClr val="black"/>
                 </a:solidFill>
-                <a:latin typeface="Times New Roman" panose="02020603050405020304" pitchFamily="18" charset="0"/>
-                <a:cs typeface="Times New Roman" panose="02020603050405020304" pitchFamily="18" charset="0"/>
+                <a:latin typeface="Liberation Serif" panose="02020603050405020304" pitchFamily="18" charset="0"/>
+                <a:cs typeface="Liberation Serif" panose="02020603050405020304" pitchFamily="18" charset="0"/>
               </a:rPr>
               <a:t>Example: 1D </a:t>
             </a:r>
@@ -12127,8 +12223,8 @@
                 <a:solidFill>
                   <a:prstClr val="black"/>
                 </a:solidFill>
-                <a:latin typeface="Times New Roman" panose="02020603050405020304" pitchFamily="18" charset="0"/>
-                <a:cs typeface="Times New Roman" panose="02020603050405020304" pitchFamily="18" charset="0"/>
+                <a:latin typeface="Liberation Serif" panose="02020603050405020304" pitchFamily="18" charset="0"/>
+                <a:cs typeface="Liberation Serif" panose="02020603050405020304" pitchFamily="18" charset="0"/>
               </a:rPr>
               <a:t>Convolution</a:t>
             </a:r>
@@ -12136,8 +12232,8 @@
               <a:solidFill>
                 <a:prstClr val="black"/>
               </a:solidFill>
-              <a:latin typeface="Times New Roman" panose="02020603050405020304" pitchFamily="18" charset="0"/>
-              <a:cs typeface="Times New Roman" panose="02020603050405020304" pitchFamily="18" charset="0"/>
+              <a:latin typeface="Liberation Serif" panose="02020603050405020304" pitchFamily="18" charset="0"/>
+              <a:cs typeface="Liberation Serif" panose="02020603050405020304" pitchFamily="18" charset="0"/>
             </a:endParaRPr>
           </a:p>
         </p:txBody>
@@ -12202,13 +12298,13 @@
               <a:lnSpc>
                 <a:spcPct val="150000"/>
               </a:lnSpc>
-              <a:buFont typeface="Arial" panose="020B0604020202020204" pitchFamily="34" charset="0"/>
+              <a:buFont typeface="Liberation Sans" panose="020B0604020202020204" pitchFamily="34" charset="0"/>
               <a:buChar char="•"/>
             </a:pPr>
             <a:r>
               <a:rPr lang="en-US" altLang="ko-KR" sz="2000" dirty="0">
-                <a:latin typeface="Times New Roman" panose="02020603050405020304" pitchFamily="18" charset="0"/>
-                <a:cs typeface="Times New Roman" panose="02020603050405020304" pitchFamily="18" charset="0"/>
+                <a:latin typeface="Liberation Serif" panose="02020603050405020304" pitchFamily="18" charset="0"/>
+                <a:cs typeface="Liberation Serif" panose="02020603050405020304" pitchFamily="18" charset="0"/>
               </a:rPr>
               <a:t>Example</a:t>
             </a:r>
@@ -12218,27 +12314,27 @@
               <a:lnSpc>
                 <a:spcPct val="150000"/>
               </a:lnSpc>
-              <a:buFont typeface="Arial" panose="020B0604020202020204" pitchFamily="34" charset="0"/>
+              <a:buFont typeface="Liberation Sans" panose="020B0604020202020204" pitchFamily="34" charset="0"/>
               <a:buChar char="•"/>
             </a:pPr>
             <a:r>
               <a:rPr lang="en-US" altLang="ko-KR" sz="2000" dirty="0" smtClean="0">
-                <a:latin typeface="Times New Roman" panose="02020603050405020304" pitchFamily="18" charset="0"/>
-                <a:cs typeface="Times New Roman" panose="02020603050405020304" pitchFamily="18" charset="0"/>
+                <a:latin typeface="Liberation Serif" panose="02020603050405020304" pitchFamily="18" charset="0"/>
+                <a:cs typeface="Liberation Serif" panose="02020603050405020304" pitchFamily="18" charset="0"/>
               </a:rPr>
               <a:t>N </a:t>
             </a:r>
             <a:r>
               <a:rPr lang="en-US" altLang="ko-KR" sz="2000" dirty="0">
-                <a:latin typeface="Times New Roman" panose="02020603050405020304" pitchFamily="18" charset="0"/>
-                <a:cs typeface="Times New Roman" panose="02020603050405020304" pitchFamily="18" charset="0"/>
+                <a:latin typeface="Liberation Serif" panose="02020603050405020304" pitchFamily="18" charset="0"/>
+                <a:cs typeface="Liberation Serif" panose="02020603050405020304" pitchFamily="18" charset="0"/>
               </a:rPr>
               <a:t>= 0: -1*0 + 1*0 = </a:t>
             </a:r>
             <a:r>
               <a:rPr lang="en-US" altLang="ko-KR" sz="2000" dirty="0" smtClean="0">
-                <a:latin typeface="Times New Roman" panose="02020603050405020304" pitchFamily="18" charset="0"/>
-                <a:cs typeface="Times New Roman" panose="02020603050405020304" pitchFamily="18" charset="0"/>
+                <a:latin typeface="Liberation Serif" panose="02020603050405020304" pitchFamily="18" charset="0"/>
+                <a:cs typeface="Liberation Serif" panose="02020603050405020304" pitchFamily="18" charset="0"/>
               </a:rPr>
               <a:t>0</a:t>
             </a:r>
@@ -12248,12 +12344,12 @@
               <a:lnSpc>
                 <a:spcPct val="150000"/>
               </a:lnSpc>
-              <a:buFont typeface="Arial" panose="020B0604020202020204" pitchFamily="34" charset="0"/>
+              <a:buFont typeface="Liberation Sans" panose="020B0604020202020204" pitchFamily="34" charset="0"/>
               <a:buChar char="•"/>
             </a:pPr>
             <a:endParaRPr lang="en-US" altLang="ko-KR" sz="2000" dirty="0">
-              <a:latin typeface="Times New Roman" panose="02020603050405020304" pitchFamily="18" charset="0"/>
-              <a:cs typeface="Times New Roman" panose="02020603050405020304" pitchFamily="18" charset="0"/>
+              <a:latin typeface="Liberation Serif" panose="02020603050405020304" pitchFamily="18" charset="0"/>
+              <a:cs typeface="Liberation Serif" panose="02020603050405020304" pitchFamily="18" charset="0"/>
             </a:endParaRPr>
           </a:p>
           <a:p>
@@ -12261,12 +12357,12 @@
               <a:lnSpc>
                 <a:spcPct val="150000"/>
               </a:lnSpc>
-              <a:buFont typeface="Arial" panose="020B0604020202020204" pitchFamily="34" charset="0"/>
+              <a:buFont typeface="Liberation Sans" panose="020B0604020202020204" pitchFamily="34" charset="0"/>
               <a:buChar char="•"/>
             </a:pPr>
             <a:endParaRPr lang="en-US" altLang="ko-KR" sz="2000" dirty="0" smtClean="0">
-              <a:latin typeface="Times New Roman" panose="02020603050405020304" pitchFamily="18" charset="0"/>
-              <a:cs typeface="Times New Roman" panose="02020603050405020304" pitchFamily="18" charset="0"/>
+              <a:latin typeface="Liberation Serif" panose="02020603050405020304" pitchFamily="18" charset="0"/>
+              <a:cs typeface="Liberation Serif" panose="02020603050405020304" pitchFamily="18" charset="0"/>
             </a:endParaRPr>
           </a:p>
           <a:p>
@@ -12274,13 +12370,13 @@
               <a:lnSpc>
                 <a:spcPct val="150000"/>
               </a:lnSpc>
-              <a:buFont typeface="Arial" panose="020B0604020202020204" pitchFamily="34" charset="0"/>
+              <a:buFont typeface="Liberation Sans" panose="020B0604020202020204" pitchFamily="34" charset="0"/>
               <a:buChar char="•"/>
             </a:pPr>
             <a:r>
               <a:rPr lang="en-US" altLang="ko-KR" sz="2000" dirty="0">
-                <a:latin typeface="Times New Roman" panose="02020603050405020304" pitchFamily="18" charset="0"/>
-                <a:cs typeface="Times New Roman" panose="02020603050405020304" pitchFamily="18" charset="0"/>
+                <a:latin typeface="Liberation Serif" panose="02020603050405020304" pitchFamily="18" charset="0"/>
+                <a:cs typeface="Liberation Serif" panose="02020603050405020304" pitchFamily="18" charset="0"/>
               </a:rPr>
               <a:t>N = 1: -1*0 + 1*0 = 0</a:t>
             </a:r>
@@ -12290,12 +12386,12 @@
               <a:lnSpc>
                 <a:spcPct val="150000"/>
               </a:lnSpc>
-              <a:buFont typeface="Arial" panose="020B0604020202020204" pitchFamily="34" charset="0"/>
+              <a:buFont typeface="Liberation Sans" panose="020B0604020202020204" pitchFamily="34" charset="0"/>
               <a:buChar char="•"/>
             </a:pPr>
             <a:endParaRPr lang="en-US" altLang="ko-KR" sz="2000" dirty="0" smtClean="0">
-              <a:latin typeface="Times New Roman" panose="02020603050405020304" pitchFamily="18" charset="0"/>
-              <a:cs typeface="Times New Roman" panose="02020603050405020304" pitchFamily="18" charset="0"/>
+              <a:latin typeface="Liberation Serif" panose="02020603050405020304" pitchFamily="18" charset="0"/>
+              <a:cs typeface="Liberation Serif" panose="02020603050405020304" pitchFamily="18" charset="0"/>
             </a:endParaRPr>
           </a:p>
           <a:p>
@@ -12303,12 +12399,12 @@
               <a:lnSpc>
                 <a:spcPct val="150000"/>
               </a:lnSpc>
-              <a:buFont typeface="Arial" panose="020B0604020202020204" pitchFamily="34" charset="0"/>
+              <a:buFont typeface="Liberation Sans" panose="020B0604020202020204" pitchFamily="34" charset="0"/>
               <a:buChar char="•"/>
             </a:pPr>
             <a:endParaRPr lang="en-US" altLang="ko-KR" sz="2000" dirty="0" smtClean="0">
-              <a:latin typeface="Times New Roman" panose="02020603050405020304" pitchFamily="18" charset="0"/>
-              <a:cs typeface="Times New Roman" panose="02020603050405020304" pitchFamily="18" charset="0"/>
+              <a:latin typeface="Liberation Serif" panose="02020603050405020304" pitchFamily="18" charset="0"/>
+              <a:cs typeface="Liberation Serif" panose="02020603050405020304" pitchFamily="18" charset="0"/>
             </a:endParaRPr>
           </a:p>
           <a:p>
@@ -12316,33 +12412,33 @@
               <a:lnSpc>
                 <a:spcPct val="150000"/>
               </a:lnSpc>
-              <a:buFont typeface="Arial" panose="020B0604020202020204" pitchFamily="34" charset="0"/>
+              <a:buFont typeface="Liberation Sans" panose="020B0604020202020204" pitchFamily="34" charset="0"/>
               <a:buChar char="•"/>
             </a:pPr>
             <a:r>
               <a:rPr lang="en-US" altLang="ko-KR" sz="2000" dirty="0" smtClean="0">
-                <a:latin typeface="Times New Roman" panose="02020603050405020304" pitchFamily="18" charset="0"/>
-                <a:cs typeface="Times New Roman" panose="02020603050405020304" pitchFamily="18" charset="0"/>
+                <a:latin typeface="Liberation Serif" panose="02020603050405020304" pitchFamily="18" charset="0"/>
+                <a:cs typeface="Liberation Serif" panose="02020603050405020304" pitchFamily="18" charset="0"/>
               </a:rPr>
               <a:t>N </a:t>
             </a:r>
             <a:r>
               <a:rPr lang="en-US" altLang="ko-KR" sz="2000" dirty="0">
-                <a:latin typeface="Times New Roman" panose="02020603050405020304" pitchFamily="18" charset="0"/>
-                <a:cs typeface="Times New Roman" panose="02020603050405020304" pitchFamily="18" charset="0"/>
+                <a:latin typeface="Liberation Serif" panose="02020603050405020304" pitchFamily="18" charset="0"/>
+                <a:cs typeface="Liberation Serif" panose="02020603050405020304" pitchFamily="18" charset="0"/>
               </a:rPr>
               <a:t>= 2: -1*0 + 1*1 = </a:t>
             </a:r>
             <a:r>
               <a:rPr lang="en-US" altLang="ko-KR" sz="2000" dirty="0" smtClean="0">
-                <a:latin typeface="Times New Roman" panose="02020603050405020304" pitchFamily="18" charset="0"/>
-                <a:cs typeface="Times New Roman" panose="02020603050405020304" pitchFamily="18" charset="0"/>
+                <a:latin typeface="Liberation Serif" panose="02020603050405020304" pitchFamily="18" charset="0"/>
+                <a:cs typeface="Liberation Serif" panose="02020603050405020304" pitchFamily="18" charset="0"/>
               </a:rPr>
               <a:t>1</a:t>
             </a:r>
             <a:endParaRPr lang="en-US" altLang="ko-KR" sz="2000" dirty="0">
-              <a:latin typeface="Times New Roman" panose="02020603050405020304" pitchFamily="18" charset="0"/>
-              <a:cs typeface="Times New Roman" panose="02020603050405020304" pitchFamily="18" charset="0"/>
+              <a:latin typeface="Liberation Serif" panose="02020603050405020304" pitchFamily="18" charset="0"/>
+              <a:cs typeface="Liberation Serif" panose="02020603050405020304" pitchFamily="18" charset="0"/>
             </a:endParaRPr>
           </a:p>
         </p:txBody>
@@ -13344,8 +13440,8 @@
                 <a:solidFill>
                   <a:prstClr val="black"/>
                 </a:solidFill>
-                <a:latin typeface="Times New Roman" panose="02020603050405020304" pitchFamily="18" charset="0"/>
-                <a:cs typeface="Times New Roman" panose="02020603050405020304" pitchFamily="18" charset="0"/>
+                <a:latin typeface="Liberation Serif" panose="02020603050405020304" pitchFamily="18" charset="0"/>
+                <a:cs typeface="Liberation Serif" panose="02020603050405020304" pitchFamily="18" charset="0"/>
               </a:rPr>
               <a:t>Example: 2D </a:t>
             </a:r>
@@ -13354,8 +13450,8 @@
                 <a:solidFill>
                   <a:prstClr val="black"/>
                 </a:solidFill>
-                <a:latin typeface="Times New Roman" panose="02020603050405020304" pitchFamily="18" charset="0"/>
-                <a:cs typeface="Times New Roman" panose="02020603050405020304" pitchFamily="18" charset="0"/>
+                <a:latin typeface="Liberation Serif" panose="02020603050405020304" pitchFamily="18" charset="0"/>
+                <a:cs typeface="Liberation Serif" panose="02020603050405020304" pitchFamily="18" charset="0"/>
               </a:rPr>
               <a:t>Convolution</a:t>
             </a:r>
@@ -13363,8 +13459,8 @@
               <a:solidFill>
                 <a:prstClr val="black"/>
               </a:solidFill>
-              <a:latin typeface="Times New Roman" panose="02020603050405020304" pitchFamily="18" charset="0"/>
-              <a:cs typeface="Times New Roman" panose="02020603050405020304" pitchFamily="18" charset="0"/>
+              <a:latin typeface="Liberation Serif" panose="02020603050405020304" pitchFamily="18" charset="0"/>
+              <a:cs typeface="Liberation Serif" panose="02020603050405020304" pitchFamily="18" charset="0"/>
             </a:endParaRPr>
           </a:p>
         </p:txBody>
@@ -13395,13 +13491,13 @@
               <a:lnSpc>
                 <a:spcPct val="150000"/>
               </a:lnSpc>
-              <a:buFont typeface="Arial" panose="020B0604020202020204" pitchFamily="34" charset="0"/>
+              <a:buFont typeface="Liberation Sans" panose="020B0604020202020204" pitchFamily="34" charset="0"/>
               <a:buChar char="•"/>
             </a:pPr>
             <a:r>
               <a:rPr lang="en-US" altLang="ko-KR" sz="2000" dirty="0" smtClean="0">
-                <a:latin typeface="Times New Roman" panose="02020603050405020304" pitchFamily="18" charset="0"/>
-                <a:cs typeface="Times New Roman" panose="02020603050405020304" pitchFamily="18" charset="0"/>
+                <a:latin typeface="Liberation Serif" panose="02020603050405020304" pitchFamily="18" charset="0"/>
+                <a:cs typeface="Liberation Serif" panose="02020603050405020304" pitchFamily="18" charset="0"/>
               </a:rPr>
               <a:t>Convolution</a:t>
             </a:r>
@@ -13594,14 +13690,14 @@
             </a:pPr>
             <a:r>
               <a:rPr lang="en-US" altLang="ko-KR" sz="1400" dirty="0" smtClean="0">
-                <a:latin typeface="Times New Roman" panose="02020603050405020304" pitchFamily="18" charset="0"/>
-                <a:cs typeface="Times New Roman" panose="02020603050405020304" pitchFamily="18" charset="0"/>
+                <a:latin typeface="Liberation Serif" panose="02020603050405020304" pitchFamily="18" charset="0"/>
+                <a:cs typeface="Liberation Serif" panose="02020603050405020304" pitchFamily="18" charset="0"/>
               </a:rPr>
               <a:t>Image data</a:t>
             </a:r>
             <a:endParaRPr lang="en-US" altLang="ko-KR" sz="1400" dirty="0">
-              <a:latin typeface="Times New Roman" panose="02020603050405020304" pitchFamily="18" charset="0"/>
-              <a:cs typeface="Times New Roman" panose="02020603050405020304" pitchFamily="18" charset="0"/>
+              <a:latin typeface="Liberation Serif" panose="02020603050405020304" pitchFamily="18" charset="0"/>
+              <a:cs typeface="Liberation Serif" panose="02020603050405020304" pitchFamily="18" charset="0"/>
             </a:endParaRPr>
           </a:p>
         </p:txBody>
@@ -13634,14 +13730,14 @@
             </a:pPr>
             <a:r>
               <a:rPr lang="en-US" altLang="ko-KR" sz="1400" dirty="0" smtClean="0">
-                <a:latin typeface="Times New Roman" panose="02020603050405020304" pitchFamily="18" charset="0"/>
-                <a:cs typeface="Times New Roman" panose="02020603050405020304" pitchFamily="18" charset="0"/>
+                <a:latin typeface="Liberation Serif" panose="02020603050405020304" pitchFamily="18" charset="0"/>
+                <a:cs typeface="Liberation Serif" panose="02020603050405020304" pitchFamily="18" charset="0"/>
               </a:rPr>
               <a:t>Convolution filter</a:t>
             </a:r>
             <a:endParaRPr lang="en-US" altLang="ko-KR" sz="1400" dirty="0">
-              <a:latin typeface="Times New Roman" panose="02020603050405020304" pitchFamily="18" charset="0"/>
-              <a:cs typeface="Times New Roman" panose="02020603050405020304" pitchFamily="18" charset="0"/>
+              <a:latin typeface="Liberation Serif" panose="02020603050405020304" pitchFamily="18" charset="0"/>
+              <a:cs typeface="Liberation Serif" panose="02020603050405020304" pitchFamily="18" charset="0"/>
             </a:endParaRPr>
           </a:p>
         </p:txBody>
@@ -13841,8 +13937,8 @@
                 <a:solidFill>
                   <a:prstClr val="black"/>
                 </a:solidFill>
-                <a:latin typeface="Times New Roman" panose="02020603050405020304" pitchFamily="18" charset="0"/>
-                <a:cs typeface="Times New Roman" panose="02020603050405020304" pitchFamily="18" charset="0"/>
+                <a:latin typeface="Liberation Serif" panose="02020603050405020304" pitchFamily="18" charset="0"/>
+                <a:cs typeface="Liberation Serif" panose="02020603050405020304" pitchFamily="18" charset="0"/>
               </a:rPr>
               <a:t>Applying 2D Multiple Kernel</a:t>
             </a:r>
@@ -13850,8 +13946,8 @@
               <a:solidFill>
                 <a:prstClr val="black"/>
               </a:solidFill>
-              <a:latin typeface="Times New Roman" panose="02020603050405020304" pitchFamily="18" charset="0"/>
-              <a:cs typeface="Times New Roman" panose="02020603050405020304" pitchFamily="18" charset="0"/>
+              <a:latin typeface="Liberation Serif" panose="02020603050405020304" pitchFamily="18" charset="0"/>
+              <a:cs typeface="Liberation Serif" panose="02020603050405020304" pitchFamily="18" charset="0"/>
             </a:endParaRPr>
           </a:p>
         </p:txBody>
@@ -14008,8 +14104,8 @@
             </a:pPr>
             <a:r>
               <a:rPr lang="en-US" altLang="ko-KR" sz="2800" b="1" dirty="0" err="1">
-                <a:latin typeface="Times New Roman" panose="02020603050405020304" pitchFamily="18" charset="0"/>
-                <a:cs typeface="Times New Roman" panose="02020603050405020304" pitchFamily="18" charset="0"/>
+                <a:latin typeface="Liberation Serif" panose="02020603050405020304" pitchFamily="18" charset="0"/>
+                <a:cs typeface="Liberation Serif" panose="02020603050405020304" pitchFamily="18" charset="0"/>
               </a:rPr>
               <a:t>ReLU</a:t>
             </a:r>
@@ -14017,8 +14113,8 @@
               <a:solidFill>
                 <a:prstClr val="black"/>
               </a:solidFill>
-              <a:latin typeface="Times New Roman" panose="02020603050405020304" pitchFamily="18" charset="0"/>
-              <a:cs typeface="Times New Roman" panose="02020603050405020304" pitchFamily="18" charset="0"/>
+              <a:latin typeface="Liberation Serif" panose="02020603050405020304" pitchFamily="18" charset="0"/>
+              <a:cs typeface="Liberation Serif" panose="02020603050405020304" pitchFamily="18" charset="0"/>
             </a:endParaRPr>
           </a:p>
         </p:txBody>
@@ -14049,40 +14145,40 @@
               <a:lnSpc>
                 <a:spcPct val="150000"/>
               </a:lnSpc>
-              <a:buFont typeface="Arial" panose="020B0604020202020204" pitchFamily="34" charset="0"/>
+              <a:buFont typeface="Liberation Sans" panose="020B0604020202020204" pitchFamily="34" charset="0"/>
               <a:buChar char="•"/>
             </a:pPr>
             <a:r>
               <a:rPr lang="en-US" altLang="ko-KR" sz="2000" dirty="0">
-                <a:latin typeface="Times New Roman" panose="02020603050405020304" pitchFamily="18" charset="0"/>
-                <a:cs typeface="Times New Roman" panose="02020603050405020304" pitchFamily="18" charset="0"/>
+                <a:latin typeface="Liberation Serif" panose="02020603050405020304" pitchFamily="18" charset="0"/>
+                <a:cs typeface="Liberation Serif" panose="02020603050405020304" pitchFamily="18" charset="0"/>
               </a:rPr>
               <a:t>Introducing </a:t>
             </a:r>
             <a:r>
               <a:rPr lang="en-US" altLang="ko-KR" sz="2000" dirty="0" smtClean="0">
-                <a:latin typeface="Times New Roman" panose="02020603050405020304" pitchFamily="18" charset="0"/>
-                <a:cs typeface="Times New Roman" panose="02020603050405020304" pitchFamily="18" charset="0"/>
+                <a:latin typeface="Liberation Serif" panose="02020603050405020304" pitchFamily="18" charset="0"/>
+                <a:cs typeface="Liberation Serif" panose="02020603050405020304" pitchFamily="18" charset="0"/>
               </a:rPr>
               <a:t>non-linearity (</a:t>
             </a:r>
             <a:r>
               <a:rPr lang="en-US" altLang="ko-KR" sz="2000" dirty="0" err="1" smtClean="0">
-                <a:latin typeface="Times New Roman" panose="02020603050405020304" pitchFamily="18" charset="0"/>
-                <a:cs typeface="Times New Roman" panose="02020603050405020304" pitchFamily="18" charset="0"/>
+                <a:latin typeface="Liberation Serif" panose="02020603050405020304" pitchFamily="18" charset="0"/>
+                <a:cs typeface="Liberation Serif" panose="02020603050405020304" pitchFamily="18" charset="0"/>
               </a:rPr>
               <a:t>ReLU</a:t>
             </a:r>
             <a:r>
               <a:rPr lang="en-US" altLang="ko-KR" sz="2000" dirty="0" smtClean="0">
-                <a:latin typeface="Times New Roman" panose="02020603050405020304" pitchFamily="18" charset="0"/>
-                <a:cs typeface="Times New Roman" panose="02020603050405020304" pitchFamily="18" charset="0"/>
+                <a:latin typeface="Liberation Serif" panose="02020603050405020304" pitchFamily="18" charset="0"/>
+                <a:cs typeface="Liberation Serif" panose="02020603050405020304" pitchFamily="18" charset="0"/>
               </a:rPr>
               <a:t>)</a:t>
             </a:r>
             <a:endParaRPr lang="en-US" altLang="ko-KR" dirty="0" smtClean="0">
-              <a:latin typeface="Times New Roman" panose="02020603050405020304" pitchFamily="18" charset="0"/>
-              <a:cs typeface="Times New Roman" panose="02020603050405020304" pitchFamily="18" charset="0"/>
+              <a:latin typeface="Liberation Serif" panose="02020603050405020304" pitchFamily="18" charset="0"/>
+              <a:cs typeface="Liberation Serif" panose="02020603050405020304" pitchFamily="18" charset="0"/>
             </a:endParaRPr>
           </a:p>
           <a:p>
@@ -14095,29 +14191,29 @@
             </a:pPr>
             <a:r>
               <a:rPr lang="en-US" altLang="ko-KR" dirty="0">
-                <a:latin typeface="Times New Roman" panose="02020603050405020304" pitchFamily="18" charset="0"/>
-                <a:cs typeface="Times New Roman" panose="02020603050405020304" pitchFamily="18" charset="0"/>
+                <a:latin typeface="Liberation Serif" panose="02020603050405020304" pitchFamily="18" charset="0"/>
+                <a:cs typeface="Liberation Serif" panose="02020603050405020304" pitchFamily="18" charset="0"/>
               </a:rPr>
               <a:t>The purpose of </a:t>
             </a:r>
             <a:r>
               <a:rPr lang="en-US" altLang="ko-KR" dirty="0" err="1">
-                <a:latin typeface="Times New Roman" panose="02020603050405020304" pitchFamily="18" charset="0"/>
-                <a:cs typeface="Times New Roman" panose="02020603050405020304" pitchFamily="18" charset="0"/>
+                <a:latin typeface="Liberation Serif" panose="02020603050405020304" pitchFamily="18" charset="0"/>
+                <a:cs typeface="Liberation Serif" panose="02020603050405020304" pitchFamily="18" charset="0"/>
               </a:rPr>
               <a:t>ReLU</a:t>
             </a:r>
             <a:r>
               <a:rPr lang="en-US" altLang="ko-KR" dirty="0">
-                <a:latin typeface="Times New Roman" panose="02020603050405020304" pitchFamily="18" charset="0"/>
-                <a:cs typeface="Times New Roman" panose="02020603050405020304" pitchFamily="18" charset="0"/>
+                <a:latin typeface="Liberation Serif" panose="02020603050405020304" pitchFamily="18" charset="0"/>
+                <a:cs typeface="Liberation Serif" panose="02020603050405020304" pitchFamily="18" charset="0"/>
               </a:rPr>
               <a:t> is to introduce non-linearity in </a:t>
             </a:r>
             <a:r>
               <a:rPr lang="en-US" altLang="ko-KR" dirty="0" smtClean="0">
-                <a:latin typeface="Times New Roman" panose="02020603050405020304" pitchFamily="18" charset="0"/>
-                <a:cs typeface="Times New Roman" panose="02020603050405020304" pitchFamily="18" charset="0"/>
+                <a:latin typeface="Liberation Serif" panose="02020603050405020304" pitchFamily="18" charset="0"/>
+                <a:cs typeface="Liberation Serif" panose="02020603050405020304" pitchFamily="18" charset="0"/>
               </a:rPr>
               <a:t>CNN.</a:t>
             </a:r>
@@ -14132,64 +14228,64 @@
             </a:pPr>
             <a:r>
               <a:rPr lang="en-US" altLang="ko-KR" dirty="0" smtClean="0">
-                <a:latin typeface="Times New Roman" panose="02020603050405020304" pitchFamily="18" charset="0"/>
-                <a:cs typeface="Times New Roman" panose="02020603050405020304" pitchFamily="18" charset="0"/>
+                <a:latin typeface="Liberation Serif" panose="02020603050405020304" pitchFamily="18" charset="0"/>
+                <a:cs typeface="Liberation Serif" panose="02020603050405020304" pitchFamily="18" charset="0"/>
               </a:rPr>
               <a:t>Other non-linear </a:t>
             </a:r>
             <a:r>
               <a:rPr lang="en-US" altLang="ko-KR" dirty="0">
-                <a:latin typeface="Times New Roman" panose="02020603050405020304" pitchFamily="18" charset="0"/>
-                <a:cs typeface="Times New Roman" panose="02020603050405020304" pitchFamily="18" charset="0"/>
+                <a:latin typeface="Liberation Serif" panose="02020603050405020304" pitchFamily="18" charset="0"/>
+                <a:cs typeface="Liberation Serif" panose="02020603050405020304" pitchFamily="18" charset="0"/>
               </a:rPr>
               <a:t>functions such as </a:t>
             </a:r>
             <a:r>
               <a:rPr lang="en-US" altLang="ko-KR" dirty="0" err="1">
-                <a:latin typeface="Times New Roman" panose="02020603050405020304" pitchFamily="18" charset="0"/>
-                <a:cs typeface="Times New Roman" panose="02020603050405020304" pitchFamily="18" charset="0"/>
+                <a:latin typeface="Liberation Serif" panose="02020603050405020304" pitchFamily="18" charset="0"/>
+                <a:cs typeface="Liberation Serif" panose="02020603050405020304" pitchFamily="18" charset="0"/>
               </a:rPr>
               <a:t>tanh</a:t>
             </a:r>
             <a:r>
               <a:rPr lang="en-US" altLang="ko-KR" dirty="0">
-                <a:latin typeface="Times New Roman" panose="02020603050405020304" pitchFamily="18" charset="0"/>
-                <a:cs typeface="Times New Roman" panose="02020603050405020304" pitchFamily="18" charset="0"/>
+                <a:latin typeface="Liberation Serif" panose="02020603050405020304" pitchFamily="18" charset="0"/>
+                <a:cs typeface="Liberation Serif" panose="02020603050405020304" pitchFamily="18" charset="0"/>
               </a:rPr>
               <a:t> or sigmoid can also be </a:t>
             </a:r>
             <a:r>
               <a:rPr lang="en-US" altLang="ko-KR" dirty="0" smtClean="0">
-                <a:latin typeface="Times New Roman" panose="02020603050405020304" pitchFamily="18" charset="0"/>
-                <a:cs typeface="Times New Roman" panose="02020603050405020304" pitchFamily="18" charset="0"/>
+                <a:latin typeface="Liberation Serif" panose="02020603050405020304" pitchFamily="18" charset="0"/>
+                <a:cs typeface="Liberation Serif" panose="02020603050405020304" pitchFamily="18" charset="0"/>
               </a:rPr>
               <a:t>used, </a:t>
             </a:r>
             <a:r>
               <a:rPr lang="en-US" altLang="ko-KR" dirty="0">
-                <a:latin typeface="Times New Roman" panose="02020603050405020304" pitchFamily="18" charset="0"/>
-                <a:cs typeface="Times New Roman" panose="02020603050405020304" pitchFamily="18" charset="0"/>
+                <a:latin typeface="Liberation Serif" panose="02020603050405020304" pitchFamily="18" charset="0"/>
+                <a:cs typeface="Liberation Serif" panose="02020603050405020304" pitchFamily="18" charset="0"/>
               </a:rPr>
               <a:t>but </a:t>
             </a:r>
             <a:r>
               <a:rPr lang="en-US" altLang="ko-KR" dirty="0" err="1">
-                <a:latin typeface="Times New Roman" panose="02020603050405020304" pitchFamily="18" charset="0"/>
-                <a:cs typeface="Times New Roman" panose="02020603050405020304" pitchFamily="18" charset="0"/>
+                <a:latin typeface="Liberation Serif" panose="02020603050405020304" pitchFamily="18" charset="0"/>
+                <a:cs typeface="Liberation Serif" panose="02020603050405020304" pitchFamily="18" charset="0"/>
               </a:rPr>
               <a:t>ReLU</a:t>
             </a:r>
             <a:r>
               <a:rPr lang="en-US" altLang="ko-KR" dirty="0">
-                <a:latin typeface="Times New Roman" panose="02020603050405020304" pitchFamily="18" charset="0"/>
-                <a:cs typeface="Times New Roman" panose="02020603050405020304" pitchFamily="18" charset="0"/>
+                <a:latin typeface="Liberation Serif" panose="02020603050405020304" pitchFamily="18" charset="0"/>
+                <a:cs typeface="Liberation Serif" panose="02020603050405020304" pitchFamily="18" charset="0"/>
               </a:rPr>
               <a:t> has been found to perform better in most situations</a:t>
             </a:r>
             <a:r>
               <a:rPr lang="en-US" altLang="ko-KR" dirty="0" smtClean="0">
-                <a:latin typeface="Times New Roman" panose="02020603050405020304" pitchFamily="18" charset="0"/>
-                <a:cs typeface="Times New Roman" panose="02020603050405020304" pitchFamily="18" charset="0"/>
+                <a:latin typeface="Liberation Serif" panose="02020603050405020304" pitchFamily="18" charset="0"/>
+                <a:cs typeface="Liberation Serif" panose="02020603050405020304" pitchFamily="18" charset="0"/>
               </a:rPr>
               <a:t>.</a:t>
             </a:r>
@@ -14223,7 +14319,7 @@
                 <a:solidFill>
                   <a:srgbClr val="222222"/>
                 </a:solidFill>
-                <a:latin typeface="Arial" panose="020B0604020202020204" pitchFamily="34" charset="0"/>
+                <a:latin typeface="Liberation Sans" panose="020B0604020202020204" pitchFamily="34" charset="0"/>
               </a:rPr>
               <a:t>Source</a:t>
             </a:r>
@@ -14232,7 +14328,7 @@
                 <a:solidFill>
                   <a:srgbClr val="222222"/>
                 </a:solidFill>
-                <a:latin typeface="Arial" panose="020B0604020202020204" pitchFamily="34" charset="0"/>
+                <a:latin typeface="Liberation Sans" panose="020B0604020202020204" pitchFamily="34" charset="0"/>
               </a:rPr>
               <a:t>: An Intuitive Explanation of Convolutional Neural </a:t>
             </a:r>
@@ -14241,7 +14337,7 @@
                 <a:solidFill>
                   <a:srgbClr val="222222"/>
                 </a:solidFill>
-                <a:latin typeface="Arial" panose="020B0604020202020204" pitchFamily="34" charset="0"/>
+                <a:latin typeface="Liberation Sans" panose="020B0604020202020204" pitchFamily="34" charset="0"/>
               </a:rPr>
               <a:t>Networks (Data Science Blog)</a:t>
             </a:r>
@@ -14252,7 +14348,7 @@
                 <a:solidFill>
                   <a:srgbClr val="222222"/>
                 </a:solidFill>
-                <a:latin typeface="Arial" panose="020B0604020202020204" pitchFamily="34" charset="0"/>
+                <a:latin typeface="Liberation Sans" panose="020B0604020202020204" pitchFamily="34" charset="0"/>
                 <a:hlinkClick r:id="rId3"/>
               </a:rPr>
               <a:t>https://ujjwalkarn.me/2016/08/11/intuitive-explanation-convnets</a:t>
@@ -14262,7 +14358,7 @@
                 <a:solidFill>
                   <a:srgbClr val="222222"/>
                 </a:solidFill>
-                <a:latin typeface="Arial" panose="020B0604020202020204" pitchFamily="34" charset="0"/>
+                <a:latin typeface="Liberation Sans" panose="020B0604020202020204" pitchFamily="34" charset="0"/>
                 <a:hlinkClick r:id="rId3"/>
               </a:rPr>
               <a:t>/</a:t>
@@ -14271,7 +14367,7 @@
               <a:solidFill>
                 <a:srgbClr val="222222"/>
               </a:solidFill>
-              <a:latin typeface="Arial" panose="020B0604020202020204" pitchFamily="34" charset="0"/>
+              <a:latin typeface="Liberation Sans" panose="020B0604020202020204" pitchFamily="34" charset="0"/>
             </a:endParaRPr>
           </a:p>
         </p:txBody>
@@ -14487,8 +14583,8 @@
                 <a:solidFill>
                   <a:prstClr val="black"/>
                 </a:solidFill>
-                <a:latin typeface="Times New Roman" panose="02020603050405020304" pitchFamily="18" charset="0"/>
-                <a:cs typeface="Times New Roman" panose="02020603050405020304" pitchFamily="18" charset="0"/>
+                <a:latin typeface="Liberation Serif" panose="02020603050405020304" pitchFamily="18" charset="0"/>
+                <a:cs typeface="Liberation Serif" panose="02020603050405020304" pitchFamily="18" charset="0"/>
               </a:rPr>
               <a:t>Max Pooling</a:t>
             </a:r>
@@ -14496,8 +14592,8 @@
               <a:solidFill>
                 <a:prstClr val="black"/>
               </a:solidFill>
-              <a:latin typeface="Times New Roman" panose="02020603050405020304" pitchFamily="18" charset="0"/>
-              <a:cs typeface="Times New Roman" panose="02020603050405020304" pitchFamily="18" charset="0"/>
+              <a:latin typeface="Liberation Serif" panose="02020603050405020304" pitchFamily="18" charset="0"/>
+              <a:cs typeface="Liberation Serif" panose="02020603050405020304" pitchFamily="18" charset="0"/>
             </a:endParaRPr>
           </a:p>
         </p:txBody>
@@ -14528,20 +14624,20 @@
               <a:lnSpc>
                 <a:spcPct val="150000"/>
               </a:lnSpc>
-              <a:buFont typeface="Arial" panose="020B0604020202020204" pitchFamily="34" charset="0"/>
+              <a:buFont typeface="Liberation Sans" panose="020B0604020202020204" pitchFamily="34" charset="0"/>
               <a:buChar char="•"/>
             </a:pPr>
             <a:r>
               <a:rPr lang="en-US" altLang="ko-KR" sz="2000" dirty="0" smtClean="0">
-                <a:latin typeface="Times New Roman" panose="02020603050405020304" pitchFamily="18" charset="0"/>
-                <a:cs typeface="Times New Roman" panose="02020603050405020304" pitchFamily="18" charset="0"/>
+                <a:latin typeface="Liberation Serif" panose="02020603050405020304" pitchFamily="18" charset="0"/>
+                <a:cs typeface="Liberation Serif" panose="02020603050405020304" pitchFamily="18" charset="0"/>
               </a:rPr>
               <a:t>Reducing </a:t>
             </a:r>
             <a:r>
               <a:rPr lang="en-US" altLang="ko-KR" sz="2000" dirty="0">
-                <a:latin typeface="Times New Roman" panose="02020603050405020304" pitchFamily="18" charset="0"/>
-                <a:cs typeface="Times New Roman" panose="02020603050405020304" pitchFamily="18" charset="0"/>
+                <a:latin typeface="Liberation Serif" panose="02020603050405020304" pitchFamily="18" charset="0"/>
+                <a:cs typeface="Liberation Serif" panose="02020603050405020304" pitchFamily="18" charset="0"/>
               </a:rPr>
               <a:t>the dimensionality of each feature map (Pooling)</a:t>
             </a:r>
@@ -14556,8 +14652,8 @@
             </a:pPr>
             <a:r>
               <a:rPr lang="en-US" altLang="ko-KR" dirty="0">
-                <a:latin typeface="Times New Roman" panose="02020603050405020304" pitchFamily="18" charset="0"/>
-                <a:cs typeface="Times New Roman" panose="02020603050405020304" pitchFamily="18" charset="0"/>
+                <a:latin typeface="Liberation Serif" panose="02020603050405020304" pitchFamily="18" charset="0"/>
+                <a:cs typeface="Liberation Serif" panose="02020603050405020304" pitchFamily="18" charset="0"/>
               </a:rPr>
               <a:t>The purpose of pooling is to reduce the number of parameters and computations in the network, therefore, controlling overfitting.</a:t>
             </a:r>
@@ -14572,8 +14668,8 @@
             </a:pPr>
             <a:r>
               <a:rPr lang="en-US" altLang="ko-KR" dirty="0">
-                <a:latin typeface="Times New Roman" panose="02020603050405020304" pitchFamily="18" charset="0"/>
-                <a:cs typeface="Times New Roman" panose="02020603050405020304" pitchFamily="18" charset="0"/>
+                <a:latin typeface="Liberation Serif" panose="02020603050405020304" pitchFamily="18" charset="0"/>
+                <a:cs typeface="Liberation Serif" panose="02020603050405020304" pitchFamily="18" charset="0"/>
               </a:rPr>
               <a:t>Another purpose is to make the network invariant to small transformations, distortions and translations in the input image.</a:t>
             </a:r>
@@ -14588,14 +14684,14 @@
             </a:pPr>
             <a:r>
               <a:rPr lang="en-US" altLang="ko-KR" dirty="0">
-                <a:latin typeface="Times New Roman" panose="02020603050405020304" pitchFamily="18" charset="0"/>
-                <a:cs typeface="Times New Roman" panose="02020603050405020304" pitchFamily="18" charset="0"/>
+                <a:latin typeface="Liberation Serif" panose="02020603050405020304" pitchFamily="18" charset="0"/>
+                <a:cs typeface="Liberation Serif" panose="02020603050405020304" pitchFamily="18" charset="0"/>
               </a:rPr>
               <a:t>Pooling can be of different types: Max, Average, Sum, etc.</a:t>
             </a:r>
             <a:endParaRPr lang="en-US" altLang="ko-KR" sz="2000" dirty="0">
-              <a:latin typeface="Times New Roman" panose="02020603050405020304" pitchFamily="18" charset="0"/>
-              <a:cs typeface="Times New Roman" panose="02020603050405020304" pitchFamily="18" charset="0"/>
+              <a:latin typeface="Liberation Serif" panose="02020603050405020304" pitchFamily="18" charset="0"/>
+              <a:cs typeface="Liberation Serif" panose="02020603050405020304" pitchFamily="18" charset="0"/>
             </a:endParaRPr>
           </a:p>
           <a:p>
@@ -14603,12 +14699,12 @@
               <a:lnSpc>
                 <a:spcPct val="150000"/>
               </a:lnSpc>
-              <a:buFont typeface="Arial" panose="020B0604020202020204" pitchFamily="34" charset="0"/>
+              <a:buFont typeface="Liberation Sans" panose="020B0604020202020204" pitchFamily="34" charset="0"/>
               <a:buChar char="•"/>
             </a:pPr>
             <a:endParaRPr lang="en-US" altLang="ko-KR" sz="2000" dirty="0" smtClean="0">
-              <a:latin typeface="Times New Roman" panose="02020603050405020304" pitchFamily="18" charset="0"/>
-              <a:cs typeface="Times New Roman" panose="02020603050405020304" pitchFamily="18" charset="0"/>
+              <a:latin typeface="Liberation Serif" panose="02020603050405020304" pitchFamily="18" charset="0"/>
+              <a:cs typeface="Liberation Serif" panose="02020603050405020304" pitchFamily="18" charset="0"/>
             </a:endParaRPr>
           </a:p>
           <a:p>
@@ -14616,12 +14712,12 @@
               <a:lnSpc>
                 <a:spcPct val="150000"/>
               </a:lnSpc>
-              <a:buFont typeface="Arial" panose="020B0604020202020204" pitchFamily="34" charset="0"/>
+              <a:buFont typeface="Liberation Sans" panose="020B0604020202020204" pitchFamily="34" charset="0"/>
               <a:buChar char="•"/>
             </a:pPr>
             <a:endParaRPr lang="en-US" altLang="ko-KR" sz="2000" dirty="0" smtClean="0">
-              <a:latin typeface="Times New Roman" panose="02020603050405020304" pitchFamily="18" charset="0"/>
-              <a:cs typeface="Times New Roman" panose="02020603050405020304" pitchFamily="18" charset="0"/>
+              <a:latin typeface="Liberation Serif" panose="02020603050405020304" pitchFamily="18" charset="0"/>
+              <a:cs typeface="Liberation Serif" panose="02020603050405020304" pitchFamily="18" charset="0"/>
             </a:endParaRPr>
           </a:p>
           <a:p>
@@ -14629,12 +14725,12 @@
               <a:lnSpc>
                 <a:spcPct val="150000"/>
               </a:lnSpc>
-              <a:buFont typeface="Arial" panose="020B0604020202020204" pitchFamily="34" charset="0"/>
+              <a:buFont typeface="Liberation Sans" panose="020B0604020202020204" pitchFamily="34" charset="0"/>
               <a:buChar char="•"/>
             </a:pPr>
             <a:endParaRPr lang="en-US" altLang="ko-KR" sz="2000" dirty="0">
-              <a:latin typeface="Times New Roman" panose="02020603050405020304" pitchFamily="18" charset="0"/>
-              <a:cs typeface="Times New Roman" panose="02020603050405020304" pitchFamily="18" charset="0"/>
+              <a:latin typeface="Liberation Serif" panose="02020603050405020304" pitchFamily="18" charset="0"/>
+              <a:cs typeface="Liberation Serif" panose="02020603050405020304" pitchFamily="18" charset="0"/>
             </a:endParaRPr>
           </a:p>
           <a:p>
@@ -14642,12 +14738,12 @@
               <a:lnSpc>
                 <a:spcPct val="150000"/>
               </a:lnSpc>
-              <a:buFont typeface="Arial" panose="020B0604020202020204" pitchFamily="34" charset="0"/>
+              <a:buFont typeface="Liberation Sans" panose="020B0604020202020204" pitchFamily="34" charset="0"/>
               <a:buChar char="•"/>
             </a:pPr>
             <a:endParaRPr lang="en-US" altLang="ko-KR" sz="2000" dirty="0" smtClean="0">
-              <a:latin typeface="Times New Roman" panose="02020603050405020304" pitchFamily="18" charset="0"/>
-              <a:cs typeface="Times New Roman" panose="02020603050405020304" pitchFamily="18" charset="0"/>
+              <a:latin typeface="Liberation Serif" panose="02020603050405020304" pitchFamily="18" charset="0"/>
+              <a:cs typeface="Liberation Serif" panose="02020603050405020304" pitchFamily="18" charset="0"/>
             </a:endParaRPr>
           </a:p>
           <a:p>
@@ -14655,12 +14751,12 @@
               <a:lnSpc>
                 <a:spcPct val="150000"/>
               </a:lnSpc>
-              <a:buFont typeface="Arial" panose="020B0604020202020204" pitchFamily="34" charset="0"/>
+              <a:buFont typeface="Liberation Sans" panose="020B0604020202020204" pitchFamily="34" charset="0"/>
               <a:buChar char="•"/>
             </a:pPr>
             <a:endParaRPr lang="en-US" altLang="ko-KR" sz="2000" dirty="0">
-              <a:latin typeface="Times New Roman" panose="02020603050405020304" pitchFamily="18" charset="0"/>
-              <a:cs typeface="Times New Roman" panose="02020603050405020304" pitchFamily="18" charset="0"/>
+              <a:latin typeface="Liberation Serif" panose="02020603050405020304" pitchFamily="18" charset="0"/>
+              <a:cs typeface="Liberation Serif" panose="02020603050405020304" pitchFamily="18" charset="0"/>
             </a:endParaRPr>
           </a:p>
           <a:p>
@@ -14668,12 +14764,12 @@
               <a:lnSpc>
                 <a:spcPct val="150000"/>
               </a:lnSpc>
-              <a:buFont typeface="Arial" panose="020B0604020202020204" pitchFamily="34" charset="0"/>
+              <a:buFont typeface="Liberation Sans" panose="020B0604020202020204" pitchFamily="34" charset="0"/>
               <a:buChar char="•"/>
             </a:pPr>
             <a:endParaRPr lang="en-US" altLang="ko-KR" sz="2000" dirty="0" smtClean="0">
-              <a:latin typeface="Times New Roman" panose="02020603050405020304" pitchFamily="18" charset="0"/>
-              <a:cs typeface="Times New Roman" panose="02020603050405020304" pitchFamily="18" charset="0"/>
+              <a:latin typeface="Liberation Serif" panose="02020603050405020304" pitchFamily="18" charset="0"/>
+              <a:cs typeface="Liberation Serif" panose="02020603050405020304" pitchFamily="18" charset="0"/>
             </a:endParaRPr>
           </a:p>
         </p:txBody>
@@ -14811,7 +14907,7 @@
                 <a:solidFill>
                   <a:srgbClr val="222222"/>
                 </a:solidFill>
-                <a:latin typeface="Arial" panose="020B0604020202020204" pitchFamily="34" charset="0"/>
+                <a:latin typeface="Liberation Sans" panose="020B0604020202020204" pitchFamily="34" charset="0"/>
               </a:rPr>
               <a:t>Source</a:t>
             </a:r>
@@ -14820,7 +14916,7 @@
                 <a:solidFill>
                   <a:srgbClr val="222222"/>
                 </a:solidFill>
-                <a:latin typeface="Arial" panose="020B0604020202020204" pitchFamily="34" charset="0"/>
+                <a:latin typeface="Liberation Sans" panose="020B0604020202020204" pitchFamily="34" charset="0"/>
               </a:rPr>
               <a:t>: An Intuitive Explanation of Convolutional Neural </a:t>
             </a:r>
@@ -14829,7 +14925,7 @@
                 <a:solidFill>
                   <a:srgbClr val="222222"/>
                 </a:solidFill>
-                <a:latin typeface="Arial" panose="020B0604020202020204" pitchFamily="34" charset="0"/>
+                <a:latin typeface="Liberation Sans" panose="020B0604020202020204" pitchFamily="34" charset="0"/>
               </a:rPr>
               <a:t>Networks (Data Science Blog)</a:t>
             </a:r>
@@ -14840,7 +14936,7 @@
                 <a:solidFill>
                   <a:srgbClr val="222222"/>
                 </a:solidFill>
-                <a:latin typeface="Arial" panose="020B0604020202020204" pitchFamily="34" charset="0"/>
+                <a:latin typeface="Liberation Sans" panose="020B0604020202020204" pitchFamily="34" charset="0"/>
                 <a:hlinkClick r:id="rId4"/>
               </a:rPr>
               <a:t>https://ujjwalkarn.me/2016/08/11/intuitive-explanation-convnets</a:t>
@@ -14850,7 +14946,7 @@
                 <a:solidFill>
                   <a:srgbClr val="222222"/>
                 </a:solidFill>
-                <a:latin typeface="Arial" panose="020B0604020202020204" pitchFamily="34" charset="0"/>
+                <a:latin typeface="Liberation Sans" panose="020B0604020202020204" pitchFamily="34" charset="0"/>
                 <a:hlinkClick r:id="rId4"/>
               </a:rPr>
               <a:t>/</a:t>
@@ -14859,7 +14955,7 @@
               <a:solidFill>
                 <a:srgbClr val="222222"/>
               </a:solidFill>
-              <a:latin typeface="Arial" panose="020B0604020202020204" pitchFamily="34" charset="0"/>
+              <a:latin typeface="Liberation Sans" panose="020B0604020202020204" pitchFamily="34" charset="0"/>
             </a:endParaRPr>
           </a:p>
         </p:txBody>
@@ -14956,8 +15052,8 @@
                 <a:solidFill>
                   <a:prstClr val="black"/>
                 </a:solidFill>
-                <a:latin typeface="Times New Roman" panose="02020603050405020304" pitchFamily="18" charset="0"/>
-                <a:cs typeface="Times New Roman" panose="02020603050405020304" pitchFamily="18" charset="0"/>
+                <a:latin typeface="Liberation Serif" panose="02020603050405020304" pitchFamily="18" charset="0"/>
+                <a:cs typeface="Liberation Serif" panose="02020603050405020304" pitchFamily="18" charset="0"/>
               </a:rPr>
               <a:t>What </a:t>
             </a:r>
@@ -14966,8 +15062,8 @@
                 <a:solidFill>
                   <a:prstClr val="black"/>
                 </a:solidFill>
-                <a:latin typeface="Times New Roman" panose="02020603050405020304" pitchFamily="18" charset="0"/>
-                <a:cs typeface="Times New Roman" panose="02020603050405020304" pitchFamily="18" charset="0"/>
+                <a:latin typeface="Liberation Serif" panose="02020603050405020304" pitchFamily="18" charset="0"/>
+                <a:cs typeface="Liberation Serif" panose="02020603050405020304" pitchFamily="18" charset="0"/>
               </a:rPr>
               <a:t>is Convolutional Neural Network (CNN</a:t>
             </a:r>
@@ -14976,8 +15072,8 @@
                 <a:solidFill>
                   <a:prstClr val="black"/>
                 </a:solidFill>
-                <a:latin typeface="Times New Roman" panose="02020603050405020304" pitchFamily="18" charset="0"/>
-                <a:cs typeface="Times New Roman" panose="02020603050405020304" pitchFamily="18" charset="0"/>
+                <a:latin typeface="Liberation Serif" panose="02020603050405020304" pitchFamily="18" charset="0"/>
+                <a:cs typeface="Liberation Serif" panose="02020603050405020304" pitchFamily="18" charset="0"/>
               </a:rPr>
               <a:t>)?</a:t>
             </a:r>
@@ -14985,8 +15081,8 @@
               <a:solidFill>
                 <a:prstClr val="black"/>
               </a:solidFill>
-              <a:latin typeface="Times New Roman" panose="02020603050405020304" pitchFamily="18" charset="0"/>
-              <a:cs typeface="Times New Roman" panose="02020603050405020304" pitchFamily="18" charset="0"/>
+              <a:latin typeface="Liberation Serif" panose="02020603050405020304" pitchFamily="18" charset="0"/>
+              <a:cs typeface="Liberation Serif" panose="02020603050405020304" pitchFamily="18" charset="0"/>
             </a:endParaRPr>
           </a:p>
         </p:txBody>
@@ -15052,13 +15148,13 @@
               <a:lnSpc>
                 <a:spcPct val="150000"/>
               </a:lnSpc>
-              <a:buFont typeface="Arial" panose="020B0604020202020204" pitchFamily="34" charset="0"/>
+              <a:buFont typeface="Liberation Sans" panose="020B0604020202020204" pitchFamily="34" charset="0"/>
               <a:buChar char="•"/>
             </a:pPr>
             <a:r>
               <a:rPr lang="en-US" altLang="ko-KR" sz="2000" dirty="0" smtClean="0">
-                <a:latin typeface="Times New Roman" panose="02020603050405020304" pitchFamily="18" charset="0"/>
-                <a:cs typeface="Times New Roman" panose="02020603050405020304" pitchFamily="18" charset="0"/>
+                <a:latin typeface="Liberation Serif" panose="02020603050405020304" pitchFamily="18" charset="0"/>
+                <a:cs typeface="Liberation Serif" panose="02020603050405020304" pitchFamily="18" charset="0"/>
               </a:rPr>
               <a:t>A typical example of CNN</a:t>
             </a:r>
@@ -15068,12 +15164,12 @@
               <a:lnSpc>
                 <a:spcPct val="150000"/>
               </a:lnSpc>
-              <a:buFont typeface="Arial" panose="020B0604020202020204" pitchFamily="34" charset="0"/>
+              <a:buFont typeface="Liberation Sans" panose="020B0604020202020204" pitchFamily="34" charset="0"/>
               <a:buChar char="•"/>
             </a:pPr>
             <a:endParaRPr lang="en-US" altLang="ko-KR" sz="1600" dirty="0" smtClean="0">
-              <a:latin typeface="Times New Roman" panose="02020603050405020304" pitchFamily="18" charset="0"/>
-              <a:cs typeface="Times New Roman" panose="02020603050405020304" pitchFamily="18" charset="0"/>
+              <a:latin typeface="Liberation Serif" panose="02020603050405020304" pitchFamily="18" charset="0"/>
+              <a:cs typeface="Liberation Serif" panose="02020603050405020304" pitchFamily="18" charset="0"/>
             </a:endParaRPr>
           </a:p>
           <a:p>
@@ -15081,12 +15177,12 @@
               <a:lnSpc>
                 <a:spcPct val="150000"/>
               </a:lnSpc>
-              <a:buFont typeface="Arial" panose="020B0604020202020204" pitchFamily="34" charset="0"/>
+              <a:buFont typeface="Liberation Sans" panose="020B0604020202020204" pitchFamily="34" charset="0"/>
               <a:buChar char="•"/>
             </a:pPr>
             <a:endParaRPr lang="en-US" altLang="ko-KR" sz="1600" dirty="0">
-              <a:latin typeface="Times New Roman" panose="02020603050405020304" pitchFamily="18" charset="0"/>
-              <a:cs typeface="Times New Roman" panose="02020603050405020304" pitchFamily="18" charset="0"/>
+              <a:latin typeface="Liberation Serif" panose="02020603050405020304" pitchFamily="18" charset="0"/>
+              <a:cs typeface="Liberation Serif" panose="02020603050405020304" pitchFamily="18" charset="0"/>
             </a:endParaRPr>
           </a:p>
           <a:p>
@@ -15094,12 +15190,12 @@
               <a:lnSpc>
                 <a:spcPct val="150000"/>
               </a:lnSpc>
-              <a:buFont typeface="Arial" panose="020B0604020202020204" pitchFamily="34" charset="0"/>
+              <a:buFont typeface="Liberation Sans" panose="020B0604020202020204" pitchFamily="34" charset="0"/>
               <a:buChar char="•"/>
             </a:pPr>
             <a:endParaRPr lang="en-US" altLang="ko-KR" sz="1600" dirty="0" smtClean="0">
-              <a:latin typeface="Times New Roman" panose="02020603050405020304" pitchFamily="18" charset="0"/>
-              <a:cs typeface="Times New Roman" panose="02020603050405020304" pitchFamily="18" charset="0"/>
+              <a:latin typeface="Liberation Serif" panose="02020603050405020304" pitchFamily="18" charset="0"/>
+              <a:cs typeface="Liberation Serif" panose="02020603050405020304" pitchFamily="18" charset="0"/>
             </a:endParaRPr>
           </a:p>
           <a:p>
@@ -15107,12 +15203,12 @@
               <a:lnSpc>
                 <a:spcPct val="150000"/>
               </a:lnSpc>
-              <a:buFont typeface="Arial" panose="020B0604020202020204" pitchFamily="34" charset="0"/>
+              <a:buFont typeface="Liberation Sans" panose="020B0604020202020204" pitchFamily="34" charset="0"/>
               <a:buChar char="•"/>
             </a:pPr>
             <a:endParaRPr lang="en-US" altLang="ko-KR" sz="1600" dirty="0">
-              <a:latin typeface="Times New Roman" panose="02020603050405020304" pitchFamily="18" charset="0"/>
-              <a:cs typeface="Times New Roman" panose="02020603050405020304" pitchFamily="18" charset="0"/>
+              <a:latin typeface="Liberation Serif" panose="02020603050405020304" pitchFamily="18" charset="0"/>
+              <a:cs typeface="Liberation Serif" panose="02020603050405020304" pitchFamily="18" charset="0"/>
             </a:endParaRPr>
           </a:p>
           <a:p>
@@ -15124,8 +15220,8 @@
               <a:buChar char="Ø"/>
             </a:pPr>
             <a:endParaRPr lang="en-US" altLang="ko-KR" sz="1600" dirty="0" smtClean="0">
-              <a:latin typeface="Times New Roman" panose="02020603050405020304" pitchFamily="18" charset="0"/>
-              <a:cs typeface="Times New Roman" panose="02020603050405020304" pitchFamily="18" charset="0"/>
+              <a:latin typeface="Liberation Serif" panose="02020603050405020304" pitchFamily="18" charset="0"/>
+              <a:cs typeface="Liberation Serif" panose="02020603050405020304" pitchFamily="18" charset="0"/>
             </a:endParaRPr>
           </a:p>
           <a:p>
@@ -15137,8 +15233,8 @@
               <a:buChar char="Ø"/>
             </a:pPr>
             <a:endParaRPr lang="en-US" altLang="ko-KR" sz="1600" dirty="0">
-              <a:latin typeface="Times New Roman" panose="02020603050405020304" pitchFamily="18" charset="0"/>
-              <a:cs typeface="Times New Roman" panose="02020603050405020304" pitchFamily="18" charset="0"/>
+              <a:latin typeface="Liberation Serif" panose="02020603050405020304" pitchFamily="18" charset="0"/>
+              <a:cs typeface="Liberation Serif" panose="02020603050405020304" pitchFamily="18" charset="0"/>
             </a:endParaRPr>
           </a:p>
           <a:p>
@@ -15150,8 +15246,8 @@
               <a:buChar char="Ø"/>
             </a:pPr>
             <a:endParaRPr lang="en-US" altLang="ko-KR" sz="1600" dirty="0" smtClean="0">
-              <a:latin typeface="Times New Roman" panose="02020603050405020304" pitchFamily="18" charset="0"/>
-              <a:cs typeface="Times New Roman" panose="02020603050405020304" pitchFamily="18" charset="0"/>
+              <a:latin typeface="Liberation Serif" panose="02020603050405020304" pitchFamily="18" charset="0"/>
+              <a:cs typeface="Liberation Serif" panose="02020603050405020304" pitchFamily="18" charset="0"/>
             </a:endParaRPr>
           </a:p>
           <a:p>
@@ -15163,8 +15259,8 @@
               <a:buChar char="Ø"/>
             </a:pPr>
             <a:endParaRPr lang="en-US" altLang="ko-KR" sz="1600" dirty="0" smtClean="0">
-              <a:latin typeface="Times New Roman" panose="02020603050405020304" pitchFamily="18" charset="0"/>
-              <a:cs typeface="Times New Roman" panose="02020603050405020304" pitchFamily="18" charset="0"/>
+              <a:latin typeface="Liberation Serif" panose="02020603050405020304" pitchFamily="18" charset="0"/>
+              <a:cs typeface="Liberation Serif" panose="02020603050405020304" pitchFamily="18" charset="0"/>
             </a:endParaRPr>
           </a:p>
           <a:p>
@@ -15177,113 +15273,113 @@
             </a:pPr>
             <a:r>
               <a:rPr lang="en-US" altLang="ko-KR" dirty="0" smtClean="0">
-                <a:latin typeface="Times New Roman" panose="02020603050405020304" pitchFamily="18" charset="0"/>
-                <a:cs typeface="Times New Roman" panose="02020603050405020304" pitchFamily="18" charset="0"/>
+                <a:latin typeface="Liberation Serif" panose="02020603050405020304" pitchFamily="18" charset="0"/>
+                <a:cs typeface="Liberation Serif" panose="02020603050405020304" pitchFamily="18" charset="0"/>
               </a:rPr>
               <a:t>Inputs (2-dimension</a:t>
             </a:r>
             <a:r>
               <a:rPr lang="en-US" altLang="ko-KR" dirty="0" smtClean="0">
-                <a:latin typeface="Cambria Math" panose="02040503050406030204" pitchFamily="18" charset="0"/>
-                <a:ea typeface="Cambria Math" panose="02040503050406030204" pitchFamily="18" charset="0"/>
-                <a:cs typeface="Times New Roman" panose="02020603050405020304" pitchFamily="18" charset="0"/>
+                <a:latin typeface="Caladea" panose="02040503050406030204" pitchFamily="18" charset="0"/>
+                <a:ea typeface="Caladea" panose="02040503050406030204" pitchFamily="18" charset="0"/>
+                <a:cs typeface="Liberation Serif" panose="02020603050405020304" pitchFamily="18" charset="0"/>
               </a:rPr>
               <a:t> ⨯ channels)</a:t>
             </a:r>
             <a:r>
               <a:rPr lang="en-US" altLang="ko-KR" dirty="0" smtClean="0">
-                <a:latin typeface="Times New Roman" panose="02020603050405020304" pitchFamily="18" charset="0"/>
-                <a:cs typeface="Times New Roman" panose="02020603050405020304" pitchFamily="18" charset="0"/>
+                <a:latin typeface="Liberation Serif" panose="02020603050405020304" pitchFamily="18" charset="0"/>
+                <a:cs typeface="Liberation Serif" panose="02020603050405020304" pitchFamily="18" charset="0"/>
               </a:rPr>
               <a:t> → [Convolution </a:t>
             </a:r>
             <a:r>
               <a:rPr lang="en-US" altLang="ko-KR" dirty="0">
-                <a:latin typeface="Times New Roman" panose="02020603050405020304" pitchFamily="18" charset="0"/>
-                <a:cs typeface="Times New Roman" panose="02020603050405020304" pitchFamily="18" charset="0"/>
+                <a:latin typeface="Liberation Serif" panose="02020603050405020304" pitchFamily="18" charset="0"/>
+                <a:cs typeface="Liberation Serif" panose="02020603050405020304" pitchFamily="18" charset="0"/>
               </a:rPr>
               <a:t>-&gt; </a:t>
             </a:r>
             <a:r>
               <a:rPr lang="en-US" altLang="ko-KR" dirty="0" err="1">
-                <a:latin typeface="Times New Roman" panose="02020603050405020304" pitchFamily="18" charset="0"/>
-                <a:cs typeface="Times New Roman" panose="02020603050405020304" pitchFamily="18" charset="0"/>
+                <a:latin typeface="Liberation Serif" panose="02020603050405020304" pitchFamily="18" charset="0"/>
+                <a:cs typeface="Liberation Serif" panose="02020603050405020304" pitchFamily="18" charset="0"/>
               </a:rPr>
               <a:t>ReLu</a:t>
             </a:r>
             <a:r>
               <a:rPr lang="en-US" altLang="ko-KR" dirty="0">
-                <a:latin typeface="Times New Roman" panose="02020603050405020304" pitchFamily="18" charset="0"/>
-                <a:cs typeface="Times New Roman" panose="02020603050405020304" pitchFamily="18" charset="0"/>
+                <a:latin typeface="Liberation Serif" panose="02020603050405020304" pitchFamily="18" charset="0"/>
+                <a:cs typeface="Liberation Serif" panose="02020603050405020304" pitchFamily="18" charset="0"/>
               </a:rPr>
               <a:t> -&gt; </a:t>
             </a:r>
             <a:r>
               <a:rPr lang="en-US" altLang="ko-KR" dirty="0" smtClean="0">
-                <a:latin typeface="Times New Roman" panose="02020603050405020304" pitchFamily="18" charset="0"/>
-                <a:cs typeface="Times New Roman" panose="02020603050405020304" pitchFamily="18" charset="0"/>
+                <a:latin typeface="Liberation Serif" panose="02020603050405020304" pitchFamily="18" charset="0"/>
+                <a:cs typeface="Liberation Serif" panose="02020603050405020304" pitchFamily="18" charset="0"/>
               </a:rPr>
               <a:t>Pooling] </a:t>
             </a:r>
             <a:r>
               <a:rPr lang="en-US" altLang="ko-KR" dirty="0">
-                <a:latin typeface="Times New Roman" panose="02020603050405020304" pitchFamily="18" charset="0"/>
-                <a:cs typeface="Times New Roman" panose="02020603050405020304" pitchFamily="18" charset="0"/>
+                <a:latin typeface="Liberation Serif" panose="02020603050405020304" pitchFamily="18" charset="0"/>
+                <a:cs typeface="Liberation Serif" panose="02020603050405020304" pitchFamily="18" charset="0"/>
               </a:rPr>
               <a:t>→ </a:t>
             </a:r>
             <a:r>
               <a:rPr lang="en-US" altLang="ko-KR" dirty="0" smtClean="0">
-                <a:latin typeface="Times New Roman" panose="02020603050405020304" pitchFamily="18" charset="0"/>
-                <a:cs typeface="Times New Roman" panose="02020603050405020304" pitchFamily="18" charset="0"/>
+                <a:latin typeface="Liberation Serif" panose="02020603050405020304" pitchFamily="18" charset="0"/>
+                <a:cs typeface="Liberation Serif" panose="02020603050405020304" pitchFamily="18" charset="0"/>
               </a:rPr>
               <a:t>… </a:t>
             </a:r>
             <a:r>
               <a:rPr lang="en-US" altLang="ko-KR" dirty="0">
-                <a:latin typeface="Times New Roman" panose="02020603050405020304" pitchFamily="18" charset="0"/>
-                <a:cs typeface="Times New Roman" panose="02020603050405020304" pitchFamily="18" charset="0"/>
+                <a:latin typeface="Liberation Serif" panose="02020603050405020304" pitchFamily="18" charset="0"/>
+                <a:cs typeface="Liberation Serif" panose="02020603050405020304" pitchFamily="18" charset="0"/>
               </a:rPr>
               <a:t>→ </a:t>
             </a:r>
             <a:r>
               <a:rPr lang="en-US" altLang="ko-KR" dirty="0" smtClean="0">
-                <a:latin typeface="Times New Roman" panose="02020603050405020304" pitchFamily="18" charset="0"/>
-                <a:cs typeface="Times New Roman" panose="02020603050405020304" pitchFamily="18" charset="0"/>
+                <a:latin typeface="Liberation Serif" panose="02020603050405020304" pitchFamily="18" charset="0"/>
+                <a:cs typeface="Liberation Serif" panose="02020603050405020304" pitchFamily="18" charset="0"/>
               </a:rPr>
               <a:t>[</a:t>
             </a:r>
             <a:r>
               <a:rPr lang="en-US" altLang="ko-KR" dirty="0">
-                <a:latin typeface="Times New Roman" panose="02020603050405020304" pitchFamily="18" charset="0"/>
-                <a:cs typeface="Times New Roman" panose="02020603050405020304" pitchFamily="18" charset="0"/>
+                <a:latin typeface="Liberation Serif" panose="02020603050405020304" pitchFamily="18" charset="0"/>
+                <a:cs typeface="Liberation Serif" panose="02020603050405020304" pitchFamily="18" charset="0"/>
               </a:rPr>
               <a:t>Convolution -&gt; </a:t>
             </a:r>
             <a:r>
               <a:rPr lang="en-US" altLang="ko-KR" dirty="0" err="1">
-                <a:latin typeface="Times New Roman" panose="02020603050405020304" pitchFamily="18" charset="0"/>
-                <a:cs typeface="Times New Roman" panose="02020603050405020304" pitchFamily="18" charset="0"/>
+                <a:latin typeface="Liberation Serif" panose="02020603050405020304" pitchFamily="18" charset="0"/>
+                <a:cs typeface="Liberation Serif" panose="02020603050405020304" pitchFamily="18" charset="0"/>
               </a:rPr>
               <a:t>ReLu</a:t>
             </a:r>
             <a:r>
               <a:rPr lang="en-US" altLang="ko-KR" dirty="0">
-                <a:latin typeface="Times New Roman" panose="02020603050405020304" pitchFamily="18" charset="0"/>
-                <a:cs typeface="Times New Roman" panose="02020603050405020304" pitchFamily="18" charset="0"/>
+                <a:latin typeface="Liberation Serif" panose="02020603050405020304" pitchFamily="18" charset="0"/>
+                <a:cs typeface="Liberation Serif" panose="02020603050405020304" pitchFamily="18" charset="0"/>
               </a:rPr>
               <a:t> -&gt; Pooling</a:t>
             </a:r>
             <a:r>
               <a:rPr lang="en-US" altLang="ko-KR" dirty="0" smtClean="0">
-                <a:latin typeface="Times New Roman" panose="02020603050405020304" pitchFamily="18" charset="0"/>
-                <a:cs typeface="Times New Roman" panose="02020603050405020304" pitchFamily="18" charset="0"/>
+                <a:latin typeface="Liberation Serif" panose="02020603050405020304" pitchFamily="18" charset="0"/>
+                <a:cs typeface="Liberation Serif" panose="02020603050405020304" pitchFamily="18" charset="0"/>
               </a:rPr>
               <a:t>] → Fully connected layer                     → Output prediction (Multi-class classification)</a:t>
             </a:r>
             <a:endParaRPr lang="en-US" altLang="ko-KR" dirty="0">
-              <a:latin typeface="Times New Roman" panose="02020603050405020304" pitchFamily="18" charset="0"/>
-              <a:cs typeface="Times New Roman" panose="02020603050405020304" pitchFamily="18" charset="0"/>
+              <a:latin typeface="Liberation Serif" panose="02020603050405020304" pitchFamily="18" charset="0"/>
+              <a:cs typeface="Liberation Serif" panose="02020603050405020304" pitchFamily="18" charset="0"/>
             </a:endParaRPr>
           </a:p>
         </p:txBody>
@@ -15456,8 +15552,8 @@
                 <a:solidFill>
                   <a:prstClr val="black"/>
                 </a:solidFill>
-                <a:latin typeface="Times New Roman" panose="02020603050405020304" pitchFamily="18" charset="0"/>
-                <a:cs typeface="Times New Roman" panose="02020603050405020304" pitchFamily="18" charset="0"/>
+                <a:latin typeface="Liberation Serif" panose="02020603050405020304" pitchFamily="18" charset="0"/>
+                <a:cs typeface="Liberation Serif" panose="02020603050405020304" pitchFamily="18" charset="0"/>
               </a:rPr>
               <a:t>Convolutional Neural Network (CNN) </a:t>
             </a:r>
@@ -15490,19 +15586,19 @@
               <a:lnSpc>
                 <a:spcPct val="150000"/>
               </a:lnSpc>
-              <a:buFont typeface="Arial" panose="020B0604020202020204" pitchFamily="34" charset="0"/>
+              <a:buFont typeface="Liberation Sans" panose="020B0604020202020204" pitchFamily="34" charset="0"/>
               <a:buChar char="•"/>
             </a:pPr>
             <a:r>
               <a:rPr lang="en-US" altLang="ko-KR" sz="2000" dirty="0" smtClean="0">
-                <a:latin typeface="Times New Roman" panose="02020603050405020304" pitchFamily="18" charset="0"/>
-                <a:cs typeface="Times New Roman" panose="02020603050405020304" pitchFamily="18" charset="0"/>
+                <a:latin typeface="Liberation Serif" panose="02020603050405020304" pitchFamily="18" charset="0"/>
+                <a:cs typeface="Liberation Serif" panose="02020603050405020304" pitchFamily="18" charset="0"/>
               </a:rPr>
               <a:t>CNN automatically learns the best filters to extract the feature maps for image classifications through back propagation.</a:t>
             </a:r>
             <a:endParaRPr lang="en-US" altLang="ko-KR" sz="2000" dirty="0">
-              <a:latin typeface="Times New Roman" panose="02020603050405020304" pitchFamily="18" charset="0"/>
-              <a:cs typeface="Times New Roman" panose="02020603050405020304" pitchFamily="18" charset="0"/>
+              <a:latin typeface="Liberation Serif" panose="02020603050405020304" pitchFamily="18" charset="0"/>
+              <a:cs typeface="Liberation Serif" panose="02020603050405020304" pitchFamily="18" charset="0"/>
             </a:endParaRPr>
           </a:p>
         </p:txBody>
@@ -15536,7 +15632,7 @@
                 <a:solidFill>
                   <a:srgbClr val="222222"/>
                 </a:solidFill>
-                <a:latin typeface="Arial" panose="020B0604020202020204" pitchFamily="34" charset="0"/>
+                <a:latin typeface="Liberation Sans" panose="020B0604020202020204" pitchFamily="34" charset="0"/>
               </a:rPr>
               <a:t>Source: </a:t>
             </a:r>
@@ -15545,7 +15641,7 @@
                 <a:solidFill>
                   <a:srgbClr val="222222"/>
                 </a:solidFill>
-                <a:latin typeface="Arial" panose="020B0604020202020204" pitchFamily="34" charset="0"/>
+                <a:latin typeface="Liberation Sans" panose="020B0604020202020204" pitchFamily="34" charset="0"/>
               </a:rPr>
               <a:t>Image </a:t>
             </a:r>
@@ -15554,7 +15650,7 @@
                 <a:solidFill>
                   <a:srgbClr val="222222"/>
                 </a:solidFill>
-                <a:latin typeface="Arial" panose="020B0604020202020204" pitchFamily="34" charset="0"/>
+                <a:latin typeface="Liberation Sans" panose="020B0604020202020204" pitchFamily="34" charset="0"/>
               </a:rPr>
               <a:t>Kernels demo, </a:t>
             </a:r>
@@ -15563,7 +15659,7 @@
                 <a:solidFill>
                   <a:srgbClr val="222222"/>
                 </a:solidFill>
-                <a:latin typeface="Arial" panose="020B0604020202020204" pitchFamily="34" charset="0"/>
+                <a:latin typeface="Liberation Sans" panose="020B0604020202020204" pitchFamily="34" charset="0"/>
                 <a:hlinkClick r:id="rId3"/>
               </a:rPr>
               <a:t>http://setosa.io/ev/image-kernels</a:t>
@@ -15573,7 +15669,7 @@
                 <a:solidFill>
                   <a:srgbClr val="222222"/>
                 </a:solidFill>
-                <a:latin typeface="Arial" panose="020B0604020202020204" pitchFamily="34" charset="0"/>
+                <a:latin typeface="Liberation Sans" panose="020B0604020202020204" pitchFamily="34" charset="0"/>
                 <a:hlinkClick r:id="rId3"/>
               </a:rPr>
               <a:t>/</a:t>
@@ -15583,7 +15679,7 @@
                 <a:solidFill>
                   <a:srgbClr val="222222"/>
                 </a:solidFill>
-                <a:latin typeface="Arial" panose="020B0604020202020204" pitchFamily="34" charset="0"/>
+                <a:latin typeface="Liberation Sans" panose="020B0604020202020204" pitchFamily="34" charset="0"/>
               </a:rPr>
               <a:t> </a:t>
             </a:r>
@@ -15591,7 +15687,7 @@
               <a:solidFill>
                 <a:srgbClr val="222222"/>
               </a:solidFill>
-              <a:latin typeface="Arial" panose="020B0604020202020204" pitchFamily="34" charset="0"/>
+              <a:latin typeface="Liberation Sans" panose="020B0604020202020204" pitchFamily="34" charset="0"/>
             </a:endParaRPr>
           </a:p>
         </p:txBody>
@@ -15723,14 +15819,14 @@
             </a:pPr>
             <a:r>
               <a:rPr lang="en-US" altLang="ko-KR" sz="1400" dirty="0" smtClean="0">
-                <a:latin typeface="Times New Roman" panose="02020603050405020304" pitchFamily="18" charset="0"/>
-                <a:cs typeface="Times New Roman" panose="02020603050405020304" pitchFamily="18" charset="0"/>
+                <a:latin typeface="Liberation Serif" panose="02020603050405020304" pitchFamily="18" charset="0"/>
+                <a:cs typeface="Liberation Serif" panose="02020603050405020304" pitchFamily="18" charset="0"/>
               </a:rPr>
               <a:t>Emboss</a:t>
             </a:r>
             <a:endParaRPr lang="en-US" altLang="ko-KR" sz="1400" dirty="0">
-              <a:latin typeface="Times New Roman" panose="02020603050405020304" pitchFamily="18" charset="0"/>
-              <a:cs typeface="Times New Roman" panose="02020603050405020304" pitchFamily="18" charset="0"/>
+              <a:latin typeface="Liberation Serif" panose="02020603050405020304" pitchFamily="18" charset="0"/>
+              <a:cs typeface="Liberation Serif" panose="02020603050405020304" pitchFamily="18" charset="0"/>
             </a:endParaRPr>
           </a:p>
         </p:txBody>
@@ -15763,14 +15859,14 @@
             </a:pPr>
             <a:r>
               <a:rPr lang="en-US" altLang="ko-KR" sz="1400" dirty="0" smtClean="0">
-                <a:latin typeface="Times New Roman" panose="02020603050405020304" pitchFamily="18" charset="0"/>
-                <a:cs typeface="Times New Roman" panose="02020603050405020304" pitchFamily="18" charset="0"/>
+                <a:latin typeface="Liberation Serif" panose="02020603050405020304" pitchFamily="18" charset="0"/>
+                <a:cs typeface="Liberation Serif" panose="02020603050405020304" pitchFamily="18" charset="0"/>
               </a:rPr>
               <a:t>Edge detect</a:t>
             </a:r>
             <a:endParaRPr lang="en-US" altLang="ko-KR" sz="1400" dirty="0">
-              <a:latin typeface="Times New Roman" panose="02020603050405020304" pitchFamily="18" charset="0"/>
-              <a:cs typeface="Times New Roman" panose="02020603050405020304" pitchFamily="18" charset="0"/>
+              <a:latin typeface="Liberation Serif" panose="02020603050405020304" pitchFamily="18" charset="0"/>
+              <a:cs typeface="Liberation Serif" panose="02020603050405020304" pitchFamily="18" charset="0"/>
             </a:endParaRPr>
           </a:p>
         </p:txBody>
@@ -15803,14 +15899,14 @@
             </a:pPr>
             <a:r>
               <a:rPr lang="en-US" altLang="ko-KR" sz="1400" dirty="0" smtClean="0">
-                <a:latin typeface="Times New Roman" panose="02020603050405020304" pitchFamily="18" charset="0"/>
-                <a:cs typeface="Times New Roman" panose="02020603050405020304" pitchFamily="18" charset="0"/>
+                <a:latin typeface="Liberation Serif" panose="02020603050405020304" pitchFamily="18" charset="0"/>
+                <a:cs typeface="Liberation Serif" panose="02020603050405020304" pitchFamily="18" charset="0"/>
               </a:rPr>
               <a:t>Sharpen</a:t>
             </a:r>
             <a:endParaRPr lang="en-US" altLang="ko-KR" sz="1400" dirty="0">
-              <a:latin typeface="Times New Roman" panose="02020603050405020304" pitchFamily="18" charset="0"/>
-              <a:cs typeface="Times New Roman" panose="02020603050405020304" pitchFamily="18" charset="0"/>
+              <a:latin typeface="Liberation Serif" panose="02020603050405020304" pitchFamily="18" charset="0"/>
+              <a:cs typeface="Liberation Serif" panose="02020603050405020304" pitchFamily="18" charset="0"/>
             </a:endParaRPr>
           </a:p>
         </p:txBody>
@@ -15952,8 +16048,8 @@
           <a:p>
             <a:r>
               <a:rPr lang="en-US" altLang="ko-KR" sz="1400" dirty="0" smtClean="0">
-                <a:latin typeface="Times New Roman" panose="02020603050405020304" pitchFamily="18" charset="0"/>
-                <a:cs typeface="Times New Roman" panose="02020603050405020304" pitchFamily="18" charset="0"/>
+                <a:latin typeface="Liberation Serif" panose="02020603050405020304" pitchFamily="18" charset="0"/>
+                <a:cs typeface="Liberation Serif" panose="02020603050405020304" pitchFamily="18" charset="0"/>
               </a:rPr>
               <a:t>-&gt; pooling</a:t>
             </a:r>
@@ -15961,8 +16057,8 @@
           <a:p>
             <a:r>
               <a:rPr lang="en-US" altLang="ko-KR" sz="1400" dirty="0" smtClean="0">
-                <a:latin typeface="Times New Roman" panose="02020603050405020304" pitchFamily="18" charset="0"/>
-                <a:cs typeface="Times New Roman" panose="02020603050405020304" pitchFamily="18" charset="0"/>
+                <a:latin typeface="Liberation Serif" panose="02020603050405020304" pitchFamily="18" charset="0"/>
+                <a:cs typeface="Liberation Serif" panose="02020603050405020304" pitchFamily="18" charset="0"/>
               </a:rPr>
               <a:t>-&gt; convolution </a:t>
             </a:r>
@@ -15970,8 +16066,8 @@
           <a:p>
             <a:r>
               <a:rPr lang="en-US" altLang="ko-KR" sz="1400" dirty="0" smtClean="0">
-                <a:latin typeface="Times New Roman" panose="02020603050405020304" pitchFamily="18" charset="0"/>
-                <a:cs typeface="Times New Roman" panose="02020603050405020304" pitchFamily="18" charset="0"/>
+                <a:latin typeface="Liberation Serif" panose="02020603050405020304" pitchFamily="18" charset="0"/>
+                <a:cs typeface="Liberation Serif" panose="02020603050405020304" pitchFamily="18" charset="0"/>
               </a:rPr>
               <a:t>-&gt; pooling </a:t>
             </a:r>
@@ -15979,8 +16075,8 @@
           <a:p>
             <a:r>
               <a:rPr lang="en-US" altLang="ko-KR" sz="1400" dirty="0" smtClean="0">
-                <a:latin typeface="Times New Roman" panose="02020603050405020304" pitchFamily="18" charset="0"/>
-                <a:cs typeface="Times New Roman" panose="02020603050405020304" pitchFamily="18" charset="0"/>
+                <a:latin typeface="Liberation Serif" panose="02020603050405020304" pitchFamily="18" charset="0"/>
+                <a:cs typeface="Liberation Serif" panose="02020603050405020304" pitchFamily="18" charset="0"/>
               </a:rPr>
               <a:t>-&gt; convolution</a:t>
             </a:r>
@@ -15988,14 +16084,14 @@
           <a:p>
             <a:r>
               <a:rPr lang="en-US" altLang="ko-KR" sz="1400" dirty="0" smtClean="0">
-                <a:latin typeface="Times New Roman" panose="02020603050405020304" pitchFamily="18" charset="0"/>
-                <a:cs typeface="Times New Roman" panose="02020603050405020304" pitchFamily="18" charset="0"/>
+                <a:latin typeface="Liberation Serif" panose="02020603050405020304" pitchFamily="18" charset="0"/>
+                <a:cs typeface="Liberation Serif" panose="02020603050405020304" pitchFamily="18" charset="0"/>
               </a:rPr>
               <a:t>…</a:t>
             </a:r>
             <a:endParaRPr lang="ko-KR" altLang="en-US" sz="1400" dirty="0">
-              <a:latin typeface="Times New Roman" panose="02020603050405020304" pitchFamily="18" charset="0"/>
-              <a:cs typeface="Times New Roman" panose="02020603050405020304" pitchFamily="18" charset="0"/>
+              <a:latin typeface="Liberation Serif" panose="02020603050405020304" pitchFamily="18" charset="0"/>
+              <a:cs typeface="Liberation Serif" panose="02020603050405020304" pitchFamily="18" charset="0"/>
             </a:endParaRPr>
           </a:p>
         </p:txBody>
@@ -16067,8 +16163,8 @@
                 <a:solidFill>
                   <a:srgbClr val="C00000"/>
                 </a:solidFill>
-                <a:latin typeface="Times New Roman" panose="02020603050405020304" pitchFamily="18" charset="0"/>
-                <a:cs typeface="Times New Roman" panose="02020603050405020304" pitchFamily="18" charset="0"/>
+                <a:latin typeface="Liberation Serif" panose="02020603050405020304" pitchFamily="18" charset="0"/>
+                <a:cs typeface="Liberation Serif" panose="02020603050405020304" pitchFamily="18" charset="0"/>
               </a:rPr>
               <a:t>Output </a:t>
             </a:r>
@@ -16077,8 +16173,8 @@
                 <a:solidFill>
                   <a:srgbClr val="C00000"/>
                 </a:solidFill>
-                <a:latin typeface="Times New Roman" panose="02020603050405020304" pitchFamily="18" charset="0"/>
-                <a:cs typeface="Times New Roman" panose="02020603050405020304" pitchFamily="18" charset="0"/>
+                <a:latin typeface="Liberation Serif" panose="02020603050405020304" pitchFamily="18" charset="0"/>
+                <a:cs typeface="Liberation Serif" panose="02020603050405020304" pitchFamily="18" charset="0"/>
               </a:rPr>
               <a:t>layer</a:t>
             </a:r>
@@ -16111,8 +16207,8 @@
                 <a:solidFill>
                   <a:srgbClr val="C00000"/>
                 </a:solidFill>
-                <a:latin typeface="Times New Roman" panose="02020603050405020304" pitchFamily="18" charset="0"/>
-                <a:cs typeface="Times New Roman" panose="02020603050405020304" pitchFamily="18" charset="0"/>
+                <a:latin typeface="Liberation Serif" panose="02020603050405020304" pitchFamily="18" charset="0"/>
+                <a:cs typeface="Liberation Serif" panose="02020603050405020304" pitchFamily="18" charset="0"/>
               </a:rPr>
               <a:t>Convolution </a:t>
             </a:r>
@@ -16123,8 +16219,8 @@
                 <a:solidFill>
                   <a:srgbClr val="C00000"/>
                 </a:solidFill>
-                <a:latin typeface="Times New Roman" panose="02020603050405020304" pitchFamily="18" charset="0"/>
-                <a:cs typeface="Times New Roman" panose="02020603050405020304" pitchFamily="18" charset="0"/>
+                <a:latin typeface="Liberation Serif" panose="02020603050405020304" pitchFamily="18" charset="0"/>
+                <a:cs typeface="Liberation Serif" panose="02020603050405020304" pitchFamily="18" charset="0"/>
               </a:rPr>
               <a:t>Filter (kernel)</a:t>
             </a:r>
@@ -16132,8 +16228,8 @@
               <a:solidFill>
                 <a:srgbClr val="C00000"/>
               </a:solidFill>
-              <a:latin typeface="Times New Roman" panose="02020603050405020304" pitchFamily="18" charset="0"/>
-              <a:cs typeface="Times New Roman" panose="02020603050405020304" pitchFamily="18" charset="0"/>
+              <a:latin typeface="Liberation Serif" panose="02020603050405020304" pitchFamily="18" charset="0"/>
+              <a:cs typeface="Liberation Serif" panose="02020603050405020304" pitchFamily="18" charset="0"/>
             </a:endParaRPr>
           </a:p>
         </p:txBody>
@@ -16164,8 +16260,8 @@
                 <a:solidFill>
                   <a:srgbClr val="C00000"/>
                 </a:solidFill>
-                <a:latin typeface="Times New Roman" panose="02020603050405020304" pitchFamily="18" charset="0"/>
-                <a:cs typeface="Times New Roman" panose="02020603050405020304" pitchFamily="18" charset="0"/>
+                <a:latin typeface="Liberation Serif" panose="02020603050405020304" pitchFamily="18" charset="0"/>
+                <a:cs typeface="Liberation Serif" panose="02020603050405020304" pitchFamily="18" charset="0"/>
               </a:rPr>
               <a:t>Feature maps</a:t>
             </a:r>
@@ -16173,8 +16269,8 @@
               <a:solidFill>
                 <a:srgbClr val="C00000"/>
               </a:solidFill>
-              <a:latin typeface="Times New Roman" panose="02020603050405020304" pitchFamily="18" charset="0"/>
-              <a:cs typeface="Times New Roman" panose="02020603050405020304" pitchFamily="18" charset="0"/>
+              <a:latin typeface="Liberation Serif" panose="02020603050405020304" pitchFamily="18" charset="0"/>
+              <a:cs typeface="Liberation Serif" panose="02020603050405020304" pitchFamily="18" charset="0"/>
             </a:endParaRPr>
           </a:p>
         </p:txBody>
@@ -16202,14 +16298,14 @@
           <a:p>
             <a:r>
               <a:rPr lang="en-US" altLang="ko-KR" sz="1400" i="1" dirty="0" smtClean="0">
-                <a:latin typeface="Times New Roman" panose="02020603050405020304" pitchFamily="18" charset="0"/>
-                <a:cs typeface="Times New Roman" panose="02020603050405020304" pitchFamily="18" charset="0"/>
+                <a:latin typeface="Liberation Serif" panose="02020603050405020304" pitchFamily="18" charset="0"/>
+                <a:cs typeface="Liberation Serif" panose="02020603050405020304" pitchFamily="18" charset="0"/>
               </a:rPr>
               <a:t>Input image</a:t>
             </a:r>
             <a:endParaRPr lang="en-US" altLang="ko-KR" sz="1400" i="1" dirty="0">
-              <a:latin typeface="Times New Roman" panose="02020603050405020304" pitchFamily="18" charset="0"/>
-              <a:cs typeface="Times New Roman" panose="02020603050405020304" pitchFamily="18" charset="0"/>
+              <a:latin typeface="Liberation Serif" panose="02020603050405020304" pitchFamily="18" charset="0"/>
+              <a:cs typeface="Liberation Serif" panose="02020603050405020304" pitchFamily="18" charset="0"/>
             </a:endParaRPr>
           </a:p>
         </p:txBody>
@@ -16250,8 +16346,8 @@
           <a:p>
             <a:pPr algn="ctr"/>
             <a:endParaRPr lang="ko-KR" altLang="en-US" sz="1000" dirty="0">
-              <a:latin typeface="Times New Roman" panose="02020603050405020304" pitchFamily="18" charset="0"/>
-              <a:cs typeface="Times New Roman" panose="02020603050405020304" pitchFamily="18" charset="0"/>
+              <a:latin typeface="Liberation Serif" panose="02020603050405020304" pitchFamily="18" charset="0"/>
+              <a:cs typeface="Liberation Serif" panose="02020603050405020304" pitchFamily="18" charset="0"/>
             </a:endParaRPr>
           </a:p>
         </p:txBody>
@@ -16292,8 +16388,8 @@
           <a:p>
             <a:pPr algn="ctr"/>
             <a:endParaRPr lang="ko-KR" altLang="en-US" sz="1000">
-              <a:latin typeface="Times New Roman" panose="02020603050405020304" pitchFamily="18" charset="0"/>
-              <a:cs typeface="Times New Roman" panose="02020603050405020304" pitchFamily="18" charset="0"/>
+              <a:latin typeface="Liberation Serif" panose="02020603050405020304" pitchFamily="18" charset="0"/>
+              <a:cs typeface="Liberation Serif" panose="02020603050405020304" pitchFamily="18" charset="0"/>
             </a:endParaRPr>
           </a:p>
         </p:txBody>
@@ -16334,8 +16430,8 @@
           <a:p>
             <a:pPr algn="ctr"/>
             <a:endParaRPr lang="ko-KR" altLang="en-US" sz="1000">
-              <a:latin typeface="Times New Roman" panose="02020603050405020304" pitchFamily="18" charset="0"/>
-              <a:cs typeface="Times New Roman" panose="02020603050405020304" pitchFamily="18" charset="0"/>
+              <a:latin typeface="Liberation Serif" panose="02020603050405020304" pitchFamily="18" charset="0"/>
+              <a:cs typeface="Liberation Serif" panose="02020603050405020304" pitchFamily="18" charset="0"/>
             </a:endParaRPr>
           </a:p>
         </p:txBody>
@@ -16364,8 +16460,8 @@
             <a:pPr algn="ctr"/>
             <a:r>
               <a:rPr lang="en-US" altLang="ko-KR" sz="1200" dirty="0" smtClean="0">
-                <a:latin typeface="Times New Roman" panose="02020603050405020304" pitchFamily="18" charset="0"/>
-                <a:cs typeface="Times New Roman" panose="02020603050405020304" pitchFamily="18" charset="0"/>
+                <a:latin typeface="Liberation Serif" panose="02020603050405020304" pitchFamily="18" charset="0"/>
+                <a:cs typeface="Liberation Serif" panose="02020603050405020304" pitchFamily="18" charset="0"/>
               </a:rPr>
               <a:t>Board </a:t>
             </a:r>
@@ -16374,14 +16470,14 @@
             <a:pPr algn="ctr"/>
             <a:r>
               <a:rPr lang="en-US" altLang="ko-KR" sz="1200" dirty="0" smtClean="0">
-                <a:latin typeface="Times New Roman" panose="02020603050405020304" pitchFamily="18" charset="0"/>
-                <a:cs typeface="Times New Roman" panose="02020603050405020304" pitchFamily="18" charset="0"/>
+                <a:latin typeface="Liberation Serif" panose="02020603050405020304" pitchFamily="18" charset="0"/>
+                <a:cs typeface="Liberation Serif" panose="02020603050405020304" pitchFamily="18" charset="0"/>
               </a:rPr>
               <a:t>(0.54)</a:t>
             </a:r>
             <a:endParaRPr lang="ko-KR" altLang="en-US" sz="1200" dirty="0">
-              <a:latin typeface="Times New Roman" panose="02020603050405020304" pitchFamily="18" charset="0"/>
-              <a:cs typeface="Times New Roman" panose="02020603050405020304" pitchFamily="18" charset="0"/>
+              <a:latin typeface="Liberation Serif" panose="02020603050405020304" pitchFamily="18" charset="0"/>
+              <a:cs typeface="Liberation Serif" panose="02020603050405020304" pitchFamily="18" charset="0"/>
             </a:endParaRPr>
           </a:p>
         </p:txBody>
@@ -16410,8 +16506,8 @@
             <a:pPr algn="ctr"/>
             <a:r>
               <a:rPr lang="en-US" altLang="ko-KR" sz="1200" dirty="0" smtClean="0">
-                <a:latin typeface="Times New Roman" panose="02020603050405020304" pitchFamily="18" charset="0"/>
-                <a:cs typeface="Times New Roman" panose="02020603050405020304" pitchFamily="18" charset="0"/>
+                <a:latin typeface="Liberation Serif" panose="02020603050405020304" pitchFamily="18" charset="0"/>
+                <a:cs typeface="Liberation Serif" panose="02020603050405020304" pitchFamily="18" charset="0"/>
               </a:rPr>
               <a:t>Sea</a:t>
             </a:r>
@@ -16420,14 +16516,14 @@
             <a:pPr algn="ctr"/>
             <a:r>
               <a:rPr lang="en-US" altLang="ko-KR" sz="1200" dirty="0" smtClean="0">
-                <a:latin typeface="Times New Roman" panose="02020603050405020304" pitchFamily="18" charset="0"/>
-                <a:cs typeface="Times New Roman" panose="02020603050405020304" pitchFamily="18" charset="0"/>
+                <a:latin typeface="Liberation Serif" panose="02020603050405020304" pitchFamily="18" charset="0"/>
+                <a:cs typeface="Liberation Serif" panose="02020603050405020304" pitchFamily="18" charset="0"/>
               </a:rPr>
               <a:t>(0.43)</a:t>
             </a:r>
             <a:endParaRPr lang="ko-KR" altLang="en-US" sz="1200" dirty="0">
-              <a:latin typeface="Times New Roman" panose="02020603050405020304" pitchFamily="18" charset="0"/>
-              <a:cs typeface="Times New Roman" panose="02020603050405020304" pitchFamily="18" charset="0"/>
+              <a:latin typeface="Liberation Serif" panose="02020603050405020304" pitchFamily="18" charset="0"/>
+              <a:cs typeface="Liberation Serif" panose="02020603050405020304" pitchFamily="18" charset="0"/>
             </a:endParaRPr>
           </a:p>
         </p:txBody>
@@ -16456,8 +16552,8 @@
             <a:pPr algn="ctr"/>
             <a:r>
               <a:rPr lang="en-US" altLang="ko-KR" sz="1200" dirty="0" smtClean="0">
-                <a:latin typeface="Times New Roman" panose="02020603050405020304" pitchFamily="18" charset="0"/>
-                <a:cs typeface="Times New Roman" panose="02020603050405020304" pitchFamily="18" charset="0"/>
+                <a:latin typeface="Liberation Serif" panose="02020603050405020304" pitchFamily="18" charset="0"/>
+                <a:cs typeface="Liberation Serif" panose="02020603050405020304" pitchFamily="18" charset="0"/>
               </a:rPr>
               <a:t>Flower</a:t>
             </a:r>
@@ -16466,14 +16562,14 @@
             <a:pPr algn="ctr"/>
             <a:r>
               <a:rPr lang="en-US" altLang="ko-KR" sz="1200" dirty="0" smtClean="0">
-                <a:latin typeface="Times New Roman" panose="02020603050405020304" pitchFamily="18" charset="0"/>
-                <a:cs typeface="Times New Roman" panose="02020603050405020304" pitchFamily="18" charset="0"/>
+                <a:latin typeface="Liberation Serif" panose="02020603050405020304" pitchFamily="18" charset="0"/>
+                <a:cs typeface="Liberation Serif" panose="02020603050405020304" pitchFamily="18" charset="0"/>
               </a:rPr>
               <a:t>(0.01)</a:t>
             </a:r>
             <a:endParaRPr lang="ko-KR" altLang="en-US" sz="1200" dirty="0">
-              <a:latin typeface="Times New Roman" panose="02020603050405020304" pitchFamily="18" charset="0"/>
-              <a:cs typeface="Times New Roman" panose="02020603050405020304" pitchFamily="18" charset="0"/>
+              <a:latin typeface="Liberation Serif" panose="02020603050405020304" pitchFamily="18" charset="0"/>
+              <a:cs typeface="Liberation Serif" panose="02020603050405020304" pitchFamily="18" charset="0"/>
             </a:endParaRPr>
           </a:p>
         </p:txBody>
@@ -16586,8 +16682,8 @@
           <a:p>
             <a:pPr algn="ctr"/>
             <a:endParaRPr lang="ko-KR" altLang="en-US" sz="1000">
-              <a:latin typeface="Times New Roman" panose="02020603050405020304" pitchFamily="18" charset="0"/>
-              <a:cs typeface="Times New Roman" panose="02020603050405020304" pitchFamily="18" charset="0"/>
+              <a:latin typeface="Liberation Serif" panose="02020603050405020304" pitchFamily="18" charset="0"/>
+              <a:cs typeface="Liberation Serif" panose="02020603050405020304" pitchFamily="18" charset="0"/>
             </a:endParaRPr>
           </a:p>
         </p:txBody>
@@ -16616,8 +16712,8 @@
             <a:pPr algn="ctr"/>
             <a:r>
               <a:rPr lang="en-US" altLang="ko-KR" sz="1200" dirty="0" smtClean="0">
-                <a:latin typeface="Times New Roman" panose="02020603050405020304" pitchFamily="18" charset="0"/>
-                <a:cs typeface="Times New Roman" panose="02020603050405020304" pitchFamily="18" charset="0"/>
+                <a:latin typeface="Liberation Serif" panose="02020603050405020304" pitchFamily="18" charset="0"/>
+                <a:cs typeface="Liberation Serif" panose="02020603050405020304" pitchFamily="18" charset="0"/>
               </a:rPr>
               <a:t>Cat</a:t>
             </a:r>
@@ -16626,14 +16722,14 @@
             <a:pPr algn="ctr"/>
             <a:r>
               <a:rPr lang="en-US" altLang="ko-KR" sz="1200" dirty="0" smtClean="0">
-                <a:latin typeface="Times New Roman" panose="02020603050405020304" pitchFamily="18" charset="0"/>
-                <a:cs typeface="Times New Roman" panose="02020603050405020304" pitchFamily="18" charset="0"/>
+                <a:latin typeface="Liberation Serif" panose="02020603050405020304" pitchFamily="18" charset="0"/>
+                <a:cs typeface="Liberation Serif" panose="02020603050405020304" pitchFamily="18" charset="0"/>
               </a:rPr>
               <a:t>(0.02)</a:t>
             </a:r>
             <a:endParaRPr lang="ko-KR" altLang="en-US" sz="1200" dirty="0">
-              <a:latin typeface="Times New Roman" panose="02020603050405020304" pitchFamily="18" charset="0"/>
-              <a:cs typeface="Times New Roman" panose="02020603050405020304" pitchFamily="18" charset="0"/>
+              <a:latin typeface="Liberation Serif" panose="02020603050405020304" pitchFamily="18" charset="0"/>
+              <a:cs typeface="Liberation Serif" panose="02020603050405020304" pitchFamily="18" charset="0"/>
             </a:endParaRPr>
           </a:p>
         </p:txBody>
@@ -16702,21 +16798,21 @@
             </a:pPr>
             <a:r>
               <a:rPr lang="en-US" altLang="ko-KR" sz="1400" i="1" dirty="0" err="1" smtClean="0">
-                <a:latin typeface="Times New Roman" panose="02020603050405020304" pitchFamily="18" charset="0"/>
-                <a:cs typeface="Times New Roman" panose="02020603050405020304" pitchFamily="18" charset="0"/>
+                <a:latin typeface="Liberation Serif" panose="02020603050405020304" pitchFamily="18" charset="0"/>
+                <a:cs typeface="Liberation Serif" panose="02020603050405020304" pitchFamily="18" charset="0"/>
               </a:rPr>
               <a:t>Softmax</a:t>
             </a:r>
             <a:r>
               <a:rPr lang="en-US" altLang="ko-KR" sz="1400" i="1" dirty="0" smtClean="0">
-                <a:latin typeface="Times New Roman" panose="02020603050405020304" pitchFamily="18" charset="0"/>
-                <a:cs typeface="Times New Roman" panose="02020603050405020304" pitchFamily="18" charset="0"/>
+                <a:latin typeface="Liberation Serif" panose="02020603050405020304" pitchFamily="18" charset="0"/>
+                <a:cs typeface="Liberation Serif" panose="02020603050405020304" pitchFamily="18" charset="0"/>
               </a:rPr>
               <a:t> function</a:t>
             </a:r>
             <a:endParaRPr lang="en-US" altLang="ko-KR" sz="1400" i="1" dirty="0">
-              <a:latin typeface="Times New Roman" panose="02020603050405020304" pitchFamily="18" charset="0"/>
-              <a:cs typeface="Times New Roman" panose="02020603050405020304" pitchFamily="18" charset="0"/>
+              <a:latin typeface="Liberation Serif" panose="02020603050405020304" pitchFamily="18" charset="0"/>
+              <a:cs typeface="Liberation Serif" panose="02020603050405020304" pitchFamily="18" charset="0"/>
             </a:endParaRPr>
           </a:p>
         </p:txBody>
@@ -17016,8 +17112,8 @@
                 <a:solidFill>
                   <a:prstClr val="black"/>
                 </a:solidFill>
-                <a:latin typeface="Times New Roman" panose="02020603050405020304" pitchFamily="18" charset="0"/>
-                <a:cs typeface="Times New Roman" panose="02020603050405020304" pitchFamily="18" charset="0"/>
+                <a:latin typeface="Liberation Serif" panose="02020603050405020304" pitchFamily="18" charset="0"/>
+                <a:cs typeface="Liberation Serif" panose="02020603050405020304" pitchFamily="18" charset="0"/>
               </a:rPr>
               <a:t>Intuitive Understanding of Deep Learning</a:t>
             </a:r>
@@ -17025,8 +17121,8 @@
               <a:solidFill>
                 <a:prstClr val="black"/>
               </a:solidFill>
-              <a:latin typeface="Times New Roman" panose="02020603050405020304" pitchFamily="18" charset="0"/>
-              <a:cs typeface="Times New Roman" panose="02020603050405020304" pitchFamily="18" charset="0"/>
+              <a:latin typeface="Liberation Serif" panose="02020603050405020304" pitchFamily="18" charset="0"/>
+              <a:cs typeface="Liberation Serif" panose="02020603050405020304" pitchFamily="18" charset="0"/>
             </a:endParaRPr>
           </a:p>
         </p:txBody>
@@ -17057,13 +17153,13 @@
               <a:lnSpc>
                 <a:spcPct val="150000"/>
               </a:lnSpc>
-              <a:buFont typeface="Arial" panose="020B0604020202020204" pitchFamily="34" charset="0"/>
+              <a:buFont typeface="Liberation Sans" panose="020B0604020202020204" pitchFamily="34" charset="0"/>
               <a:buChar char="•"/>
             </a:pPr>
             <a:r>
               <a:rPr lang="en-US" altLang="ko-KR" sz="2000" dirty="0" smtClean="0">
-                <a:latin typeface="Times New Roman" panose="02020603050405020304" pitchFamily="18" charset="0"/>
-                <a:cs typeface="Times New Roman" panose="02020603050405020304" pitchFamily="18" charset="0"/>
+                <a:latin typeface="Liberation Serif" panose="02020603050405020304" pitchFamily="18" charset="0"/>
+                <a:cs typeface="Liberation Serif" panose="02020603050405020304" pitchFamily="18" charset="0"/>
               </a:rPr>
               <a:t>What is deep learning?</a:t>
             </a:r>
@@ -17078,35 +17174,35 @@
             </a:pPr>
             <a:r>
               <a:rPr lang="en-US" altLang="ko-KR" dirty="0" smtClean="0">
-                <a:latin typeface="Times New Roman" panose="02020603050405020304" pitchFamily="18" charset="0"/>
-                <a:cs typeface="Times New Roman" panose="02020603050405020304" pitchFamily="18" charset="0"/>
+                <a:latin typeface="Liberation Serif" panose="02020603050405020304" pitchFamily="18" charset="0"/>
+                <a:cs typeface="Liberation Serif" panose="02020603050405020304" pitchFamily="18" charset="0"/>
               </a:rPr>
               <a:t>Deep learning is “</a:t>
             </a:r>
             <a:r>
               <a:rPr lang="en-US" altLang="ko-KR" b="1" dirty="0" smtClean="0">
-                <a:latin typeface="Times New Roman" panose="02020603050405020304" pitchFamily="18" charset="0"/>
-                <a:cs typeface="Times New Roman" panose="02020603050405020304" pitchFamily="18" charset="0"/>
+                <a:latin typeface="Liberation Serif" panose="02020603050405020304" pitchFamily="18" charset="0"/>
+                <a:cs typeface="Liberation Serif" panose="02020603050405020304" pitchFamily="18" charset="0"/>
               </a:rPr>
               <a:t>Representation Learning</a:t>
             </a:r>
             <a:r>
               <a:rPr lang="en-US" altLang="ko-KR" dirty="0" smtClean="0">
-                <a:latin typeface="Times New Roman" panose="02020603050405020304" pitchFamily="18" charset="0"/>
-                <a:cs typeface="Times New Roman" panose="02020603050405020304" pitchFamily="18" charset="0"/>
+                <a:latin typeface="Liberation Serif" panose="02020603050405020304" pitchFamily="18" charset="0"/>
+                <a:cs typeface="Liberation Serif" panose="02020603050405020304" pitchFamily="18" charset="0"/>
               </a:rPr>
               <a:t>” to learn and discover how to represent features of data. </a:t>
             </a:r>
             <a:r>
               <a:rPr lang="en-US" altLang="ko-KR" sz="1600" dirty="0" smtClean="0">
-                <a:latin typeface="Times New Roman" panose="02020603050405020304" pitchFamily="18" charset="0"/>
-                <a:cs typeface="Times New Roman" panose="02020603050405020304" pitchFamily="18" charset="0"/>
+                <a:latin typeface="Liberation Serif" panose="02020603050405020304" pitchFamily="18" charset="0"/>
+                <a:cs typeface="Liberation Serif" panose="02020603050405020304" pitchFamily="18" charset="0"/>
               </a:rPr>
               <a:t>(Here, representation means a machine-understandable format)</a:t>
             </a:r>
             <a:endParaRPr lang="en-US" altLang="ko-KR" sz="1600" i="1" dirty="0" smtClean="0">
-              <a:latin typeface="Times New Roman" panose="02020603050405020304" pitchFamily="18" charset="0"/>
-              <a:cs typeface="Times New Roman" panose="02020603050405020304" pitchFamily="18" charset="0"/>
+              <a:latin typeface="Liberation Serif" panose="02020603050405020304" pitchFamily="18" charset="0"/>
+              <a:cs typeface="Liberation Serif" panose="02020603050405020304" pitchFamily="18" charset="0"/>
             </a:endParaRPr>
           </a:p>
         </p:txBody>
@@ -17187,8 +17283,8 @@
             </a:pPr>
             <a:r>
               <a:rPr lang="en-US" altLang="ko-KR" sz="1200" i="1" dirty="0" smtClean="0">
-                <a:latin typeface="Times New Roman" panose="02020603050405020304" pitchFamily="18" charset="0"/>
-                <a:cs typeface="Times New Roman" panose="02020603050405020304" pitchFamily="18" charset="0"/>
+                <a:latin typeface="Liberation Serif" panose="02020603050405020304" pitchFamily="18" charset="0"/>
+                <a:cs typeface="Liberation Serif" panose="02020603050405020304" pitchFamily="18" charset="0"/>
               </a:rPr>
               <a:t>How to draw faces?</a:t>
             </a:r>
@@ -17224,8 +17320,8 @@
             </a:pPr>
             <a:r>
               <a:rPr lang="en-US" altLang="ko-KR" sz="1200" i="1" dirty="0" smtClean="0">
-                <a:latin typeface="Times New Roman" panose="02020603050405020304" pitchFamily="18" charset="0"/>
-                <a:cs typeface="Times New Roman" panose="02020603050405020304" pitchFamily="18" charset="0"/>
+                <a:latin typeface="Liberation Serif" panose="02020603050405020304" pitchFamily="18" charset="0"/>
+                <a:cs typeface="Liberation Serif" panose="02020603050405020304" pitchFamily="18" charset="0"/>
               </a:rPr>
               <a:t>How to represent faces?</a:t>
             </a:r>
@@ -17359,8 +17455,8 @@
                 <a:solidFill>
                   <a:prstClr val="black"/>
                 </a:solidFill>
-                <a:latin typeface="Times New Roman" panose="02020603050405020304" pitchFamily="18" charset="0"/>
-                <a:cs typeface="Times New Roman" panose="02020603050405020304" pitchFamily="18" charset="0"/>
+                <a:latin typeface="Liberation Serif" panose="02020603050405020304" pitchFamily="18" charset="0"/>
+                <a:cs typeface="Liberation Serif" panose="02020603050405020304" pitchFamily="18" charset="0"/>
               </a:rPr>
               <a:t>Convolutional Neural Network </a:t>
             </a:r>
@@ -17369,8 +17465,8 @@
                 <a:solidFill>
                   <a:prstClr val="black"/>
                 </a:solidFill>
-                <a:latin typeface="Times New Roman" panose="02020603050405020304" pitchFamily="18" charset="0"/>
-                <a:cs typeface="Times New Roman" panose="02020603050405020304" pitchFamily="18" charset="0"/>
+                <a:latin typeface="Liberation Serif" panose="02020603050405020304" pitchFamily="18" charset="0"/>
+                <a:cs typeface="Liberation Serif" panose="02020603050405020304" pitchFamily="18" charset="0"/>
               </a:rPr>
               <a:t>(CNN) </a:t>
             </a:r>
@@ -17378,8 +17474,8 @@
               <a:solidFill>
                 <a:prstClr val="black"/>
               </a:solidFill>
-              <a:latin typeface="Times New Roman" panose="02020603050405020304" pitchFamily="18" charset="0"/>
-              <a:cs typeface="Times New Roman" panose="02020603050405020304" pitchFamily="18" charset="0"/>
+              <a:latin typeface="Liberation Serif" panose="02020603050405020304" pitchFamily="18" charset="0"/>
+              <a:cs typeface="Liberation Serif" panose="02020603050405020304" pitchFamily="18" charset="0"/>
             </a:endParaRPr>
           </a:p>
         </p:txBody>
@@ -17410,13 +17506,13 @@
               <a:lnSpc>
                 <a:spcPct val="150000"/>
               </a:lnSpc>
-              <a:buFont typeface="Arial" panose="020B0604020202020204" pitchFamily="34" charset="0"/>
+              <a:buFont typeface="Liberation Sans" panose="020B0604020202020204" pitchFamily="34" charset="0"/>
               <a:buChar char="•"/>
             </a:pPr>
             <a:r>
               <a:rPr lang="en-US" altLang="ko-KR" sz="2000" dirty="0" smtClean="0">
-                <a:latin typeface="Times New Roman" panose="02020603050405020304" pitchFamily="18" charset="0"/>
-                <a:cs typeface="Times New Roman" panose="02020603050405020304" pitchFamily="18" charset="0"/>
+                <a:latin typeface="Liberation Serif" panose="02020603050405020304" pitchFamily="18" charset="0"/>
+                <a:cs typeface="Liberation Serif" panose="02020603050405020304" pitchFamily="18" charset="0"/>
               </a:rPr>
               <a:t>CNN has been considered as a basic deep learning algorithm. Why is CNN superior at feature representations?</a:t>
             </a:r>
@@ -17431,8 +17527,8 @@
             </a:pPr>
             <a:r>
               <a:rPr lang="en-US" altLang="ko-KR" sz="1600" dirty="0" smtClean="0">
-                <a:latin typeface="Times New Roman" panose="02020603050405020304" pitchFamily="18" charset="0"/>
-                <a:cs typeface="Times New Roman" panose="02020603050405020304" pitchFamily="18" charset="0"/>
+                <a:latin typeface="Liberation Serif" panose="02020603050405020304" pitchFamily="18" charset="0"/>
+                <a:cs typeface="Liberation Serif" panose="02020603050405020304" pitchFamily="18" charset="0"/>
               </a:rPr>
               <a:t>Effectively reducing computational complexity (Convolution filter)</a:t>
             </a:r>
@@ -17447,8 +17543,8 @@
             </a:pPr>
             <a:r>
               <a:rPr lang="en-US" altLang="ko-KR" sz="1600" dirty="0" smtClean="0">
-                <a:latin typeface="Times New Roman" panose="02020603050405020304" pitchFamily="18" charset="0"/>
-                <a:cs typeface="Times New Roman" panose="02020603050405020304" pitchFamily="18" charset="0"/>
+                <a:latin typeface="Liberation Serif" panose="02020603050405020304" pitchFamily="18" charset="0"/>
+                <a:cs typeface="Liberation Serif" panose="02020603050405020304" pitchFamily="18" charset="0"/>
               </a:rPr>
               <a:t>Hierarchical feature representation (multiple convolution layers)</a:t>
             </a:r>
@@ -17463,43 +17559,43 @@
             </a:pPr>
             <a:r>
               <a:rPr lang="en-US" altLang="ko-KR" sz="1600" dirty="0" smtClean="0">
-                <a:latin typeface="Times New Roman" panose="02020603050405020304" pitchFamily="18" charset="0"/>
-                <a:cs typeface="Times New Roman" panose="02020603050405020304" pitchFamily="18" charset="0"/>
+                <a:latin typeface="Liberation Serif" panose="02020603050405020304" pitchFamily="18" charset="0"/>
+                <a:cs typeface="Liberation Serif" panose="02020603050405020304" pitchFamily="18" charset="0"/>
               </a:rPr>
               <a:t>Non-linearity and less overfitting (</a:t>
             </a:r>
             <a:r>
               <a:rPr lang="en-US" altLang="ko-KR" sz="1600" dirty="0">
-                <a:latin typeface="Times New Roman" panose="02020603050405020304" pitchFamily="18" charset="0"/>
-                <a:cs typeface="Times New Roman" panose="02020603050405020304" pitchFamily="18" charset="0"/>
+                <a:latin typeface="Liberation Serif" panose="02020603050405020304" pitchFamily="18" charset="0"/>
+                <a:cs typeface="Liberation Serif" panose="02020603050405020304" pitchFamily="18" charset="0"/>
               </a:rPr>
               <a:t>Rectified Linear </a:t>
             </a:r>
             <a:r>
               <a:rPr lang="en-US" altLang="ko-KR" sz="1600" dirty="0" smtClean="0">
-                <a:latin typeface="Times New Roman" panose="02020603050405020304" pitchFamily="18" charset="0"/>
-                <a:cs typeface="Times New Roman" panose="02020603050405020304" pitchFamily="18" charset="0"/>
+                <a:latin typeface="Liberation Serif" panose="02020603050405020304" pitchFamily="18" charset="0"/>
+                <a:cs typeface="Liberation Serif" panose="02020603050405020304" pitchFamily="18" charset="0"/>
               </a:rPr>
               <a:t>Unit </a:t>
             </a:r>
             <a:r>
               <a:rPr lang="en-US" altLang="ko-KR" sz="1600" dirty="0">
-                <a:latin typeface="Times New Roman" panose="02020603050405020304" pitchFamily="18" charset="0"/>
-                <a:cs typeface="Times New Roman" panose="02020603050405020304" pitchFamily="18" charset="0"/>
+                <a:latin typeface="Liberation Serif" panose="02020603050405020304" pitchFamily="18" charset="0"/>
+                <a:cs typeface="Liberation Serif" panose="02020603050405020304" pitchFamily="18" charset="0"/>
               </a:rPr>
               <a:t>(</a:t>
             </a:r>
             <a:r>
               <a:rPr lang="en-US" altLang="ko-KR" sz="1600" dirty="0" err="1" smtClean="0">
-                <a:latin typeface="Times New Roman" panose="02020603050405020304" pitchFamily="18" charset="0"/>
-                <a:cs typeface="Times New Roman" panose="02020603050405020304" pitchFamily="18" charset="0"/>
+                <a:latin typeface="Liberation Serif" panose="02020603050405020304" pitchFamily="18" charset="0"/>
+                <a:cs typeface="Liberation Serif" panose="02020603050405020304" pitchFamily="18" charset="0"/>
               </a:rPr>
               <a:t>ReLU</a:t>
             </a:r>
             <a:r>
               <a:rPr lang="en-US" altLang="ko-KR" sz="1600" dirty="0" smtClean="0">
-                <a:latin typeface="Times New Roman" panose="02020603050405020304" pitchFamily="18" charset="0"/>
-                <a:cs typeface="Times New Roman" panose="02020603050405020304" pitchFamily="18" charset="0"/>
+                <a:latin typeface="Liberation Serif" panose="02020603050405020304" pitchFamily="18" charset="0"/>
+                <a:cs typeface="Liberation Serif" panose="02020603050405020304" pitchFamily="18" charset="0"/>
               </a:rPr>
               <a:t>) and Pooling)</a:t>
             </a:r>
@@ -17573,20 +17669,20 @@
                 <a:solidFill>
                   <a:schemeClr val="bg1"/>
                 </a:solidFill>
-                <a:latin typeface="나눔명조" pitchFamily="18" charset="-127"/>
-                <a:ea typeface="나눔명조" pitchFamily="18" charset="-127"/>
-              </a:rPr>
-              <a:t>감사합니다</a:t>
+                <a:latin typeface="Liberation Sans" pitchFamily="18" charset="-127"/>
+                <a:ea typeface="Liberation Sans" pitchFamily="18" charset="-127"/>
+              </a:rPr>
+              <a:t>Thank you.</a:t>
             </a:r>
             <a:r>
               <a:rPr lang="en-US" altLang="ko-KR" sz="4000" spc="-150" dirty="0" smtClean="0">
                 <a:solidFill>
                   <a:schemeClr val="bg1"/>
                 </a:solidFill>
-                <a:latin typeface="나눔명조" pitchFamily="18" charset="-127"/>
-                <a:ea typeface="나눔명조" pitchFamily="18" charset="-127"/>
-              </a:rPr>
-              <a:t>.</a:t>
+                <a:latin typeface="Liberation Sans" pitchFamily="18" charset="-127"/>
+                <a:ea typeface="Liberation Sans" pitchFamily="18" charset="-127"/>
+              </a:rPr>
+              <a:t/>
             </a:r>
           </a:p>
         </p:txBody>
@@ -17673,9 +17769,9 @@
               <a:solidFill>
                 <a:schemeClr val="bg1"/>
               </a:solidFill>
-              <a:latin typeface="Times New Roman" panose="02020603050405020304" pitchFamily="18" charset="0"/>
+              <a:latin typeface="Liberation Serif" panose="02020603050405020304" pitchFamily="18" charset="0"/>
               <a:ea typeface="나눔고딕" panose="020D0604000000000000" pitchFamily="50" charset="-127"/>
-              <a:cs typeface="Times New Roman" panose="02020603050405020304" pitchFamily="18" charset="0"/>
+              <a:cs typeface="Liberation Serif" panose="02020603050405020304" pitchFamily="18" charset="0"/>
             </a:endParaRPr>
           </a:p>
           <a:p>
@@ -17684,9 +17780,9 @@
               <a:solidFill>
                 <a:schemeClr val="bg1"/>
               </a:solidFill>
-              <a:latin typeface="Times New Roman" panose="02020603050405020304" pitchFamily="18" charset="0"/>
+              <a:latin typeface="Liberation Serif" panose="02020603050405020304" pitchFamily="18" charset="0"/>
               <a:ea typeface="나눔고딕" panose="020D0604000000000000" pitchFamily="50" charset="-127"/>
-              <a:cs typeface="Times New Roman" panose="02020603050405020304" pitchFamily="18" charset="0"/>
+              <a:cs typeface="Liberation Serif" panose="02020603050405020304" pitchFamily="18" charset="0"/>
             </a:endParaRPr>
           </a:p>
           <a:p>
@@ -17696,9 +17792,9 @@
                 <a:solidFill>
                   <a:schemeClr val="bg1"/>
                 </a:solidFill>
-                <a:latin typeface="Times New Roman" panose="02020603050405020304" pitchFamily="18" charset="0"/>
+                <a:latin typeface="Liberation Serif" panose="02020603050405020304" pitchFamily="18" charset="0"/>
                 <a:ea typeface="나눔고딕" panose="020D0604000000000000" pitchFamily="50" charset="-127"/>
-                <a:cs typeface="Times New Roman" panose="02020603050405020304" pitchFamily="18" charset="0"/>
+                <a:cs typeface="Liberation Serif" panose="02020603050405020304" pitchFamily="18" charset="0"/>
               </a:rPr>
               <a:t>Thank you </a:t>
             </a:r>
@@ -17707,9 +17803,9 @@
                 <a:solidFill>
                   <a:schemeClr val="bg1"/>
                 </a:solidFill>
-                <a:latin typeface="Times New Roman" panose="02020603050405020304" pitchFamily="18" charset="0"/>
+                <a:latin typeface="Liberation Serif" panose="02020603050405020304" pitchFamily="18" charset="0"/>
                 <a:ea typeface="나눔고딕" panose="020D0604000000000000" pitchFamily="50" charset="-127"/>
-                <a:cs typeface="Times New Roman" panose="02020603050405020304" pitchFamily="18" charset="0"/>
+                <a:cs typeface="Liberation Serif" panose="02020603050405020304" pitchFamily="18" charset="0"/>
                 <a:sym typeface="Wingdings"/>
               </a:rPr>
               <a:t></a:t>
@@ -17718,9 +17814,9 @@
               <a:solidFill>
                 <a:schemeClr val="bg1"/>
               </a:solidFill>
-              <a:latin typeface="Times New Roman" panose="02020603050405020304" pitchFamily="18" charset="0"/>
+              <a:latin typeface="Liberation Serif" panose="02020603050405020304" pitchFamily="18" charset="0"/>
               <a:ea typeface="나눔고딕" panose="020D0604000000000000" pitchFamily="50" charset="-127"/>
-              <a:cs typeface="Times New Roman" panose="02020603050405020304" pitchFamily="18" charset="0"/>
+              <a:cs typeface="Liberation Serif" panose="02020603050405020304" pitchFamily="18" charset="0"/>
             </a:endParaRPr>
           </a:p>
           <a:p>
@@ -17729,9 +17825,9 @@
               <a:solidFill>
                 <a:schemeClr val="bg1"/>
               </a:solidFill>
-              <a:latin typeface="Times New Roman" panose="02020603050405020304" pitchFamily="18" charset="0"/>
+              <a:latin typeface="Liberation Serif" panose="02020603050405020304" pitchFamily="18" charset="0"/>
               <a:ea typeface="나눔고딕" panose="020D0604000000000000" pitchFamily="50" charset="-127"/>
-              <a:cs typeface="Times New Roman" panose="02020603050405020304" pitchFamily="18" charset="0"/>
+              <a:cs typeface="Liberation Serif" panose="02020603050405020304" pitchFamily="18" charset="0"/>
             </a:endParaRPr>
           </a:p>
           <a:p>
@@ -17741,9 +17837,9 @@
                 <a:solidFill>
                   <a:schemeClr val="bg1"/>
                 </a:solidFill>
-                <a:latin typeface="Times New Roman" panose="02020603050405020304" pitchFamily="18" charset="0"/>
+                <a:latin typeface="Liberation Serif" panose="02020603050405020304" pitchFamily="18" charset="0"/>
                 <a:ea typeface="나눔고딕" panose="020D0604000000000000" pitchFamily="50" charset="-127"/>
-                <a:cs typeface="Times New Roman" panose="02020603050405020304" pitchFamily="18" charset="0"/>
+                <a:cs typeface="Liberation Serif" panose="02020603050405020304" pitchFamily="18" charset="0"/>
               </a:rPr>
               <a:t>Contact Info: </a:t>
             </a:r>
@@ -17752,9 +17848,9 @@
                 <a:solidFill>
                   <a:schemeClr val="bg1"/>
                 </a:solidFill>
-                <a:latin typeface="Times New Roman" panose="02020603050405020304" pitchFamily="18" charset="0"/>
+                <a:latin typeface="Liberation Serif" panose="02020603050405020304" pitchFamily="18" charset="0"/>
                 <a:ea typeface="나눔고딕" panose="020D0604000000000000" pitchFamily="50" charset="-127"/>
-                <a:cs typeface="Times New Roman" panose="02020603050405020304" pitchFamily="18" charset="0"/>
+                <a:cs typeface="Liberation Serif" panose="02020603050405020304" pitchFamily="18" charset="0"/>
               </a:rPr>
               <a:t>quantic.jh@gmail.com</a:t>
             </a:r>
@@ -17762,9 +17858,9 @@
               <a:solidFill>
                 <a:schemeClr val="bg1"/>
               </a:solidFill>
-              <a:latin typeface="Times New Roman" panose="02020603050405020304" pitchFamily="18" charset="0"/>
+              <a:latin typeface="Liberation Serif" panose="02020603050405020304" pitchFamily="18" charset="0"/>
               <a:ea typeface="나눔고딕" panose="020D0604000000000000" pitchFamily="50" charset="-127"/>
-              <a:cs typeface="Times New Roman" panose="02020603050405020304" pitchFamily="18" charset="0"/>
+              <a:cs typeface="Liberation Serif" panose="02020603050405020304" pitchFamily="18" charset="0"/>
             </a:endParaRPr>
           </a:p>
         </p:txBody>
@@ -17920,8 +18016,8 @@
                 <a:solidFill>
                   <a:prstClr val="black"/>
                 </a:solidFill>
-                <a:latin typeface="Times New Roman" panose="02020603050405020304" pitchFamily="18" charset="0"/>
-                <a:cs typeface="Times New Roman" panose="02020603050405020304" pitchFamily="18" charset="0"/>
+                <a:latin typeface="Liberation Serif" panose="02020603050405020304" pitchFamily="18" charset="0"/>
+                <a:cs typeface="Liberation Serif" panose="02020603050405020304" pitchFamily="18" charset="0"/>
               </a:rPr>
               <a:t>(Appendix) </a:t>
             </a:r>
@@ -17930,8 +18026,8 @@
                 <a:solidFill>
                   <a:prstClr val="black"/>
                 </a:solidFill>
-                <a:latin typeface="Times New Roman" panose="02020603050405020304" pitchFamily="18" charset="0"/>
-                <a:cs typeface="Times New Roman" panose="02020603050405020304" pitchFamily="18" charset="0"/>
+                <a:latin typeface="Liberation Serif" panose="02020603050405020304" pitchFamily="18" charset="0"/>
+                <a:cs typeface="Liberation Serif" panose="02020603050405020304" pitchFamily="18" charset="0"/>
               </a:rPr>
               <a:t>Learning Algorithm of Neural Networks</a:t>
             </a:r>
@@ -17964,13 +18060,13 @@
               <a:lnSpc>
                 <a:spcPct val="150000"/>
               </a:lnSpc>
-              <a:buFont typeface="Arial" panose="020B0604020202020204" pitchFamily="34" charset="0"/>
+              <a:buFont typeface="Liberation Sans" panose="020B0604020202020204" pitchFamily="34" charset="0"/>
               <a:buChar char="•"/>
             </a:pPr>
             <a:r>
               <a:rPr lang="en-US" altLang="ko-KR" sz="2000" dirty="0" smtClean="0">
-                <a:latin typeface="Times New Roman" panose="02020603050405020304" pitchFamily="18" charset="0"/>
-                <a:cs typeface="Times New Roman" panose="02020603050405020304" pitchFamily="18" charset="0"/>
+                <a:latin typeface="Liberation Serif" panose="02020603050405020304" pitchFamily="18" charset="0"/>
+                <a:cs typeface="Liberation Serif" panose="02020603050405020304" pitchFamily="18" charset="0"/>
               </a:rPr>
               <a:t>Gradient descent method (Back-propagation)</a:t>
             </a:r>
@@ -17983,28 +18079,28 @@
             </a:pPr>
             <a:r>
               <a:rPr lang="en-US" altLang="ko-KR" dirty="0" smtClean="0">
-                <a:latin typeface="Times New Roman" panose="02020603050405020304" pitchFamily="18" charset="0"/>
-                <a:cs typeface="Times New Roman" panose="02020603050405020304" pitchFamily="18" charset="0"/>
+                <a:latin typeface="Liberation Serif" panose="02020603050405020304" pitchFamily="18" charset="0"/>
+                <a:cs typeface="Liberation Serif" panose="02020603050405020304" pitchFamily="18" charset="0"/>
               </a:rPr>
               <a:t>= Learning </a:t>
             </a:r>
             <a:r>
               <a:rPr lang="en-US" altLang="ko-KR" dirty="0">
-                <a:latin typeface="Times New Roman" panose="02020603050405020304" pitchFamily="18" charset="0"/>
-                <a:cs typeface="Times New Roman" panose="02020603050405020304" pitchFamily="18" charset="0"/>
+                <a:latin typeface="Liberation Serif" panose="02020603050405020304" pitchFamily="18" charset="0"/>
+                <a:cs typeface="Liberation Serif" panose="02020603050405020304" pitchFamily="18" charset="0"/>
               </a:rPr>
               <a:t>parameters to minimize the error from the true </a:t>
             </a:r>
             <a:r>
               <a:rPr lang="en-US" altLang="ko-KR" dirty="0" smtClean="0">
-                <a:latin typeface="Times New Roman" panose="02020603050405020304" pitchFamily="18" charset="0"/>
-                <a:cs typeface="Times New Roman" panose="02020603050405020304" pitchFamily="18" charset="0"/>
+                <a:latin typeface="Liberation Serif" panose="02020603050405020304" pitchFamily="18" charset="0"/>
+                <a:cs typeface="Liberation Serif" panose="02020603050405020304" pitchFamily="18" charset="0"/>
               </a:rPr>
               <a:t>value in the systematic,  reverse way even for multiple hidden layers</a:t>
             </a:r>
             <a:endParaRPr lang="en-US" altLang="ko-KR" dirty="0">
-              <a:latin typeface="Times New Roman" panose="02020603050405020304" pitchFamily="18" charset="0"/>
-              <a:cs typeface="Times New Roman" panose="02020603050405020304" pitchFamily="18" charset="0"/>
+              <a:latin typeface="Liberation Serif" panose="02020603050405020304" pitchFamily="18" charset="0"/>
+              <a:cs typeface="Liberation Serif" panose="02020603050405020304" pitchFamily="18" charset="0"/>
             </a:endParaRPr>
           </a:p>
         </p:txBody>
@@ -18077,126 +18173,126 @@
                 <a:solidFill>
                   <a:srgbClr val="222222"/>
                 </a:solidFill>
-                <a:latin typeface="Arial" panose="020B0604020202020204" pitchFamily="34" charset="0"/>
-              </a:rPr>
-              <a:t>Source</a:t>
+                <a:latin typeface="Liberation Sans" panose="020B0604020202020204" pitchFamily="34" charset="0"/>
+              </a:rPr>
+              <a:t>Source: Fully Understanding Backpropagation with Examples (Jaejun Yoo’s Playground) http://jaejunyoo.blogspot.com/2017/01/backpropagation.html </a:t>
             </a:r>
             <a:r>
               <a:rPr lang="en-US" altLang="ko-KR" sz="900" dirty="0">
                 <a:solidFill>
                   <a:srgbClr val="222222"/>
                 </a:solidFill>
-                <a:latin typeface="Arial" panose="020B0604020202020204" pitchFamily="34" charset="0"/>
-              </a:rPr>
-              <a:t>: Backpropagation </a:t>
+                <a:latin typeface="Liberation Sans" panose="020B0604020202020204" pitchFamily="34" charset="0"/>
+              </a:rPr>
+              <a:t/>
             </a:r>
             <a:r>
               <a:rPr lang="ko-KR" altLang="en-US" sz="900" dirty="0">
                 <a:solidFill>
                   <a:srgbClr val="222222"/>
                 </a:solidFill>
-                <a:latin typeface="Arial" panose="020B0604020202020204" pitchFamily="34" charset="0"/>
-              </a:rPr>
-              <a:t>설명 예제와 함께 완전히 </a:t>
+                <a:latin typeface="Liberation Sans" panose="020B0604020202020204" pitchFamily="34" charset="0"/>
+              </a:rPr>
+              <a:t/>
             </a:r>
             <a:r>
               <a:rPr lang="ko-KR" altLang="en-US" sz="900" dirty="0" smtClean="0">
                 <a:solidFill>
                   <a:srgbClr val="222222"/>
                 </a:solidFill>
-                <a:latin typeface="Arial" panose="020B0604020202020204" pitchFamily="34" charset="0"/>
-              </a:rPr>
-              <a:t>이해하기 </a:t>
+                <a:latin typeface="Liberation Sans" panose="020B0604020202020204" pitchFamily="34" charset="0"/>
+              </a:rPr>
+              <a:t/>
             </a:r>
             <a:r>
               <a:rPr lang="en-US" altLang="ko-KR" sz="900" dirty="0" smtClean="0">
                 <a:solidFill>
                   <a:srgbClr val="222222"/>
                 </a:solidFill>
-                <a:latin typeface="Arial" panose="020B0604020202020204" pitchFamily="34" charset="0"/>
-              </a:rPr>
-              <a:t>(</a:t>
+                <a:latin typeface="Liberation Sans" panose="020B0604020202020204" pitchFamily="34" charset="0"/>
+              </a:rPr>
+              <a:t/>
             </a:r>
             <a:r>
               <a:rPr lang="en-US" altLang="ko-KR" sz="900" dirty="0" err="1" smtClean="0">
                 <a:solidFill>
                   <a:srgbClr val="222222"/>
                 </a:solidFill>
-                <a:latin typeface="Arial" panose="020B0604020202020204" pitchFamily="34" charset="0"/>
-              </a:rPr>
-              <a:t>Jaejun</a:t>
+                <a:latin typeface="Liberation Sans" panose="020B0604020202020204" pitchFamily="34" charset="0"/>
+              </a:rPr>
+              <a:t/>
             </a:r>
             <a:r>
               <a:rPr lang="en-US" altLang="ko-KR" sz="900" dirty="0" smtClean="0">
                 <a:solidFill>
                   <a:srgbClr val="222222"/>
                 </a:solidFill>
-                <a:latin typeface="Arial" panose="020B0604020202020204" pitchFamily="34" charset="0"/>
-              </a:rPr>
-              <a:t> </a:t>
+                <a:latin typeface="Liberation Sans" panose="020B0604020202020204" pitchFamily="34" charset="0"/>
+              </a:rPr>
+              <a:t/>
             </a:r>
             <a:r>
               <a:rPr lang="en-US" altLang="ko-KR" sz="900" dirty="0" err="1" smtClean="0">
                 <a:solidFill>
                   <a:srgbClr val="222222"/>
                 </a:solidFill>
-                <a:latin typeface="Arial" panose="020B0604020202020204" pitchFamily="34" charset="0"/>
-              </a:rPr>
-              <a:t>Yoo’s</a:t>
+                <a:latin typeface="Liberation Sans" panose="020B0604020202020204" pitchFamily="34" charset="0"/>
+              </a:rPr>
+              <a:t/>
             </a:r>
             <a:r>
               <a:rPr lang="en-US" altLang="ko-KR" sz="900" dirty="0" smtClean="0">
                 <a:solidFill>
                   <a:srgbClr val="222222"/>
                 </a:solidFill>
-                <a:latin typeface="Arial" panose="020B0604020202020204" pitchFamily="34" charset="0"/>
-              </a:rPr>
-              <a:t> Playground) </a:t>
+                <a:latin typeface="Liberation Sans" panose="020B0604020202020204" pitchFamily="34" charset="0"/>
+              </a:rPr>
+              <a:t/>
             </a:r>
             <a:r>
               <a:rPr lang="en-US" altLang="ko-KR" sz="900" dirty="0" smtClean="0">
                 <a:solidFill>
                   <a:srgbClr val="222222"/>
                 </a:solidFill>
-                <a:latin typeface="Arial" panose="020B0604020202020204" pitchFamily="34" charset="0"/>
+                <a:latin typeface="Liberation Sans" panose="020B0604020202020204" pitchFamily="34" charset="0"/>
                 <a:hlinkClick r:id="rId4"/>
               </a:rPr>
-              <a:t>http</a:t>
+              <a:t/>
             </a:r>
             <a:r>
               <a:rPr lang="en-US" altLang="ko-KR" sz="900" dirty="0">
                 <a:solidFill>
                   <a:srgbClr val="222222"/>
                 </a:solidFill>
-                <a:latin typeface="Arial" panose="020B0604020202020204" pitchFamily="34" charset="0"/>
+                <a:latin typeface="Liberation Sans" panose="020B0604020202020204" pitchFamily="34" charset="0"/>
                 <a:hlinkClick r:id="rId4"/>
               </a:rPr>
-              <a:t>://</a:t>
+              <a:t/>
             </a:r>
             <a:r>
               <a:rPr lang="en-US" altLang="ko-KR" sz="900" dirty="0" smtClean="0">
                 <a:solidFill>
                   <a:srgbClr val="222222"/>
                 </a:solidFill>
-                <a:latin typeface="Arial" panose="020B0604020202020204" pitchFamily="34" charset="0"/>
+                <a:latin typeface="Liberation Sans" panose="020B0604020202020204" pitchFamily="34" charset="0"/>
                 <a:hlinkClick r:id="rId4"/>
               </a:rPr>
-              <a:t>jaejunyoo.blogspot.com/2017/01/backpropagation.html</a:t>
+              <a:t/>
             </a:r>
             <a:r>
               <a:rPr lang="en-US" altLang="ko-KR" sz="900" dirty="0" smtClean="0">
                 <a:solidFill>
                   <a:srgbClr val="222222"/>
                 </a:solidFill>
-                <a:latin typeface="Arial" panose="020B0604020202020204" pitchFamily="34" charset="0"/>
-              </a:rPr>
-              <a:t> </a:t>
+                <a:latin typeface="Liberation Sans" panose="020B0604020202020204" pitchFamily="34" charset="0"/>
+              </a:rPr>
+              <a:t/>
             </a:r>
             <a:endParaRPr lang="ko-KR" altLang="en-US" sz="900" dirty="0">
               <a:solidFill>
                 <a:srgbClr val="222222"/>
               </a:solidFill>
-              <a:latin typeface="Arial" panose="020B0604020202020204" pitchFamily="34" charset="0"/>
+              <a:latin typeface="Liberation Sans" panose="020B0604020202020204" pitchFamily="34" charset="0"/>
             </a:endParaRPr>
           </a:p>
         </p:txBody>
@@ -18227,15 +18323,15 @@
               <a:p>
                 <a:r>
                   <a:rPr lang="en-US" altLang="ko-KR" sz="1600" b="0" dirty="0" smtClean="0">
-                    <a:latin typeface="Times New Roman" panose="02020603050405020304" pitchFamily="18" charset="0"/>
-                    <a:cs typeface="Times New Roman" panose="02020603050405020304" pitchFamily="18" charset="0"/>
+                    <a:latin typeface="Liberation Serif" panose="02020603050405020304" pitchFamily="18" charset="0"/>
+                    <a:cs typeface="Liberation Serif" panose="02020603050405020304" pitchFamily="18" charset="0"/>
                   </a:rPr>
                   <a:t>The goal is to minimize the following error (loss) function,</a:t>
                 </a:r>
               </a:p>
               <a:p>
                 <a:endParaRPr lang="en-US" altLang="ko-KR" sz="1600" b="0" i="1" dirty="0" smtClean="0">
-                  <a:latin typeface="Cambria Math" panose="02040503050406030204" pitchFamily="18" charset="0"/>
+                  <a:latin typeface="Caladea" panose="02040503050406030204" pitchFamily="18" charset="0"/>
                 </a:endParaRPr>
               </a:p>
               <a:p>
@@ -18248,13 +18344,13 @@
                     <m:oMath xmlns:m="http://schemas.openxmlformats.org/officeDocument/2006/math">
                       <m:r>
                         <a:rPr lang="en-US" altLang="ko-KR" sz="1400" b="0" i="1" smtClean="0">
-                          <a:latin typeface="Cambria Math" panose="02040503050406030204" pitchFamily="18" charset="0"/>
+                          <a:latin typeface="Caladea" panose="02040503050406030204" pitchFamily="18" charset="0"/>
                         </a:rPr>
                         <m:t>𝐸</m:t>
                       </m:r>
                       <m:r>
                         <a:rPr lang="en-US" altLang="ko-KR" sz="1400" b="0" i="1" smtClean="0">
-                          <a:latin typeface="Cambria Math" panose="02040503050406030204" pitchFamily="18" charset="0"/>
+                          <a:latin typeface="Caladea" panose="02040503050406030204" pitchFamily="18" charset="0"/>
                         </a:rPr>
                         <m:t>=−</m:t>
                       </m:r>
@@ -18263,7 +18359,7 @@
                           <m:chr m:val="∑"/>
                           <m:ctrlPr>
                             <a:rPr lang="en-US" altLang="ko-KR" sz="1400" b="0" i="1" smtClean="0">
-                              <a:latin typeface="Cambria Math" charset="0"/>
+                              <a:latin typeface="Caladea" charset="0"/>
                             </a:rPr>
                           </m:ctrlPr>
                         </m:naryPr>
@@ -18273,13 +18369,13 @@
                               <m:brk m:alnAt="23"/>
                             </m:rPr>
                             <a:rPr lang="en-US" altLang="ko-KR" sz="1400" b="0" i="1" smtClean="0">
-                              <a:latin typeface="Cambria Math" panose="02040503050406030204" pitchFamily="18" charset="0"/>
+                              <a:latin typeface="Caladea" panose="02040503050406030204" pitchFamily="18" charset="0"/>
                             </a:rPr>
                             <m:t>𝑖</m:t>
                           </m:r>
                           <m:r>
                             <a:rPr lang="en-US" altLang="ko-KR" sz="1400" b="0" i="1" smtClean="0">
-                              <a:latin typeface="Cambria Math" panose="02040503050406030204" pitchFamily="18" charset="0"/>
+                              <a:latin typeface="Caladea" panose="02040503050406030204" pitchFamily="18" charset="0"/>
                             </a:rPr>
                             <m:t>=1</m:t>
                           </m:r>
@@ -18287,7 +18383,7 @@
                         <m:sup>
                           <m:r>
                             <a:rPr lang="en-US" altLang="ko-KR" sz="1400" b="0" i="1" smtClean="0">
-                              <a:latin typeface="Cambria Math" panose="02040503050406030204" pitchFamily="18" charset="0"/>
+                              <a:latin typeface="Caladea" panose="02040503050406030204" pitchFamily="18" charset="0"/>
                             </a:rPr>
                             <m:t>3</m:t>
                           </m:r>
@@ -18298,7 +18394,7 @@
                               <m:begChr m:val="["/>
                               <m:ctrlPr>
                                 <a:rPr lang="en-US" altLang="ko-KR" sz="1400" b="0" i="1" smtClean="0">
-                                  <a:latin typeface="Cambria Math" charset="0"/>
+                                  <a:latin typeface="Caladea" charset="0"/>
                                 </a:rPr>
                               </m:ctrlPr>
                             </m:dPr>
@@ -18307,14 +18403,14 @@
                                 <m:sSubPr>
                                   <m:ctrlPr>
                                     <a:rPr lang="en-US" altLang="ko-KR" sz="1400" b="0" i="1" smtClean="0">
-                                      <a:latin typeface="Cambria Math" charset="0"/>
+                                      <a:latin typeface="Caladea" charset="0"/>
                                     </a:rPr>
                                   </m:ctrlPr>
                                 </m:sSubPr>
                                 <m:e>
                                   <m:r>
                                     <a:rPr lang="en-US" altLang="ko-KR" sz="1400" b="0" i="1" smtClean="0">
-                                      <a:latin typeface="Cambria Math" panose="02040503050406030204" pitchFamily="18" charset="0"/>
+                                      <a:latin typeface="Caladea" panose="02040503050406030204" pitchFamily="18" charset="0"/>
                                     </a:rPr>
                                     <m:t>𝑡</m:t>
                                   </m:r>
@@ -18322,7 +18418,7 @@
                                 <m:sub>
                                   <m:r>
                                     <a:rPr lang="en-US" altLang="ko-KR" sz="1400" b="0" i="1" smtClean="0">
-                                      <a:latin typeface="Cambria Math" panose="02040503050406030204" pitchFamily="18" charset="0"/>
+                                      <a:latin typeface="Caladea" panose="02040503050406030204" pitchFamily="18" charset="0"/>
                                     </a:rPr>
                                     <m:t>𝑖</m:t>
                                   </m:r>
@@ -18332,7 +18428,7 @@
                                 <m:funcPr>
                                   <m:ctrlPr>
                                     <a:rPr lang="en-US" altLang="ko-KR" sz="1400" b="0" i="1" smtClean="0">
-                                      <a:latin typeface="Cambria Math" charset="0"/>
+                                      <a:latin typeface="Caladea" charset="0"/>
                                     </a:rPr>
                                   </m:ctrlPr>
                                 </m:funcPr>
@@ -18342,7 +18438,7 @@
                                       <m:sty m:val="p"/>
                                     </m:rPr>
                                     <a:rPr lang="en-US" altLang="ko-KR" sz="1400" b="0" i="0" smtClean="0">
-                                      <a:latin typeface="Cambria Math" panose="02040503050406030204" pitchFamily="18" charset="0"/>
+                                      <a:latin typeface="Caladea" panose="02040503050406030204" pitchFamily="18" charset="0"/>
                                     </a:rPr>
                                     <m:t>log</m:t>
                                   </m:r>
@@ -18352,7 +18448,7 @@
                                     <m:dPr>
                                       <m:ctrlPr>
                                         <a:rPr lang="en-US" altLang="ko-KR" sz="1400" b="0" i="1" smtClean="0">
-                                          <a:latin typeface="Cambria Math" charset="0"/>
+                                          <a:latin typeface="Caladea" charset="0"/>
                                         </a:rPr>
                                       </m:ctrlPr>
                                     </m:dPr>
@@ -18361,14 +18457,14 @@
                                         <m:sSubPr>
                                           <m:ctrlPr>
                                             <a:rPr lang="en-US" altLang="ko-KR" sz="1400" b="0" i="1" smtClean="0">
-                                              <a:latin typeface="Cambria Math" charset="0"/>
+                                              <a:latin typeface="Caladea" charset="0"/>
                                             </a:rPr>
                                           </m:ctrlPr>
                                         </m:sSubPr>
                                         <m:e>
                                           <m:r>
                                             <a:rPr lang="en-US" altLang="ko-KR" sz="1400" b="0" i="1" smtClean="0">
-                                              <a:latin typeface="Cambria Math" panose="02040503050406030204" pitchFamily="18" charset="0"/>
+                                              <a:latin typeface="Caladea" panose="02040503050406030204" pitchFamily="18" charset="0"/>
                                             </a:rPr>
                                             <m:t>𝑥</m:t>
                                           </m:r>
@@ -18376,7 +18472,7 @@
                                         <m:sub>
                                           <m:r>
                                             <a:rPr lang="en-US" altLang="ko-KR" sz="1400" b="0" i="1" smtClean="0">
-                                              <a:latin typeface="Cambria Math" panose="02040503050406030204" pitchFamily="18" charset="0"/>
+                                              <a:latin typeface="Caladea" panose="02040503050406030204" pitchFamily="18" charset="0"/>
                                             </a:rPr>
                                             <m:t>𝑖</m:t>
                                           </m:r>
@@ -18388,7 +18484,7 @@
                               </m:func>
                               <m:r>
                                 <a:rPr lang="en-US" altLang="ko-KR" sz="1400" b="0" i="1" smtClean="0">
-                                  <a:latin typeface="Cambria Math" panose="02040503050406030204" pitchFamily="18" charset="0"/>
+                                  <a:latin typeface="Caladea" panose="02040503050406030204" pitchFamily="18" charset="0"/>
                                 </a:rPr>
                                 <m:t>+</m:t>
                               </m:r>
@@ -18396,14 +18492,14 @@
                                 <m:dPr>
                                   <m:ctrlPr>
                                     <a:rPr lang="en-US" altLang="ko-KR" sz="1400" b="0" i="1" smtClean="0">
-                                      <a:latin typeface="Cambria Math" charset="0"/>
+                                      <a:latin typeface="Caladea" charset="0"/>
                                     </a:rPr>
                                   </m:ctrlPr>
                                 </m:dPr>
                                 <m:e>
                                   <m:r>
                                     <a:rPr lang="en-US" altLang="ko-KR" sz="1400" b="0" i="1" smtClean="0">
-                                      <a:latin typeface="Cambria Math" panose="02040503050406030204" pitchFamily="18" charset="0"/>
+                                      <a:latin typeface="Caladea" panose="02040503050406030204" pitchFamily="18" charset="0"/>
                                     </a:rPr>
                                     <m:t>1−</m:t>
                                   </m:r>
@@ -18411,14 +18507,14 @@
                                     <m:sSubPr>
                                       <m:ctrlPr>
                                         <a:rPr lang="en-US" altLang="ko-KR" sz="1400" b="0" i="1" smtClean="0">
-                                          <a:latin typeface="Cambria Math" charset="0"/>
+                                          <a:latin typeface="Caladea" charset="0"/>
                                         </a:rPr>
                                       </m:ctrlPr>
                                     </m:sSubPr>
                                     <m:e>
                                       <m:r>
                                         <a:rPr lang="en-US" altLang="ko-KR" sz="1400" b="0" i="1" smtClean="0">
-                                          <a:latin typeface="Cambria Math" panose="02040503050406030204" pitchFamily="18" charset="0"/>
+                                          <a:latin typeface="Caladea" panose="02040503050406030204" pitchFamily="18" charset="0"/>
                                         </a:rPr>
                                         <m:t>𝑡</m:t>
                                       </m:r>
@@ -18426,7 +18522,7 @@
                                     <m:sub>
                                       <m:r>
                                         <a:rPr lang="en-US" altLang="ko-KR" sz="1400" b="0" i="1" smtClean="0">
-                                          <a:latin typeface="Cambria Math" panose="02040503050406030204" pitchFamily="18" charset="0"/>
+                                          <a:latin typeface="Caladea" panose="02040503050406030204" pitchFamily="18" charset="0"/>
                                         </a:rPr>
                                         <m:t>𝑖</m:t>
                                       </m:r>
@@ -18438,7 +18534,7 @@
                                 <m:funcPr>
                                   <m:ctrlPr>
                                     <a:rPr lang="en-US" altLang="ko-KR" sz="1400" b="0" i="1" smtClean="0">
-                                      <a:latin typeface="Cambria Math" charset="0"/>
+                                      <a:latin typeface="Caladea" charset="0"/>
                                     </a:rPr>
                                   </m:ctrlPr>
                                 </m:funcPr>
@@ -18448,7 +18544,7 @@
                                       <m:sty m:val="p"/>
                                     </m:rPr>
                                     <a:rPr lang="en-US" altLang="ko-KR" sz="1400" b="0" i="0" smtClean="0">
-                                      <a:latin typeface="Cambria Math" panose="02040503050406030204" pitchFamily="18" charset="0"/>
+                                      <a:latin typeface="Caladea" panose="02040503050406030204" pitchFamily="18" charset="0"/>
                                     </a:rPr>
                                     <m:t>log</m:t>
                                   </m:r>
@@ -18458,14 +18554,14 @@
                                     <m:dPr>
                                       <m:ctrlPr>
                                         <a:rPr lang="en-US" altLang="ko-KR" sz="1400" b="0" i="1" smtClean="0">
-                                          <a:latin typeface="Cambria Math" charset="0"/>
+                                          <a:latin typeface="Caladea" charset="0"/>
                                         </a:rPr>
                                       </m:ctrlPr>
                                     </m:dPr>
                                     <m:e>
                                       <m:r>
                                         <a:rPr lang="en-US" altLang="ko-KR" sz="1400" b="0" i="1" smtClean="0">
-                                          <a:latin typeface="Cambria Math" panose="02040503050406030204" pitchFamily="18" charset="0"/>
+                                          <a:latin typeface="Caladea" panose="02040503050406030204" pitchFamily="18" charset="0"/>
                                         </a:rPr>
                                         <m:t>1−</m:t>
                                       </m:r>
@@ -18473,14 +18569,14 @@
                                         <m:sSubPr>
                                           <m:ctrlPr>
                                             <a:rPr lang="en-US" altLang="ko-KR" sz="1400" b="0" i="1" smtClean="0">
-                                              <a:latin typeface="Cambria Math" charset="0"/>
+                                              <a:latin typeface="Caladea" charset="0"/>
                                             </a:rPr>
                                           </m:ctrlPr>
                                         </m:sSubPr>
                                         <m:e>
                                           <m:r>
                                             <a:rPr lang="en-US" altLang="ko-KR" sz="1400" b="0" i="1" smtClean="0">
-                                              <a:latin typeface="Cambria Math" panose="02040503050406030204" pitchFamily="18" charset="0"/>
+                                              <a:latin typeface="Caladea" panose="02040503050406030204" pitchFamily="18" charset="0"/>
                                             </a:rPr>
                                             <m:t>𝑥</m:t>
                                           </m:r>
@@ -18488,7 +18584,7 @@
                                         <m:sub>
                                           <m:r>
                                             <a:rPr lang="en-US" altLang="ko-KR" sz="1400" b="0" i="1" smtClean="0">
-                                              <a:latin typeface="Cambria Math" panose="02040503050406030204" pitchFamily="18" charset="0"/>
+                                              <a:latin typeface="Caladea" panose="02040503050406030204" pitchFamily="18" charset="0"/>
                                             </a:rPr>
                                             <m:t>𝑖</m:t>
                                           </m:r>
@@ -18504,7 +18600,7 @@
                       </m:nary>
                       <m:r>
                         <a:rPr lang="en-US" altLang="ko-KR" sz="1400" b="0" i="1" smtClean="0">
-                          <a:latin typeface="Cambria Math" panose="02040503050406030204" pitchFamily="18" charset="0"/>
+                          <a:latin typeface="Caladea" panose="02040503050406030204" pitchFamily="18" charset="0"/>
                         </a:rPr>
                         <m:t>]</m:t>
                       </m:r>
@@ -18580,8 +18676,8 @@
             <a:pPr algn="ctr"/>
             <a:r>
               <a:rPr lang="en-US" altLang="ko-KR" sz="1400" dirty="0" smtClean="0">
-                <a:latin typeface="Times New Roman" panose="02020603050405020304" pitchFamily="18" charset="0"/>
-                <a:cs typeface="Times New Roman" panose="02020603050405020304" pitchFamily="18" charset="0"/>
+                <a:latin typeface="Liberation Serif" panose="02020603050405020304" pitchFamily="18" charset="0"/>
+                <a:cs typeface="Liberation Serif" panose="02020603050405020304" pitchFamily="18" charset="0"/>
               </a:rPr>
               <a:t>True values</a:t>
             </a:r>
@@ -18715,8 +18811,8 @@
                 <a:solidFill>
                   <a:prstClr val="black"/>
                 </a:solidFill>
-                <a:latin typeface="Times New Roman" panose="02020603050405020304" pitchFamily="18" charset="0"/>
-                <a:cs typeface="Times New Roman" panose="02020603050405020304" pitchFamily="18" charset="0"/>
+                <a:latin typeface="Liberation Serif" panose="02020603050405020304" pitchFamily="18" charset="0"/>
+                <a:cs typeface="Liberation Serif" panose="02020603050405020304" pitchFamily="18" charset="0"/>
               </a:rPr>
               <a:t>(Appendix) Learning Algorithm of Neural Networks</a:t>
             </a:r>
@@ -18749,13 +18845,13 @@
               <a:lnSpc>
                 <a:spcPct val="150000"/>
               </a:lnSpc>
-              <a:buFont typeface="Arial" panose="020B0604020202020204" pitchFamily="34" charset="0"/>
+              <a:buFont typeface="Liberation Sans" panose="020B0604020202020204" pitchFamily="34" charset="0"/>
               <a:buChar char="•"/>
             </a:pPr>
             <a:r>
               <a:rPr lang="en-US" altLang="ko-KR" sz="2000" dirty="0">
-                <a:latin typeface="Times New Roman" panose="02020603050405020304" pitchFamily="18" charset="0"/>
-                <a:cs typeface="Times New Roman" panose="02020603050405020304" pitchFamily="18" charset="0"/>
+                <a:latin typeface="Liberation Serif" panose="02020603050405020304" pitchFamily="18" charset="0"/>
+                <a:cs typeface="Liberation Serif" panose="02020603050405020304" pitchFamily="18" charset="0"/>
               </a:rPr>
               <a:t>Gradient descent method (Back-propagation)</a:t>
             </a:r>
@@ -18768,8 +18864,8 @@
             </a:pPr>
             <a:r>
               <a:rPr lang="en-US" altLang="ko-KR" dirty="0">
-                <a:latin typeface="Times New Roman" panose="02020603050405020304" pitchFamily="18" charset="0"/>
-                <a:cs typeface="Times New Roman" panose="02020603050405020304" pitchFamily="18" charset="0"/>
+                <a:latin typeface="Liberation Serif" panose="02020603050405020304" pitchFamily="18" charset="0"/>
+                <a:cs typeface="Liberation Serif" panose="02020603050405020304" pitchFamily="18" charset="0"/>
               </a:rPr>
               <a:t>= Learning parameters to minimize the error from the true value in the systematic,  reverse way even for multiple hidden layers</a:t>
             </a:r>
@@ -18803,126 +18899,126 @@
                 <a:solidFill>
                   <a:srgbClr val="222222"/>
                 </a:solidFill>
-                <a:latin typeface="Arial" panose="020B0604020202020204" pitchFamily="34" charset="0"/>
-              </a:rPr>
-              <a:t>Source</a:t>
+                <a:latin typeface="Liberation Sans" panose="020B0604020202020204" pitchFamily="34" charset="0"/>
+              </a:rPr>
+              <a:t>Source: Fully Understanding Backpropagation with Examples (Jaejun Yoo’s Playground) http://jaejunyoo.blogspot.com/2017/01/backpropagation.html </a:t>
             </a:r>
             <a:r>
               <a:rPr lang="en-US" altLang="ko-KR" sz="900" dirty="0">
                 <a:solidFill>
                   <a:srgbClr val="222222"/>
                 </a:solidFill>
-                <a:latin typeface="Arial" panose="020B0604020202020204" pitchFamily="34" charset="0"/>
-              </a:rPr>
-              <a:t>: Backpropagation </a:t>
+                <a:latin typeface="Liberation Sans" panose="020B0604020202020204" pitchFamily="34" charset="0"/>
+              </a:rPr>
+              <a:t/>
             </a:r>
             <a:r>
               <a:rPr lang="ko-KR" altLang="en-US" sz="900" dirty="0">
                 <a:solidFill>
                   <a:srgbClr val="222222"/>
                 </a:solidFill>
-                <a:latin typeface="Arial" panose="020B0604020202020204" pitchFamily="34" charset="0"/>
-              </a:rPr>
-              <a:t>설명 예제와 함께 완전히 </a:t>
+                <a:latin typeface="Liberation Sans" panose="020B0604020202020204" pitchFamily="34" charset="0"/>
+              </a:rPr>
+              <a:t/>
             </a:r>
             <a:r>
               <a:rPr lang="ko-KR" altLang="en-US" sz="900" dirty="0" smtClean="0">
                 <a:solidFill>
                   <a:srgbClr val="222222"/>
                 </a:solidFill>
-                <a:latin typeface="Arial" panose="020B0604020202020204" pitchFamily="34" charset="0"/>
-              </a:rPr>
-              <a:t>이해하기 </a:t>
+                <a:latin typeface="Liberation Sans" panose="020B0604020202020204" pitchFamily="34" charset="0"/>
+              </a:rPr>
+              <a:t/>
             </a:r>
             <a:r>
               <a:rPr lang="en-US" altLang="ko-KR" sz="900" dirty="0" smtClean="0">
                 <a:solidFill>
                   <a:srgbClr val="222222"/>
                 </a:solidFill>
-                <a:latin typeface="Arial" panose="020B0604020202020204" pitchFamily="34" charset="0"/>
-              </a:rPr>
-              <a:t>(</a:t>
+                <a:latin typeface="Liberation Sans" panose="020B0604020202020204" pitchFamily="34" charset="0"/>
+              </a:rPr>
+              <a:t/>
             </a:r>
             <a:r>
               <a:rPr lang="en-US" altLang="ko-KR" sz="900" dirty="0" err="1" smtClean="0">
                 <a:solidFill>
                   <a:srgbClr val="222222"/>
                 </a:solidFill>
-                <a:latin typeface="Arial" panose="020B0604020202020204" pitchFamily="34" charset="0"/>
-              </a:rPr>
-              <a:t>Jaejun</a:t>
+                <a:latin typeface="Liberation Sans" panose="020B0604020202020204" pitchFamily="34" charset="0"/>
+              </a:rPr>
+              <a:t/>
             </a:r>
             <a:r>
               <a:rPr lang="en-US" altLang="ko-KR" sz="900" dirty="0" smtClean="0">
                 <a:solidFill>
                   <a:srgbClr val="222222"/>
                 </a:solidFill>
-                <a:latin typeface="Arial" panose="020B0604020202020204" pitchFamily="34" charset="0"/>
-              </a:rPr>
-              <a:t> </a:t>
+                <a:latin typeface="Liberation Sans" panose="020B0604020202020204" pitchFamily="34" charset="0"/>
+              </a:rPr>
+              <a:t/>
             </a:r>
             <a:r>
               <a:rPr lang="en-US" altLang="ko-KR" sz="900" dirty="0" err="1" smtClean="0">
                 <a:solidFill>
                   <a:srgbClr val="222222"/>
                 </a:solidFill>
-                <a:latin typeface="Arial" panose="020B0604020202020204" pitchFamily="34" charset="0"/>
-              </a:rPr>
-              <a:t>Yoo’s</a:t>
+                <a:latin typeface="Liberation Sans" panose="020B0604020202020204" pitchFamily="34" charset="0"/>
+              </a:rPr>
+              <a:t/>
             </a:r>
             <a:r>
               <a:rPr lang="en-US" altLang="ko-KR" sz="900" dirty="0" smtClean="0">
                 <a:solidFill>
                   <a:srgbClr val="222222"/>
                 </a:solidFill>
-                <a:latin typeface="Arial" panose="020B0604020202020204" pitchFamily="34" charset="0"/>
-              </a:rPr>
-              <a:t> Playground) </a:t>
+                <a:latin typeface="Liberation Sans" panose="020B0604020202020204" pitchFamily="34" charset="0"/>
+              </a:rPr>
+              <a:t/>
             </a:r>
             <a:r>
               <a:rPr lang="en-US" altLang="ko-KR" sz="900" dirty="0" smtClean="0">
                 <a:solidFill>
                   <a:srgbClr val="222222"/>
                 </a:solidFill>
-                <a:latin typeface="Arial" panose="020B0604020202020204" pitchFamily="34" charset="0"/>
+                <a:latin typeface="Liberation Sans" panose="020B0604020202020204" pitchFamily="34" charset="0"/>
                 <a:hlinkClick r:id="rId3"/>
               </a:rPr>
-              <a:t>http</a:t>
+              <a:t/>
             </a:r>
             <a:r>
               <a:rPr lang="en-US" altLang="ko-KR" sz="900" dirty="0">
                 <a:solidFill>
                   <a:srgbClr val="222222"/>
                 </a:solidFill>
-                <a:latin typeface="Arial" panose="020B0604020202020204" pitchFamily="34" charset="0"/>
+                <a:latin typeface="Liberation Sans" panose="020B0604020202020204" pitchFamily="34" charset="0"/>
                 <a:hlinkClick r:id="rId3"/>
               </a:rPr>
-              <a:t>://</a:t>
+              <a:t/>
             </a:r>
             <a:r>
               <a:rPr lang="en-US" altLang="ko-KR" sz="900" dirty="0" smtClean="0">
                 <a:solidFill>
                   <a:srgbClr val="222222"/>
                 </a:solidFill>
-                <a:latin typeface="Arial" panose="020B0604020202020204" pitchFamily="34" charset="0"/>
+                <a:latin typeface="Liberation Sans" panose="020B0604020202020204" pitchFamily="34" charset="0"/>
                 <a:hlinkClick r:id="rId3"/>
               </a:rPr>
-              <a:t>jaejunyoo.blogspot.com/2017/01/backpropagation.html</a:t>
+              <a:t/>
             </a:r>
             <a:r>
               <a:rPr lang="en-US" altLang="ko-KR" sz="900" dirty="0" smtClean="0">
                 <a:solidFill>
                   <a:srgbClr val="222222"/>
                 </a:solidFill>
-                <a:latin typeface="Arial" panose="020B0604020202020204" pitchFamily="34" charset="0"/>
-              </a:rPr>
-              <a:t> </a:t>
+                <a:latin typeface="Liberation Sans" panose="020B0604020202020204" pitchFamily="34" charset="0"/>
+              </a:rPr>
+              <a:t/>
             </a:r>
             <a:endParaRPr lang="ko-KR" altLang="en-US" sz="900" dirty="0">
               <a:solidFill>
                 <a:srgbClr val="222222"/>
               </a:solidFill>
-              <a:latin typeface="Arial" panose="020B0604020202020204" pitchFamily="34" charset="0"/>
+              <a:latin typeface="Liberation Sans" panose="020B0604020202020204" pitchFamily="34" charset="0"/>
             </a:endParaRPr>
           </a:p>
         </p:txBody>
@@ -18994,15 +19090,15 @@
               <a:p>
                 <a:r>
                   <a:rPr lang="en-US" altLang="ko-KR" sz="1600" b="0" dirty="0" smtClean="0">
-                    <a:latin typeface="Times New Roman" panose="02020603050405020304" pitchFamily="18" charset="0"/>
-                    <a:cs typeface="Times New Roman" panose="02020603050405020304" pitchFamily="18" charset="0"/>
+                    <a:latin typeface="Liberation Serif" panose="02020603050405020304" pitchFamily="18" charset="0"/>
+                    <a:cs typeface="Liberation Serif" panose="02020603050405020304" pitchFamily="18" charset="0"/>
                   </a:rPr>
                   <a:t>Firstly, update the parameters between output and hidden layers.</a:t>
                 </a:r>
               </a:p>
               <a:p>
                 <a:endParaRPr lang="en-US" altLang="ko-KR" sz="1600" b="0" i="1" dirty="0" smtClean="0">
-                  <a:latin typeface="Cambria Math" panose="02040503050406030204" pitchFamily="18" charset="0"/>
+                  <a:latin typeface="Caladea" panose="02040503050406030204" pitchFamily="18" charset="0"/>
                 </a:endParaRPr>
               </a:p>
               <a:p>
@@ -19017,20 +19113,20 @@
                         <m:fPr>
                           <m:ctrlPr>
                             <a:rPr lang="en-US" altLang="ko-KR" sz="1600" b="0" i="1" smtClean="0">
-                              <a:latin typeface="Cambria Math" charset="0"/>
+                              <a:latin typeface="Caladea" charset="0"/>
                             </a:rPr>
                           </m:ctrlPr>
                         </m:fPr>
                         <m:num>
                           <m:r>
                             <a:rPr lang="ko-KR" altLang="en-US" sz="1600" b="0" i="1" smtClean="0">
-                              <a:latin typeface="Cambria Math" panose="02040503050406030204" pitchFamily="18" charset="0"/>
+                              <a:latin typeface="Caladea" panose="02040503050406030204" pitchFamily="18" charset="0"/>
                             </a:rPr>
                             <m:t>𝜕</m:t>
                           </m:r>
                           <m:r>
                             <a:rPr lang="en-US" altLang="ko-KR" sz="1600" b="0" i="1" smtClean="0">
-                              <a:latin typeface="Cambria Math" panose="02040503050406030204" pitchFamily="18" charset="0"/>
+                              <a:latin typeface="Caladea" panose="02040503050406030204" pitchFamily="18" charset="0"/>
                             </a:rPr>
                             <m:t>𝐸</m:t>
                           </m:r>
@@ -19038,7 +19134,7 @@
                         <m:den>
                           <m:r>
                             <a:rPr lang="ko-KR" altLang="en-US" sz="1600" b="0" i="1" smtClean="0">
-                              <a:latin typeface="Cambria Math" panose="02040503050406030204" pitchFamily="18" charset="0"/>
+                              <a:latin typeface="Caladea" panose="02040503050406030204" pitchFamily="18" charset="0"/>
                             </a:rPr>
                             <m:t>𝜕</m:t>
                           </m:r>
@@ -19046,14 +19142,14 @@
                             <m:sSubPr>
                               <m:ctrlPr>
                                 <a:rPr lang="en-US" altLang="ko-KR" sz="1600" b="0" i="1" smtClean="0">
-                                  <a:latin typeface="Cambria Math" charset="0"/>
+                                  <a:latin typeface="Caladea" charset="0"/>
                                 </a:rPr>
                               </m:ctrlPr>
                             </m:sSubPr>
                             <m:e>
                               <m:r>
                                 <a:rPr lang="en-US" altLang="ko-KR" sz="1600" b="0" i="1" smtClean="0">
-                                  <a:latin typeface="Cambria Math" panose="02040503050406030204" pitchFamily="18" charset="0"/>
+                                  <a:latin typeface="Caladea" panose="02040503050406030204" pitchFamily="18" charset="0"/>
                                 </a:rPr>
                                 <m:t>𝑤</m:t>
                               </m:r>
@@ -19061,13 +19157,13 @@
                             <m:sub>
                               <m:r>
                                 <a:rPr lang="en-US" altLang="ko-KR" sz="1600" b="0" i="1" smtClean="0">
-                                  <a:latin typeface="Cambria Math" panose="02040503050406030204" pitchFamily="18" charset="0"/>
+                                  <a:latin typeface="Caladea" panose="02040503050406030204" pitchFamily="18" charset="0"/>
                                 </a:rPr>
                                 <m:t>𝑗</m:t>
                               </m:r>
                               <m:r>
                                 <a:rPr lang="en-US" altLang="ko-KR" sz="1600" b="0" i="1" smtClean="0">
-                                  <a:latin typeface="Cambria Math" panose="02040503050406030204" pitchFamily="18" charset="0"/>
+                                  <a:latin typeface="Caladea" panose="02040503050406030204" pitchFamily="18" charset="0"/>
                                 </a:rPr>
                                 <m:t>1</m:t>
                               </m:r>
@@ -19077,7 +19173,7 @@
                       </m:f>
                       <m:r>
                         <a:rPr lang="en-US" altLang="ko-KR" sz="1600" b="0" i="1" smtClean="0">
-                          <a:latin typeface="Cambria Math" panose="02040503050406030204" pitchFamily="18" charset="0"/>
+                          <a:latin typeface="Caladea" panose="02040503050406030204" pitchFamily="18" charset="0"/>
                         </a:rPr>
                         <m:t>=</m:t>
                       </m:r>
@@ -19085,20 +19181,20 @@
                         <m:fPr>
                           <m:ctrlPr>
                             <a:rPr lang="en-US" altLang="ko-KR" sz="1600" i="1">
-                              <a:latin typeface="Cambria Math" charset="0"/>
+                              <a:latin typeface="Caladea" charset="0"/>
                             </a:rPr>
                           </m:ctrlPr>
                         </m:fPr>
                         <m:num>
                           <m:r>
                             <a:rPr lang="ko-KR" altLang="en-US" sz="1600" i="1">
-                              <a:latin typeface="Cambria Math" panose="02040503050406030204" pitchFamily="18" charset="0"/>
+                              <a:latin typeface="Caladea" panose="02040503050406030204" pitchFamily="18" charset="0"/>
                             </a:rPr>
                             <m:t>𝜕</m:t>
                           </m:r>
                           <m:r>
                             <a:rPr lang="en-US" altLang="ko-KR" sz="1600" i="1">
-                              <a:latin typeface="Cambria Math" panose="02040503050406030204" pitchFamily="18" charset="0"/>
+                              <a:latin typeface="Caladea" panose="02040503050406030204" pitchFamily="18" charset="0"/>
                             </a:rPr>
                             <m:t>𝐸</m:t>
                           </m:r>
@@ -19106,7 +19202,7 @@
                         <m:den>
                           <m:r>
                             <a:rPr lang="ko-KR" altLang="en-US" sz="1600" i="1">
-                              <a:latin typeface="Cambria Math" panose="02040503050406030204" pitchFamily="18" charset="0"/>
+                              <a:latin typeface="Caladea" panose="02040503050406030204" pitchFamily="18" charset="0"/>
                             </a:rPr>
                             <m:t>𝜕</m:t>
                           </m:r>
@@ -19114,14 +19210,14 @@
                             <m:sSubPr>
                               <m:ctrlPr>
                                 <a:rPr lang="en-US" altLang="ko-KR" sz="1600" b="0" i="1" smtClean="0">
-                                  <a:latin typeface="Cambria Math" charset="0"/>
+                                  <a:latin typeface="Caladea" charset="0"/>
                                 </a:rPr>
                               </m:ctrlPr>
                             </m:sSubPr>
                             <m:e>
                               <m:r>
                                 <a:rPr lang="en-US" altLang="ko-KR" sz="1600" b="0" i="1" smtClean="0">
-                                  <a:latin typeface="Cambria Math" panose="02040503050406030204" pitchFamily="18" charset="0"/>
+                                  <a:latin typeface="Caladea" panose="02040503050406030204" pitchFamily="18" charset="0"/>
                                 </a:rPr>
                                 <m:t>𝑥</m:t>
                               </m:r>
@@ -19129,7 +19225,7 @@
                             <m:sub>
                               <m:r>
                                 <a:rPr lang="en-US" altLang="ko-KR" sz="1600" b="0" i="1" smtClean="0">
-                                  <a:latin typeface="Cambria Math" panose="02040503050406030204" pitchFamily="18" charset="0"/>
+                                  <a:latin typeface="Caladea" panose="02040503050406030204" pitchFamily="18" charset="0"/>
                                 </a:rPr>
                                 <m:t>𝑖</m:t>
                               </m:r>
@@ -19141,14 +19237,14 @@
                         <m:fPr>
                           <m:ctrlPr>
                             <a:rPr lang="en-US" altLang="ko-KR" sz="1600" i="1">
-                              <a:latin typeface="Cambria Math" charset="0"/>
+                              <a:latin typeface="Caladea" charset="0"/>
                             </a:rPr>
                           </m:ctrlPr>
                         </m:fPr>
                         <m:num>
                           <m:r>
                             <a:rPr lang="ko-KR" altLang="en-US" sz="1600" i="1">
-                              <a:latin typeface="Cambria Math" panose="02040503050406030204" pitchFamily="18" charset="0"/>
+                              <a:latin typeface="Caladea" panose="02040503050406030204" pitchFamily="18" charset="0"/>
                             </a:rPr>
                             <m:t>𝜕</m:t>
                           </m:r>
@@ -19156,14 +19252,14 @@
                             <m:sSubPr>
                               <m:ctrlPr>
                                 <a:rPr lang="en-US" altLang="ko-KR" sz="1600" b="0" i="1" smtClean="0">
-                                  <a:latin typeface="Cambria Math" charset="0"/>
+                                  <a:latin typeface="Caladea" charset="0"/>
                                 </a:rPr>
                               </m:ctrlPr>
                             </m:sSubPr>
                             <m:e>
                               <m:r>
                                 <a:rPr lang="en-US" altLang="ko-KR" sz="1600" b="0" i="1" smtClean="0">
-                                  <a:latin typeface="Cambria Math" panose="02040503050406030204" pitchFamily="18" charset="0"/>
+                                  <a:latin typeface="Caladea" panose="02040503050406030204" pitchFamily="18" charset="0"/>
                                 </a:rPr>
                                 <m:t>𝑥</m:t>
                               </m:r>
@@ -19171,7 +19267,7 @@
                             <m:sub>
                               <m:r>
                                 <a:rPr lang="en-US" altLang="ko-KR" sz="1600" b="0" i="1" smtClean="0">
-                                  <a:latin typeface="Cambria Math" panose="02040503050406030204" pitchFamily="18" charset="0"/>
+                                  <a:latin typeface="Caladea" panose="02040503050406030204" pitchFamily="18" charset="0"/>
                                 </a:rPr>
                                 <m:t>𝑖</m:t>
                               </m:r>
@@ -19181,7 +19277,7 @@
                         <m:den>
                           <m:r>
                             <a:rPr lang="ko-KR" altLang="en-US" sz="1600" i="1">
-                              <a:latin typeface="Cambria Math" panose="02040503050406030204" pitchFamily="18" charset="0"/>
+                              <a:latin typeface="Caladea" panose="02040503050406030204" pitchFamily="18" charset="0"/>
                             </a:rPr>
                             <m:t>𝜕</m:t>
                           </m:r>
@@ -19189,14 +19285,14 @@
                             <m:sSubPr>
                               <m:ctrlPr>
                                 <a:rPr lang="en-US" altLang="ko-KR" sz="1600" b="0" i="1" smtClean="0">
-                                  <a:latin typeface="Cambria Math" charset="0"/>
+                                  <a:latin typeface="Caladea" charset="0"/>
                                 </a:rPr>
                               </m:ctrlPr>
                             </m:sSubPr>
                             <m:e>
                               <m:r>
                                 <a:rPr lang="en-US" altLang="ko-KR" sz="1600" b="0" i="1" smtClean="0">
-                                  <a:latin typeface="Cambria Math" panose="02040503050406030204" pitchFamily="18" charset="0"/>
+                                  <a:latin typeface="Caladea" panose="02040503050406030204" pitchFamily="18" charset="0"/>
                                 </a:rPr>
                                 <m:t>𝑠</m:t>
                               </m:r>
@@ -19204,7 +19300,7 @@
                             <m:sub>
                               <m:r>
                                 <a:rPr lang="en-US" altLang="ko-KR" sz="1600" b="0" i="1" smtClean="0">
-                                  <a:latin typeface="Cambria Math" panose="02040503050406030204" pitchFamily="18" charset="0"/>
+                                  <a:latin typeface="Caladea" panose="02040503050406030204" pitchFamily="18" charset="0"/>
                                 </a:rPr>
                                 <m:t>𝑖</m:t>
                               </m:r>
@@ -19216,14 +19312,14 @@
                         <m:fPr>
                           <m:ctrlPr>
                             <a:rPr lang="en-US" altLang="ko-KR" sz="1600" i="1">
-                              <a:latin typeface="Cambria Math" charset="0"/>
+                              <a:latin typeface="Caladea" charset="0"/>
                             </a:rPr>
                           </m:ctrlPr>
                         </m:fPr>
                         <m:num>
                           <m:r>
                             <a:rPr lang="ko-KR" altLang="en-US" sz="1600" i="1">
-                              <a:latin typeface="Cambria Math" panose="02040503050406030204" pitchFamily="18" charset="0"/>
+                              <a:latin typeface="Caladea" panose="02040503050406030204" pitchFamily="18" charset="0"/>
                             </a:rPr>
                             <m:t>𝜕</m:t>
                           </m:r>
@@ -19231,14 +19327,14 @@
                             <m:sSubPr>
                               <m:ctrlPr>
                                 <a:rPr lang="en-US" altLang="ko-KR" sz="1600" b="0" i="1" smtClean="0">
-                                  <a:latin typeface="Cambria Math" charset="0"/>
+                                  <a:latin typeface="Caladea" charset="0"/>
                                 </a:rPr>
                               </m:ctrlPr>
                             </m:sSubPr>
                             <m:e>
                               <m:r>
                                 <a:rPr lang="en-US" altLang="ko-KR" sz="1600" b="0" i="1" smtClean="0">
-                                  <a:latin typeface="Cambria Math" panose="02040503050406030204" pitchFamily="18" charset="0"/>
+                                  <a:latin typeface="Caladea" panose="02040503050406030204" pitchFamily="18" charset="0"/>
                                 </a:rPr>
                                 <m:t>𝑠</m:t>
                               </m:r>
@@ -19246,7 +19342,7 @@
                             <m:sub>
                               <m:r>
                                 <a:rPr lang="en-US" altLang="ko-KR" sz="1600" b="0" i="1" smtClean="0">
-                                  <a:latin typeface="Cambria Math" panose="02040503050406030204" pitchFamily="18" charset="0"/>
+                                  <a:latin typeface="Caladea" panose="02040503050406030204" pitchFamily="18" charset="0"/>
                                 </a:rPr>
                                 <m:t>𝑖</m:t>
                               </m:r>
@@ -19256,7 +19352,7 @@
                         <m:den>
                           <m:r>
                             <a:rPr lang="ko-KR" altLang="en-US" sz="1600" i="1">
-                              <a:latin typeface="Cambria Math" panose="02040503050406030204" pitchFamily="18" charset="0"/>
+                              <a:latin typeface="Caladea" panose="02040503050406030204" pitchFamily="18" charset="0"/>
                             </a:rPr>
                             <m:t>𝜕</m:t>
                           </m:r>
@@ -19264,14 +19360,14 @@
                             <m:sSubPr>
                               <m:ctrlPr>
                                 <a:rPr lang="en-US" altLang="ko-KR" sz="1600" i="1">
-                                  <a:latin typeface="Cambria Math" charset="0"/>
+                                  <a:latin typeface="Caladea" charset="0"/>
                                 </a:rPr>
                               </m:ctrlPr>
                             </m:sSubPr>
                             <m:e>
                               <m:r>
                                 <a:rPr lang="en-US" altLang="ko-KR" sz="1600" b="0" i="1" smtClean="0">
-                                  <a:latin typeface="Cambria Math" panose="02040503050406030204" pitchFamily="18" charset="0"/>
+                                  <a:latin typeface="Caladea" panose="02040503050406030204" pitchFamily="18" charset="0"/>
                                 </a:rPr>
                                 <m:t>𝑤</m:t>
                               </m:r>
@@ -19279,13 +19375,13 @@
                             <m:sub>
                               <m:r>
                                 <a:rPr lang="en-US" altLang="ko-KR" sz="1600" b="0" i="1" smtClean="0">
-                                  <a:latin typeface="Cambria Math" panose="02040503050406030204" pitchFamily="18" charset="0"/>
+                                  <a:latin typeface="Caladea" panose="02040503050406030204" pitchFamily="18" charset="0"/>
                                 </a:rPr>
                                 <m:t>𝑗</m:t>
                               </m:r>
                               <m:r>
                                 <a:rPr lang="en-US" altLang="ko-KR" sz="1600" i="1">
-                                  <a:latin typeface="Cambria Math" panose="02040503050406030204" pitchFamily="18" charset="0"/>
+                                  <a:latin typeface="Caladea" panose="02040503050406030204" pitchFamily="18" charset="0"/>
                                 </a:rPr>
                                 <m:t>𝑖</m:t>
                               </m:r>
@@ -19300,14 +19396,14 @@
               </a:p>
               <a:p>
                 <a:endParaRPr lang="en-US" altLang="ko-KR" sz="1600" i="1" dirty="0" smtClean="0">
-                  <a:latin typeface="Cambria Math" panose="02040503050406030204" pitchFamily="18" charset="0"/>
-                  <a:ea typeface="Cambria Math" panose="02040503050406030204" pitchFamily="18" charset="0"/>
+                  <a:latin typeface="Caladea" panose="02040503050406030204" pitchFamily="18" charset="0"/>
+                  <a:ea typeface="Caladea" panose="02040503050406030204" pitchFamily="18" charset="0"/>
                 </a:endParaRPr>
               </a:p>
               <a:p>
                 <a:endParaRPr lang="en-US" altLang="ko-KR" sz="1600" i="1" dirty="0" smtClean="0">
-                  <a:latin typeface="Cambria Math" panose="02040503050406030204" pitchFamily="18" charset="0"/>
-                  <a:ea typeface="Cambria Math" panose="02040503050406030204" pitchFamily="18" charset="0"/>
+                  <a:latin typeface="Caladea" panose="02040503050406030204" pitchFamily="18" charset="0"/>
+                  <a:ea typeface="Caladea" panose="02040503050406030204" pitchFamily="18" charset="0"/>
                 </a:endParaRPr>
               </a:p>
               <a:p>
@@ -19320,15 +19416,15 @@
                     <m:oMath xmlns:m="http://schemas.openxmlformats.org/officeDocument/2006/math">
                       <m:r>
                         <a:rPr lang="en-US" altLang="ko-KR" sz="1600" i="1" smtClean="0">
-                          <a:latin typeface="Cambria Math" panose="02040503050406030204" pitchFamily="18" charset="0"/>
-                          <a:ea typeface="Cambria Math" panose="02040503050406030204" pitchFamily="18" charset="0"/>
+                          <a:latin typeface="Caladea" panose="02040503050406030204" pitchFamily="18" charset="0"/>
+                          <a:ea typeface="Caladea" panose="02040503050406030204" pitchFamily="18" charset="0"/>
                         </a:rPr>
                         <m:t>∴</m:t>
                       </m:r>
                       <m:r>
                         <a:rPr lang="en-US" altLang="ko-KR" sz="1600" b="0" i="1" smtClean="0">
-                          <a:latin typeface="Cambria Math" panose="02040503050406030204" pitchFamily="18" charset="0"/>
-                          <a:ea typeface="Cambria Math" panose="02040503050406030204" pitchFamily="18" charset="0"/>
+                          <a:latin typeface="Caladea" panose="02040503050406030204" pitchFamily="18" charset="0"/>
+                          <a:ea typeface="Caladea" panose="02040503050406030204" pitchFamily="18" charset="0"/>
                         </a:rPr>
                         <m:t> </m:t>
                       </m:r>
@@ -19336,20 +19432,20 @@
                         <m:fPr>
                           <m:ctrlPr>
                             <a:rPr lang="en-US" altLang="ko-KR" sz="1600" i="1">
-                              <a:latin typeface="Cambria Math" charset="0"/>
+                              <a:latin typeface="Caladea" charset="0"/>
                             </a:rPr>
                           </m:ctrlPr>
                         </m:fPr>
                         <m:num>
                           <m:r>
                             <a:rPr lang="ko-KR" altLang="en-US" sz="1600" i="1">
-                              <a:latin typeface="Cambria Math" panose="02040503050406030204" pitchFamily="18" charset="0"/>
+                              <a:latin typeface="Caladea" panose="02040503050406030204" pitchFamily="18" charset="0"/>
                             </a:rPr>
                             <m:t>𝜕</m:t>
                           </m:r>
                           <m:r>
                             <a:rPr lang="en-US" altLang="ko-KR" sz="1600" i="1">
-                              <a:latin typeface="Cambria Math" panose="02040503050406030204" pitchFamily="18" charset="0"/>
+                              <a:latin typeface="Caladea" panose="02040503050406030204" pitchFamily="18" charset="0"/>
                             </a:rPr>
                             <m:t>𝐸</m:t>
                           </m:r>
@@ -19357,7 +19453,7 @@
                         <m:den>
                           <m:r>
                             <a:rPr lang="ko-KR" altLang="en-US" sz="1600" i="1">
-                              <a:latin typeface="Cambria Math" panose="02040503050406030204" pitchFamily="18" charset="0"/>
+                              <a:latin typeface="Caladea" panose="02040503050406030204" pitchFamily="18" charset="0"/>
                             </a:rPr>
                             <m:t>𝜕</m:t>
                           </m:r>
@@ -19365,14 +19461,14 @@
                             <m:sSubPr>
                               <m:ctrlPr>
                                 <a:rPr lang="en-US" altLang="ko-KR" sz="1600" i="1">
-                                  <a:latin typeface="Cambria Math" charset="0"/>
+                                  <a:latin typeface="Caladea" charset="0"/>
                                 </a:rPr>
                               </m:ctrlPr>
                             </m:sSubPr>
                             <m:e>
                               <m:r>
                                 <a:rPr lang="en-US" altLang="ko-KR" sz="1600" i="1">
-                                  <a:latin typeface="Cambria Math" panose="02040503050406030204" pitchFamily="18" charset="0"/>
+                                  <a:latin typeface="Caladea" panose="02040503050406030204" pitchFamily="18" charset="0"/>
                                 </a:rPr>
                                 <m:t>𝑤</m:t>
                               </m:r>
@@ -19380,13 +19476,13 @@
                             <m:sub>
                               <m:r>
                                 <a:rPr lang="en-US" altLang="ko-KR" sz="1600" i="1">
-                                  <a:latin typeface="Cambria Math" panose="02040503050406030204" pitchFamily="18" charset="0"/>
+                                  <a:latin typeface="Caladea" panose="02040503050406030204" pitchFamily="18" charset="0"/>
                                 </a:rPr>
                                 <m:t>𝑗</m:t>
                               </m:r>
                               <m:r>
                                 <a:rPr lang="en-US" altLang="ko-KR" sz="1600" i="1">
-                                  <a:latin typeface="Cambria Math" panose="02040503050406030204" pitchFamily="18" charset="0"/>
+                                  <a:latin typeface="Caladea" panose="02040503050406030204" pitchFamily="18" charset="0"/>
                                 </a:rPr>
                                 <m:t>1</m:t>
                               </m:r>
@@ -19396,7 +19492,7 @@
                       </m:f>
                       <m:r>
                         <a:rPr lang="en-US" altLang="ko-KR" sz="1600" i="1">
-                          <a:latin typeface="Cambria Math" panose="02040503050406030204" pitchFamily="18" charset="0"/>
+                          <a:latin typeface="Caladea" panose="02040503050406030204" pitchFamily="18" charset="0"/>
                         </a:rPr>
                         <m:t>=</m:t>
                       </m:r>
@@ -19404,7 +19500,7 @@
                         <m:dPr>
                           <m:ctrlPr>
                             <a:rPr lang="en-US" altLang="ko-KR" sz="1600" b="0" i="1" smtClean="0">
-                              <a:latin typeface="Cambria Math" charset="0"/>
+                              <a:latin typeface="Caladea" charset="0"/>
                             </a:rPr>
                           </m:ctrlPr>
                         </m:dPr>
@@ -19413,14 +19509,14 @@
                             <m:sSubPr>
                               <m:ctrlPr>
                                 <a:rPr lang="en-US" altLang="ko-KR" sz="1600" b="0" i="1" smtClean="0">
-                                  <a:latin typeface="Cambria Math" charset="0"/>
+                                  <a:latin typeface="Caladea" charset="0"/>
                                 </a:rPr>
                               </m:ctrlPr>
                             </m:sSubPr>
                             <m:e>
                               <m:r>
                                 <a:rPr lang="en-US" altLang="ko-KR" sz="1600" b="0" i="1" smtClean="0">
-                                  <a:latin typeface="Cambria Math" panose="02040503050406030204" pitchFamily="18" charset="0"/>
+                                  <a:latin typeface="Caladea" panose="02040503050406030204" pitchFamily="18" charset="0"/>
                                 </a:rPr>
                                 <m:t>𝑥</m:t>
                               </m:r>
@@ -19428,7 +19524,7 @@
                             <m:sub>
                               <m:r>
                                 <a:rPr lang="en-US" altLang="ko-KR" sz="1600" b="0" i="1" smtClean="0">
-                                  <a:latin typeface="Cambria Math" panose="02040503050406030204" pitchFamily="18" charset="0"/>
+                                  <a:latin typeface="Caladea" panose="02040503050406030204" pitchFamily="18" charset="0"/>
                                 </a:rPr>
                                 <m:t>𝑖</m:t>
                               </m:r>
@@ -19436,7 +19532,7 @@
                           </m:sSub>
                           <m:r>
                             <a:rPr lang="en-US" altLang="ko-KR" sz="1600" b="0" i="1" smtClean="0">
-                              <a:latin typeface="Cambria Math" panose="02040503050406030204" pitchFamily="18" charset="0"/>
+                              <a:latin typeface="Caladea" panose="02040503050406030204" pitchFamily="18" charset="0"/>
                             </a:rPr>
                             <m:t>−</m:t>
                           </m:r>
@@ -19444,14 +19540,14 @@
                             <m:sSubPr>
                               <m:ctrlPr>
                                 <a:rPr lang="en-US" altLang="ko-KR" sz="1600" b="0" i="1" smtClean="0">
-                                  <a:latin typeface="Cambria Math" charset="0"/>
+                                  <a:latin typeface="Caladea" charset="0"/>
                                 </a:rPr>
                               </m:ctrlPr>
                             </m:sSubPr>
                             <m:e>
                               <m:r>
                                 <a:rPr lang="en-US" altLang="ko-KR" sz="1600" b="0" i="1" smtClean="0">
-                                  <a:latin typeface="Cambria Math" panose="02040503050406030204" pitchFamily="18" charset="0"/>
+                                  <a:latin typeface="Caladea" panose="02040503050406030204" pitchFamily="18" charset="0"/>
                                 </a:rPr>
                                 <m:t>𝑡</m:t>
                               </m:r>
@@ -19459,7 +19555,7 @@
                             <m:sub>
                               <m:r>
                                 <a:rPr lang="en-US" altLang="ko-KR" sz="1600" b="0" i="1" smtClean="0">
-                                  <a:latin typeface="Cambria Math" panose="02040503050406030204" pitchFamily="18" charset="0"/>
+                                  <a:latin typeface="Caladea" panose="02040503050406030204" pitchFamily="18" charset="0"/>
                                 </a:rPr>
                                 <m:t>𝑖</m:t>
                               </m:r>
@@ -19471,14 +19567,14 @@
                         <m:sSubPr>
                           <m:ctrlPr>
                             <a:rPr lang="en-US" altLang="ko-KR" sz="1600" b="0" i="1" smtClean="0">
-                              <a:latin typeface="Cambria Math" charset="0"/>
+                              <a:latin typeface="Caladea" charset="0"/>
                             </a:rPr>
                           </m:ctrlPr>
                         </m:sSubPr>
                         <m:e>
                           <m:r>
                             <a:rPr lang="en-US" altLang="ko-KR" sz="1600" b="0" i="1" smtClean="0">
-                              <a:latin typeface="Cambria Math" panose="02040503050406030204" pitchFamily="18" charset="0"/>
+                              <a:latin typeface="Caladea" panose="02040503050406030204" pitchFamily="18" charset="0"/>
                             </a:rPr>
                             <m:t>𝑥</m:t>
                           </m:r>
@@ -19486,7 +19582,7 @@
                         <m:sub>
                           <m:r>
                             <a:rPr lang="en-US" altLang="ko-KR" sz="1600" b="0" i="1" smtClean="0">
-                              <a:latin typeface="Cambria Math" panose="02040503050406030204" pitchFamily="18" charset="0"/>
+                              <a:latin typeface="Caladea" panose="02040503050406030204" pitchFamily="18" charset="0"/>
                             </a:rPr>
                             <m:t>𝑗</m:t>
                           </m:r>
@@ -19564,8 +19660,8 @@
             <a:pPr algn="ctr"/>
             <a:r>
               <a:rPr lang="en-US" altLang="ko-KR" sz="1400" dirty="0" smtClean="0">
-                <a:latin typeface="Times New Roman" panose="02020603050405020304" pitchFamily="18" charset="0"/>
-                <a:cs typeface="Times New Roman" panose="02020603050405020304" pitchFamily="18" charset="0"/>
+                <a:latin typeface="Liberation Serif" panose="02020603050405020304" pitchFamily="18" charset="0"/>
+                <a:cs typeface="Liberation Serif" panose="02020603050405020304" pitchFamily="18" charset="0"/>
               </a:rPr>
               <a:t>True values</a:t>
             </a:r>
@@ -19597,8 +19693,8 @@
             <a:pPr algn="ctr"/>
             <a:r>
               <a:rPr lang="en-US" altLang="ko-KR" sz="1400" dirty="0" smtClean="0">
-                <a:latin typeface="Times New Roman" panose="02020603050405020304" pitchFamily="18" charset="0"/>
-                <a:cs typeface="Times New Roman" panose="02020603050405020304" pitchFamily="18" charset="0"/>
+                <a:latin typeface="Liberation Serif" panose="02020603050405020304" pitchFamily="18" charset="0"/>
+                <a:cs typeface="Liberation Serif" panose="02020603050405020304" pitchFamily="18" charset="0"/>
               </a:rPr>
               <a:t>(Chain rule)</a:t>
             </a:r>
@@ -19732,8 +19828,8 @@
                 <a:solidFill>
                   <a:prstClr val="black"/>
                 </a:solidFill>
-                <a:latin typeface="Times New Roman" panose="02020603050405020304" pitchFamily="18" charset="0"/>
-                <a:cs typeface="Times New Roman" panose="02020603050405020304" pitchFamily="18" charset="0"/>
+                <a:latin typeface="Liberation Serif" panose="02020603050405020304" pitchFamily="18" charset="0"/>
+                <a:cs typeface="Liberation Serif" panose="02020603050405020304" pitchFamily="18" charset="0"/>
               </a:rPr>
               <a:t>(Appendix) Learning Algorithm of Neural Networks</a:t>
             </a:r>
@@ -19766,13 +19862,13 @@
               <a:lnSpc>
                 <a:spcPct val="150000"/>
               </a:lnSpc>
-              <a:buFont typeface="Arial" panose="020B0604020202020204" pitchFamily="34" charset="0"/>
+              <a:buFont typeface="Liberation Sans" panose="020B0604020202020204" pitchFamily="34" charset="0"/>
               <a:buChar char="•"/>
             </a:pPr>
             <a:r>
               <a:rPr lang="en-US" altLang="ko-KR" sz="2000" dirty="0">
-                <a:latin typeface="Times New Roman" panose="02020603050405020304" pitchFamily="18" charset="0"/>
-                <a:cs typeface="Times New Roman" panose="02020603050405020304" pitchFamily="18" charset="0"/>
+                <a:latin typeface="Liberation Serif" panose="02020603050405020304" pitchFamily="18" charset="0"/>
+                <a:cs typeface="Liberation Serif" panose="02020603050405020304" pitchFamily="18" charset="0"/>
               </a:rPr>
               <a:t>Gradient descent method (Back-propagation)</a:t>
             </a:r>
@@ -19785,8 +19881,8 @@
             </a:pPr>
             <a:r>
               <a:rPr lang="en-US" altLang="ko-KR" dirty="0">
-                <a:latin typeface="Times New Roman" panose="02020603050405020304" pitchFamily="18" charset="0"/>
-                <a:cs typeface="Times New Roman" panose="02020603050405020304" pitchFamily="18" charset="0"/>
+                <a:latin typeface="Liberation Serif" panose="02020603050405020304" pitchFamily="18" charset="0"/>
+                <a:cs typeface="Liberation Serif" panose="02020603050405020304" pitchFamily="18" charset="0"/>
               </a:rPr>
               <a:t>= Learning parameters to minimize the error from the true value in the systematic,  reverse way even for multiple hidden layers</a:t>
             </a:r>
@@ -19820,126 +19916,126 @@
                 <a:solidFill>
                   <a:srgbClr val="222222"/>
                 </a:solidFill>
-                <a:latin typeface="Arial" panose="020B0604020202020204" pitchFamily="34" charset="0"/>
-              </a:rPr>
-              <a:t>Source</a:t>
+                <a:latin typeface="Liberation Sans" panose="020B0604020202020204" pitchFamily="34" charset="0"/>
+              </a:rPr>
+              <a:t>Source: Fully Understanding Backpropagation with Examples (Jaejun Yoo’s Playground) http://jaejunyoo.blogspot.com/2017/01/backpropagation.html </a:t>
             </a:r>
             <a:r>
               <a:rPr lang="en-US" altLang="ko-KR" sz="900" dirty="0">
                 <a:solidFill>
                   <a:srgbClr val="222222"/>
                 </a:solidFill>
-                <a:latin typeface="Arial" panose="020B0604020202020204" pitchFamily="34" charset="0"/>
-              </a:rPr>
-              <a:t>: Backpropagation </a:t>
+                <a:latin typeface="Liberation Sans" panose="020B0604020202020204" pitchFamily="34" charset="0"/>
+              </a:rPr>
+              <a:t/>
             </a:r>
             <a:r>
               <a:rPr lang="ko-KR" altLang="en-US" sz="900" dirty="0">
                 <a:solidFill>
                   <a:srgbClr val="222222"/>
                 </a:solidFill>
-                <a:latin typeface="Arial" panose="020B0604020202020204" pitchFamily="34" charset="0"/>
-              </a:rPr>
-              <a:t>설명 예제와 함께 완전히 </a:t>
+                <a:latin typeface="Liberation Sans" panose="020B0604020202020204" pitchFamily="34" charset="0"/>
+              </a:rPr>
+              <a:t/>
             </a:r>
             <a:r>
               <a:rPr lang="ko-KR" altLang="en-US" sz="900" dirty="0" smtClean="0">
                 <a:solidFill>
                   <a:srgbClr val="222222"/>
                 </a:solidFill>
-                <a:latin typeface="Arial" panose="020B0604020202020204" pitchFamily="34" charset="0"/>
-              </a:rPr>
-              <a:t>이해하기 </a:t>
+                <a:latin typeface="Liberation Sans" panose="020B0604020202020204" pitchFamily="34" charset="0"/>
+              </a:rPr>
+              <a:t/>
             </a:r>
             <a:r>
               <a:rPr lang="en-US" altLang="ko-KR" sz="900" dirty="0" smtClean="0">
                 <a:solidFill>
                   <a:srgbClr val="222222"/>
                 </a:solidFill>
-                <a:latin typeface="Arial" panose="020B0604020202020204" pitchFamily="34" charset="0"/>
-              </a:rPr>
-              <a:t>(</a:t>
+                <a:latin typeface="Liberation Sans" panose="020B0604020202020204" pitchFamily="34" charset="0"/>
+              </a:rPr>
+              <a:t/>
             </a:r>
             <a:r>
               <a:rPr lang="en-US" altLang="ko-KR" sz="900" dirty="0" err="1" smtClean="0">
                 <a:solidFill>
                   <a:srgbClr val="222222"/>
                 </a:solidFill>
-                <a:latin typeface="Arial" panose="020B0604020202020204" pitchFamily="34" charset="0"/>
-              </a:rPr>
-              <a:t>Jaejun</a:t>
+                <a:latin typeface="Liberation Sans" panose="020B0604020202020204" pitchFamily="34" charset="0"/>
+              </a:rPr>
+              <a:t/>
             </a:r>
             <a:r>
               <a:rPr lang="en-US" altLang="ko-KR" sz="900" dirty="0" smtClean="0">
                 <a:solidFill>
                   <a:srgbClr val="222222"/>
                 </a:solidFill>
-                <a:latin typeface="Arial" panose="020B0604020202020204" pitchFamily="34" charset="0"/>
-              </a:rPr>
-              <a:t> </a:t>
+                <a:latin typeface="Liberation Sans" panose="020B0604020202020204" pitchFamily="34" charset="0"/>
+              </a:rPr>
+              <a:t/>
             </a:r>
             <a:r>
               <a:rPr lang="en-US" altLang="ko-KR" sz="900" dirty="0" err="1" smtClean="0">
                 <a:solidFill>
                   <a:srgbClr val="222222"/>
                 </a:solidFill>
-                <a:latin typeface="Arial" panose="020B0604020202020204" pitchFamily="34" charset="0"/>
-              </a:rPr>
-              <a:t>Yoo’s</a:t>
+                <a:latin typeface="Liberation Sans" panose="020B0604020202020204" pitchFamily="34" charset="0"/>
+              </a:rPr>
+              <a:t/>
             </a:r>
             <a:r>
               <a:rPr lang="en-US" altLang="ko-KR" sz="900" dirty="0" smtClean="0">
                 <a:solidFill>
                   <a:srgbClr val="222222"/>
                 </a:solidFill>
-                <a:latin typeface="Arial" panose="020B0604020202020204" pitchFamily="34" charset="0"/>
-              </a:rPr>
-              <a:t> Playground) </a:t>
+                <a:latin typeface="Liberation Sans" panose="020B0604020202020204" pitchFamily="34" charset="0"/>
+              </a:rPr>
+              <a:t/>
             </a:r>
             <a:r>
               <a:rPr lang="en-US" altLang="ko-KR" sz="900" dirty="0" smtClean="0">
                 <a:solidFill>
                   <a:srgbClr val="222222"/>
                 </a:solidFill>
-                <a:latin typeface="Arial" panose="020B0604020202020204" pitchFamily="34" charset="0"/>
+                <a:latin typeface="Liberation Sans" panose="020B0604020202020204" pitchFamily="34" charset="0"/>
                 <a:hlinkClick r:id="rId3"/>
               </a:rPr>
-              <a:t>http</a:t>
+              <a:t/>
             </a:r>
             <a:r>
               <a:rPr lang="en-US" altLang="ko-KR" sz="900" dirty="0">
                 <a:solidFill>
                   <a:srgbClr val="222222"/>
                 </a:solidFill>
-                <a:latin typeface="Arial" panose="020B0604020202020204" pitchFamily="34" charset="0"/>
+                <a:latin typeface="Liberation Sans" panose="020B0604020202020204" pitchFamily="34" charset="0"/>
                 <a:hlinkClick r:id="rId3"/>
               </a:rPr>
-              <a:t>://</a:t>
+              <a:t/>
             </a:r>
             <a:r>
               <a:rPr lang="en-US" altLang="ko-KR" sz="900" dirty="0" smtClean="0">
                 <a:solidFill>
                   <a:srgbClr val="222222"/>
                 </a:solidFill>
-                <a:latin typeface="Arial" panose="020B0604020202020204" pitchFamily="34" charset="0"/>
+                <a:latin typeface="Liberation Sans" panose="020B0604020202020204" pitchFamily="34" charset="0"/>
                 <a:hlinkClick r:id="rId3"/>
               </a:rPr>
-              <a:t>jaejunyoo.blogspot.com/2017/01/backpropagation.html</a:t>
+              <a:t/>
             </a:r>
             <a:r>
               <a:rPr lang="en-US" altLang="ko-KR" sz="900" dirty="0" smtClean="0">
                 <a:solidFill>
                   <a:srgbClr val="222222"/>
                 </a:solidFill>
-                <a:latin typeface="Arial" panose="020B0604020202020204" pitchFamily="34" charset="0"/>
-              </a:rPr>
-              <a:t> </a:t>
+                <a:latin typeface="Liberation Sans" panose="020B0604020202020204" pitchFamily="34" charset="0"/>
+              </a:rPr>
+              <a:t/>
             </a:r>
             <a:endParaRPr lang="ko-KR" altLang="en-US" sz="900" dirty="0">
               <a:solidFill>
                 <a:srgbClr val="222222"/>
               </a:solidFill>
-              <a:latin typeface="Arial" panose="020B0604020202020204" pitchFamily="34" charset="0"/>
+              <a:latin typeface="Liberation Sans" panose="020B0604020202020204" pitchFamily="34" charset="0"/>
             </a:endParaRPr>
           </a:p>
         </p:txBody>
@@ -20011,15 +20107,15 @@
               <a:p>
                 <a:r>
                   <a:rPr lang="en-US" altLang="ko-KR" sz="1600" b="0" dirty="0" smtClean="0">
-                    <a:latin typeface="Times New Roman" panose="02020603050405020304" pitchFamily="18" charset="0"/>
-                    <a:cs typeface="Times New Roman" panose="02020603050405020304" pitchFamily="18" charset="0"/>
+                    <a:latin typeface="Liberation Serif" panose="02020603050405020304" pitchFamily="18" charset="0"/>
+                    <a:cs typeface="Liberation Serif" panose="02020603050405020304" pitchFamily="18" charset="0"/>
                   </a:rPr>
                   <a:t>Secondly, update the parameters between hidden and input layers.</a:t>
                 </a:r>
               </a:p>
               <a:p>
                 <a:endParaRPr lang="en-US" altLang="ko-KR" sz="1600" b="0" i="1" dirty="0" smtClean="0">
-                  <a:latin typeface="Cambria Math" panose="02040503050406030204" pitchFamily="18" charset="0"/>
+                  <a:latin typeface="Caladea" panose="02040503050406030204" pitchFamily="18" charset="0"/>
                 </a:endParaRPr>
               </a:p>
               <a:p>
@@ -20034,20 +20130,20 @@
                         <m:fPr>
                           <m:ctrlPr>
                             <a:rPr lang="en-US" altLang="ko-KR" sz="1600" b="0" i="1" smtClean="0">
-                              <a:latin typeface="Cambria Math" charset="0"/>
+                              <a:latin typeface="Caladea" charset="0"/>
                             </a:rPr>
                           </m:ctrlPr>
                         </m:fPr>
                         <m:num>
                           <m:r>
                             <a:rPr lang="ko-KR" altLang="en-US" sz="1600" b="0" i="1" smtClean="0">
-                              <a:latin typeface="Cambria Math" panose="02040503050406030204" pitchFamily="18" charset="0"/>
+                              <a:latin typeface="Caladea" panose="02040503050406030204" pitchFamily="18" charset="0"/>
                             </a:rPr>
                             <m:t>𝜕</m:t>
                           </m:r>
                           <m:r>
                             <a:rPr lang="en-US" altLang="ko-KR" sz="1600" b="0" i="1" smtClean="0">
-                              <a:latin typeface="Cambria Math" panose="02040503050406030204" pitchFamily="18" charset="0"/>
+                              <a:latin typeface="Caladea" panose="02040503050406030204" pitchFamily="18" charset="0"/>
                             </a:rPr>
                             <m:t>𝐸</m:t>
                           </m:r>
@@ -20055,7 +20151,7 @@
                         <m:den>
                           <m:r>
                             <a:rPr lang="ko-KR" altLang="en-US" sz="1600" b="0" i="1" smtClean="0">
-                              <a:latin typeface="Cambria Math" panose="02040503050406030204" pitchFamily="18" charset="0"/>
+                              <a:latin typeface="Caladea" panose="02040503050406030204" pitchFamily="18" charset="0"/>
                             </a:rPr>
                             <m:t>𝜕</m:t>
                           </m:r>
@@ -20063,14 +20159,14 @@
                             <m:sSubPr>
                               <m:ctrlPr>
                                 <a:rPr lang="en-US" altLang="ko-KR" sz="1600" b="0" i="1" smtClean="0">
-                                  <a:latin typeface="Cambria Math" charset="0"/>
+                                  <a:latin typeface="Caladea" charset="0"/>
                                 </a:rPr>
                               </m:ctrlPr>
                             </m:sSubPr>
                             <m:e>
                               <m:r>
                                 <a:rPr lang="en-US" altLang="ko-KR" sz="1600" b="0" i="1" smtClean="0">
-                                  <a:latin typeface="Cambria Math" panose="02040503050406030204" pitchFamily="18" charset="0"/>
+                                  <a:latin typeface="Caladea" panose="02040503050406030204" pitchFamily="18" charset="0"/>
                                 </a:rPr>
                                 <m:t>𝑤</m:t>
                               </m:r>
@@ -20078,7 +20174,7 @@
                             <m:sub>
                               <m:r>
                                 <a:rPr lang="en-US" altLang="ko-KR" sz="1600" b="0" i="1" smtClean="0">
-                                  <a:latin typeface="Cambria Math" panose="02040503050406030204" pitchFamily="18" charset="0"/>
+                                  <a:latin typeface="Caladea" panose="02040503050406030204" pitchFamily="18" charset="0"/>
                                 </a:rPr>
                                 <m:t>𝑘𝑗</m:t>
                               </m:r>
@@ -20088,7 +20184,7 @@
                       </m:f>
                       <m:r>
                         <a:rPr lang="en-US" altLang="ko-KR" sz="1600" b="0" i="1" smtClean="0">
-                          <a:latin typeface="Cambria Math" panose="02040503050406030204" pitchFamily="18" charset="0"/>
+                          <a:latin typeface="Caladea" panose="02040503050406030204" pitchFamily="18" charset="0"/>
                         </a:rPr>
                         <m:t>=</m:t>
                       </m:r>
@@ -20096,20 +20192,20 @@
                         <m:fPr>
                           <m:ctrlPr>
                             <a:rPr lang="en-US" altLang="ko-KR" sz="1600" i="1">
-                              <a:latin typeface="Cambria Math" charset="0"/>
+                              <a:latin typeface="Caladea" charset="0"/>
                             </a:rPr>
                           </m:ctrlPr>
                         </m:fPr>
                         <m:num>
                           <m:r>
                             <a:rPr lang="ko-KR" altLang="en-US" sz="1600" i="1">
-                              <a:latin typeface="Cambria Math" panose="02040503050406030204" pitchFamily="18" charset="0"/>
+                              <a:latin typeface="Caladea" panose="02040503050406030204" pitchFamily="18" charset="0"/>
                             </a:rPr>
                             <m:t>𝜕</m:t>
                           </m:r>
                           <m:r>
                             <a:rPr lang="en-US" altLang="ko-KR" sz="1600" i="1">
-                              <a:latin typeface="Cambria Math" panose="02040503050406030204" pitchFamily="18" charset="0"/>
+                              <a:latin typeface="Caladea" panose="02040503050406030204" pitchFamily="18" charset="0"/>
                             </a:rPr>
                             <m:t>𝐸</m:t>
                           </m:r>
@@ -20117,7 +20213,7 @@
                         <m:den>
                           <m:r>
                             <a:rPr lang="ko-KR" altLang="en-US" sz="1600" i="1">
-                              <a:latin typeface="Cambria Math" panose="02040503050406030204" pitchFamily="18" charset="0"/>
+                              <a:latin typeface="Caladea" panose="02040503050406030204" pitchFamily="18" charset="0"/>
                             </a:rPr>
                             <m:t>𝜕</m:t>
                           </m:r>
@@ -20125,14 +20221,14 @@
                             <m:sSubPr>
                               <m:ctrlPr>
                                 <a:rPr lang="en-US" altLang="ko-KR" sz="1600" b="0" i="1" smtClean="0">
-                                  <a:latin typeface="Cambria Math" charset="0"/>
+                                  <a:latin typeface="Caladea" charset="0"/>
                                 </a:rPr>
                               </m:ctrlPr>
                             </m:sSubPr>
                             <m:e>
                               <m:r>
                                 <a:rPr lang="en-US" altLang="ko-KR" sz="1600" b="0" i="1" smtClean="0">
-                                  <a:latin typeface="Cambria Math" panose="02040503050406030204" pitchFamily="18" charset="0"/>
+                                  <a:latin typeface="Caladea" panose="02040503050406030204" pitchFamily="18" charset="0"/>
                                 </a:rPr>
                                 <m:t>𝑠</m:t>
                               </m:r>
@@ -20140,7 +20236,7 @@
                             <m:sub>
                               <m:r>
                                 <a:rPr lang="en-US" altLang="ko-KR" sz="1600" b="0" i="1" smtClean="0">
-                                  <a:latin typeface="Cambria Math" panose="02040503050406030204" pitchFamily="18" charset="0"/>
+                                  <a:latin typeface="Caladea" panose="02040503050406030204" pitchFamily="18" charset="0"/>
                                 </a:rPr>
                                 <m:t>𝑗</m:t>
                               </m:r>
@@ -20152,14 +20248,14 @@
                         <m:fPr>
                           <m:ctrlPr>
                             <a:rPr lang="en-US" altLang="ko-KR" sz="1600" i="1">
-                              <a:latin typeface="Cambria Math" charset="0"/>
+                              <a:latin typeface="Caladea" charset="0"/>
                             </a:rPr>
                           </m:ctrlPr>
                         </m:fPr>
                         <m:num>
                           <m:r>
                             <a:rPr lang="ko-KR" altLang="en-US" sz="1600" i="1">
-                              <a:latin typeface="Cambria Math" panose="02040503050406030204" pitchFamily="18" charset="0"/>
+                              <a:latin typeface="Caladea" panose="02040503050406030204" pitchFamily="18" charset="0"/>
                             </a:rPr>
                             <m:t>𝜕</m:t>
                           </m:r>
@@ -20167,14 +20263,14 @@
                             <m:sSubPr>
                               <m:ctrlPr>
                                 <a:rPr lang="en-US" altLang="ko-KR" sz="1600" b="0" i="1" smtClean="0">
-                                  <a:latin typeface="Cambria Math" charset="0"/>
+                                  <a:latin typeface="Caladea" charset="0"/>
                                 </a:rPr>
                               </m:ctrlPr>
                             </m:sSubPr>
                             <m:e>
                               <m:r>
                                 <a:rPr lang="en-US" altLang="ko-KR" sz="1600" b="0" i="1" smtClean="0">
-                                  <a:latin typeface="Cambria Math" panose="02040503050406030204" pitchFamily="18" charset="0"/>
+                                  <a:latin typeface="Caladea" panose="02040503050406030204" pitchFamily="18" charset="0"/>
                                 </a:rPr>
                                 <m:t>𝑠</m:t>
                               </m:r>
@@ -20182,7 +20278,7 @@
                             <m:sub>
                               <m:r>
                                 <a:rPr lang="en-US" altLang="ko-KR" sz="1600" b="0" i="1" smtClean="0">
-                                  <a:latin typeface="Cambria Math" panose="02040503050406030204" pitchFamily="18" charset="0"/>
+                                  <a:latin typeface="Caladea" panose="02040503050406030204" pitchFamily="18" charset="0"/>
                                 </a:rPr>
                                 <m:t>𝑗</m:t>
                               </m:r>
@@ -20192,7 +20288,7 @@
                         <m:den>
                           <m:r>
                             <a:rPr lang="ko-KR" altLang="en-US" sz="1600" i="1">
-                              <a:latin typeface="Cambria Math" panose="02040503050406030204" pitchFamily="18" charset="0"/>
+                              <a:latin typeface="Caladea" panose="02040503050406030204" pitchFamily="18" charset="0"/>
                             </a:rPr>
                             <m:t>𝜕</m:t>
                           </m:r>
@@ -20200,14 +20296,14 @@
                             <m:sSubPr>
                               <m:ctrlPr>
                                 <a:rPr lang="en-US" altLang="ko-KR" sz="1600" i="1">
-                                  <a:latin typeface="Cambria Math" charset="0"/>
+                                  <a:latin typeface="Caladea" charset="0"/>
                                 </a:rPr>
                               </m:ctrlPr>
                             </m:sSubPr>
                             <m:e>
                               <m:r>
                                 <a:rPr lang="en-US" altLang="ko-KR" sz="1600" b="0" i="1" smtClean="0">
-                                  <a:latin typeface="Cambria Math" panose="02040503050406030204" pitchFamily="18" charset="0"/>
+                                  <a:latin typeface="Caladea" panose="02040503050406030204" pitchFamily="18" charset="0"/>
                                 </a:rPr>
                                 <m:t>𝑤</m:t>
                               </m:r>
@@ -20215,13 +20311,13 @@
                             <m:sub>
                               <m:r>
                                 <a:rPr lang="en-US" altLang="ko-KR" sz="1600" b="0" i="1" smtClean="0">
-                                  <a:latin typeface="Cambria Math" panose="02040503050406030204" pitchFamily="18" charset="0"/>
+                                  <a:latin typeface="Caladea" panose="02040503050406030204" pitchFamily="18" charset="0"/>
                                 </a:rPr>
                                 <m:t>𝑘</m:t>
                               </m:r>
                               <m:r>
                                 <a:rPr lang="en-US" altLang="ko-KR" sz="1600" i="1">
-                                  <a:latin typeface="Cambria Math" panose="02040503050406030204" pitchFamily="18" charset="0"/>
+                                  <a:latin typeface="Caladea" panose="02040503050406030204" pitchFamily="18" charset="0"/>
                                 </a:rPr>
                                 <m:t>𝑖</m:t>
                               </m:r>
@@ -20249,20 +20345,20 @@
                         <m:fPr>
                           <m:ctrlPr>
                             <a:rPr lang="en-US" altLang="ko-KR" sz="1600" i="1">
-                              <a:latin typeface="Cambria Math" charset="0"/>
+                              <a:latin typeface="Caladea" charset="0"/>
                             </a:rPr>
                           </m:ctrlPr>
                         </m:fPr>
                         <m:num>
                           <m:r>
                             <a:rPr lang="ko-KR" altLang="en-US" sz="1600" i="1">
-                              <a:latin typeface="Cambria Math" panose="02040503050406030204" pitchFamily="18" charset="0"/>
+                              <a:latin typeface="Caladea" panose="02040503050406030204" pitchFamily="18" charset="0"/>
                             </a:rPr>
                             <m:t>𝜕</m:t>
                           </m:r>
                           <m:r>
                             <a:rPr lang="en-US" altLang="ko-KR" sz="1600" i="1">
-                              <a:latin typeface="Cambria Math" panose="02040503050406030204" pitchFamily="18" charset="0"/>
+                              <a:latin typeface="Caladea" panose="02040503050406030204" pitchFamily="18" charset="0"/>
                             </a:rPr>
                             <m:t>𝐸</m:t>
                           </m:r>
@@ -20270,7 +20366,7 @@
                         <m:den>
                           <m:r>
                             <a:rPr lang="ko-KR" altLang="en-US" sz="1600" i="1">
-                              <a:latin typeface="Cambria Math" panose="02040503050406030204" pitchFamily="18" charset="0"/>
+                              <a:latin typeface="Caladea" panose="02040503050406030204" pitchFamily="18" charset="0"/>
                             </a:rPr>
                             <m:t>𝜕</m:t>
                           </m:r>
@@ -20278,14 +20374,14 @@
                             <m:sSubPr>
                               <m:ctrlPr>
                                 <a:rPr lang="en-US" altLang="ko-KR" sz="1600" i="1">
-                                  <a:latin typeface="Cambria Math" charset="0"/>
+                                  <a:latin typeface="Caladea" charset="0"/>
                                 </a:rPr>
                               </m:ctrlPr>
                             </m:sSubPr>
                             <m:e>
                               <m:r>
                                 <a:rPr lang="en-US" altLang="ko-KR" sz="1600" i="1">
-                                  <a:latin typeface="Cambria Math" panose="02040503050406030204" pitchFamily="18" charset="0"/>
+                                  <a:latin typeface="Caladea" panose="02040503050406030204" pitchFamily="18" charset="0"/>
                                 </a:rPr>
                                 <m:t>𝑤</m:t>
                               </m:r>
@@ -20293,7 +20389,7 @@
                             <m:sub>
                               <m:r>
                                 <a:rPr lang="en-US" altLang="ko-KR" sz="1600" i="1">
-                                  <a:latin typeface="Cambria Math" panose="02040503050406030204" pitchFamily="18" charset="0"/>
+                                  <a:latin typeface="Caladea" panose="02040503050406030204" pitchFamily="18" charset="0"/>
                                 </a:rPr>
                                 <m:t>𝑘𝑗</m:t>
                               </m:r>
@@ -20303,7 +20399,7 @@
                       </m:f>
                       <m:r>
                         <a:rPr lang="en-US" altLang="ko-KR" sz="1600" i="1">
-                          <a:latin typeface="Cambria Math" panose="02040503050406030204" pitchFamily="18" charset="0"/>
+                          <a:latin typeface="Caladea" panose="02040503050406030204" pitchFamily="18" charset="0"/>
                         </a:rPr>
                         <m:t>=</m:t>
                       </m:r>
@@ -20312,7 +20408,7 @@
                           <m:chr m:val="∑"/>
                           <m:ctrlPr>
                             <a:rPr lang="en-US" altLang="ko-KR" sz="1600" i="1">
-                              <a:latin typeface="Cambria Math" charset="0"/>
+                              <a:latin typeface="Caladea" charset="0"/>
                             </a:rPr>
                           </m:ctrlPr>
                         </m:naryPr>
@@ -20322,13 +20418,13 @@
                               <m:brk m:alnAt="23"/>
                             </m:rPr>
                             <a:rPr lang="en-US" altLang="ko-KR" sz="1600" i="1">
-                              <a:latin typeface="Cambria Math" panose="02040503050406030204" pitchFamily="18" charset="0"/>
+                              <a:latin typeface="Caladea" panose="02040503050406030204" pitchFamily="18" charset="0"/>
                             </a:rPr>
                             <m:t>𝑖</m:t>
                           </m:r>
                           <m:r>
                             <a:rPr lang="en-US" altLang="ko-KR" sz="1600" i="1">
-                              <a:latin typeface="Cambria Math" panose="02040503050406030204" pitchFamily="18" charset="0"/>
+                              <a:latin typeface="Caladea" panose="02040503050406030204" pitchFamily="18" charset="0"/>
                             </a:rPr>
                             <m:t>=1</m:t>
                           </m:r>
@@ -20336,7 +20432,7 @@
                         <m:sup>
                           <m:r>
                             <a:rPr lang="en-US" altLang="ko-KR" sz="1600" i="1">
-                              <a:latin typeface="Cambria Math" panose="02040503050406030204" pitchFamily="18" charset="0"/>
+                              <a:latin typeface="Caladea" panose="02040503050406030204" pitchFamily="18" charset="0"/>
                             </a:rPr>
                             <m:t>3</m:t>
                           </m:r>
@@ -20346,20 +20442,20 @@
                             <m:fPr>
                               <m:ctrlPr>
                                 <a:rPr lang="en-US" altLang="ko-KR" sz="1600" i="1">
-                                  <a:latin typeface="Cambria Math" charset="0"/>
+                                  <a:latin typeface="Caladea" charset="0"/>
                                 </a:rPr>
                               </m:ctrlPr>
                             </m:fPr>
                             <m:num>
                               <m:r>
                                 <a:rPr lang="ko-KR" altLang="en-US" sz="1600" i="1">
-                                  <a:latin typeface="Cambria Math" panose="02040503050406030204" pitchFamily="18" charset="0"/>
+                                  <a:latin typeface="Caladea" panose="02040503050406030204" pitchFamily="18" charset="0"/>
                                 </a:rPr>
                                 <m:t>𝜕</m:t>
                               </m:r>
                               <m:r>
                                 <a:rPr lang="en-US" altLang="ko-KR" sz="1600" i="1">
-                                  <a:latin typeface="Cambria Math" panose="02040503050406030204" pitchFamily="18" charset="0"/>
+                                  <a:latin typeface="Caladea" panose="02040503050406030204" pitchFamily="18" charset="0"/>
                                 </a:rPr>
                                 <m:t>𝐸</m:t>
                               </m:r>
@@ -20367,7 +20463,7 @@
                             <m:den>
                               <m:r>
                                 <a:rPr lang="ko-KR" altLang="en-US" sz="1600" i="1">
-                                  <a:latin typeface="Cambria Math" panose="02040503050406030204" pitchFamily="18" charset="0"/>
+                                  <a:latin typeface="Caladea" panose="02040503050406030204" pitchFamily="18" charset="0"/>
                                 </a:rPr>
                                 <m:t>𝜕</m:t>
                               </m:r>
@@ -20375,14 +20471,14 @@
                                 <m:sSubPr>
                                   <m:ctrlPr>
                                     <a:rPr lang="en-US" altLang="ko-KR" sz="1600" i="1">
-                                      <a:latin typeface="Cambria Math" charset="0"/>
+                                      <a:latin typeface="Caladea" charset="0"/>
                                     </a:rPr>
                                   </m:ctrlPr>
                                 </m:sSubPr>
                                 <m:e>
                                   <m:r>
                                     <a:rPr lang="en-US" altLang="ko-KR" sz="1600" b="0" i="1" smtClean="0">
-                                      <a:latin typeface="Cambria Math" panose="02040503050406030204" pitchFamily="18" charset="0"/>
+                                      <a:latin typeface="Caladea" panose="02040503050406030204" pitchFamily="18" charset="0"/>
                                     </a:rPr>
                                     <m:t>𝑠</m:t>
                                   </m:r>
@@ -20390,7 +20486,7 @@
                                 <m:sub>
                                   <m:r>
                                     <a:rPr lang="en-US" altLang="ko-KR" sz="1600" i="1">
-                                      <a:latin typeface="Cambria Math" panose="02040503050406030204" pitchFamily="18" charset="0"/>
+                                      <a:latin typeface="Caladea" panose="02040503050406030204" pitchFamily="18" charset="0"/>
                                     </a:rPr>
                                     <m:t>𝑖</m:t>
                                   </m:r>
@@ -20402,14 +20498,14 @@
                             <m:fPr>
                               <m:ctrlPr>
                                 <a:rPr lang="en-US" altLang="ko-KR" sz="1600" i="1">
-                                  <a:latin typeface="Cambria Math" charset="0"/>
+                                  <a:latin typeface="Caladea" charset="0"/>
                                 </a:rPr>
                               </m:ctrlPr>
                             </m:fPr>
                             <m:num>
                               <m:r>
                                 <a:rPr lang="ko-KR" altLang="en-US" sz="1600" i="1">
-                                  <a:latin typeface="Cambria Math" panose="02040503050406030204" pitchFamily="18" charset="0"/>
+                                  <a:latin typeface="Caladea" panose="02040503050406030204" pitchFamily="18" charset="0"/>
                                 </a:rPr>
                                 <m:t>𝜕</m:t>
                               </m:r>
@@ -20417,14 +20513,14 @@
                                 <m:sSubPr>
                                   <m:ctrlPr>
                                     <a:rPr lang="en-US" altLang="ko-KR" sz="1600" i="1">
-                                      <a:latin typeface="Cambria Math" charset="0"/>
+                                      <a:latin typeface="Caladea" charset="0"/>
                                     </a:rPr>
                                   </m:ctrlPr>
                                 </m:sSubPr>
                                 <m:e>
                                   <m:r>
                                     <a:rPr lang="en-US" altLang="ko-KR" sz="1600" b="0" i="1" smtClean="0">
-                                      <a:latin typeface="Cambria Math" panose="02040503050406030204" pitchFamily="18" charset="0"/>
+                                      <a:latin typeface="Caladea" panose="02040503050406030204" pitchFamily="18" charset="0"/>
                                     </a:rPr>
                                     <m:t>𝑠</m:t>
                                   </m:r>
@@ -20432,7 +20528,7 @@
                                 <m:sub>
                                   <m:r>
                                     <a:rPr lang="en-US" altLang="ko-KR" sz="1600" i="1">
-                                      <a:latin typeface="Cambria Math" panose="02040503050406030204" pitchFamily="18" charset="0"/>
+                                      <a:latin typeface="Caladea" panose="02040503050406030204" pitchFamily="18" charset="0"/>
                                     </a:rPr>
                                     <m:t>𝑖</m:t>
                                   </m:r>
@@ -20442,7 +20538,7 @@
                             <m:den>
                               <m:r>
                                 <a:rPr lang="ko-KR" altLang="en-US" sz="1600" i="1">
-                                  <a:latin typeface="Cambria Math" panose="02040503050406030204" pitchFamily="18" charset="0"/>
+                                  <a:latin typeface="Caladea" panose="02040503050406030204" pitchFamily="18" charset="0"/>
                                 </a:rPr>
                                 <m:t>𝜕</m:t>
                               </m:r>
@@ -20450,14 +20546,14 @@
                                 <m:sSubPr>
                                   <m:ctrlPr>
                                     <a:rPr lang="en-US" altLang="ko-KR" sz="1600" i="1">
-                                      <a:latin typeface="Cambria Math" charset="0"/>
+                                      <a:latin typeface="Caladea" charset="0"/>
                                     </a:rPr>
                                   </m:ctrlPr>
                                 </m:sSubPr>
                                 <m:e>
                                   <m:r>
                                     <a:rPr lang="en-US" altLang="ko-KR" sz="1600" b="0" i="1" smtClean="0">
-                                      <a:latin typeface="Cambria Math" panose="02040503050406030204" pitchFamily="18" charset="0"/>
+                                      <a:latin typeface="Caladea" panose="02040503050406030204" pitchFamily="18" charset="0"/>
                                     </a:rPr>
                                     <m:t>𝑥</m:t>
                                   </m:r>
@@ -20465,7 +20561,7 @@
                                 <m:sub>
                                   <m:r>
                                     <a:rPr lang="en-US" altLang="ko-KR" sz="1600" b="0" i="1" smtClean="0">
-                                      <a:latin typeface="Cambria Math" panose="02040503050406030204" pitchFamily="18" charset="0"/>
+                                      <a:latin typeface="Caladea" panose="02040503050406030204" pitchFamily="18" charset="0"/>
                                     </a:rPr>
                                     <m:t>𝑗</m:t>
                                   </m:r>
@@ -20477,14 +20573,14 @@
                             <m:fPr>
                               <m:ctrlPr>
                                 <a:rPr lang="en-US" altLang="ko-KR" sz="1600" i="1">
-                                  <a:latin typeface="Cambria Math" charset="0"/>
+                                  <a:latin typeface="Caladea" charset="0"/>
                                 </a:rPr>
                               </m:ctrlPr>
                             </m:fPr>
                             <m:num>
                               <m:r>
                                 <a:rPr lang="ko-KR" altLang="en-US" sz="1600" i="1">
-                                  <a:latin typeface="Cambria Math" panose="02040503050406030204" pitchFamily="18" charset="0"/>
+                                  <a:latin typeface="Caladea" panose="02040503050406030204" pitchFamily="18" charset="0"/>
                                 </a:rPr>
                                 <m:t>𝜕</m:t>
                               </m:r>
@@ -20492,14 +20588,14 @@
                                 <m:sSubPr>
                                   <m:ctrlPr>
                                     <a:rPr lang="en-US" altLang="ko-KR" sz="1600" i="1">
-                                      <a:latin typeface="Cambria Math" charset="0"/>
+                                      <a:latin typeface="Caladea" charset="0"/>
                                     </a:rPr>
                                   </m:ctrlPr>
                                 </m:sSubPr>
                                 <m:e>
                                   <m:r>
                                     <a:rPr lang="en-US" altLang="ko-KR" sz="1600" b="0" i="1" smtClean="0">
-                                      <a:latin typeface="Cambria Math" panose="02040503050406030204" pitchFamily="18" charset="0"/>
+                                      <a:latin typeface="Caladea" panose="02040503050406030204" pitchFamily="18" charset="0"/>
                                     </a:rPr>
                                     <m:t>𝑥</m:t>
                                   </m:r>
@@ -20507,7 +20603,7 @@
                                 <m:sub>
                                   <m:r>
                                     <a:rPr lang="en-US" altLang="ko-KR" sz="1600" b="0" i="1" smtClean="0">
-                                      <a:latin typeface="Cambria Math" panose="02040503050406030204" pitchFamily="18" charset="0"/>
+                                      <a:latin typeface="Caladea" panose="02040503050406030204" pitchFamily="18" charset="0"/>
                                     </a:rPr>
                                     <m:t>𝑗</m:t>
                                   </m:r>
@@ -20517,7 +20613,7 @@
                             <m:den>
                               <m:r>
                                 <a:rPr lang="ko-KR" altLang="en-US" sz="1600" i="1">
-                                  <a:latin typeface="Cambria Math" panose="02040503050406030204" pitchFamily="18" charset="0"/>
+                                  <a:latin typeface="Caladea" panose="02040503050406030204" pitchFamily="18" charset="0"/>
                                 </a:rPr>
                                 <m:t>𝜕</m:t>
                               </m:r>
@@ -20525,14 +20621,14 @@
                                 <m:sSubPr>
                                   <m:ctrlPr>
                                     <a:rPr lang="en-US" altLang="ko-KR" sz="1600" i="1">
-                                      <a:latin typeface="Cambria Math" charset="0"/>
+                                      <a:latin typeface="Caladea" charset="0"/>
                                     </a:rPr>
                                   </m:ctrlPr>
                                 </m:sSubPr>
                                 <m:e>
                                   <m:r>
                                     <a:rPr lang="en-US" altLang="ko-KR" sz="1600" b="0" i="1" smtClean="0">
-                                      <a:latin typeface="Cambria Math" panose="02040503050406030204" pitchFamily="18" charset="0"/>
+                                      <a:latin typeface="Caladea" panose="02040503050406030204" pitchFamily="18" charset="0"/>
                                     </a:rPr>
                                     <m:t>𝑠</m:t>
                                   </m:r>
@@ -20540,7 +20636,7 @@
                                 <m:sub>
                                   <m:r>
                                     <a:rPr lang="en-US" altLang="ko-KR" sz="1600" i="1">
-                                      <a:latin typeface="Cambria Math" panose="02040503050406030204" pitchFamily="18" charset="0"/>
+                                      <a:latin typeface="Caladea" panose="02040503050406030204" pitchFamily="18" charset="0"/>
                                     </a:rPr>
                                     <m:t>𝑗</m:t>
                                   </m:r>
@@ -20552,8 +20648,8 @@
                       </m:nary>
                       <m:r>
                         <a:rPr lang="en-US" altLang="ko-KR" sz="1600" i="1">
-                          <a:latin typeface="Cambria Math" panose="02040503050406030204" pitchFamily="18" charset="0"/>
-                          <a:ea typeface="Cambria Math" panose="02040503050406030204" pitchFamily="18" charset="0"/>
+                          <a:latin typeface="Caladea" panose="02040503050406030204" pitchFamily="18" charset="0"/>
+                          <a:ea typeface="Caladea" panose="02040503050406030204" pitchFamily="18" charset="0"/>
                         </a:rPr>
                         <m:t>×</m:t>
                       </m:r>
@@ -20561,14 +20657,14 @@
                         <m:fPr>
                           <m:ctrlPr>
                             <a:rPr lang="en-US" altLang="ko-KR" sz="1600" i="1">
-                              <a:latin typeface="Cambria Math" charset="0"/>
+                              <a:latin typeface="Caladea" charset="0"/>
                             </a:rPr>
                           </m:ctrlPr>
                         </m:fPr>
                         <m:num>
                           <m:r>
                             <a:rPr lang="ko-KR" altLang="en-US" sz="1600" i="1">
-                              <a:latin typeface="Cambria Math" panose="02040503050406030204" pitchFamily="18" charset="0"/>
+                              <a:latin typeface="Caladea" panose="02040503050406030204" pitchFamily="18" charset="0"/>
                             </a:rPr>
                             <m:t>𝜕</m:t>
                           </m:r>
@@ -20576,14 +20672,14 @@
                             <m:sSubPr>
                               <m:ctrlPr>
                                 <a:rPr lang="en-US" altLang="ko-KR" sz="1600" i="1">
-                                  <a:latin typeface="Cambria Math" charset="0"/>
+                                  <a:latin typeface="Caladea" charset="0"/>
                                 </a:rPr>
                               </m:ctrlPr>
                             </m:sSubPr>
                             <m:e>
                               <m:r>
                                 <a:rPr lang="en-US" altLang="ko-KR" sz="1600" i="1">
-                                  <a:latin typeface="Cambria Math" panose="02040503050406030204" pitchFamily="18" charset="0"/>
+                                  <a:latin typeface="Caladea" panose="02040503050406030204" pitchFamily="18" charset="0"/>
                                 </a:rPr>
                                 <m:t>𝑠</m:t>
                               </m:r>
@@ -20591,7 +20687,7 @@
                             <m:sub>
                               <m:r>
                                 <a:rPr lang="en-US" altLang="ko-KR" sz="1600" i="1">
-                                  <a:latin typeface="Cambria Math" panose="02040503050406030204" pitchFamily="18" charset="0"/>
+                                  <a:latin typeface="Caladea" panose="02040503050406030204" pitchFamily="18" charset="0"/>
                                 </a:rPr>
                                 <m:t>𝑗</m:t>
                               </m:r>
@@ -20601,7 +20697,7 @@
                         <m:den>
                           <m:r>
                             <a:rPr lang="ko-KR" altLang="en-US" sz="1600" i="1">
-                              <a:latin typeface="Cambria Math" panose="02040503050406030204" pitchFamily="18" charset="0"/>
+                              <a:latin typeface="Caladea" panose="02040503050406030204" pitchFamily="18" charset="0"/>
                             </a:rPr>
                             <m:t>𝜕</m:t>
                           </m:r>
@@ -20609,14 +20705,14 @@
                             <m:sSubPr>
                               <m:ctrlPr>
                                 <a:rPr lang="en-US" altLang="ko-KR" sz="1600" i="1">
-                                  <a:latin typeface="Cambria Math" charset="0"/>
+                                  <a:latin typeface="Caladea" charset="0"/>
                                 </a:rPr>
                               </m:ctrlPr>
                             </m:sSubPr>
                             <m:e>
                               <m:r>
                                 <a:rPr lang="en-US" altLang="ko-KR" sz="1600" i="1">
-                                  <a:latin typeface="Cambria Math" panose="02040503050406030204" pitchFamily="18" charset="0"/>
+                                  <a:latin typeface="Caladea" panose="02040503050406030204" pitchFamily="18" charset="0"/>
                                 </a:rPr>
                                 <m:t>𝑤</m:t>
                               </m:r>
@@ -20624,7 +20720,7 @@
                             <m:sub>
                               <m:r>
                                 <a:rPr lang="en-US" altLang="ko-KR" sz="1600" i="1">
-                                  <a:latin typeface="Cambria Math" panose="02040503050406030204" pitchFamily="18" charset="0"/>
+                                  <a:latin typeface="Caladea" panose="02040503050406030204" pitchFamily="18" charset="0"/>
                                 </a:rPr>
                                 <m:t>𝑘𝑖</m:t>
                               </m:r>
@@ -20639,8 +20735,8 @@
               </a:p>
               <a:p>
                 <a:endParaRPr lang="en-US" altLang="ko-KR" sz="1600" i="1" dirty="0" smtClean="0">
-                  <a:latin typeface="Cambria Math" panose="02040503050406030204" pitchFamily="18" charset="0"/>
-                  <a:ea typeface="Cambria Math" panose="02040503050406030204" pitchFamily="18" charset="0"/>
+                  <a:latin typeface="Caladea" panose="02040503050406030204" pitchFamily="18" charset="0"/>
+                  <a:ea typeface="Caladea" panose="02040503050406030204" pitchFamily="18" charset="0"/>
                 </a:endParaRPr>
               </a:p>
               <a:p>
@@ -20653,15 +20749,15 @@
                     <m:oMath xmlns:m="http://schemas.openxmlformats.org/officeDocument/2006/math">
                       <m:r>
                         <a:rPr lang="en-US" altLang="ko-KR" sz="1600" i="1" smtClean="0">
-                          <a:latin typeface="Cambria Math" panose="02040503050406030204" pitchFamily="18" charset="0"/>
-                          <a:ea typeface="Cambria Math" panose="02040503050406030204" pitchFamily="18" charset="0"/>
+                          <a:latin typeface="Caladea" panose="02040503050406030204" pitchFamily="18" charset="0"/>
+                          <a:ea typeface="Caladea" panose="02040503050406030204" pitchFamily="18" charset="0"/>
                         </a:rPr>
                         <m:t>∴</m:t>
                       </m:r>
                       <m:r>
                         <a:rPr lang="en-US" altLang="ko-KR" sz="1600" b="0" i="1" smtClean="0">
-                          <a:latin typeface="Cambria Math" panose="02040503050406030204" pitchFamily="18" charset="0"/>
-                          <a:ea typeface="Cambria Math" panose="02040503050406030204" pitchFamily="18" charset="0"/>
+                          <a:latin typeface="Caladea" panose="02040503050406030204" pitchFamily="18" charset="0"/>
+                          <a:ea typeface="Caladea" panose="02040503050406030204" pitchFamily="18" charset="0"/>
                         </a:rPr>
                         <m:t> </m:t>
                       </m:r>
@@ -20669,20 +20765,20 @@
                         <m:fPr>
                           <m:ctrlPr>
                             <a:rPr lang="en-US" altLang="ko-KR" sz="1600" i="1">
-                              <a:latin typeface="Cambria Math" charset="0"/>
+                              <a:latin typeface="Caladea" charset="0"/>
                             </a:rPr>
                           </m:ctrlPr>
                         </m:fPr>
                         <m:num>
                           <m:r>
                             <a:rPr lang="ko-KR" altLang="en-US" sz="1600" i="1">
-                              <a:latin typeface="Cambria Math" panose="02040503050406030204" pitchFamily="18" charset="0"/>
+                              <a:latin typeface="Caladea" panose="02040503050406030204" pitchFamily="18" charset="0"/>
                             </a:rPr>
                             <m:t>𝜕</m:t>
                           </m:r>
                           <m:r>
                             <a:rPr lang="en-US" altLang="ko-KR" sz="1600" i="1">
-                              <a:latin typeface="Cambria Math" panose="02040503050406030204" pitchFamily="18" charset="0"/>
+                              <a:latin typeface="Caladea" panose="02040503050406030204" pitchFamily="18" charset="0"/>
                             </a:rPr>
                             <m:t>𝐸</m:t>
                           </m:r>
@@ -20690,7 +20786,7 @@
                         <m:den>
                           <m:r>
                             <a:rPr lang="ko-KR" altLang="en-US" sz="1600" i="1">
-                              <a:latin typeface="Cambria Math" panose="02040503050406030204" pitchFamily="18" charset="0"/>
+                              <a:latin typeface="Caladea" panose="02040503050406030204" pitchFamily="18" charset="0"/>
                             </a:rPr>
                             <m:t>𝜕</m:t>
                           </m:r>
@@ -20698,14 +20794,14 @@
                             <m:sSubPr>
                               <m:ctrlPr>
                                 <a:rPr lang="en-US" altLang="ko-KR" sz="1600" i="1">
-                                  <a:latin typeface="Cambria Math" charset="0"/>
+                                  <a:latin typeface="Caladea" charset="0"/>
                                 </a:rPr>
                               </m:ctrlPr>
                             </m:sSubPr>
                             <m:e>
                               <m:r>
                                 <a:rPr lang="en-US" altLang="ko-KR" sz="1600" i="1">
-                                  <a:latin typeface="Cambria Math" panose="02040503050406030204" pitchFamily="18" charset="0"/>
+                                  <a:latin typeface="Caladea" panose="02040503050406030204" pitchFamily="18" charset="0"/>
                                 </a:rPr>
                                 <m:t>𝑤</m:t>
                               </m:r>
@@ -20713,7 +20809,7 @@
                             <m:sub>
                               <m:r>
                                 <a:rPr lang="en-US" altLang="ko-KR" sz="1600" b="0" i="1" smtClean="0">
-                                  <a:latin typeface="Cambria Math" panose="02040503050406030204" pitchFamily="18" charset="0"/>
+                                  <a:latin typeface="Caladea" panose="02040503050406030204" pitchFamily="18" charset="0"/>
                                 </a:rPr>
                                 <m:t>𝑘𝑗</m:t>
                               </m:r>
@@ -20723,7 +20819,7 @@
                       </m:f>
                       <m:r>
                         <a:rPr lang="en-US" altLang="ko-KR" sz="1600" i="1">
-                          <a:latin typeface="Cambria Math" panose="02040503050406030204" pitchFamily="18" charset="0"/>
+                          <a:latin typeface="Caladea" panose="02040503050406030204" pitchFamily="18" charset="0"/>
                         </a:rPr>
                         <m:t>=</m:t>
                       </m:r>
@@ -20732,7 +20828,7 @@
                           <m:chr m:val="∑"/>
                           <m:ctrlPr>
                             <a:rPr lang="en-US" altLang="ko-KR" sz="1600" i="1" smtClean="0">
-                              <a:latin typeface="Cambria Math" charset="0"/>
+                              <a:latin typeface="Caladea" charset="0"/>
                             </a:rPr>
                           </m:ctrlPr>
                         </m:naryPr>
@@ -20742,13 +20838,13 @@
                               <m:brk m:alnAt="23"/>
                             </m:rPr>
                             <a:rPr lang="en-US" altLang="ko-KR" sz="1600" b="0" i="1" smtClean="0">
-                              <a:latin typeface="Cambria Math" panose="02040503050406030204" pitchFamily="18" charset="0"/>
+                              <a:latin typeface="Caladea" panose="02040503050406030204" pitchFamily="18" charset="0"/>
                             </a:rPr>
                             <m:t>𝑖</m:t>
                           </m:r>
                           <m:r>
                             <a:rPr lang="en-US" altLang="ko-KR" sz="1600" b="0" i="1" smtClean="0">
-                              <a:latin typeface="Cambria Math" panose="02040503050406030204" pitchFamily="18" charset="0"/>
+                              <a:latin typeface="Caladea" panose="02040503050406030204" pitchFamily="18" charset="0"/>
                             </a:rPr>
                             <m:t>=1</m:t>
                           </m:r>
@@ -20756,7 +20852,7 @@
                         <m:sup>
                           <m:r>
                             <a:rPr lang="en-US" altLang="ko-KR" sz="1600" b="0" i="1" smtClean="0">
-                              <a:latin typeface="Cambria Math" panose="02040503050406030204" pitchFamily="18" charset="0"/>
+                              <a:latin typeface="Caladea" panose="02040503050406030204" pitchFamily="18" charset="0"/>
                             </a:rPr>
                             <m:t>3</m:t>
                           </m:r>
@@ -20766,7 +20862,7 @@
                             <m:dPr>
                               <m:ctrlPr>
                                 <a:rPr lang="en-US" altLang="ko-KR" sz="1600" i="1">
-                                  <a:latin typeface="Cambria Math" charset="0"/>
+                                  <a:latin typeface="Caladea" charset="0"/>
                                 </a:rPr>
                               </m:ctrlPr>
                             </m:dPr>
@@ -20775,14 +20871,14 @@
                                 <m:sSubPr>
                                   <m:ctrlPr>
                                     <a:rPr lang="en-US" altLang="ko-KR" sz="1600" i="1">
-                                      <a:latin typeface="Cambria Math" charset="0"/>
+                                      <a:latin typeface="Caladea" charset="0"/>
                                     </a:rPr>
                                   </m:ctrlPr>
                                 </m:sSubPr>
                                 <m:e>
                                   <m:r>
                                     <a:rPr lang="en-US" altLang="ko-KR" sz="1600" i="1">
-                                      <a:latin typeface="Cambria Math" panose="02040503050406030204" pitchFamily="18" charset="0"/>
+                                      <a:latin typeface="Caladea" panose="02040503050406030204" pitchFamily="18" charset="0"/>
                                     </a:rPr>
                                     <m:t>𝑥</m:t>
                                   </m:r>
@@ -20790,7 +20886,7 @@
                                 <m:sub>
                                   <m:r>
                                     <a:rPr lang="en-US" altLang="ko-KR" sz="1600" i="1">
-                                      <a:latin typeface="Cambria Math" panose="02040503050406030204" pitchFamily="18" charset="0"/>
+                                      <a:latin typeface="Caladea" panose="02040503050406030204" pitchFamily="18" charset="0"/>
                                     </a:rPr>
                                     <m:t>𝑖</m:t>
                                   </m:r>
@@ -20798,7 +20894,7 @@
                               </m:sSub>
                               <m:r>
                                 <a:rPr lang="en-US" altLang="ko-KR" sz="1600" i="1">
-                                  <a:latin typeface="Cambria Math" panose="02040503050406030204" pitchFamily="18" charset="0"/>
+                                  <a:latin typeface="Caladea" panose="02040503050406030204" pitchFamily="18" charset="0"/>
                                 </a:rPr>
                                 <m:t>−</m:t>
                               </m:r>
@@ -20806,14 +20902,14 @@
                                 <m:sSubPr>
                                   <m:ctrlPr>
                                     <a:rPr lang="en-US" altLang="ko-KR" sz="1600" i="1">
-                                      <a:latin typeface="Cambria Math" charset="0"/>
+                                      <a:latin typeface="Caladea" charset="0"/>
                                     </a:rPr>
                                   </m:ctrlPr>
                                 </m:sSubPr>
                                 <m:e>
                                   <m:r>
                                     <a:rPr lang="en-US" altLang="ko-KR" sz="1600" i="1">
-                                      <a:latin typeface="Cambria Math" panose="02040503050406030204" pitchFamily="18" charset="0"/>
+                                      <a:latin typeface="Caladea" panose="02040503050406030204" pitchFamily="18" charset="0"/>
                                     </a:rPr>
                                     <m:t>𝑡</m:t>
                                   </m:r>
@@ -20821,7 +20917,7 @@
                                 <m:sub>
                                   <m:r>
                                     <a:rPr lang="en-US" altLang="ko-KR" sz="1600" i="1">
-                                      <a:latin typeface="Cambria Math" panose="02040503050406030204" pitchFamily="18" charset="0"/>
+                                      <a:latin typeface="Caladea" panose="02040503050406030204" pitchFamily="18" charset="0"/>
                                     </a:rPr>
                                     <m:t>𝑖</m:t>
                                   </m:r>
@@ -20833,14 +20929,14 @@
                             <m:sSubPr>
                               <m:ctrlPr>
                                 <a:rPr lang="en-US" altLang="ko-KR" sz="1600" i="1">
-                                  <a:latin typeface="Cambria Math" charset="0"/>
+                                  <a:latin typeface="Caladea" charset="0"/>
                                 </a:rPr>
                               </m:ctrlPr>
                             </m:sSubPr>
                             <m:e>
                               <m:r>
                                 <a:rPr lang="en-US" altLang="ko-KR" sz="1600" b="0" i="1" smtClean="0">
-                                  <a:latin typeface="Cambria Math" panose="02040503050406030204" pitchFamily="18" charset="0"/>
+                                  <a:latin typeface="Caladea" panose="02040503050406030204" pitchFamily="18" charset="0"/>
                                 </a:rPr>
                                 <m:t>𝑤</m:t>
                               </m:r>
@@ -20848,13 +20944,13 @@
                             <m:sub>
                               <m:r>
                                 <a:rPr lang="en-US" altLang="ko-KR" sz="1600" i="1">
-                                  <a:latin typeface="Cambria Math" panose="02040503050406030204" pitchFamily="18" charset="0"/>
+                                  <a:latin typeface="Caladea" panose="02040503050406030204" pitchFamily="18" charset="0"/>
                                 </a:rPr>
                                 <m:t>𝑗</m:t>
                               </m:r>
                               <m:r>
                                 <a:rPr lang="en-US" altLang="ko-KR" sz="1600" b="0" i="1" smtClean="0">
-                                  <a:latin typeface="Cambria Math" panose="02040503050406030204" pitchFamily="18" charset="0"/>
+                                  <a:latin typeface="Caladea" panose="02040503050406030204" pitchFamily="18" charset="0"/>
                                 </a:rPr>
                                 <m:t>𝑖</m:t>
                               </m:r>
@@ -20862,7 +20958,7 @@
                           </m:sSub>
                           <m:r>
                             <a:rPr lang="en-US" altLang="ko-KR" sz="1600" b="0" i="1" smtClean="0">
-                              <a:latin typeface="Cambria Math" panose="02040503050406030204" pitchFamily="18" charset="0"/>
+                              <a:latin typeface="Caladea" panose="02040503050406030204" pitchFamily="18" charset="0"/>
                             </a:rPr>
                             <m:t>(</m:t>
                           </m:r>
@@ -20870,14 +20966,14 @@
                             <m:sSubPr>
                               <m:ctrlPr>
                                 <a:rPr lang="en-US" altLang="ko-KR" sz="1600" b="0" i="1" smtClean="0">
-                                  <a:latin typeface="Cambria Math" charset="0"/>
+                                  <a:latin typeface="Caladea" charset="0"/>
                                 </a:rPr>
                               </m:ctrlPr>
                             </m:sSubPr>
                             <m:e>
                               <m:r>
                                 <a:rPr lang="en-US" altLang="ko-KR" sz="1600" b="0" i="1" smtClean="0">
-                                  <a:latin typeface="Cambria Math" panose="02040503050406030204" pitchFamily="18" charset="0"/>
+                                  <a:latin typeface="Caladea" panose="02040503050406030204" pitchFamily="18" charset="0"/>
                                 </a:rPr>
                                 <m:t>𝑥</m:t>
                               </m:r>
@@ -20885,7 +20981,7 @@
                             <m:sub>
                               <m:r>
                                 <a:rPr lang="en-US" altLang="ko-KR" sz="1600" b="0" i="1" smtClean="0">
-                                  <a:latin typeface="Cambria Math" panose="02040503050406030204" pitchFamily="18" charset="0"/>
+                                  <a:latin typeface="Caladea" panose="02040503050406030204" pitchFamily="18" charset="0"/>
                                 </a:rPr>
                                 <m:t>𝑗</m:t>
                               </m:r>
@@ -20895,14 +20991,14 @@
                             <m:dPr>
                               <m:ctrlPr>
                                 <a:rPr lang="en-US" altLang="ko-KR" sz="1600" b="0" i="1" smtClean="0">
-                                  <a:latin typeface="Cambria Math" charset="0"/>
+                                  <a:latin typeface="Caladea" charset="0"/>
                                 </a:rPr>
                               </m:ctrlPr>
                             </m:dPr>
                             <m:e>
                               <m:r>
                                 <a:rPr lang="en-US" altLang="ko-KR" sz="1600" b="0" i="1" smtClean="0">
-                                  <a:latin typeface="Cambria Math" panose="02040503050406030204" pitchFamily="18" charset="0"/>
+                                  <a:latin typeface="Caladea" panose="02040503050406030204" pitchFamily="18" charset="0"/>
                                 </a:rPr>
                                 <m:t>1−</m:t>
                               </m:r>
@@ -20910,14 +21006,14 @@
                                 <m:sSubPr>
                                   <m:ctrlPr>
                                     <a:rPr lang="en-US" altLang="ko-KR" sz="1600" b="0" i="1" smtClean="0">
-                                      <a:latin typeface="Cambria Math" charset="0"/>
+                                      <a:latin typeface="Caladea" charset="0"/>
                                     </a:rPr>
                                   </m:ctrlPr>
                                 </m:sSubPr>
                                 <m:e>
                                   <m:r>
                                     <a:rPr lang="en-US" altLang="ko-KR" sz="1600" b="0" i="1" smtClean="0">
-                                      <a:latin typeface="Cambria Math" panose="02040503050406030204" pitchFamily="18" charset="0"/>
+                                      <a:latin typeface="Caladea" panose="02040503050406030204" pitchFamily="18" charset="0"/>
                                     </a:rPr>
                                     <m:t>𝑥</m:t>
                                   </m:r>
@@ -20925,7 +21021,7 @@
                                 <m:sub>
                                   <m:r>
                                     <a:rPr lang="en-US" altLang="ko-KR" sz="1600" b="0" i="1" smtClean="0">
-                                      <a:latin typeface="Cambria Math" panose="02040503050406030204" pitchFamily="18" charset="0"/>
+                                      <a:latin typeface="Caladea" panose="02040503050406030204" pitchFamily="18" charset="0"/>
                                     </a:rPr>
                                     <m:t>𝑗</m:t>
                                   </m:r>
@@ -20935,7 +21031,7 @@
                           </m:d>
                           <m:r>
                             <a:rPr lang="en-US" altLang="ko-KR" sz="1600" b="0" i="1" smtClean="0">
-                              <a:latin typeface="Cambria Math" panose="02040503050406030204" pitchFamily="18" charset="0"/>
+                              <a:latin typeface="Caladea" panose="02040503050406030204" pitchFamily="18" charset="0"/>
                             </a:rPr>
                             <m:t>)</m:t>
                           </m:r>
@@ -20943,8 +21039,8 @@
                       </m:nary>
                       <m:r>
                         <a:rPr lang="en-US" altLang="ko-KR" sz="1600" i="1">
-                          <a:latin typeface="Cambria Math" panose="02040503050406030204" pitchFamily="18" charset="0"/>
-                          <a:ea typeface="Cambria Math" panose="02040503050406030204" pitchFamily="18" charset="0"/>
+                          <a:latin typeface="Caladea" panose="02040503050406030204" pitchFamily="18" charset="0"/>
+                          <a:ea typeface="Caladea" panose="02040503050406030204" pitchFamily="18" charset="0"/>
                         </a:rPr>
                         <m:t>×</m:t>
                       </m:r>
@@ -20952,16 +21048,16 @@
                         <m:sSubPr>
                           <m:ctrlPr>
                             <a:rPr lang="en-US" altLang="ko-KR" sz="1600" b="0" i="1" smtClean="0">
-                              <a:latin typeface="Cambria Math" charset="0"/>
-                              <a:ea typeface="Cambria Math" panose="02040503050406030204" pitchFamily="18" charset="0"/>
+                              <a:latin typeface="Caladea" charset="0"/>
+                              <a:ea typeface="Caladea" panose="02040503050406030204" pitchFamily="18" charset="0"/>
                             </a:rPr>
                           </m:ctrlPr>
                         </m:sSubPr>
                         <m:e>
                           <m:r>
                             <a:rPr lang="en-US" altLang="ko-KR" sz="1600" b="0" i="1" smtClean="0">
-                              <a:latin typeface="Cambria Math" panose="02040503050406030204" pitchFamily="18" charset="0"/>
-                              <a:ea typeface="Cambria Math" panose="02040503050406030204" pitchFamily="18" charset="0"/>
+                              <a:latin typeface="Caladea" panose="02040503050406030204" pitchFamily="18" charset="0"/>
+                              <a:ea typeface="Caladea" panose="02040503050406030204" pitchFamily="18" charset="0"/>
                             </a:rPr>
                             <m:t>𝑥</m:t>
                           </m:r>
@@ -20969,8 +21065,8 @@
                         <m:sub>
                           <m:r>
                             <a:rPr lang="en-US" altLang="ko-KR" sz="1600" b="0" i="1" smtClean="0">
-                              <a:latin typeface="Cambria Math" panose="02040503050406030204" pitchFamily="18" charset="0"/>
-                              <a:ea typeface="Cambria Math" panose="02040503050406030204" pitchFamily="18" charset="0"/>
+                              <a:latin typeface="Caladea" panose="02040503050406030204" pitchFamily="18" charset="0"/>
+                              <a:ea typeface="Caladea" panose="02040503050406030204" pitchFamily="18" charset="0"/>
                             </a:rPr>
                             <m:t>𝑘</m:t>
                           </m:r>
@@ -21048,8 +21144,8 @@
             <a:pPr algn="ctr"/>
             <a:r>
               <a:rPr lang="en-US" altLang="ko-KR" sz="1400" dirty="0" smtClean="0">
-                <a:latin typeface="Times New Roman" panose="02020603050405020304" pitchFamily="18" charset="0"/>
-                <a:cs typeface="Times New Roman" panose="02020603050405020304" pitchFamily="18" charset="0"/>
+                <a:latin typeface="Liberation Serif" panose="02020603050405020304" pitchFamily="18" charset="0"/>
+                <a:cs typeface="Liberation Serif" panose="02020603050405020304" pitchFamily="18" charset="0"/>
               </a:rPr>
               <a:t>True values</a:t>
             </a:r>
@@ -21183,8 +21279,8 @@
                 <a:solidFill>
                   <a:prstClr val="black"/>
                 </a:solidFill>
-                <a:latin typeface="Times New Roman" panose="02020603050405020304" pitchFamily="18" charset="0"/>
-                <a:cs typeface="Times New Roman" panose="02020603050405020304" pitchFamily="18" charset="0"/>
+                <a:latin typeface="Liberation Serif" panose="02020603050405020304" pitchFamily="18" charset="0"/>
+                <a:cs typeface="Liberation Serif" panose="02020603050405020304" pitchFamily="18" charset="0"/>
               </a:rPr>
               <a:t>Intuitive Understanding of Deep Learning</a:t>
             </a:r>
@@ -21192,8 +21288,8 @@
               <a:solidFill>
                 <a:prstClr val="black"/>
               </a:solidFill>
-              <a:latin typeface="Times New Roman" panose="02020603050405020304" pitchFamily="18" charset="0"/>
-              <a:cs typeface="Times New Roman" panose="02020603050405020304" pitchFamily="18" charset="0"/>
+              <a:latin typeface="Liberation Serif" panose="02020603050405020304" pitchFamily="18" charset="0"/>
+              <a:cs typeface="Liberation Serif" panose="02020603050405020304" pitchFamily="18" charset="0"/>
             </a:endParaRPr>
           </a:p>
         </p:txBody>
@@ -21224,13 +21320,13 @@
               <a:lnSpc>
                 <a:spcPct val="150000"/>
               </a:lnSpc>
-              <a:buFont typeface="Arial" panose="020B0604020202020204" pitchFamily="34" charset="0"/>
+              <a:buFont typeface="Liberation Sans" panose="020B0604020202020204" pitchFamily="34" charset="0"/>
               <a:buChar char="•"/>
             </a:pPr>
             <a:r>
               <a:rPr lang="en-US" altLang="ko-KR" sz="2000" dirty="0" smtClean="0">
-                <a:latin typeface="Times New Roman" panose="02020603050405020304" pitchFamily="18" charset="0"/>
-                <a:cs typeface="Times New Roman" panose="02020603050405020304" pitchFamily="18" charset="0"/>
+                <a:latin typeface="Liberation Serif" panose="02020603050405020304" pitchFamily="18" charset="0"/>
+                <a:cs typeface="Liberation Serif" panose="02020603050405020304" pitchFamily="18" charset="0"/>
               </a:rPr>
               <a:t>Why important to well-represent the features of data?</a:t>
             </a:r>
@@ -21238,8 +21334,8 @@
               <a:solidFill>
                 <a:srgbClr val="FF0000"/>
               </a:solidFill>
-              <a:latin typeface="Times New Roman" panose="02020603050405020304" pitchFamily="18" charset="0"/>
-              <a:cs typeface="Times New Roman" panose="02020603050405020304" pitchFamily="18" charset="0"/>
+              <a:latin typeface="Liberation Serif" panose="02020603050405020304" pitchFamily="18" charset="0"/>
+              <a:cs typeface="Liberation Serif" panose="02020603050405020304" pitchFamily="18" charset="0"/>
             </a:endParaRPr>
           </a:p>
           <a:p>
@@ -21247,12 +21343,12 @@
               <a:lnSpc>
                 <a:spcPct val="150000"/>
               </a:lnSpc>
-              <a:buFont typeface="Arial" panose="020B0604020202020204" pitchFamily="34" charset="0"/>
+              <a:buFont typeface="Liberation Sans" panose="020B0604020202020204" pitchFamily="34" charset="0"/>
               <a:buChar char="•"/>
             </a:pPr>
             <a:endParaRPr lang="en-US" altLang="ko-KR" sz="2000" dirty="0" smtClean="0">
-              <a:latin typeface="Times New Roman" panose="02020603050405020304" pitchFamily="18" charset="0"/>
-              <a:cs typeface="Times New Roman" panose="02020603050405020304" pitchFamily="18" charset="0"/>
+              <a:latin typeface="Liberation Serif" panose="02020603050405020304" pitchFamily="18" charset="0"/>
+              <a:cs typeface="Liberation Serif" panose="02020603050405020304" pitchFamily="18" charset="0"/>
             </a:endParaRPr>
           </a:p>
           <a:p>
@@ -21260,13 +21356,13 @@
               <a:lnSpc>
                 <a:spcPct val="150000"/>
               </a:lnSpc>
-              <a:buFont typeface="Arial" panose="020B0604020202020204" pitchFamily="34" charset="0"/>
+              <a:buFont typeface="Liberation Sans" panose="020B0604020202020204" pitchFamily="34" charset="0"/>
               <a:buChar char="•"/>
             </a:pPr>
             <a:r>
               <a:rPr lang="en-US" altLang="ko-KR" sz="2000" dirty="0" smtClean="0">
-                <a:latin typeface="Times New Roman" panose="02020603050405020304" pitchFamily="18" charset="0"/>
-                <a:cs typeface="Times New Roman" panose="02020603050405020304" pitchFamily="18" charset="0"/>
+                <a:latin typeface="Liberation Serif" panose="02020603050405020304" pitchFamily="18" charset="0"/>
+                <a:cs typeface="Liberation Serif" panose="02020603050405020304" pitchFamily="18" charset="0"/>
               </a:rPr>
               <a:t>What needs to well-represent the features of data?</a:t>
             </a:r>
@@ -21276,12 +21372,12 @@
               <a:lnSpc>
                 <a:spcPct val="150000"/>
               </a:lnSpc>
-              <a:buFont typeface="Arial" panose="020B0604020202020204" pitchFamily="34" charset="0"/>
+              <a:buFont typeface="Liberation Sans" panose="020B0604020202020204" pitchFamily="34" charset="0"/>
               <a:buChar char="•"/>
             </a:pPr>
             <a:endParaRPr lang="en-US" altLang="ko-KR" sz="2000" dirty="0" smtClean="0">
-              <a:latin typeface="Times New Roman" panose="02020603050405020304" pitchFamily="18" charset="0"/>
-              <a:cs typeface="Times New Roman" panose="02020603050405020304" pitchFamily="18" charset="0"/>
+              <a:latin typeface="Liberation Serif" panose="02020603050405020304" pitchFamily="18" charset="0"/>
+              <a:cs typeface="Liberation Serif" panose="02020603050405020304" pitchFamily="18" charset="0"/>
             </a:endParaRPr>
           </a:p>
           <a:p>
@@ -21289,13 +21385,13 @@
               <a:lnSpc>
                 <a:spcPct val="150000"/>
               </a:lnSpc>
-              <a:buFont typeface="Arial" panose="020B0604020202020204" pitchFamily="34" charset="0"/>
+              <a:buFont typeface="Liberation Sans" panose="020B0604020202020204" pitchFamily="34" charset="0"/>
               <a:buChar char="•"/>
             </a:pPr>
             <a:r>
               <a:rPr lang="en-US" altLang="ko-KR" sz="2000" dirty="0">
-                <a:latin typeface="Times New Roman" panose="02020603050405020304" pitchFamily="18" charset="0"/>
-                <a:cs typeface="Times New Roman" panose="02020603050405020304" pitchFamily="18" charset="0"/>
+                <a:latin typeface="Liberation Serif" panose="02020603050405020304" pitchFamily="18" charset="0"/>
+                <a:cs typeface="Liberation Serif" panose="02020603050405020304" pitchFamily="18" charset="0"/>
               </a:rPr>
               <a:t>Why is deep learning outstanding at representation learning?</a:t>
             </a:r>
@@ -21429,8 +21525,8 @@
                 <a:solidFill>
                   <a:prstClr val="black"/>
                 </a:solidFill>
-                <a:latin typeface="Times New Roman" panose="02020603050405020304" pitchFamily="18" charset="0"/>
-                <a:cs typeface="Times New Roman" panose="02020603050405020304" pitchFamily="18" charset="0"/>
+                <a:latin typeface="Liberation Serif" panose="02020603050405020304" pitchFamily="18" charset="0"/>
+                <a:cs typeface="Liberation Serif" panose="02020603050405020304" pitchFamily="18" charset="0"/>
               </a:rPr>
               <a:t>Intuitive Understanding of Deep Learning</a:t>
             </a:r>
@@ -21463,13 +21559,13 @@
               <a:lnSpc>
                 <a:spcPct val="150000"/>
               </a:lnSpc>
-              <a:buFont typeface="Arial" panose="020B0604020202020204" pitchFamily="34" charset="0"/>
+              <a:buFont typeface="Liberation Sans" panose="020B0604020202020204" pitchFamily="34" charset="0"/>
               <a:buChar char="•"/>
             </a:pPr>
             <a:r>
               <a:rPr lang="en-US" altLang="ko-KR" dirty="0" smtClean="0">
-                <a:latin typeface="Times New Roman" panose="02020603050405020304" pitchFamily="18" charset="0"/>
-                <a:cs typeface="Times New Roman" panose="02020603050405020304" pitchFamily="18" charset="0"/>
+                <a:latin typeface="Liberation Serif" panose="02020603050405020304" pitchFamily="18" charset="0"/>
+                <a:cs typeface="Liberation Serif" panose="02020603050405020304" pitchFamily="18" charset="0"/>
               </a:rPr>
               <a:t>Why important to well-represent the features of data?</a:t>
             </a:r>
@@ -21481,8 +21577,8 @@
               </a:lnSpc>
             </a:pPr>
             <a:endParaRPr lang="en-US" altLang="ko-KR" sz="1200" dirty="0" smtClean="0">
-              <a:latin typeface="Times New Roman" panose="02020603050405020304" pitchFamily="18" charset="0"/>
-              <a:cs typeface="Times New Roman" panose="02020603050405020304" pitchFamily="18" charset="0"/>
+              <a:latin typeface="Liberation Serif" panose="02020603050405020304" pitchFamily="18" charset="0"/>
+              <a:cs typeface="Liberation Serif" panose="02020603050405020304" pitchFamily="18" charset="0"/>
             </a:endParaRPr>
           </a:p>
           <a:p>
@@ -21490,13 +21586,13 @@
               <a:lnSpc>
                 <a:spcPct val="150000"/>
               </a:lnSpc>
-              <a:buFont typeface="Arial" panose="020B0604020202020204" pitchFamily="34" charset="0"/>
+              <a:buFont typeface="Liberation Sans" panose="020B0604020202020204" pitchFamily="34" charset="0"/>
               <a:buChar char="•"/>
             </a:pPr>
             <a:r>
               <a:rPr lang="en-US" altLang="ko-KR" dirty="0" smtClean="0">
-                <a:latin typeface="Times New Roman" panose="02020603050405020304" pitchFamily="18" charset="0"/>
-                <a:cs typeface="Times New Roman" panose="02020603050405020304" pitchFamily="18" charset="0"/>
+                <a:latin typeface="Liberation Serif" panose="02020603050405020304" pitchFamily="18" charset="0"/>
+                <a:cs typeface="Liberation Serif" panose="02020603050405020304" pitchFamily="18" charset="0"/>
               </a:rPr>
               <a:t>What needs to well-represent the features of data?</a:t>
             </a:r>
@@ -21504,8 +21600,8 @@
               <a:solidFill>
                 <a:srgbClr val="FF0000"/>
               </a:solidFill>
-              <a:latin typeface="Times New Roman" panose="02020603050405020304" pitchFamily="18" charset="0"/>
-              <a:cs typeface="Times New Roman" panose="02020603050405020304" pitchFamily="18" charset="0"/>
+              <a:latin typeface="Liberation Serif" panose="02020603050405020304" pitchFamily="18" charset="0"/>
+              <a:cs typeface="Liberation Serif" panose="02020603050405020304" pitchFamily="18" charset="0"/>
             </a:endParaRPr>
           </a:p>
           <a:p>
@@ -21513,12 +21609,12 @@
               <a:lnSpc>
                 <a:spcPct val="150000"/>
               </a:lnSpc>
-              <a:buFont typeface="Arial" panose="020B0604020202020204" pitchFamily="34" charset="0"/>
+              <a:buFont typeface="Liberation Sans" panose="020B0604020202020204" pitchFamily="34" charset="0"/>
               <a:buChar char="•"/>
             </a:pPr>
             <a:endParaRPr lang="en-US" altLang="ko-KR" sz="1200" dirty="0" smtClean="0">
-              <a:latin typeface="Times New Roman" panose="02020603050405020304" pitchFamily="18" charset="0"/>
-              <a:cs typeface="Times New Roman" panose="02020603050405020304" pitchFamily="18" charset="0"/>
+              <a:latin typeface="Liberation Serif" panose="02020603050405020304" pitchFamily="18" charset="0"/>
+              <a:cs typeface="Liberation Serif" panose="02020603050405020304" pitchFamily="18" charset="0"/>
             </a:endParaRPr>
           </a:p>
           <a:p>
@@ -21526,13 +21622,13 @@
               <a:lnSpc>
                 <a:spcPct val="150000"/>
               </a:lnSpc>
-              <a:buFont typeface="Arial" panose="020B0604020202020204" pitchFamily="34" charset="0"/>
+              <a:buFont typeface="Liberation Sans" panose="020B0604020202020204" pitchFamily="34" charset="0"/>
               <a:buChar char="•"/>
             </a:pPr>
             <a:r>
               <a:rPr lang="en-US" altLang="ko-KR" dirty="0">
-                <a:latin typeface="Times New Roman" panose="02020603050405020304" pitchFamily="18" charset="0"/>
-                <a:cs typeface="Times New Roman" panose="02020603050405020304" pitchFamily="18" charset="0"/>
+                <a:latin typeface="Liberation Serif" panose="02020603050405020304" pitchFamily="18" charset="0"/>
+                <a:cs typeface="Liberation Serif" panose="02020603050405020304" pitchFamily="18" charset="0"/>
               </a:rPr>
               <a:t>Why is deep learning outstanding at representation learning?</a:t>
             </a:r>
@@ -21576,8 +21672,8 @@
                 <a:solidFill>
                   <a:srgbClr val="C00000"/>
                 </a:solidFill>
-                <a:latin typeface="Times New Roman" panose="02020603050405020304" pitchFamily="18" charset="0"/>
-                <a:cs typeface="Times New Roman" panose="02020603050405020304" pitchFamily="18" charset="0"/>
+                <a:latin typeface="Liberation Serif" panose="02020603050405020304" pitchFamily="18" charset="0"/>
+                <a:cs typeface="Liberation Serif" panose="02020603050405020304" pitchFamily="18" charset="0"/>
               </a:rPr>
               <a:t>Ch1. Representational Learning</a:t>
             </a:r>
@@ -21592,8 +21688,8 @@
               <a:solidFill>
                 <a:srgbClr val="C00000"/>
               </a:solidFill>
-              <a:latin typeface="Times New Roman" panose="02020603050405020304" pitchFamily="18" charset="0"/>
-              <a:cs typeface="Times New Roman" panose="02020603050405020304" pitchFamily="18" charset="0"/>
+              <a:latin typeface="Liberation Serif" panose="02020603050405020304" pitchFamily="18" charset="0"/>
+              <a:cs typeface="Liberation Serif" panose="02020603050405020304" pitchFamily="18" charset="0"/>
             </a:endParaRPr>
           </a:p>
           <a:p>
@@ -21606,8 +21702,8 @@
               <a:solidFill>
                 <a:srgbClr val="C00000"/>
               </a:solidFill>
-              <a:latin typeface="Times New Roman" panose="02020603050405020304" pitchFamily="18" charset="0"/>
-              <a:cs typeface="Times New Roman" panose="02020603050405020304" pitchFamily="18" charset="0"/>
+              <a:latin typeface="Liberation Serif" panose="02020603050405020304" pitchFamily="18" charset="0"/>
+              <a:cs typeface="Liberation Serif" panose="02020603050405020304" pitchFamily="18" charset="0"/>
             </a:endParaRPr>
           </a:p>
           <a:p>
@@ -21621,8 +21717,8 @@
                 <a:solidFill>
                   <a:srgbClr val="C00000"/>
                 </a:solidFill>
-                <a:latin typeface="Times New Roman" panose="02020603050405020304" pitchFamily="18" charset="0"/>
-                <a:cs typeface="Times New Roman" panose="02020603050405020304" pitchFamily="18" charset="0"/>
+                <a:latin typeface="Liberation Serif" panose="02020603050405020304" pitchFamily="18" charset="0"/>
+                <a:cs typeface="Liberation Serif" panose="02020603050405020304" pitchFamily="18" charset="0"/>
               </a:rPr>
               <a:t>Ch2. Artificial Neural Networks</a:t>
             </a:r>
@@ -21637,8 +21733,8 @@
               <a:solidFill>
                 <a:srgbClr val="C00000"/>
               </a:solidFill>
-              <a:latin typeface="Times New Roman" panose="02020603050405020304" pitchFamily="18" charset="0"/>
-              <a:cs typeface="Times New Roman" panose="02020603050405020304" pitchFamily="18" charset="0"/>
+              <a:latin typeface="Liberation Serif" panose="02020603050405020304" pitchFamily="18" charset="0"/>
+              <a:cs typeface="Liberation Serif" panose="02020603050405020304" pitchFamily="18" charset="0"/>
             </a:endParaRPr>
           </a:p>
           <a:p>
@@ -21652,8 +21748,8 @@
                 <a:solidFill>
                   <a:srgbClr val="C00000"/>
                 </a:solidFill>
-                <a:latin typeface="Times New Roman" panose="02020603050405020304" pitchFamily="18" charset="0"/>
-                <a:cs typeface="Times New Roman" panose="02020603050405020304" pitchFamily="18" charset="0"/>
+                <a:latin typeface="Liberation Serif" panose="02020603050405020304" pitchFamily="18" charset="0"/>
+                <a:cs typeface="Liberation Serif" panose="02020603050405020304" pitchFamily="18" charset="0"/>
               </a:rPr>
               <a:t>Ch3. Deep Learning Algorithms </a:t>
             </a:r>
@@ -21927,8 +22023,8 @@
                 <a:solidFill>
                   <a:prstClr val="black"/>
                 </a:solidFill>
-                <a:latin typeface="Times New Roman" panose="02020603050405020304" pitchFamily="18" charset="0"/>
-                <a:cs typeface="Times New Roman" panose="02020603050405020304" pitchFamily="18" charset="0"/>
+                <a:latin typeface="Liberation Serif" panose="02020603050405020304" pitchFamily="18" charset="0"/>
+                <a:cs typeface="Liberation Serif" panose="02020603050405020304" pitchFamily="18" charset="0"/>
               </a:rPr>
               <a:t>Ch1. Representational Learning</a:t>
             </a:r>
@@ -21936,8 +22032,8 @@
               <a:solidFill>
                 <a:prstClr val="black"/>
               </a:solidFill>
-              <a:latin typeface="Times New Roman" panose="02020603050405020304" pitchFamily="18" charset="0"/>
-              <a:cs typeface="Times New Roman" panose="02020603050405020304" pitchFamily="18" charset="0"/>
+              <a:latin typeface="Liberation Serif" panose="02020603050405020304" pitchFamily="18" charset="0"/>
+              <a:cs typeface="Liberation Serif" panose="02020603050405020304" pitchFamily="18" charset="0"/>
             </a:endParaRPr>
           </a:p>
         </p:txBody>
@@ -22131,8 +22227,8 @@
                 <a:solidFill>
                   <a:prstClr val="black"/>
                 </a:solidFill>
-                <a:latin typeface="Times New Roman" panose="02020603050405020304" pitchFamily="18" charset="0"/>
-                <a:cs typeface="Times New Roman" panose="02020603050405020304" pitchFamily="18" charset="0"/>
+                <a:latin typeface="Liberation Serif" panose="02020603050405020304" pitchFamily="18" charset="0"/>
+                <a:cs typeface="Liberation Serif" panose="02020603050405020304" pitchFamily="18" charset="0"/>
               </a:rPr>
               <a:t>What is the meaning of Well-Representation of the Data Feature?</a:t>
             </a:r>
@@ -22165,20 +22261,20 @@
               <a:lnSpc>
                 <a:spcPct val="150000"/>
               </a:lnSpc>
-              <a:buFont typeface="Arial" panose="020B0604020202020204" pitchFamily="34" charset="0"/>
+              <a:buFont typeface="Liberation Sans" panose="020B0604020202020204" pitchFamily="34" charset="0"/>
               <a:buChar char="•"/>
             </a:pPr>
             <a:r>
               <a:rPr lang="en-US" altLang="ko-KR" sz="2000" dirty="0">
-                <a:latin typeface="Times New Roman" panose="02020603050405020304" pitchFamily="18" charset="0"/>
-                <a:cs typeface="Times New Roman" panose="02020603050405020304" pitchFamily="18" charset="0"/>
+                <a:latin typeface="Liberation Serif" panose="02020603050405020304" pitchFamily="18" charset="0"/>
+                <a:cs typeface="Liberation Serif" panose="02020603050405020304" pitchFamily="18" charset="0"/>
               </a:rPr>
               <a:t>First, let's look at an example of what a Representation </a:t>
             </a:r>
             <a:r>
               <a:rPr lang="en-US" altLang="ko-KR" sz="2000" dirty="0" smtClean="0">
-                <a:latin typeface="Times New Roman" panose="02020603050405020304" pitchFamily="18" charset="0"/>
-                <a:cs typeface="Times New Roman" panose="02020603050405020304" pitchFamily="18" charset="0"/>
+                <a:latin typeface="Liberation Serif" panose="02020603050405020304" pitchFamily="18" charset="0"/>
+                <a:cs typeface="Liberation Serif" panose="02020603050405020304" pitchFamily="18" charset="0"/>
               </a:rPr>
               <a:t>is:</a:t>
             </a:r>
@@ -22188,12 +22284,12 @@
               <a:lnSpc>
                 <a:spcPct val="150000"/>
               </a:lnSpc>
-              <a:buFont typeface="Arial" panose="020B0604020202020204" pitchFamily="34" charset="0"/>
+              <a:buFont typeface="Liberation Sans" panose="020B0604020202020204" pitchFamily="34" charset="0"/>
               <a:buChar char="•"/>
             </a:pPr>
             <a:endParaRPr lang="en-US" altLang="ko-KR" sz="2000" dirty="0">
-              <a:latin typeface="Times New Roman" panose="02020603050405020304" pitchFamily="18" charset="0"/>
-              <a:cs typeface="Times New Roman" panose="02020603050405020304" pitchFamily="18" charset="0"/>
+              <a:latin typeface="Liberation Serif" panose="02020603050405020304" pitchFamily="18" charset="0"/>
+              <a:cs typeface="Liberation Serif" panose="02020603050405020304" pitchFamily="18" charset="0"/>
             </a:endParaRPr>
           </a:p>
           <a:p>
@@ -22201,12 +22297,12 @@
               <a:lnSpc>
                 <a:spcPct val="150000"/>
               </a:lnSpc>
-              <a:buFont typeface="Arial" panose="020B0604020202020204" pitchFamily="34" charset="0"/>
+              <a:buFont typeface="Liberation Sans" panose="020B0604020202020204" pitchFamily="34" charset="0"/>
               <a:buChar char="•"/>
             </a:pPr>
             <a:endParaRPr lang="en-US" altLang="ko-KR" sz="2000" dirty="0" smtClean="0">
-              <a:latin typeface="Times New Roman" panose="02020603050405020304" pitchFamily="18" charset="0"/>
-              <a:cs typeface="Times New Roman" panose="02020603050405020304" pitchFamily="18" charset="0"/>
+              <a:latin typeface="Liberation Serif" panose="02020603050405020304" pitchFamily="18" charset="0"/>
+              <a:cs typeface="Liberation Serif" panose="02020603050405020304" pitchFamily="18" charset="0"/>
             </a:endParaRPr>
           </a:p>
           <a:p>
@@ -22214,12 +22310,12 @@
               <a:lnSpc>
                 <a:spcPct val="150000"/>
               </a:lnSpc>
-              <a:buFont typeface="Arial" panose="020B0604020202020204" pitchFamily="34" charset="0"/>
+              <a:buFont typeface="Liberation Sans" panose="020B0604020202020204" pitchFamily="34" charset="0"/>
               <a:buChar char="•"/>
             </a:pPr>
             <a:endParaRPr lang="en-US" altLang="ko-KR" sz="2000" dirty="0">
-              <a:latin typeface="Times New Roman" panose="02020603050405020304" pitchFamily="18" charset="0"/>
-              <a:cs typeface="Times New Roman" panose="02020603050405020304" pitchFamily="18" charset="0"/>
+              <a:latin typeface="Liberation Serif" panose="02020603050405020304" pitchFamily="18" charset="0"/>
+              <a:cs typeface="Liberation Serif" panose="02020603050405020304" pitchFamily="18" charset="0"/>
             </a:endParaRPr>
           </a:p>
           <a:p>
@@ -22227,12 +22323,12 @@
               <a:lnSpc>
                 <a:spcPct val="150000"/>
               </a:lnSpc>
-              <a:buFont typeface="Arial" panose="020B0604020202020204" pitchFamily="34" charset="0"/>
+              <a:buFont typeface="Liberation Sans" panose="020B0604020202020204" pitchFamily="34" charset="0"/>
               <a:buChar char="•"/>
             </a:pPr>
             <a:endParaRPr lang="en-US" altLang="ko-KR" sz="2000" dirty="0" smtClean="0">
-              <a:latin typeface="Times New Roman" panose="02020603050405020304" pitchFamily="18" charset="0"/>
-              <a:cs typeface="Times New Roman" panose="02020603050405020304" pitchFamily="18" charset="0"/>
+              <a:latin typeface="Liberation Serif" panose="02020603050405020304" pitchFamily="18" charset="0"/>
+              <a:cs typeface="Liberation Serif" panose="02020603050405020304" pitchFamily="18" charset="0"/>
             </a:endParaRPr>
           </a:p>
           <a:p>
@@ -22240,12 +22336,12 @@
               <a:lnSpc>
                 <a:spcPct val="150000"/>
               </a:lnSpc>
-              <a:buFont typeface="Arial" panose="020B0604020202020204" pitchFamily="34" charset="0"/>
+              <a:buFont typeface="Liberation Sans" panose="020B0604020202020204" pitchFamily="34" charset="0"/>
               <a:buChar char="•"/>
             </a:pPr>
             <a:endParaRPr lang="en-US" altLang="ko-KR" sz="2000" dirty="0">
-              <a:latin typeface="Times New Roman" panose="02020603050405020304" pitchFamily="18" charset="0"/>
-              <a:cs typeface="Times New Roman" panose="02020603050405020304" pitchFamily="18" charset="0"/>
+              <a:latin typeface="Liberation Serif" panose="02020603050405020304" pitchFamily="18" charset="0"/>
+              <a:cs typeface="Liberation Serif" panose="02020603050405020304" pitchFamily="18" charset="0"/>
             </a:endParaRPr>
           </a:p>
           <a:p>
@@ -22253,13 +22349,13 @@
               <a:lnSpc>
                 <a:spcPct val="150000"/>
               </a:lnSpc>
-              <a:buFont typeface="Arial" panose="020B0604020202020204" pitchFamily="34" charset="0"/>
+              <a:buFont typeface="Liberation Sans" panose="020B0604020202020204" pitchFamily="34" charset="0"/>
               <a:buChar char="•"/>
             </a:pPr>
             <a:r>
               <a:rPr lang="en-US" altLang="ko-KR" sz="2000" dirty="0" smtClean="0">
-                <a:latin typeface="Times New Roman" panose="02020603050405020304" pitchFamily="18" charset="0"/>
-                <a:cs typeface="Times New Roman" panose="02020603050405020304" pitchFamily="18" charset="0"/>
+                <a:latin typeface="Liberation Serif" panose="02020603050405020304" pitchFamily="18" charset="0"/>
+                <a:cs typeface="Liberation Serif" panose="02020603050405020304" pitchFamily="18" charset="0"/>
               </a:rPr>
               <a:t>How can you distinguish the objects?</a:t>
             </a:r>
@@ -22269,12 +22365,12 @@
               <a:lnSpc>
                 <a:spcPct val="150000"/>
               </a:lnSpc>
-              <a:buFont typeface="Arial" panose="020B0604020202020204" pitchFamily="34" charset="0"/>
+              <a:buFont typeface="Liberation Sans" panose="020B0604020202020204" pitchFamily="34" charset="0"/>
               <a:buChar char="•"/>
             </a:pPr>
             <a:endParaRPr lang="en-US" altLang="ko-KR" sz="2000" dirty="0">
-              <a:latin typeface="Times New Roman" panose="02020603050405020304" pitchFamily="18" charset="0"/>
-              <a:cs typeface="Times New Roman" panose="02020603050405020304" pitchFamily="18" charset="0"/>
+              <a:latin typeface="Liberation Serif" panose="02020603050405020304" pitchFamily="18" charset="0"/>
+              <a:cs typeface="Liberation Serif" panose="02020603050405020304" pitchFamily="18" charset="0"/>
             </a:endParaRPr>
           </a:p>
           <a:p>
@@ -22282,12 +22378,12 @@
               <a:lnSpc>
                 <a:spcPct val="150000"/>
               </a:lnSpc>
-              <a:buFont typeface="Arial" panose="020B0604020202020204" pitchFamily="34" charset="0"/>
+              <a:buFont typeface="Liberation Sans" panose="020B0604020202020204" pitchFamily="34" charset="0"/>
               <a:buChar char="•"/>
             </a:pPr>
             <a:endParaRPr lang="en-US" altLang="ko-KR" sz="2000" dirty="0" smtClean="0">
-              <a:latin typeface="Times New Roman" panose="02020603050405020304" pitchFamily="18" charset="0"/>
-              <a:cs typeface="Times New Roman" panose="02020603050405020304" pitchFamily="18" charset="0"/>
+              <a:latin typeface="Liberation Serif" panose="02020603050405020304" pitchFamily="18" charset="0"/>
+              <a:cs typeface="Liberation Serif" panose="02020603050405020304" pitchFamily="18" charset="0"/>
             </a:endParaRPr>
           </a:p>
           <a:p>
@@ -22295,12 +22391,12 @@
               <a:lnSpc>
                 <a:spcPct val="150000"/>
               </a:lnSpc>
-              <a:buFont typeface="Arial" panose="020B0604020202020204" pitchFamily="34" charset="0"/>
+              <a:buFont typeface="Liberation Sans" panose="020B0604020202020204" pitchFamily="34" charset="0"/>
               <a:buChar char="•"/>
             </a:pPr>
             <a:endParaRPr lang="en-US" altLang="ko-KR" sz="2000" dirty="0">
-              <a:latin typeface="Times New Roman" panose="02020603050405020304" pitchFamily="18" charset="0"/>
-              <a:cs typeface="Times New Roman" panose="02020603050405020304" pitchFamily="18" charset="0"/>
+              <a:latin typeface="Liberation Serif" panose="02020603050405020304" pitchFamily="18" charset="0"/>
+              <a:cs typeface="Liberation Serif" panose="02020603050405020304" pitchFamily="18" charset="0"/>
             </a:endParaRPr>
           </a:p>
           <a:p>
@@ -22308,12 +22404,12 @@
               <a:lnSpc>
                 <a:spcPct val="150000"/>
               </a:lnSpc>
-              <a:buFont typeface="Arial" panose="020B0604020202020204" pitchFamily="34" charset="0"/>
+              <a:buFont typeface="Liberation Sans" panose="020B0604020202020204" pitchFamily="34" charset="0"/>
               <a:buChar char="•"/>
             </a:pPr>
             <a:endParaRPr lang="en-US" altLang="ko-KR" sz="2000" dirty="0" smtClean="0">
-              <a:latin typeface="Times New Roman" panose="02020603050405020304" pitchFamily="18" charset="0"/>
-              <a:cs typeface="Times New Roman" panose="02020603050405020304" pitchFamily="18" charset="0"/>
+              <a:latin typeface="Liberation Serif" panose="02020603050405020304" pitchFamily="18" charset="0"/>
+              <a:cs typeface="Liberation Serif" panose="02020603050405020304" pitchFamily="18" charset="0"/>
             </a:endParaRPr>
           </a:p>
         </p:txBody>
@@ -22500,8 +22596,8 @@
                 <a:solidFill>
                   <a:prstClr val="black"/>
                 </a:solidFill>
-                <a:latin typeface="Times New Roman" panose="02020603050405020304" pitchFamily="18" charset="0"/>
-                <a:cs typeface="Times New Roman" panose="02020603050405020304" pitchFamily="18" charset="0"/>
+                <a:latin typeface="Liberation Serif" panose="02020603050405020304" pitchFamily="18" charset="0"/>
+                <a:cs typeface="Liberation Serif" panose="02020603050405020304" pitchFamily="18" charset="0"/>
               </a:rPr>
               <a:t>What is the meaning of Well-Representation of the Data Feature?</a:t>
             </a:r>
@@ -22534,20 +22630,20 @@
               <a:lnSpc>
                 <a:spcPct val="150000"/>
               </a:lnSpc>
-              <a:buFont typeface="Arial" panose="020B0604020202020204" pitchFamily="34" charset="0"/>
+              <a:buFont typeface="Liberation Sans" panose="020B0604020202020204" pitchFamily="34" charset="0"/>
               <a:buChar char="•"/>
             </a:pPr>
             <a:r>
               <a:rPr lang="en-US" altLang="ko-KR" sz="2000" dirty="0">
-                <a:latin typeface="Times New Roman" panose="02020603050405020304" pitchFamily="18" charset="0"/>
-                <a:cs typeface="Times New Roman" panose="02020603050405020304" pitchFamily="18" charset="0"/>
+                <a:latin typeface="Liberation Serif" panose="02020603050405020304" pitchFamily="18" charset="0"/>
+                <a:cs typeface="Liberation Serif" panose="02020603050405020304" pitchFamily="18" charset="0"/>
               </a:rPr>
               <a:t>First, let's look at an example of what a Representation </a:t>
             </a:r>
             <a:r>
               <a:rPr lang="en-US" altLang="ko-KR" sz="2000" dirty="0" smtClean="0">
-                <a:latin typeface="Times New Roman" panose="02020603050405020304" pitchFamily="18" charset="0"/>
-                <a:cs typeface="Times New Roman" panose="02020603050405020304" pitchFamily="18" charset="0"/>
+                <a:latin typeface="Liberation Serif" panose="02020603050405020304" pitchFamily="18" charset="0"/>
+                <a:cs typeface="Liberation Serif" panose="02020603050405020304" pitchFamily="18" charset="0"/>
               </a:rPr>
               <a:t>is:</a:t>
             </a:r>
@@ -22557,12 +22653,12 @@
               <a:lnSpc>
                 <a:spcPct val="150000"/>
               </a:lnSpc>
-              <a:buFont typeface="Arial" panose="020B0604020202020204" pitchFamily="34" charset="0"/>
+              <a:buFont typeface="Liberation Sans" panose="020B0604020202020204" pitchFamily="34" charset="0"/>
               <a:buChar char="•"/>
             </a:pPr>
             <a:endParaRPr lang="en-US" altLang="ko-KR" sz="2000" dirty="0">
-              <a:latin typeface="Times New Roman" panose="02020603050405020304" pitchFamily="18" charset="0"/>
-              <a:cs typeface="Times New Roman" panose="02020603050405020304" pitchFamily="18" charset="0"/>
+              <a:latin typeface="Liberation Serif" panose="02020603050405020304" pitchFamily="18" charset="0"/>
+              <a:cs typeface="Liberation Serif" panose="02020603050405020304" pitchFamily="18" charset="0"/>
             </a:endParaRPr>
           </a:p>
           <a:p>
@@ -22570,12 +22666,12 @@
               <a:lnSpc>
                 <a:spcPct val="150000"/>
               </a:lnSpc>
-              <a:buFont typeface="Arial" panose="020B0604020202020204" pitchFamily="34" charset="0"/>
+              <a:buFont typeface="Liberation Sans" panose="020B0604020202020204" pitchFamily="34" charset="0"/>
               <a:buChar char="•"/>
             </a:pPr>
             <a:endParaRPr lang="en-US" altLang="ko-KR" sz="2000" dirty="0" smtClean="0">
-              <a:latin typeface="Times New Roman" panose="02020603050405020304" pitchFamily="18" charset="0"/>
-              <a:cs typeface="Times New Roman" panose="02020603050405020304" pitchFamily="18" charset="0"/>
+              <a:latin typeface="Liberation Serif" panose="02020603050405020304" pitchFamily="18" charset="0"/>
+              <a:cs typeface="Liberation Serif" panose="02020603050405020304" pitchFamily="18" charset="0"/>
             </a:endParaRPr>
           </a:p>
           <a:p>
@@ -22583,12 +22679,12 @@
               <a:lnSpc>
                 <a:spcPct val="150000"/>
               </a:lnSpc>
-              <a:buFont typeface="Arial" panose="020B0604020202020204" pitchFamily="34" charset="0"/>
+              <a:buFont typeface="Liberation Sans" panose="020B0604020202020204" pitchFamily="34" charset="0"/>
               <a:buChar char="•"/>
             </a:pPr>
             <a:endParaRPr lang="en-US" altLang="ko-KR" sz="2000" dirty="0">
-              <a:latin typeface="Times New Roman" panose="02020603050405020304" pitchFamily="18" charset="0"/>
-              <a:cs typeface="Times New Roman" panose="02020603050405020304" pitchFamily="18" charset="0"/>
+              <a:latin typeface="Liberation Serif" panose="02020603050405020304" pitchFamily="18" charset="0"/>
+              <a:cs typeface="Liberation Serif" panose="02020603050405020304" pitchFamily="18" charset="0"/>
             </a:endParaRPr>
           </a:p>
           <a:p>
@@ -22596,12 +22692,12 @@
               <a:lnSpc>
                 <a:spcPct val="150000"/>
               </a:lnSpc>
-              <a:buFont typeface="Arial" panose="020B0604020202020204" pitchFamily="34" charset="0"/>
+              <a:buFont typeface="Liberation Sans" panose="020B0604020202020204" pitchFamily="34" charset="0"/>
               <a:buChar char="•"/>
             </a:pPr>
             <a:endParaRPr lang="en-US" altLang="ko-KR" sz="2000" dirty="0" smtClean="0">
-              <a:latin typeface="Times New Roman" panose="02020603050405020304" pitchFamily="18" charset="0"/>
-              <a:cs typeface="Times New Roman" panose="02020603050405020304" pitchFamily="18" charset="0"/>
+              <a:latin typeface="Liberation Serif" panose="02020603050405020304" pitchFamily="18" charset="0"/>
+              <a:cs typeface="Liberation Serif" panose="02020603050405020304" pitchFamily="18" charset="0"/>
             </a:endParaRPr>
           </a:p>
           <a:p>
@@ -22609,12 +22705,12 @@
               <a:lnSpc>
                 <a:spcPct val="150000"/>
               </a:lnSpc>
-              <a:buFont typeface="Arial" panose="020B0604020202020204" pitchFamily="34" charset="0"/>
+              <a:buFont typeface="Liberation Sans" panose="020B0604020202020204" pitchFamily="34" charset="0"/>
               <a:buChar char="•"/>
             </a:pPr>
             <a:endParaRPr lang="en-US" altLang="ko-KR" sz="2000" dirty="0">
-              <a:latin typeface="Times New Roman" panose="02020603050405020304" pitchFamily="18" charset="0"/>
-              <a:cs typeface="Times New Roman" panose="02020603050405020304" pitchFamily="18" charset="0"/>
+              <a:latin typeface="Liberation Serif" panose="02020603050405020304" pitchFamily="18" charset="0"/>
+              <a:cs typeface="Liberation Serif" panose="02020603050405020304" pitchFamily="18" charset="0"/>
             </a:endParaRPr>
           </a:p>
           <a:p>
@@ -22622,20 +22718,20 @@
               <a:lnSpc>
                 <a:spcPct val="150000"/>
               </a:lnSpc>
-              <a:buFont typeface="Arial" panose="020B0604020202020204" pitchFamily="34" charset="0"/>
+              <a:buFont typeface="Liberation Sans" panose="020B0604020202020204" pitchFamily="34" charset="0"/>
               <a:buChar char="•"/>
             </a:pPr>
             <a:r>
               <a:rPr lang="en-US" altLang="ko-KR" sz="2000" dirty="0">
-                <a:latin typeface="Times New Roman" panose="02020603050405020304" pitchFamily="18" charset="0"/>
-                <a:cs typeface="Times New Roman" panose="02020603050405020304" pitchFamily="18" charset="0"/>
+                <a:latin typeface="Liberation Serif" panose="02020603050405020304" pitchFamily="18" charset="0"/>
+                <a:cs typeface="Liberation Serif" panose="02020603050405020304" pitchFamily="18" charset="0"/>
               </a:rPr>
               <a:t>If you try to solve the problem of Classify the following shape, the number of corners can be used as a </a:t>
             </a:r>
             <a:r>
               <a:rPr lang="en-US" altLang="ko-KR" sz="2000" dirty="0" smtClean="0">
-                <a:latin typeface="Times New Roman" panose="02020603050405020304" pitchFamily="18" charset="0"/>
-                <a:cs typeface="Times New Roman" panose="02020603050405020304" pitchFamily="18" charset="0"/>
+                <a:latin typeface="Liberation Serif" panose="02020603050405020304" pitchFamily="18" charset="0"/>
+                <a:cs typeface="Liberation Serif" panose="02020603050405020304" pitchFamily="18" charset="0"/>
               </a:rPr>
               <a:t>Representation</a:t>
             </a:r>
@@ -22645,13 +22741,13 @@
               <a:lnSpc>
                 <a:spcPct val="150000"/>
               </a:lnSpc>
-              <a:buFont typeface="Arial" panose="020B0604020202020204" pitchFamily="34" charset="0"/>
+              <a:buFont typeface="Liberation Sans" panose="020B0604020202020204" pitchFamily="34" charset="0"/>
               <a:buChar char="•"/>
             </a:pPr>
             <a:r>
               <a:rPr lang="en-US" altLang="ko-KR" sz="2000" dirty="0" smtClean="0">
-                <a:latin typeface="Times New Roman" panose="02020603050405020304" pitchFamily="18" charset="0"/>
-                <a:cs typeface="Times New Roman" panose="02020603050405020304" pitchFamily="18" charset="0"/>
+                <a:latin typeface="Liberation Serif" panose="02020603050405020304" pitchFamily="18" charset="0"/>
+                <a:cs typeface="Liberation Serif" panose="02020603050405020304" pitchFamily="18" charset="0"/>
               </a:rPr>
               <a:t>Square: 4 corner</a:t>
             </a:r>
@@ -22661,13 +22757,13 @@
               <a:lnSpc>
                 <a:spcPct val="150000"/>
               </a:lnSpc>
-              <a:buFont typeface="Arial" panose="020B0604020202020204" pitchFamily="34" charset="0"/>
+              <a:buFont typeface="Liberation Sans" panose="020B0604020202020204" pitchFamily="34" charset="0"/>
               <a:buChar char="•"/>
             </a:pPr>
             <a:r>
               <a:rPr lang="en-US" altLang="ko-KR" sz="2000" dirty="0" smtClean="0">
-                <a:latin typeface="Times New Roman" panose="02020603050405020304" pitchFamily="18" charset="0"/>
-                <a:cs typeface="Times New Roman" panose="02020603050405020304" pitchFamily="18" charset="0"/>
+                <a:latin typeface="Liberation Serif" panose="02020603050405020304" pitchFamily="18" charset="0"/>
+                <a:cs typeface="Liberation Serif" panose="02020603050405020304" pitchFamily="18" charset="0"/>
               </a:rPr>
               <a:t>Triangle: 3 corner</a:t>
             </a:r>
@@ -22677,19 +22773,19 @@
               <a:lnSpc>
                 <a:spcPct val="150000"/>
               </a:lnSpc>
-              <a:buFont typeface="Arial" panose="020B0604020202020204" pitchFamily="34" charset="0"/>
+              <a:buFont typeface="Liberation Sans" panose="020B0604020202020204" pitchFamily="34" charset="0"/>
               <a:buChar char="•"/>
             </a:pPr>
             <a:r>
               <a:rPr lang="en-US" altLang="ko-KR" sz="2000" dirty="0" smtClean="0">
-                <a:latin typeface="Times New Roman" panose="02020603050405020304" pitchFamily="18" charset="0"/>
-                <a:cs typeface="Times New Roman" panose="02020603050405020304" pitchFamily="18" charset="0"/>
+                <a:latin typeface="Liberation Serif" panose="02020603050405020304" pitchFamily="18" charset="0"/>
+                <a:cs typeface="Liberation Serif" panose="02020603050405020304" pitchFamily="18" charset="0"/>
               </a:rPr>
               <a:t>Circle: 0 corner</a:t>
             </a:r>
             <a:endParaRPr lang="en-US" altLang="ko-KR" sz="2000" dirty="0">
-              <a:latin typeface="Times New Roman" panose="02020603050405020304" pitchFamily="18" charset="0"/>
-              <a:cs typeface="Times New Roman" panose="02020603050405020304" pitchFamily="18" charset="0"/>
+              <a:latin typeface="Liberation Serif" panose="02020603050405020304" pitchFamily="18" charset="0"/>
+              <a:cs typeface="Liberation Serif" panose="02020603050405020304" pitchFamily="18" charset="0"/>
             </a:endParaRPr>
           </a:p>
         </p:txBody>
@@ -22813,8 +22909,8 @@
                 <a:solidFill>
                   <a:prstClr val="black"/>
                 </a:solidFill>
-                <a:latin typeface="Times New Roman" panose="02020603050405020304" pitchFamily="18" charset="0"/>
-                <a:cs typeface="Times New Roman" panose="02020603050405020304" pitchFamily="18" charset="0"/>
+                <a:latin typeface="Liberation Serif" panose="02020603050405020304" pitchFamily="18" charset="0"/>
+                <a:cs typeface="Liberation Serif" panose="02020603050405020304" pitchFamily="18" charset="0"/>
               </a:rPr>
               <a:t>What is the meaning of Well-Representation of the Data Feature?</a:t>
             </a:r>
@@ -22877,26 +22973,26 @@
               <a:lnSpc>
                 <a:spcPct val="150000"/>
               </a:lnSpc>
-              <a:buFont typeface="Arial" panose="020B0604020202020204" pitchFamily="34" charset="0"/>
+              <a:buFont typeface="Liberation Sans" panose="020B0604020202020204" pitchFamily="34" charset="0"/>
               <a:buChar char="•"/>
             </a:pPr>
             <a:r>
               <a:rPr lang="ko-KR" altLang="en-US" sz="2000" dirty="0">
-                <a:latin typeface="Times New Roman" panose="02020603050405020304" pitchFamily="18" charset="0"/>
-                <a:cs typeface="Times New Roman" panose="02020603050405020304" pitchFamily="18" charset="0"/>
+                <a:latin typeface="Liberation Serif" panose="02020603050405020304" pitchFamily="18" charset="0"/>
+                <a:cs typeface="Liberation Serif" panose="02020603050405020304" pitchFamily="18" charset="0"/>
               </a:rPr>
               <a:t>But how do we cope if this shape comes in</a:t>
             </a:r>
             <a:r>
               <a:rPr lang="ko-KR" altLang="en-US" sz="2000" dirty="0" smtClean="0">
-                <a:latin typeface="Times New Roman" panose="02020603050405020304" pitchFamily="18" charset="0"/>
-                <a:cs typeface="Times New Roman" panose="02020603050405020304" pitchFamily="18" charset="0"/>
+                <a:latin typeface="Liberation Serif" panose="02020603050405020304" pitchFamily="18" charset="0"/>
+                <a:cs typeface="Liberation Serif" panose="02020603050405020304" pitchFamily="18" charset="0"/>
               </a:rPr>
               <a:t>?</a:t>
             </a:r>
             <a:endParaRPr lang="en-US" altLang="ko-KR" sz="2000" dirty="0" smtClean="0">
-              <a:latin typeface="Times New Roman" panose="02020603050405020304" pitchFamily="18" charset="0"/>
-              <a:cs typeface="Times New Roman" panose="02020603050405020304" pitchFamily="18" charset="0"/>
+              <a:latin typeface="Liberation Serif" panose="02020603050405020304" pitchFamily="18" charset="0"/>
+              <a:cs typeface="Liberation Serif" panose="02020603050405020304" pitchFamily="18" charset="0"/>
             </a:endParaRPr>
           </a:p>
           <a:p>
@@ -22904,12 +23000,12 @@
               <a:lnSpc>
                 <a:spcPct val="150000"/>
               </a:lnSpc>
-              <a:buFont typeface="Arial" panose="020B0604020202020204" pitchFamily="34" charset="0"/>
+              <a:buFont typeface="Liberation Sans" panose="020B0604020202020204" pitchFamily="34" charset="0"/>
               <a:buChar char="•"/>
             </a:pPr>
             <a:endParaRPr lang="en-US" altLang="ko-KR" sz="2000" dirty="0">
-              <a:latin typeface="Times New Roman" panose="02020603050405020304" pitchFamily="18" charset="0"/>
-              <a:cs typeface="Times New Roman" panose="02020603050405020304" pitchFamily="18" charset="0"/>
+              <a:latin typeface="Liberation Serif" panose="02020603050405020304" pitchFamily="18" charset="0"/>
+              <a:cs typeface="Liberation Serif" panose="02020603050405020304" pitchFamily="18" charset="0"/>
             </a:endParaRPr>
           </a:p>
           <a:p>
@@ -22917,12 +23013,12 @@
               <a:lnSpc>
                 <a:spcPct val="150000"/>
               </a:lnSpc>
-              <a:buFont typeface="Arial" panose="020B0604020202020204" pitchFamily="34" charset="0"/>
+              <a:buFont typeface="Liberation Sans" panose="020B0604020202020204" pitchFamily="34" charset="0"/>
               <a:buChar char="•"/>
             </a:pPr>
             <a:endParaRPr lang="en-US" altLang="ko-KR" sz="2000" dirty="0" smtClean="0">
-              <a:latin typeface="Times New Roman" panose="02020603050405020304" pitchFamily="18" charset="0"/>
-              <a:cs typeface="Times New Roman" panose="02020603050405020304" pitchFamily="18" charset="0"/>
+              <a:latin typeface="Liberation Serif" panose="02020603050405020304" pitchFamily="18" charset="0"/>
+              <a:cs typeface="Liberation Serif" panose="02020603050405020304" pitchFamily="18" charset="0"/>
             </a:endParaRPr>
           </a:p>
           <a:p>
@@ -22930,12 +23026,12 @@
               <a:lnSpc>
                 <a:spcPct val="150000"/>
               </a:lnSpc>
-              <a:buFont typeface="Arial" panose="020B0604020202020204" pitchFamily="34" charset="0"/>
+              <a:buFont typeface="Liberation Sans" panose="020B0604020202020204" pitchFamily="34" charset="0"/>
               <a:buChar char="•"/>
             </a:pPr>
             <a:endParaRPr lang="en-US" altLang="ko-KR" sz="2000" dirty="0">
-              <a:latin typeface="Times New Roman" panose="02020603050405020304" pitchFamily="18" charset="0"/>
-              <a:cs typeface="Times New Roman" panose="02020603050405020304" pitchFamily="18" charset="0"/>
+              <a:latin typeface="Liberation Serif" panose="02020603050405020304" pitchFamily="18" charset="0"/>
+              <a:cs typeface="Liberation Serif" panose="02020603050405020304" pitchFamily="18" charset="0"/>
             </a:endParaRPr>
           </a:p>
           <a:p>
@@ -22943,12 +23039,12 @@
               <a:lnSpc>
                 <a:spcPct val="150000"/>
               </a:lnSpc>
-              <a:buFont typeface="Arial" panose="020B0604020202020204" pitchFamily="34" charset="0"/>
+              <a:buFont typeface="Liberation Sans" panose="020B0604020202020204" pitchFamily="34" charset="0"/>
               <a:buChar char="•"/>
             </a:pPr>
             <a:endParaRPr lang="en-US" altLang="ko-KR" sz="2000" dirty="0" smtClean="0">
-              <a:latin typeface="Times New Roman" panose="02020603050405020304" pitchFamily="18" charset="0"/>
-              <a:cs typeface="Times New Roman" panose="02020603050405020304" pitchFamily="18" charset="0"/>
+              <a:latin typeface="Liberation Serif" panose="02020603050405020304" pitchFamily="18" charset="0"/>
+              <a:cs typeface="Liberation Serif" panose="02020603050405020304" pitchFamily="18" charset="0"/>
             </a:endParaRPr>
           </a:p>
           <a:p>
@@ -22956,12 +23052,12 @@
               <a:lnSpc>
                 <a:spcPct val="150000"/>
               </a:lnSpc>
-              <a:buFont typeface="Arial" panose="020B0604020202020204" pitchFamily="34" charset="0"/>
+              <a:buFont typeface="Liberation Sans" panose="020B0604020202020204" pitchFamily="34" charset="0"/>
               <a:buChar char="•"/>
             </a:pPr>
             <a:endParaRPr lang="en-US" altLang="ko-KR" sz="2000" dirty="0">
-              <a:latin typeface="Times New Roman" panose="02020603050405020304" pitchFamily="18" charset="0"/>
-              <a:cs typeface="Times New Roman" panose="02020603050405020304" pitchFamily="18" charset="0"/>
+              <a:latin typeface="Liberation Serif" panose="02020603050405020304" pitchFamily="18" charset="0"/>
+              <a:cs typeface="Liberation Serif" panose="02020603050405020304" pitchFamily="18" charset="0"/>
             </a:endParaRPr>
           </a:p>
           <a:p>
@@ -22969,12 +23065,12 @@
               <a:lnSpc>
                 <a:spcPct val="150000"/>
               </a:lnSpc>
-              <a:buFont typeface="Arial" panose="020B0604020202020204" pitchFamily="34" charset="0"/>
+              <a:buFont typeface="Liberation Sans" panose="020B0604020202020204" pitchFamily="34" charset="0"/>
               <a:buChar char="•"/>
             </a:pPr>
             <a:endParaRPr lang="en-US" altLang="ko-KR" sz="2000" dirty="0" smtClean="0">
-              <a:latin typeface="Times New Roman" panose="02020603050405020304" pitchFamily="18" charset="0"/>
-              <a:cs typeface="Times New Roman" panose="02020603050405020304" pitchFamily="18" charset="0"/>
+              <a:latin typeface="Liberation Serif" panose="02020603050405020304" pitchFamily="18" charset="0"/>
+              <a:cs typeface="Liberation Serif" panose="02020603050405020304" pitchFamily="18" charset="0"/>
             </a:endParaRPr>
           </a:p>
           <a:p>
@@ -22982,12 +23078,12 @@
               <a:lnSpc>
                 <a:spcPct val="150000"/>
               </a:lnSpc>
-              <a:buFont typeface="Arial" panose="020B0604020202020204" pitchFamily="34" charset="0"/>
+              <a:buFont typeface="Liberation Sans" panose="020B0604020202020204" pitchFamily="34" charset="0"/>
               <a:buChar char="•"/>
             </a:pPr>
             <a:endParaRPr lang="en-US" altLang="ko-KR" sz="2000" dirty="0">
-              <a:latin typeface="Times New Roman" panose="02020603050405020304" pitchFamily="18" charset="0"/>
-              <a:cs typeface="Times New Roman" panose="02020603050405020304" pitchFamily="18" charset="0"/>
+              <a:latin typeface="Liberation Serif" panose="02020603050405020304" pitchFamily="18" charset="0"/>
+              <a:cs typeface="Liberation Serif" panose="02020603050405020304" pitchFamily="18" charset="0"/>
             </a:endParaRPr>
           </a:p>
           <a:p>
@@ -22995,26 +23091,26 @@
               <a:lnSpc>
                 <a:spcPct val="150000"/>
               </a:lnSpc>
-              <a:buFont typeface="Arial" panose="020B0604020202020204" pitchFamily="34" charset="0"/>
+              <a:buFont typeface="Liberation Sans" panose="020B0604020202020204" pitchFamily="34" charset="0"/>
               <a:buChar char="•"/>
             </a:pPr>
             <a:r>
               <a:rPr lang="en-US" altLang="ko-KR" sz="2000" dirty="0">
-                <a:latin typeface="Times New Roman" panose="02020603050405020304" pitchFamily="18" charset="0"/>
-                <a:cs typeface="Times New Roman" panose="02020603050405020304" pitchFamily="18" charset="0"/>
+                <a:latin typeface="Liberation Serif" panose="02020603050405020304" pitchFamily="18" charset="0"/>
+                <a:cs typeface="Liberation Serif" panose="02020603050405020304" pitchFamily="18" charset="0"/>
               </a:rPr>
               <a:t>You need great expertise in good representation, and Deep Learning automatically learns this </a:t>
             </a:r>
             <a:r>
               <a:rPr lang="en-US" altLang="ko-KR" sz="2000" dirty="0" smtClean="0">
-                <a:latin typeface="Times New Roman" panose="02020603050405020304" pitchFamily="18" charset="0"/>
-                <a:cs typeface="Times New Roman" panose="02020603050405020304" pitchFamily="18" charset="0"/>
+                <a:latin typeface="Liberation Serif" panose="02020603050405020304" pitchFamily="18" charset="0"/>
+                <a:cs typeface="Liberation Serif" panose="02020603050405020304" pitchFamily="18" charset="0"/>
               </a:rPr>
               <a:t>representation</a:t>
             </a:r>
             <a:endParaRPr lang="ko-KR" altLang="en-US" sz="2000" dirty="0">
-              <a:latin typeface="Times New Roman" panose="02020603050405020304" pitchFamily="18" charset="0"/>
-              <a:cs typeface="Times New Roman" panose="02020603050405020304" pitchFamily="18" charset="0"/>
+              <a:latin typeface="Liberation Serif" panose="02020603050405020304" pitchFamily="18" charset="0"/>
+              <a:cs typeface="Liberation Serif" panose="02020603050405020304" pitchFamily="18" charset="0"/>
             </a:endParaRPr>
           </a:p>
         </p:txBody>
@@ -23075,74 +23171,74 @@
     </a:clrScheme>
     <a:fontScheme name="Office 테마">
       <a:majorFont>
-        <a:latin typeface="Calibri Light" panose="020F0302020204030204"/>
+        <a:latin typeface="Carlito" panose="020F0302020204030204"/>
         <a:ea typeface=""/>
         <a:cs typeface=""/>
-        <a:font script="Jpan" typeface="ＭＳ Ｐゴシック"/>
-        <a:font script="Hang" typeface="맑은 고딕"/>
-        <a:font script="Hans" typeface="宋体"/>
-        <a:font script="Hant" typeface="新細明體"/>
-        <a:font script="Arab" typeface="Times New Roman"/>
-        <a:font script="Hebr" typeface="Times New Roman"/>
-        <a:font script="Thai" typeface="Angsana New"/>
-        <a:font script="Ethi" typeface="Nyala"/>
-        <a:font script="Beng" typeface="Vrinda"/>
-        <a:font script="Gujr" typeface="Shruti"/>
-        <a:font script="Khmr" typeface="MoolBoran"/>
-        <a:font script="Knda" typeface="Tunga"/>
-        <a:font script="Guru" typeface="Raavi"/>
-        <a:font script="Cans" typeface="Euphemia"/>
-        <a:font script="Cher" typeface="Plantagenet Cherokee"/>
-        <a:font script="Yiii" typeface="Microsoft Yi Baiti"/>
-        <a:font script="Tibt" typeface="Microsoft Himalaya"/>
-        <a:font script="Thaa" typeface="MV Boli"/>
-        <a:font script="Deva" typeface="Mangal"/>
-        <a:font script="Telu" typeface="Gautami"/>
-        <a:font script="Taml" typeface="Latha"/>
-        <a:font script="Syrc" typeface="Estrangelo Edessa"/>
-        <a:font script="Orya" typeface="Kalinga"/>
-        <a:font script="Mlym" typeface="Kartika"/>
-        <a:font script="Laoo" typeface="DokChampa"/>
-        <a:font script="Sinh" typeface="Iskoola Pota"/>
-        <a:font script="Mong" typeface="Mongolian Baiti"/>
-        <a:font script="Viet" typeface="Times New Roman"/>
-        <a:font script="Uigh" typeface="Microsoft Uighur"/>
-        <a:font script="Geor" typeface="Sylfaen"/>
+        <a:font script="Jpan" typeface="Liberation Sans"/>
+        <a:font script="Hang" typeface="Liberation Sans"/>
+        <a:font script="Hans" typeface="Liberation Sans"/>
+        <a:font script="Hant" typeface="Liberation Sans"/>
+        <a:font script="Arab" typeface="Liberation Serif"/>
+        <a:font script="Hebr" typeface="Liberation Serif"/>
+        <a:font script="Thai" typeface="Liberation Serif"/>
+        <a:font script="Ethi" typeface="Liberation Sans"/>
+        <a:font script="Beng" typeface="Liberation Sans"/>
+        <a:font script="Gujr" typeface="Liberation Sans"/>
+        <a:font script="Khmr" typeface="Liberation Sans"/>
+        <a:font script="Knda" typeface="Liberation Sans"/>
+        <a:font script="Guru" typeface="Liberation Sans"/>
+        <a:font script="Cans" typeface="Liberation Sans"/>
+        <a:font script="Cher" typeface="Liberation Serif"/>
+        <a:font script="Yiii" typeface="Liberation Sans"/>
+        <a:font script="Tibt" typeface="Liberation Sans"/>
+        <a:font script="Thaa" typeface="Liberation Sans"/>
+        <a:font script="Deva" typeface="Liberation Sans"/>
+        <a:font script="Telu" typeface="Liberation Sans"/>
+        <a:font script="Taml" typeface="Liberation Sans"/>
+        <a:font script="Syrc" typeface="Liberation Sans"/>
+        <a:font script="Orya" typeface="Liberation Sans"/>
+        <a:font script="Mlym" typeface="Liberation Sans"/>
+        <a:font script="Laoo" typeface="Liberation Sans"/>
+        <a:font script="Sinh" typeface="Liberation Sans"/>
+        <a:font script="Mong" typeface="Liberation Sans"/>
+        <a:font script="Viet" typeface="Liberation Serif"/>
+        <a:font script="Uigh" typeface="Liberation Sans"/>
+        <a:font script="Geor" typeface="Liberation Serif"/>
       </a:majorFont>
       <a:minorFont>
-        <a:latin typeface="Calibri" panose="020F0502020204030204"/>
+        <a:latin typeface="Carlito" panose="020F0502020204030204"/>
         <a:ea typeface=""/>
         <a:cs typeface=""/>
-        <a:font script="Jpan" typeface="ＭＳ Ｐゴシック"/>
-        <a:font script="Hang" typeface="맑은 고딕"/>
-        <a:font script="Hans" typeface="宋体"/>
-        <a:font script="Hant" typeface="新細明體"/>
-        <a:font script="Arab" typeface="Arial"/>
-        <a:font script="Hebr" typeface="Arial"/>
-        <a:font script="Thai" typeface="Cordia New"/>
-        <a:font script="Ethi" typeface="Nyala"/>
-        <a:font script="Beng" typeface="Vrinda"/>
-        <a:font script="Gujr" typeface="Shruti"/>
-        <a:font script="Khmr" typeface="DaunPenh"/>
-        <a:font script="Knda" typeface="Tunga"/>
-        <a:font script="Guru" typeface="Raavi"/>
-        <a:font script="Cans" typeface="Euphemia"/>
-        <a:font script="Cher" typeface="Plantagenet Cherokee"/>
-        <a:font script="Yiii" typeface="Microsoft Yi Baiti"/>
-        <a:font script="Tibt" typeface="Microsoft Himalaya"/>
-        <a:font script="Thaa" typeface="MV Boli"/>
-        <a:font script="Deva" typeface="Mangal"/>
-        <a:font script="Telu" typeface="Gautami"/>
-        <a:font script="Taml" typeface="Latha"/>
-        <a:font script="Syrc" typeface="Estrangelo Edessa"/>
-        <a:font script="Orya" typeface="Kalinga"/>
-        <a:font script="Mlym" typeface="Kartika"/>
-        <a:font script="Laoo" typeface="DokChampa"/>
-        <a:font script="Sinh" typeface="Iskoola Pota"/>
-        <a:font script="Mong" typeface="Mongolian Baiti"/>
-        <a:font script="Viet" typeface="Arial"/>
-        <a:font script="Uigh" typeface="Microsoft Uighur"/>
-        <a:font script="Geor" typeface="Sylfaen"/>
+        <a:font script="Jpan" typeface="Liberation Sans"/>
+        <a:font script="Hang" typeface="Liberation Sans"/>
+        <a:font script="Hans" typeface="Liberation Sans"/>
+        <a:font script="Hant" typeface="Liberation Sans"/>
+        <a:font script="Arab" typeface="Liberation Sans"/>
+        <a:font script="Hebr" typeface="Liberation Sans"/>
+        <a:font script="Thai" typeface="Liberation Sans"/>
+        <a:font script="Ethi" typeface="Liberation Sans"/>
+        <a:font script="Beng" typeface="Liberation Sans"/>
+        <a:font script="Gujr" typeface="Liberation Sans"/>
+        <a:font script="Khmr" typeface="Liberation Sans"/>
+        <a:font script="Knda" typeface="Liberation Sans"/>
+        <a:font script="Guru" typeface="Liberation Sans"/>
+        <a:font script="Cans" typeface="Liberation Sans"/>
+        <a:font script="Cher" typeface="Liberation Serif"/>
+        <a:font script="Yiii" typeface="Liberation Sans"/>
+        <a:font script="Tibt" typeface="Liberation Sans"/>
+        <a:font script="Thaa" typeface="Liberation Sans"/>
+        <a:font script="Deva" typeface="Liberation Sans"/>
+        <a:font script="Telu" typeface="Liberation Sans"/>
+        <a:font script="Taml" typeface="Liberation Sans"/>
+        <a:font script="Syrc" typeface="Liberation Sans"/>
+        <a:font script="Orya" typeface="Liberation Sans"/>
+        <a:font script="Mlym" typeface="Liberation Sans"/>
+        <a:font script="Laoo" typeface="Liberation Sans"/>
+        <a:font script="Sinh" typeface="Liberation Sans"/>
+        <a:font script="Mong" typeface="Liberation Sans"/>
+        <a:font script="Viet" typeface="Liberation Sans"/>
+        <a:font script="Uigh" typeface="Liberation Sans"/>
+        <a:font script="Geor" typeface="Liberation Serif"/>
       </a:minorFont>
     </a:fontScheme>
     <a:fmtScheme name="Office 테마">
@@ -23336,74 +23432,74 @@
     </a:clrScheme>
     <a:fontScheme name="Office">
       <a:majorFont>
-        <a:latin typeface="맑은 고딕" panose="020F0302020204030204"/>
+        <a:latin typeface="Liberation Sans" panose="020F0302020204030204"/>
         <a:ea typeface=""/>
         <a:cs typeface=""/>
-        <a:font script="Jpan" typeface="ＭＳ Ｐゴシック"/>
-        <a:font script="Hang" typeface="맑은 고딕"/>
-        <a:font script="Hans" typeface="宋体"/>
-        <a:font script="Hant" typeface="新細明體"/>
-        <a:font script="Arab" typeface="Times New Roman"/>
-        <a:font script="Hebr" typeface="Times New Roman"/>
-        <a:font script="Thai" typeface="Angsana New"/>
-        <a:font script="Ethi" typeface="Nyala"/>
-        <a:font script="Beng" typeface="Vrinda"/>
-        <a:font script="Gujr" typeface="Shruti"/>
-        <a:font script="Khmr" typeface="MoolBoran"/>
-        <a:font script="Knda" typeface="Tunga"/>
-        <a:font script="Guru" typeface="Raavi"/>
-        <a:font script="Cans" typeface="Euphemia"/>
-        <a:font script="Cher" typeface="Plantagenet Cherokee"/>
-        <a:font script="Yiii" typeface="Microsoft Yi Baiti"/>
-        <a:font script="Tibt" typeface="Microsoft Himalaya"/>
-        <a:font script="Thaa" typeface="MV Boli"/>
-        <a:font script="Deva" typeface="Mangal"/>
-        <a:font script="Telu" typeface="Gautami"/>
-        <a:font script="Taml" typeface="Latha"/>
-        <a:font script="Syrc" typeface="Estrangelo Edessa"/>
-        <a:font script="Orya" typeface="Kalinga"/>
-        <a:font script="Mlym" typeface="Kartika"/>
-        <a:font script="Laoo" typeface="DokChampa"/>
-        <a:font script="Sinh" typeface="Iskoola Pota"/>
-        <a:font script="Mong" typeface="Mongolian Baiti"/>
-        <a:font script="Viet" typeface="Times New Roman"/>
-        <a:font script="Uigh" typeface="Microsoft Uighur"/>
-        <a:font script="Geor" typeface="Sylfaen"/>
+        <a:font script="Jpan" typeface="Liberation Sans"/>
+        <a:font script="Hang" typeface="Liberation Sans"/>
+        <a:font script="Hans" typeface="Liberation Sans"/>
+        <a:font script="Hant" typeface="Liberation Sans"/>
+        <a:font script="Arab" typeface="Liberation Serif"/>
+        <a:font script="Hebr" typeface="Liberation Serif"/>
+        <a:font script="Thai" typeface="Liberation Serif"/>
+        <a:font script="Ethi" typeface="Liberation Sans"/>
+        <a:font script="Beng" typeface="Liberation Sans"/>
+        <a:font script="Gujr" typeface="Liberation Sans"/>
+        <a:font script="Khmr" typeface="Liberation Sans"/>
+        <a:font script="Knda" typeface="Liberation Sans"/>
+        <a:font script="Guru" typeface="Liberation Sans"/>
+        <a:font script="Cans" typeface="Liberation Sans"/>
+        <a:font script="Cher" typeface="Liberation Serif"/>
+        <a:font script="Yiii" typeface="Liberation Sans"/>
+        <a:font script="Tibt" typeface="Liberation Sans"/>
+        <a:font script="Thaa" typeface="Liberation Sans"/>
+        <a:font script="Deva" typeface="Liberation Sans"/>
+        <a:font script="Telu" typeface="Liberation Sans"/>
+        <a:font script="Taml" typeface="Liberation Sans"/>
+        <a:font script="Syrc" typeface="Liberation Sans"/>
+        <a:font script="Orya" typeface="Liberation Sans"/>
+        <a:font script="Mlym" typeface="Liberation Sans"/>
+        <a:font script="Laoo" typeface="Liberation Sans"/>
+        <a:font script="Sinh" typeface="Liberation Sans"/>
+        <a:font script="Mong" typeface="Liberation Sans"/>
+        <a:font script="Viet" typeface="Liberation Serif"/>
+        <a:font script="Uigh" typeface="Liberation Sans"/>
+        <a:font script="Geor" typeface="Liberation Serif"/>
       </a:majorFont>
       <a:minorFont>
-        <a:latin typeface="맑은 고딕" panose="020F0502020204030204"/>
+        <a:latin typeface="Liberation Sans" panose="020F0502020204030204"/>
         <a:ea typeface=""/>
         <a:cs typeface=""/>
-        <a:font script="Jpan" typeface="ＭＳ Ｐゴシック"/>
-        <a:font script="Hang" typeface="맑은 고딕"/>
-        <a:font script="Hans" typeface="宋体"/>
-        <a:font script="Hant" typeface="新細明體"/>
-        <a:font script="Arab" typeface="Arial"/>
-        <a:font script="Hebr" typeface="Arial"/>
-        <a:font script="Thai" typeface="Cordia New"/>
-        <a:font script="Ethi" typeface="Nyala"/>
-        <a:font script="Beng" typeface="Vrinda"/>
-        <a:font script="Gujr" typeface="Shruti"/>
-        <a:font script="Khmr" typeface="DaunPenh"/>
-        <a:font script="Knda" typeface="Tunga"/>
-        <a:font script="Guru" typeface="Raavi"/>
-        <a:font script="Cans" typeface="Euphemia"/>
-        <a:font script="Cher" typeface="Plantagenet Cherokee"/>
-        <a:font script="Yiii" typeface="Microsoft Yi Baiti"/>
-        <a:font script="Tibt" typeface="Microsoft Himalaya"/>
-        <a:font script="Thaa" typeface="MV Boli"/>
-        <a:font script="Deva" typeface="Mangal"/>
-        <a:font script="Telu" typeface="Gautami"/>
-        <a:font script="Taml" typeface="Latha"/>
-        <a:font script="Syrc" typeface="Estrangelo Edessa"/>
-        <a:font script="Orya" typeface="Kalinga"/>
-        <a:font script="Mlym" typeface="Kartika"/>
-        <a:font script="Laoo" typeface="DokChampa"/>
-        <a:font script="Sinh" typeface="Iskoola Pota"/>
-        <a:font script="Mong" typeface="Mongolian Baiti"/>
-        <a:font script="Viet" typeface="Arial"/>
-        <a:font script="Uigh" typeface="Microsoft Uighur"/>
-        <a:font script="Geor" typeface="Sylfaen"/>
+        <a:font script="Jpan" typeface="Liberation Sans"/>
+        <a:font script="Hang" typeface="Liberation Sans"/>
+        <a:font script="Hans" typeface="Liberation Sans"/>
+        <a:font script="Hant" typeface="Liberation Sans"/>
+        <a:font script="Arab" typeface="Liberation Sans"/>
+        <a:font script="Hebr" typeface="Liberation Sans"/>
+        <a:font script="Thai" typeface="Liberation Sans"/>
+        <a:font script="Ethi" typeface="Liberation Sans"/>
+        <a:font script="Beng" typeface="Liberation Sans"/>
+        <a:font script="Gujr" typeface="Liberation Sans"/>
+        <a:font script="Khmr" typeface="Liberation Sans"/>
+        <a:font script="Knda" typeface="Liberation Sans"/>
+        <a:font script="Guru" typeface="Liberation Sans"/>
+        <a:font script="Cans" typeface="Liberation Sans"/>
+        <a:font script="Cher" typeface="Liberation Serif"/>
+        <a:font script="Yiii" typeface="Liberation Sans"/>
+        <a:font script="Tibt" typeface="Liberation Sans"/>
+        <a:font script="Thaa" typeface="Liberation Sans"/>
+        <a:font script="Deva" typeface="Liberation Sans"/>
+        <a:font script="Telu" typeface="Liberation Sans"/>
+        <a:font script="Taml" typeface="Liberation Sans"/>
+        <a:font script="Syrc" typeface="Liberation Sans"/>
+        <a:font script="Orya" typeface="Liberation Sans"/>
+        <a:font script="Mlym" typeface="Liberation Sans"/>
+        <a:font script="Laoo" typeface="Liberation Sans"/>
+        <a:font script="Sinh" typeface="Liberation Sans"/>
+        <a:font script="Mong" typeface="Liberation Sans"/>
+        <a:font script="Viet" typeface="Liberation Sans"/>
+        <a:font script="Uigh" typeface="Liberation Sans"/>
+        <a:font script="Geor" typeface="Liberation Serif"/>
       </a:minorFont>
     </a:fontScheme>
     <a:fmtScheme name="Office">
